--- a/Testarea sistemelor software – Testare unitară în Python.pptx
+++ b/Testarea sistemelor software – Testare unitară în Python.pptx
@@ -9,6 +9,7 @@
     <p:sldId id="258" r:id="rId6"/>
     <p:sldId id="259" r:id="rId7"/>
     <p:sldId id="260" r:id="rId8"/>
+    <p:sldId id="261" r:id="rId9"/>
   </p:sldIdLst>
   <p:sldSz cx="12192000" cy="6858000"/>
   <p:notesSz cx="6858000" cy="9144000"/>
@@ -6160,31 +6161,404 @@
           </a:p>
         </p:txBody>
       </p:sp>
-      <p:sp>
-        <p:nvSpPr>
-          <p:cNvPr id="3" name="Content Placeholder 2">
+      <p:graphicFrame>
+        <p:nvGraphicFramePr>
+          <p:cNvPr id="8" name="Content Placeholder 7">
             <a:extLst>
               <a:ext uri="{FF2B5EF4-FFF2-40B4-BE49-F238E27FC236}">
-                <a16:creationId xmlns:a16="http://schemas.microsoft.com/office/drawing/2014/main" id="{C32D5EF0-EC8F-3CCC-7DF8-257812667890}"/>
+                <a16:creationId xmlns:a16="http://schemas.microsoft.com/office/drawing/2014/main" id="{F6EF54FB-E507-46C7-00C7-CB0661E5ED5A}"/>
               </a:ext>
             </a:extLst>
           </p:cNvPr>
-          <p:cNvSpPr>
-            <a:spLocks noGrp="1"/>
-          </p:cNvSpPr>
+          <p:cNvGraphicFramePr>
+            <a:graphicFrameLocks noGrp="1"/>
+          </p:cNvGraphicFramePr>
           <p:nvPr>
             <p:ph idx="1"/>
+            <p:extLst>
+              <p:ext uri="{D42A27DB-BD31-4B8C-83A1-F6EECF244321}">
+                <p14:modId xmlns:p14="http://schemas.microsoft.com/office/powerpoint/2010/main" val="2895779132"/>
+              </p:ext>
+            </p:extLst>
           </p:nvPr>
-        </p:nvSpPr>
-        <p:spPr/>
-        <p:txBody>
-          <a:bodyPr/>
-          <a:lstStyle/>
-          <a:p>
-            <a:endParaRPr lang="en-US"/>
-          </a:p>
-        </p:txBody>
-      </p:sp>
+        </p:nvGraphicFramePr>
+        <p:xfrm>
+          <a:off x="767857" y="2836654"/>
+          <a:ext cx="3031851" cy="3168964"/>
+        </p:xfrm>
+        <a:graphic>
+          <a:graphicData uri="http://schemas.openxmlformats.org/drawingml/2006/table">
+            <a:tbl>
+              <a:tblPr firstRow="1" bandRow="1">
+                <a:tableStyleId>{93296810-A885-4BE3-A3E7-6D5BEEA58F35}</a:tableStyleId>
+              </a:tblPr>
+              <a:tblGrid>
+                <a:gridCol w="1010617">
+                  <a:extLst>
+                    <a:ext uri="{9D8B030D-6E8A-4147-A177-3AD203B41FA5}">
+                      <a16:colId xmlns:a16="http://schemas.microsoft.com/office/drawing/2014/main" val="2499345031"/>
+                    </a:ext>
+                  </a:extLst>
+                </a:gridCol>
+                <a:gridCol w="1010617">
+                  <a:extLst>
+                    <a:ext uri="{9D8B030D-6E8A-4147-A177-3AD203B41FA5}">
+                      <a16:colId xmlns:a16="http://schemas.microsoft.com/office/drawing/2014/main" val="2745786238"/>
+                    </a:ext>
+                  </a:extLst>
+                </a:gridCol>
+                <a:gridCol w="1010617">
+                  <a:extLst>
+                    <a:ext uri="{9D8B030D-6E8A-4147-A177-3AD203B41FA5}">
+                      <a16:colId xmlns:a16="http://schemas.microsoft.com/office/drawing/2014/main" val="4232967936"/>
+                    </a:ext>
+                  </a:extLst>
+                </a:gridCol>
+              </a:tblGrid>
+              <a:tr h="651164">
+                <a:tc>
+                  <a:txBody>
+                    <a:bodyPr/>
+                    <a:lstStyle/>
+                    <a:p>
+                      <a:pPr algn="l">
+                        <a:buNone/>
+                      </a:pPr>
+                      <a:r>
+                        <a:rPr lang="en-US" sz="1200" dirty="0">
+                          <a:effectLst/>
+                        </a:rPr>
+                        <a:t>Status</a:t>
+                      </a:r>
+                    </a:p>
+                  </a:txBody>
+                  <a:tcPr marL="95250" marR="95250" marT="47625" marB="47625" anchor="ctr"/>
+                </a:tc>
+                <a:tc>
+                  <a:txBody>
+                    <a:bodyPr/>
+                    <a:lstStyle/>
+                    <a:p>
+                      <a:pPr algn="l">
+                        <a:buNone/>
+                      </a:pPr>
+                      <a:r>
+                        <a:rPr lang="en-US" sz="1200">
+                          <a:effectLst/>
+                        </a:rPr>
+                        <a:t>Semnificație</a:t>
+                      </a:r>
+                    </a:p>
+                  </a:txBody>
+                  <a:tcPr marL="95250" marR="95250" marT="47625" marB="47625" anchor="ctr"/>
+                </a:tc>
+                <a:tc>
+                  <a:txBody>
+                    <a:bodyPr/>
+                    <a:lstStyle/>
+                    <a:p>
+                      <a:pPr algn="l">
+                        <a:buNone/>
+                      </a:pPr>
+                      <a:r>
+                        <a:rPr lang="en-US" sz="1200" dirty="0" err="1">
+                          <a:effectLst/>
+                        </a:rPr>
+                        <a:t>Consumă</a:t>
+                      </a:r>
+                      <a:r>
+                        <a:rPr lang="en-US" sz="1200" dirty="0">
+                          <a:effectLst/>
+                        </a:rPr>
+                        <a:t> </a:t>
+                      </a:r>
+                      <a:r>
+                        <a:rPr lang="en-US" sz="1200" dirty="0" err="1">
+                          <a:effectLst/>
+                        </a:rPr>
+                        <a:t>ședință</a:t>
+                      </a:r>
+                      <a:r>
+                        <a:rPr lang="en-US" sz="1200" dirty="0">
+                          <a:effectLst/>
+                        </a:rPr>
+                        <a:t> din </a:t>
+                      </a:r>
+                      <a:r>
+                        <a:rPr lang="en-US" sz="1200" dirty="0" err="1">
+                          <a:effectLst/>
+                        </a:rPr>
+                        <a:t>pachet</a:t>
+                      </a:r>
+                      <a:r>
+                        <a:rPr lang="en-US" sz="1200" dirty="0">
+                          <a:effectLst/>
+                        </a:rPr>
+                        <a:t>?</a:t>
+                      </a:r>
+                    </a:p>
+                  </a:txBody>
+                  <a:tcPr marL="95250" marR="95250" marT="47625" marB="47625" anchor="ctr"/>
+                </a:tc>
+                <a:extLst>
+                  <a:ext uri="{0D108BD9-81ED-4DB2-BD59-A6C34878D82A}">
+                    <a16:rowId xmlns:a16="http://schemas.microsoft.com/office/drawing/2014/main" val="929505174"/>
+                  </a:ext>
+                </a:extLst>
+              </a:tr>
+              <a:tr h="856986">
+                <a:tc>
+                  <a:txBody>
+                    <a:bodyPr/>
+                    <a:lstStyle/>
+                    <a:p>
+                      <a:pPr>
+                        <a:buNone/>
+                      </a:pPr>
+                      <a:r>
+                        <a:rPr lang="en-US" sz="1200">
+                          <a:solidFill>
+                            <a:schemeClr val="tx1"/>
+                          </a:solidFill>
+                          <a:effectLst/>
+                          <a:latin typeface="Consolas" panose="020B0609020204030204" pitchFamily="49" charset="0"/>
+                        </a:rPr>
+                        <a:t>attended</a:t>
+                      </a:r>
+                      <a:endParaRPr lang="en-US" sz="1200">
+                        <a:solidFill>
+                          <a:schemeClr val="tx1"/>
+                        </a:solidFill>
+                        <a:effectLst/>
+                      </a:endParaRPr>
+                    </a:p>
+                  </a:txBody>
+                  <a:tcPr marL="95250" marR="95250" marT="47625" marB="47625" anchor="ctr"/>
+                </a:tc>
+                <a:tc>
+                  <a:txBody>
+                    <a:bodyPr/>
+                    <a:lstStyle/>
+                    <a:p>
+                      <a:pPr>
+                        <a:buNone/>
+                      </a:pPr>
+                      <a:r>
+                        <a:rPr lang="en-US" sz="1200">
+                          <a:solidFill>
+                            <a:schemeClr val="tx1"/>
+                          </a:solidFill>
+                          <a:effectLst/>
+                        </a:rPr>
+                        <a:t>Clientul a participat la ședință</a:t>
+                      </a:r>
+                    </a:p>
+                  </a:txBody>
+                  <a:tcPr marL="95250" marR="95250" marT="47625" marB="47625" anchor="ctr"/>
+                </a:tc>
+                <a:tc>
+                  <a:txBody>
+                    <a:bodyPr/>
+                    <a:lstStyle/>
+                    <a:p>
+                      <a:pPr>
+                        <a:buNone/>
+                      </a:pPr>
+                      <a:r>
+                        <a:rPr lang="en-US" sz="1200" b="1">
+                          <a:solidFill>
+                            <a:schemeClr val="tx1"/>
+                          </a:solidFill>
+                          <a:effectLst/>
+                        </a:rPr>
+                        <a:t>Da</a:t>
+                      </a:r>
+                      <a:endParaRPr lang="en-US" sz="1200">
+                        <a:solidFill>
+                          <a:schemeClr val="tx1"/>
+                        </a:solidFill>
+                        <a:effectLst/>
+                      </a:endParaRPr>
+                    </a:p>
+                  </a:txBody>
+                  <a:tcPr marL="95250" marR="95250" marT="47625" marB="47625" anchor="ctr"/>
+                </a:tc>
+                <a:extLst>
+                  <a:ext uri="{0D108BD9-81ED-4DB2-BD59-A6C34878D82A}">
+                    <a16:rowId xmlns:a16="http://schemas.microsoft.com/office/drawing/2014/main" val="2445302600"/>
+                  </a:ext>
+                </a:extLst>
+              </a:tr>
+              <a:tr h="928582">
+                <a:tc>
+                  <a:txBody>
+                    <a:bodyPr/>
+                    <a:lstStyle/>
+                    <a:p>
+                      <a:pPr>
+                        <a:buNone/>
+                      </a:pPr>
+                      <a:r>
+                        <a:rPr lang="en-US" sz="1200">
+                          <a:solidFill>
+                            <a:schemeClr val="tx1"/>
+                          </a:solidFill>
+                          <a:effectLst/>
+                          <a:latin typeface="Consolas" panose="020B0609020204030204" pitchFamily="49" charset="0"/>
+                        </a:rPr>
+                        <a:t>no_show</a:t>
+                      </a:r>
+                      <a:endParaRPr lang="en-US" sz="1200">
+                        <a:solidFill>
+                          <a:schemeClr val="tx1"/>
+                        </a:solidFill>
+                        <a:effectLst/>
+                      </a:endParaRPr>
+                    </a:p>
+                  </a:txBody>
+                  <a:tcPr marL="95250" marR="95250" marT="47625" marB="47625" anchor="ctr"/>
+                </a:tc>
+                <a:tc>
+                  <a:txBody>
+                    <a:bodyPr/>
+                    <a:lstStyle/>
+                    <a:p>
+                      <a:pPr>
+                        <a:buNone/>
+                      </a:pPr>
+                      <a:r>
+                        <a:rPr lang="pt-BR" sz="1200">
+                          <a:solidFill>
+                            <a:schemeClr val="tx1"/>
+                          </a:solidFill>
+                          <a:effectLst/>
+                        </a:rPr>
+                        <a:t>Clientul nu s-a prezentat și nu a anunțat</a:t>
+                      </a:r>
+                    </a:p>
+                  </a:txBody>
+                  <a:tcPr marL="95250" marR="95250" marT="47625" marB="47625" anchor="ctr"/>
+                </a:tc>
+                <a:tc>
+                  <a:txBody>
+                    <a:bodyPr/>
+                    <a:lstStyle/>
+                    <a:p>
+                      <a:pPr>
+                        <a:buNone/>
+                      </a:pPr>
+                      <a:r>
+                        <a:rPr lang="en-US" sz="1200" b="1">
+                          <a:solidFill>
+                            <a:schemeClr val="tx1"/>
+                          </a:solidFill>
+                          <a:effectLst/>
+                        </a:rPr>
+                        <a:t>Da</a:t>
+                      </a:r>
+                      <a:endParaRPr lang="en-US" sz="1200">
+                        <a:solidFill>
+                          <a:schemeClr val="tx1"/>
+                        </a:solidFill>
+                        <a:effectLst/>
+                      </a:endParaRPr>
+                    </a:p>
+                  </a:txBody>
+                  <a:tcPr marL="95250" marR="95250" marT="47625" marB="47625" anchor="ctr"/>
+                </a:tc>
+                <a:extLst>
+                  <a:ext uri="{0D108BD9-81ED-4DB2-BD59-A6C34878D82A}">
+                    <a16:rowId xmlns:a16="http://schemas.microsoft.com/office/drawing/2014/main" val="3212780542"/>
+                  </a:ext>
+                </a:extLst>
+              </a:tr>
+              <a:tr h="651164">
+                <a:tc>
+                  <a:txBody>
+                    <a:bodyPr/>
+                    <a:lstStyle/>
+                    <a:p>
+                      <a:pPr>
+                        <a:buNone/>
+                      </a:pPr>
+                      <a:r>
+                        <a:rPr lang="en-US" sz="1200">
+                          <a:solidFill>
+                            <a:schemeClr val="tx1"/>
+                          </a:solidFill>
+                          <a:effectLst/>
+                          <a:latin typeface="Consolas" panose="020B0609020204030204" pitchFamily="49" charset="0"/>
+                        </a:rPr>
+                        <a:t>cancelled</a:t>
+                      </a:r>
+                      <a:endParaRPr lang="en-US" sz="1200">
+                        <a:solidFill>
+                          <a:schemeClr val="tx1"/>
+                        </a:solidFill>
+                        <a:effectLst/>
+                      </a:endParaRPr>
+                    </a:p>
+                  </a:txBody>
+                  <a:tcPr marL="95250" marR="95250" marT="47625" marB="47625" anchor="ctr"/>
+                </a:tc>
+                <a:tc>
+                  <a:txBody>
+                    <a:bodyPr/>
+                    <a:lstStyle/>
+                    <a:p>
+                      <a:pPr>
+                        <a:buNone/>
+                      </a:pPr>
+                      <a:r>
+                        <a:rPr lang="en-US" sz="1200">
+                          <a:solidFill>
+                            <a:schemeClr val="tx1"/>
+                          </a:solidFill>
+                          <a:effectLst/>
+                        </a:rPr>
+                        <a:t>Clientul a anulat la timp</a:t>
+                      </a:r>
+                    </a:p>
+                  </a:txBody>
+                  <a:tcPr marL="95250" marR="95250" marT="47625" marB="47625" anchor="ctr"/>
+                </a:tc>
+                <a:tc>
+                  <a:txBody>
+                    <a:bodyPr/>
+                    <a:lstStyle/>
+                    <a:p>
+                      <a:pPr>
+                        <a:buNone/>
+                      </a:pPr>
+                      <a:r>
+                        <a:rPr lang="en-US" sz="1200" b="1" dirty="0">
+                          <a:solidFill>
+                            <a:schemeClr val="tx1"/>
+                          </a:solidFill>
+                          <a:effectLst/>
+                        </a:rPr>
+                        <a:t>Nu</a:t>
+                      </a:r>
+                      <a:endParaRPr lang="en-US" sz="1200" dirty="0">
+                        <a:solidFill>
+                          <a:schemeClr val="tx1"/>
+                        </a:solidFill>
+                        <a:effectLst/>
+                      </a:endParaRPr>
+                    </a:p>
+                  </a:txBody>
+                  <a:tcPr marL="95250" marR="95250" marT="47625" marB="47625" anchor="ctr"/>
+                </a:tc>
+                <a:extLst>
+                  <a:ext uri="{0D108BD9-81ED-4DB2-BD59-A6C34878D82A}">
+                    <a16:rowId xmlns:a16="http://schemas.microsoft.com/office/drawing/2014/main" val="692863160"/>
+                  </a:ext>
+                </a:extLst>
+              </a:tr>
+            </a:tbl>
+          </a:graphicData>
+        </a:graphic>
+      </p:graphicFrame>
       <p:sp>
         <p:nvSpPr>
           <p:cNvPr id="4" name="Text Placeholder 3">
@@ -6201,12 +6575,299 @@
             <p:ph type="body" sz="half" idx="2"/>
           </p:nvPr>
         </p:nvSpPr>
-        <p:spPr/>
+        <p:spPr>
+          <a:xfrm>
+            <a:off x="4580074" y="1917537"/>
+            <a:ext cx="3031852" cy="3001392"/>
+          </a:xfrm>
+        </p:spPr>
         <p:txBody>
-          <a:bodyPr/>
+          <a:bodyPr>
+            <a:normAutofit/>
+          </a:bodyPr>
           <a:lstStyle/>
           <a:p>
-            <a:endParaRPr lang="en-US"/>
+            <a:r>
+              <a:rPr lang="en-US" b="1" dirty="0" err="1">
+                <a:solidFill>
+                  <a:schemeClr val="tx1"/>
+                </a:solidFill>
+              </a:rPr>
+              <a:t>Exemplu</a:t>
+            </a:r>
+            <a:r>
+              <a:rPr lang="en-US" b="1" dirty="0">
+                <a:solidFill>
+                  <a:schemeClr val="tx1"/>
+                </a:solidFill>
+              </a:rPr>
+              <a:t> </a:t>
+            </a:r>
+            <a:r>
+              <a:rPr lang="en-US" b="1" dirty="0" err="1">
+                <a:solidFill>
+                  <a:schemeClr val="tx1"/>
+                </a:solidFill>
+              </a:rPr>
+              <a:t>complet</a:t>
+            </a:r>
+            <a:r>
+              <a:rPr lang="en-US" b="1" dirty="0">
+                <a:solidFill>
+                  <a:schemeClr val="tx1"/>
+                </a:solidFill>
+              </a:rPr>
+              <a:t> de </a:t>
+            </a:r>
+            <a:r>
+              <a:rPr lang="en-US" b="1" dirty="0" err="1">
+                <a:solidFill>
+                  <a:schemeClr val="tx1"/>
+                </a:solidFill>
+              </a:rPr>
+              <a:t>calcul</a:t>
+            </a:r>
+            <a:r>
+              <a:rPr lang="ro-RO" b="1" dirty="0">
+                <a:solidFill>
+                  <a:schemeClr val="tx1"/>
+                </a:solidFill>
+              </a:rPr>
+              <a:t>   </a:t>
+            </a:r>
+            <a:r>
+              <a:rPr lang="ro-RO" sz="1400" dirty="0">
+                <a:solidFill>
+                  <a:schemeClr val="tx1"/>
+                </a:solidFill>
+              </a:rPr>
+              <a:t>input:</a:t>
+            </a:r>
+          </a:p>
+          <a:p>
+            <a:endParaRPr lang="ro-RO" sz="1400" dirty="0">
+              <a:solidFill>
+                <a:schemeClr val="tx1"/>
+              </a:solidFill>
+            </a:endParaRPr>
+          </a:p>
+          <a:p>
+            <a:endParaRPr lang="ro-RO" sz="1400" dirty="0">
+              <a:solidFill>
+                <a:schemeClr val="tx1"/>
+              </a:solidFill>
+            </a:endParaRPr>
+          </a:p>
+          <a:p>
+            <a:r>
+              <a:rPr lang="ro-RO" sz="1400" dirty="0">
+                <a:solidFill>
+                  <a:schemeClr val="tx1"/>
+                </a:solidFill>
+              </a:rPr>
+              <a:t>output:</a:t>
+            </a:r>
+            <a:endParaRPr lang="en-US" sz="1400" dirty="0">
+              <a:solidFill>
+                <a:schemeClr val="tx1"/>
+              </a:solidFill>
+            </a:endParaRPr>
+          </a:p>
+          <a:p>
+            <a:endParaRPr lang="en-US" b="1" dirty="0">
+              <a:solidFill>
+                <a:schemeClr val="tx1"/>
+              </a:solidFill>
+            </a:endParaRPr>
+          </a:p>
+        </p:txBody>
+      </p:sp>
+      <p:pic>
+        <p:nvPicPr>
+          <p:cNvPr id="6" name="Picture 5">
+            <a:extLst>
+              <a:ext uri="{FF2B5EF4-FFF2-40B4-BE49-F238E27FC236}">
+                <a16:creationId xmlns:a16="http://schemas.microsoft.com/office/drawing/2014/main" id="{42535FF0-8D3F-118C-F412-CF0FE31596CF}"/>
+              </a:ext>
+            </a:extLst>
+          </p:cNvPr>
+          <p:cNvPicPr>
+            <a:picLocks noChangeAspect="1"/>
+          </p:cNvPicPr>
+          <p:nvPr/>
+        </p:nvPicPr>
+        <p:blipFill>
+          <a:blip r:embed="rId2"/>
+          <a:stretch>
+            <a:fillRect/>
+          </a:stretch>
+        </p:blipFill>
+        <p:spPr>
+          <a:xfrm>
+            <a:off x="4639760" y="755325"/>
+            <a:ext cx="7173326" cy="1162212"/>
+          </a:xfrm>
+          <a:prstGeom prst="rect">
+            <a:avLst/>
+          </a:prstGeom>
+        </p:spPr>
+      </p:pic>
+      <p:pic>
+        <p:nvPicPr>
+          <p:cNvPr id="10" name="Picture 9">
+            <a:extLst>
+              <a:ext uri="{FF2B5EF4-FFF2-40B4-BE49-F238E27FC236}">
+                <a16:creationId xmlns:a16="http://schemas.microsoft.com/office/drawing/2014/main" id="{9EF30BD4-7735-70DF-30E3-F1F80D6D1648}"/>
+              </a:ext>
+            </a:extLst>
+          </p:cNvPr>
+          <p:cNvPicPr>
+            <a:picLocks noChangeAspect="1"/>
+          </p:cNvPicPr>
+          <p:nvPr/>
+        </p:nvPicPr>
+        <p:blipFill>
+          <a:blip r:embed="rId3"/>
+          <a:stretch>
+            <a:fillRect/>
+          </a:stretch>
+        </p:blipFill>
+        <p:spPr>
+          <a:xfrm>
+            <a:off x="4639760" y="2497525"/>
+            <a:ext cx="4644917" cy="815874"/>
+          </a:xfrm>
+          <a:prstGeom prst="rect">
+            <a:avLst/>
+          </a:prstGeom>
+        </p:spPr>
+      </p:pic>
+      <p:pic>
+        <p:nvPicPr>
+          <p:cNvPr id="14" name="Picture 13">
+            <a:extLst>
+              <a:ext uri="{FF2B5EF4-FFF2-40B4-BE49-F238E27FC236}">
+                <a16:creationId xmlns:a16="http://schemas.microsoft.com/office/drawing/2014/main" id="{29E8646B-11F2-247A-5BB1-5582D21D7FE1}"/>
+              </a:ext>
+            </a:extLst>
+          </p:cNvPr>
+          <p:cNvPicPr>
+            <a:picLocks noChangeAspect="1"/>
+          </p:cNvPicPr>
+          <p:nvPr/>
+        </p:nvPicPr>
+        <p:blipFill>
+          <a:blip r:embed="rId4"/>
+          <a:stretch>
+            <a:fillRect/>
+          </a:stretch>
+        </p:blipFill>
+        <p:spPr>
+          <a:xfrm>
+            <a:off x="4713445" y="3534362"/>
+            <a:ext cx="3796403" cy="1458221"/>
+          </a:xfrm>
+          <a:prstGeom prst="rect">
+            <a:avLst/>
+          </a:prstGeom>
+        </p:spPr>
+      </p:pic>
+      <p:sp>
+        <p:nvSpPr>
+          <p:cNvPr id="16" name="Rectangle 15">
+            <a:extLst>
+              <a:ext uri="{FF2B5EF4-FFF2-40B4-BE49-F238E27FC236}">
+                <a16:creationId xmlns:a16="http://schemas.microsoft.com/office/drawing/2014/main" id="{88B60573-B48C-14F3-A8D1-3CAC9EF9914D}"/>
+              </a:ext>
+            </a:extLst>
+          </p:cNvPr>
+          <p:cNvSpPr/>
+          <p:nvPr/>
+        </p:nvSpPr>
+        <p:spPr>
+          <a:xfrm>
+            <a:off x="9407770" y="2400299"/>
+            <a:ext cx="2497015" cy="1274885"/>
+          </a:xfrm>
+          <a:prstGeom prst="rect">
+            <a:avLst/>
+          </a:prstGeom>
+          <a:solidFill>
+            <a:schemeClr val="accent4">
+              <a:alpha val="50000"/>
+            </a:schemeClr>
+          </a:solidFill>
+          <a:ln>
+            <a:noFill/>
+          </a:ln>
+        </p:spPr>
+        <p:style>
+          <a:lnRef idx="0">
+            <a:scrgbClr r="0" g="0" b="0"/>
+          </a:lnRef>
+          <a:fillRef idx="0">
+            <a:scrgbClr r="0" g="0" b="0"/>
+          </a:fillRef>
+          <a:effectRef idx="0">
+            <a:scrgbClr r="0" g="0" b="0"/>
+          </a:effectRef>
+          <a:fontRef idx="minor">
+            <a:schemeClr val="lt1"/>
+          </a:fontRef>
+        </p:style>
+        <p:txBody>
+          <a:bodyPr rtlCol="0" anchor="ctr"/>
+          <a:lstStyle/>
+          <a:p>
+            <a:br>
+              <a:rPr lang="ro-RO" sz="1400" dirty="0"/>
+            </a:br>
+            <a:r>
+              <a:rPr lang="ro-RO" sz="1400" dirty="0"/>
+              <a:t>Constantele clasei:</a:t>
+            </a:r>
+            <a:br>
+              <a:rPr lang="ro-RO" sz="1400" dirty="0"/>
+            </a:br>
+            <a:r>
+              <a:rPr lang="en-US" sz="1200" b="1" dirty="0"/>
+              <a:t>VALID_CLASSES = {"dance", "</a:t>
+            </a:r>
+            <a:r>
+              <a:rPr lang="en-US" sz="1200" b="1" dirty="0" err="1"/>
+              <a:t>pilates</a:t>
+            </a:r>
+            <a:r>
+              <a:rPr lang="en-US" sz="1200" b="1" dirty="0"/>
+              <a:t>", "yoga", "</a:t>
+            </a:r>
+            <a:r>
+              <a:rPr lang="en-US" sz="1200" b="1" dirty="0" err="1"/>
+              <a:t>zumba</a:t>
+            </a:r>
+            <a:r>
+              <a:rPr lang="en-US" sz="1200" b="1" dirty="0"/>
+              <a:t>"}</a:t>
+            </a:r>
+          </a:p>
+          <a:p>
+            <a:r>
+              <a:rPr lang="en-US" sz="1200" b="1" dirty="0"/>
+              <a:t>MAX_PACKAGE_SESSIONS = 20</a:t>
+            </a:r>
+          </a:p>
+          <a:p>
+            <a:r>
+              <a:rPr lang="en-US" sz="1200" b="1" dirty="0"/>
+              <a:t>MEMBERSHIP_DISCOUNT = 0.20</a:t>
+            </a:r>
+          </a:p>
+          <a:p>
+            <a:pPr algn="ctr"/>
+            <a:br>
+              <a:rPr lang="ro-RO" sz="1400" dirty="0"/>
+            </a:br>
+            <a:endParaRPr lang="en-US" sz="1400" dirty="0"/>
           </a:p>
         </p:txBody>
       </p:sp>
@@ -6214,6 +6875,773 @@
     <p:extLst>
       <p:ext uri="{BB962C8B-B14F-4D97-AF65-F5344CB8AC3E}">
         <p14:creationId xmlns:p14="http://schemas.microsoft.com/office/powerpoint/2010/main" val="628085033"/>
+      </p:ext>
+    </p:extLst>
+  </p:cSld>
+  <p:clrMapOvr>
+    <a:masterClrMapping/>
+  </p:clrMapOvr>
+</p:sld>
+</file>
+
+<file path=ppt/slides/slide5.xml><?xml version="1.0" encoding="utf-8"?>
+<p:sld xmlns:a="http://schemas.openxmlformats.org/drawingml/2006/main" xmlns:r="http://schemas.openxmlformats.org/officeDocument/2006/relationships" xmlns:p="http://schemas.openxmlformats.org/presentationml/2006/main">
+  <p:cSld>
+    <p:spTree>
+      <p:nvGrpSpPr>
+        <p:cNvPr id="1" name=""/>
+        <p:cNvGrpSpPr/>
+        <p:nvPr/>
+      </p:nvGrpSpPr>
+      <p:grpSpPr>
+        <a:xfrm>
+          <a:off x="0" y="0"/>
+          <a:ext cx="0" cy="0"/>
+          <a:chOff x="0" y="0"/>
+          <a:chExt cx="0" cy="0"/>
+        </a:xfrm>
+      </p:grpSpPr>
+      <p:sp>
+        <p:nvSpPr>
+          <p:cNvPr id="5" name="Title 4">
+            <a:extLst>
+              <a:ext uri="{FF2B5EF4-FFF2-40B4-BE49-F238E27FC236}">
+                <a16:creationId xmlns:a16="http://schemas.microsoft.com/office/drawing/2014/main" id="{1D7B3796-1AA2-1F4B-DD7E-74ED6AF55D89}"/>
+              </a:ext>
+            </a:extLst>
+          </p:cNvPr>
+          <p:cNvSpPr>
+            <a:spLocks noGrp="1"/>
+          </p:cNvSpPr>
+          <p:nvPr>
+            <p:ph type="title"/>
+          </p:nvPr>
+        </p:nvSpPr>
+        <p:spPr>
+          <a:xfrm>
+            <a:off x="581192" y="702156"/>
+            <a:ext cx="11029616" cy="572729"/>
+          </a:xfrm>
+        </p:spPr>
+        <p:txBody>
+          <a:bodyPr/>
+          <a:lstStyle/>
+          <a:p>
+            <a:r>
+              <a:rPr lang="nb-NO" dirty="0"/>
+              <a:t>Validări </a:t>
+            </a:r>
+            <a:r>
+              <a:rPr lang="ro-RO" dirty="0"/>
+              <a:t>s</a:t>
+            </a:r>
+            <a:r>
+              <a:rPr lang="nb-NO" dirty="0"/>
+              <a:t>i reguli de business</a:t>
+            </a:r>
+            <a:endParaRPr lang="en-US" dirty="0"/>
+          </a:p>
+        </p:txBody>
+      </p:sp>
+      <p:graphicFrame>
+        <p:nvGraphicFramePr>
+          <p:cNvPr id="6" name="Content Placeholder 5">
+            <a:extLst>
+              <a:ext uri="{FF2B5EF4-FFF2-40B4-BE49-F238E27FC236}">
+                <a16:creationId xmlns:a16="http://schemas.microsoft.com/office/drawing/2014/main" id="{F6675575-EF92-9029-378E-A616DA4237DD}"/>
+              </a:ext>
+            </a:extLst>
+          </p:cNvPr>
+          <p:cNvGraphicFramePr>
+            <a:graphicFrameLocks noGrp="1"/>
+          </p:cNvGraphicFramePr>
+          <p:nvPr>
+            <p:ph idx="1"/>
+          </p:nvPr>
+        </p:nvGraphicFramePr>
+        <p:xfrm>
+          <a:off x="581025" y="1468438"/>
+          <a:ext cx="5760719" cy="1645920"/>
+        </p:xfrm>
+        <a:graphic>
+          <a:graphicData uri="http://schemas.openxmlformats.org/drawingml/2006/table">
+            <a:tbl>
+              <a:tblPr firstRow="1" bandRow="1">
+                <a:tableStyleId>{5C22544A-7EE6-4342-B048-85BDC9FD1C3A}</a:tableStyleId>
+              </a:tblPr>
+              <a:tblGrid>
+                <a:gridCol w="2011680">
+                  <a:extLst>
+                    <a:ext uri="{9D8B030D-6E8A-4147-A177-3AD203B41FA5}">
+                      <a16:colId xmlns:a16="http://schemas.microsoft.com/office/drawing/2014/main" val="20000"/>
+                    </a:ext>
+                  </a:extLst>
+                </a:gridCol>
+                <a:gridCol w="3749039">
+                  <a:extLst>
+                    <a:ext uri="{9D8B030D-6E8A-4147-A177-3AD203B41FA5}">
+                      <a16:colId xmlns:a16="http://schemas.microsoft.com/office/drawing/2014/main" val="20001"/>
+                    </a:ext>
+                  </a:extLst>
+                </a:gridCol>
+              </a:tblGrid>
+              <a:tr h="411480">
+                <a:tc>
+                  <a:txBody>
+                    <a:bodyPr/>
+                    <a:lstStyle/>
+                    <a:p>
+                      <a:pPr algn="ctr"/>
+                      <a:r>
+                        <a:rPr sz="1200" b="1" dirty="0" err="1">
+                          <a:solidFill>
+                            <a:srgbClr val="38BDF8"/>
+                          </a:solidFill>
+                          <a:latin typeface="Calibri"/>
+                        </a:rPr>
+                        <a:t>Parametru</a:t>
+                      </a:r>
+                      <a:endParaRPr sz="1200" b="1" dirty="0">
+                        <a:solidFill>
+                          <a:srgbClr val="38BDF8"/>
+                        </a:solidFill>
+                        <a:latin typeface="Calibri"/>
+                      </a:endParaRPr>
+                    </a:p>
+                  </a:txBody>
+                  <a:tcPr>
+                    <a:solidFill>
+                      <a:srgbClr val="0E1F38"/>
+                    </a:solidFill>
+                  </a:tcPr>
+                </a:tc>
+                <a:tc>
+                  <a:txBody>
+                    <a:bodyPr/>
+                    <a:lstStyle/>
+                    <a:p>
+                      <a:pPr algn="ctr"/>
+                      <a:r>
+                        <a:rPr sz="1200" b="1">
+                          <a:solidFill>
+                            <a:srgbClr val="38BDF8"/>
+                          </a:solidFill>
+                          <a:latin typeface="Calibri"/>
+                        </a:rPr>
+                        <a:t>Regulă de validare</a:t>
+                      </a:r>
+                    </a:p>
+                  </a:txBody>
+                  <a:tcPr>
+                    <a:solidFill>
+                      <a:srgbClr val="0E1F38"/>
+                    </a:solidFill>
+                  </a:tcPr>
+                </a:tc>
+                <a:extLst>
+                  <a:ext uri="{0D108BD9-81ED-4DB2-BD59-A6C34878D82A}">
+                    <a16:rowId xmlns:a16="http://schemas.microsoft.com/office/drawing/2014/main" val="10000"/>
+                  </a:ext>
+                </a:extLst>
+              </a:tr>
+              <a:tr h="411480">
+                <a:tc>
+                  <a:txBody>
+                    <a:bodyPr/>
+                    <a:lstStyle/>
+                    <a:p>
+                      <a:pPr algn="l"/>
+                      <a:r>
+                        <a:rPr sz="1100" b="0">
+                          <a:solidFill>
+                            <a:srgbClr val="FFFFFF"/>
+                          </a:solidFill>
+                          <a:latin typeface="Calibri"/>
+                        </a:rPr>
+                        <a:t>class_name</a:t>
+                      </a:r>
+                    </a:p>
+                  </a:txBody>
+                  <a:tcPr>
+                    <a:solidFill>
+                      <a:srgbClr val="1E293B"/>
+                    </a:solidFill>
+                  </a:tcPr>
+                </a:tc>
+                <a:tc>
+                  <a:txBody>
+                    <a:bodyPr/>
+                    <a:lstStyle/>
+                    <a:p>
+                      <a:pPr algn="ctr"/>
+                      <a:r>
+                        <a:rPr sz="1100" b="0">
+                          <a:solidFill>
+                            <a:srgbClr val="FFFFFF"/>
+                          </a:solidFill>
+                          <a:latin typeface="Calibri"/>
+                        </a:rPr>
+                        <a:t>Trebuie să fie în {dance, pilates, yoga, zumba}</a:t>
+                      </a:r>
+                    </a:p>
+                  </a:txBody>
+                  <a:tcPr>
+                    <a:solidFill>
+                      <a:srgbClr val="1E293B"/>
+                    </a:solidFill>
+                  </a:tcPr>
+                </a:tc>
+                <a:extLst>
+                  <a:ext uri="{0D108BD9-81ED-4DB2-BD59-A6C34878D82A}">
+                    <a16:rowId xmlns:a16="http://schemas.microsoft.com/office/drawing/2014/main" val="10001"/>
+                  </a:ext>
+                </a:extLst>
+              </a:tr>
+              <a:tr h="411480">
+                <a:tc>
+                  <a:txBody>
+                    <a:bodyPr/>
+                    <a:lstStyle/>
+                    <a:p>
+                      <a:pPr algn="l"/>
+                      <a:r>
+                        <a:rPr sz="1100" b="0">
+                          <a:solidFill>
+                            <a:srgbClr val="FFFFFF"/>
+                          </a:solidFill>
+                          <a:latin typeface="Calibri"/>
+                        </a:rPr>
+                        <a:t>instructor</a:t>
+                      </a:r>
+                    </a:p>
+                  </a:txBody>
+                  <a:tcPr>
+                    <a:solidFill>
+                      <a:srgbClr val="273549"/>
+                    </a:solidFill>
+                  </a:tcPr>
+                </a:tc>
+                <a:tc>
+                  <a:txBody>
+                    <a:bodyPr/>
+                    <a:lstStyle/>
+                    <a:p>
+                      <a:pPr algn="ctr"/>
+                      <a:r>
+                        <a:rPr sz="1100" b="0">
+                          <a:solidFill>
+                            <a:srgbClr val="FFFFFF"/>
+                          </a:solidFill>
+                          <a:latin typeface="Calibri"/>
+                        </a:rPr>
+                        <a:t>Șir nevid după strip()</a:t>
+                      </a:r>
+                    </a:p>
+                  </a:txBody>
+                  <a:tcPr>
+                    <a:solidFill>
+                      <a:srgbClr val="273549"/>
+                    </a:solidFill>
+                  </a:tcPr>
+                </a:tc>
+                <a:extLst>
+                  <a:ext uri="{0D108BD9-81ED-4DB2-BD59-A6C34878D82A}">
+                    <a16:rowId xmlns:a16="http://schemas.microsoft.com/office/drawing/2014/main" val="10002"/>
+                  </a:ext>
+                </a:extLst>
+              </a:tr>
+              <a:tr h="411480">
+                <a:tc>
+                  <a:txBody>
+                    <a:bodyPr/>
+                    <a:lstStyle/>
+                    <a:p>
+                      <a:pPr algn="l"/>
+                      <a:r>
+                        <a:rPr sz="1100" b="0">
+                          <a:solidFill>
+                            <a:srgbClr val="FFFFFF"/>
+                          </a:solidFill>
+                          <a:latin typeface="Calibri"/>
+                        </a:rPr>
+                        <a:t>price_per_session</a:t>
+                      </a:r>
+                    </a:p>
+                  </a:txBody>
+                  <a:tcPr>
+                    <a:solidFill>
+                      <a:srgbClr val="1E293B"/>
+                    </a:solidFill>
+                  </a:tcPr>
+                </a:tc>
+                <a:tc>
+                  <a:txBody>
+                    <a:bodyPr/>
+                    <a:lstStyle/>
+                    <a:p>
+                      <a:pPr algn="ctr"/>
+                      <a:r>
+                        <a:rPr sz="1100" b="0" dirty="0" err="1">
+                          <a:solidFill>
+                            <a:srgbClr val="FFFFFF"/>
+                          </a:solidFill>
+                          <a:latin typeface="Calibri"/>
+                        </a:rPr>
+                        <a:t>Număr</a:t>
+                      </a:r>
+                      <a:r>
+                        <a:rPr sz="1100" b="0" dirty="0">
+                          <a:solidFill>
+                            <a:srgbClr val="FFFFFF"/>
+                          </a:solidFill>
+                          <a:latin typeface="Calibri"/>
+                        </a:rPr>
+                        <a:t> </a:t>
+                      </a:r>
+                      <a:r>
+                        <a:rPr sz="1100" b="0" dirty="0" err="1">
+                          <a:solidFill>
+                            <a:srgbClr val="FFFFFF"/>
+                          </a:solidFill>
+                          <a:latin typeface="Calibri"/>
+                        </a:rPr>
+                        <a:t>pozitiv</a:t>
+                      </a:r>
+                      <a:r>
+                        <a:rPr sz="1100" b="0" dirty="0">
+                          <a:solidFill>
+                            <a:srgbClr val="FFFFFF"/>
+                          </a:solidFill>
+                          <a:latin typeface="Calibri"/>
+                        </a:rPr>
+                        <a:t>; bool </a:t>
+                      </a:r>
+                      <a:r>
+                        <a:rPr sz="1100" b="0" dirty="0" err="1">
+                          <a:solidFill>
+                            <a:srgbClr val="FFFFFF"/>
+                          </a:solidFill>
+                          <a:latin typeface="Calibri"/>
+                        </a:rPr>
+                        <a:t>respins</a:t>
+                      </a:r>
+                      <a:r>
+                        <a:rPr sz="1100" b="0" dirty="0">
+                          <a:solidFill>
+                            <a:srgbClr val="FFFFFF"/>
+                          </a:solidFill>
+                          <a:latin typeface="Calibri"/>
+                        </a:rPr>
+                        <a:t> explicit</a:t>
+                      </a:r>
+                    </a:p>
+                  </a:txBody>
+                  <a:tcPr>
+                    <a:solidFill>
+                      <a:srgbClr val="1E293B"/>
+                    </a:solidFill>
+                  </a:tcPr>
+                </a:tc>
+                <a:extLst>
+                  <a:ext uri="{0D108BD9-81ED-4DB2-BD59-A6C34878D82A}">
+                    <a16:rowId xmlns:a16="http://schemas.microsoft.com/office/drawing/2014/main" val="10003"/>
+                  </a:ext>
+                </a:extLst>
+              </a:tr>
+            </a:tbl>
+          </a:graphicData>
+        </a:graphic>
+      </p:graphicFrame>
+      <p:graphicFrame>
+        <p:nvGraphicFramePr>
+          <p:cNvPr id="7" name="Table 6">
+            <a:extLst>
+              <a:ext uri="{FF2B5EF4-FFF2-40B4-BE49-F238E27FC236}">
+                <a16:creationId xmlns:a16="http://schemas.microsoft.com/office/drawing/2014/main" id="{104A91B1-A473-C28A-7D9F-A062290E5E07}"/>
+              </a:ext>
+            </a:extLst>
+          </p:cNvPr>
+          <p:cNvGraphicFramePr>
+            <a:graphicFrameLocks noGrp="1"/>
+          </p:cNvGraphicFramePr>
+          <p:nvPr/>
+        </p:nvGraphicFramePr>
+        <p:xfrm>
+          <a:off x="6400800" y="1600200"/>
+          <a:ext cx="5577840" cy="2011680"/>
+        </p:xfrm>
+        <a:graphic>
+          <a:graphicData uri="http://schemas.openxmlformats.org/drawingml/2006/table">
+            <a:tbl>
+              <a:tblPr firstRow="1" bandRow="1">
+                <a:tableStyleId>{5C22544A-7EE6-4342-B048-85BDC9FD1C3A}</a:tableStyleId>
+              </a:tblPr>
+              <a:tblGrid>
+                <a:gridCol w="2103120">
+                  <a:extLst>
+                    <a:ext uri="{9D8B030D-6E8A-4147-A177-3AD203B41FA5}">
+                      <a16:colId xmlns:a16="http://schemas.microsoft.com/office/drawing/2014/main" val="20000"/>
+                    </a:ext>
+                  </a:extLst>
+                </a:gridCol>
+                <a:gridCol w="3474720">
+                  <a:extLst>
+                    <a:ext uri="{9D8B030D-6E8A-4147-A177-3AD203B41FA5}">
+                      <a16:colId xmlns:a16="http://schemas.microsoft.com/office/drawing/2014/main" val="20001"/>
+                    </a:ext>
+                  </a:extLst>
+                </a:gridCol>
+              </a:tblGrid>
+              <a:tr h="335280">
+                <a:tc>
+                  <a:txBody>
+                    <a:bodyPr/>
+                    <a:lstStyle/>
+                    <a:p>
+                      <a:pPr algn="ctr"/>
+                      <a:r>
+                        <a:rPr sz="1200" b="1">
+                          <a:solidFill>
+                            <a:srgbClr val="38BDF8"/>
+                          </a:solidFill>
+                          <a:latin typeface="Calibri"/>
+                        </a:rPr>
+                        <a:t>Parametru</a:t>
+                      </a:r>
+                    </a:p>
+                  </a:txBody>
+                  <a:tcPr>
+                    <a:solidFill>
+                      <a:srgbClr val="0E1F38"/>
+                    </a:solidFill>
+                  </a:tcPr>
+                </a:tc>
+                <a:tc>
+                  <a:txBody>
+                    <a:bodyPr/>
+                    <a:lstStyle/>
+                    <a:p>
+                      <a:pPr algn="ctr"/>
+                      <a:r>
+                        <a:rPr sz="1200" b="1">
+                          <a:solidFill>
+                            <a:srgbClr val="38BDF8"/>
+                          </a:solidFill>
+                          <a:latin typeface="Calibri"/>
+                        </a:rPr>
+                        <a:t>Regulă de validare</a:t>
+                      </a:r>
+                    </a:p>
+                  </a:txBody>
+                  <a:tcPr>
+                    <a:solidFill>
+                      <a:srgbClr val="0E1F38"/>
+                    </a:solidFill>
+                  </a:tcPr>
+                </a:tc>
+                <a:extLst>
+                  <a:ext uri="{0D108BD9-81ED-4DB2-BD59-A6C34878D82A}">
+                    <a16:rowId xmlns:a16="http://schemas.microsoft.com/office/drawing/2014/main" val="10000"/>
+                  </a:ext>
+                </a:extLst>
+              </a:tr>
+              <a:tr h="335280">
+                <a:tc>
+                  <a:txBody>
+                    <a:bodyPr/>
+                    <a:lstStyle/>
+                    <a:p>
+                      <a:pPr algn="l"/>
+                      <a:r>
+                        <a:rPr sz="1100" b="0">
+                          <a:solidFill>
+                            <a:srgbClr val="FFFFFF"/>
+                          </a:solidFill>
+                          <a:latin typeface="Calibri"/>
+                        </a:rPr>
+                        <a:t>session_history</a:t>
+                      </a:r>
+                    </a:p>
+                  </a:txBody>
+                  <a:tcPr>
+                    <a:solidFill>
+                      <a:srgbClr val="1E293B"/>
+                    </a:solidFill>
+                  </a:tcPr>
+                </a:tc>
+                <a:tc>
+                  <a:txBody>
+                    <a:bodyPr/>
+                    <a:lstStyle/>
+                    <a:p>
+                      <a:pPr algn="ctr"/>
+                      <a:r>
+                        <a:rPr sz="1100" b="0">
+                          <a:solidFill>
+                            <a:srgbClr val="FFFFFF"/>
+                          </a:solidFill>
+                          <a:latin typeface="Calibri"/>
+                        </a:rPr>
+                        <a:t>Trebuie să fie de tip list</a:t>
+                      </a:r>
+                    </a:p>
+                  </a:txBody>
+                  <a:tcPr>
+                    <a:solidFill>
+                      <a:srgbClr val="1E293B"/>
+                    </a:solidFill>
+                  </a:tcPr>
+                </a:tc>
+                <a:extLst>
+                  <a:ext uri="{0D108BD9-81ED-4DB2-BD59-A6C34878D82A}">
+                    <a16:rowId xmlns:a16="http://schemas.microsoft.com/office/drawing/2014/main" val="10001"/>
+                  </a:ext>
+                </a:extLst>
+              </a:tr>
+              <a:tr h="335280">
+                <a:tc>
+                  <a:txBody>
+                    <a:bodyPr/>
+                    <a:lstStyle/>
+                    <a:p>
+                      <a:pPr algn="l"/>
+                      <a:r>
+                        <a:rPr sz="1100" b="0">
+                          <a:solidFill>
+                            <a:srgbClr val="FFFFFF"/>
+                          </a:solidFill>
+                          <a:latin typeface="Calibri"/>
+                        </a:rPr>
+                        <a:t>package_sessions</a:t>
+                      </a:r>
+                    </a:p>
+                  </a:txBody>
+                  <a:tcPr>
+                    <a:solidFill>
+                      <a:srgbClr val="273549"/>
+                    </a:solidFill>
+                  </a:tcPr>
+                </a:tc>
+                <a:tc>
+                  <a:txBody>
+                    <a:bodyPr/>
+                    <a:lstStyle/>
+                    <a:p>
+                      <a:pPr algn="ctr"/>
+                      <a:r>
+                        <a:rPr sz="1100" b="0">
+                          <a:solidFill>
+                            <a:srgbClr val="FFFFFF"/>
+                          </a:solidFill>
+                          <a:latin typeface="Calibri"/>
+                        </a:rPr>
+                        <a:t>int în [1, 20]; bool respins explicit</a:t>
+                      </a:r>
+                    </a:p>
+                  </a:txBody>
+                  <a:tcPr>
+                    <a:solidFill>
+                      <a:srgbClr val="273549"/>
+                    </a:solidFill>
+                  </a:tcPr>
+                </a:tc>
+                <a:extLst>
+                  <a:ext uri="{0D108BD9-81ED-4DB2-BD59-A6C34878D82A}">
+                    <a16:rowId xmlns:a16="http://schemas.microsoft.com/office/drawing/2014/main" val="10002"/>
+                  </a:ext>
+                </a:extLst>
+              </a:tr>
+              <a:tr h="335280">
+                <a:tc>
+                  <a:txBody>
+                    <a:bodyPr/>
+                    <a:lstStyle/>
+                    <a:p>
+                      <a:pPr algn="l"/>
+                      <a:r>
+                        <a:rPr sz="1100" b="0">
+                          <a:solidFill>
+                            <a:srgbClr val="FFFFFF"/>
+                          </a:solidFill>
+                          <a:latin typeface="Calibri"/>
+                        </a:rPr>
+                        <a:t>has_membership</a:t>
+                      </a:r>
+                    </a:p>
+                  </a:txBody>
+                  <a:tcPr>
+                    <a:solidFill>
+                      <a:srgbClr val="1E293B"/>
+                    </a:solidFill>
+                  </a:tcPr>
+                </a:tc>
+                <a:tc>
+                  <a:txBody>
+                    <a:bodyPr/>
+                    <a:lstStyle/>
+                    <a:p>
+                      <a:pPr algn="ctr"/>
+                      <a:r>
+                        <a:rPr sz="1100" b="0">
+                          <a:solidFill>
+                            <a:srgbClr val="FFFFFF"/>
+                          </a:solidFill>
+                          <a:latin typeface="Calibri"/>
+                        </a:rPr>
+                        <a:t>Strict bool (nu int)</a:t>
+                      </a:r>
+                    </a:p>
+                  </a:txBody>
+                  <a:tcPr>
+                    <a:solidFill>
+                      <a:srgbClr val="1E293B"/>
+                    </a:solidFill>
+                  </a:tcPr>
+                </a:tc>
+                <a:extLst>
+                  <a:ext uri="{0D108BD9-81ED-4DB2-BD59-A6C34878D82A}">
+                    <a16:rowId xmlns:a16="http://schemas.microsoft.com/office/drawing/2014/main" val="10003"/>
+                  </a:ext>
+                </a:extLst>
+              </a:tr>
+              <a:tr h="335280">
+                <a:tc>
+                  <a:txBody>
+                    <a:bodyPr/>
+                    <a:lstStyle/>
+                    <a:p>
+                      <a:pPr algn="l"/>
+                      <a:r>
+                        <a:rPr sz="1100" b="0">
+                          <a:solidFill>
+                            <a:srgbClr val="FFFFFF"/>
+                          </a:solidFill>
+                          <a:latin typeface="Calibri"/>
+                        </a:rPr>
+                        <a:t>statusuri în istoric</a:t>
+                      </a:r>
+                    </a:p>
+                  </a:txBody>
+                  <a:tcPr>
+                    <a:solidFill>
+                      <a:srgbClr val="273549"/>
+                    </a:solidFill>
+                  </a:tcPr>
+                </a:tc>
+                <a:tc>
+                  <a:txBody>
+                    <a:bodyPr/>
+                    <a:lstStyle/>
+                    <a:p>
+                      <a:pPr algn="ctr"/>
+                      <a:r>
+                        <a:rPr sz="1100" b="0">
+                          <a:solidFill>
+                            <a:srgbClr val="FFFFFF"/>
+                          </a:solidFill>
+                          <a:latin typeface="Calibri"/>
+                        </a:rPr>
+                        <a:t>Doar 'attended', 'no_show', 'cancelled'</a:t>
+                      </a:r>
+                    </a:p>
+                  </a:txBody>
+                  <a:tcPr>
+                    <a:solidFill>
+                      <a:srgbClr val="273549"/>
+                    </a:solidFill>
+                  </a:tcPr>
+                </a:tc>
+                <a:extLst>
+                  <a:ext uri="{0D108BD9-81ED-4DB2-BD59-A6C34878D82A}">
+                    <a16:rowId xmlns:a16="http://schemas.microsoft.com/office/drawing/2014/main" val="10004"/>
+                  </a:ext>
+                </a:extLst>
+              </a:tr>
+              <a:tr h="335280">
+                <a:tc>
+                  <a:txBody>
+                    <a:bodyPr/>
+                    <a:lstStyle/>
+                    <a:p>
+                      <a:pPr algn="l"/>
+                      <a:r>
+                        <a:rPr sz="1100" b="0">
+                          <a:solidFill>
+                            <a:srgbClr val="FFFFFF"/>
+                          </a:solidFill>
+                          <a:latin typeface="Calibri"/>
+                        </a:rPr>
+                        <a:t>consum vs pachet</a:t>
+                      </a:r>
+                    </a:p>
+                  </a:txBody>
+                  <a:tcPr>
+                    <a:solidFill>
+                      <a:srgbClr val="1E293B"/>
+                    </a:solidFill>
+                  </a:tcPr>
+                </a:tc>
+                <a:tc>
+                  <a:txBody>
+                    <a:bodyPr/>
+                    <a:lstStyle/>
+                    <a:p>
+                      <a:pPr algn="ctr"/>
+                      <a:r>
+                        <a:rPr sz="1100" b="0" dirty="0" err="1">
+                          <a:solidFill>
+                            <a:srgbClr val="FFFFFF"/>
+                          </a:solidFill>
+                          <a:latin typeface="Calibri"/>
+                        </a:rPr>
+                        <a:t>used_sessions</a:t>
+                      </a:r>
+                      <a:r>
+                        <a:rPr sz="1100" b="0" dirty="0">
+                          <a:solidFill>
+                            <a:srgbClr val="FFFFFF"/>
+                          </a:solidFill>
+                          <a:latin typeface="Calibri"/>
+                        </a:rPr>
+                        <a:t> ≤ </a:t>
+                      </a:r>
+                      <a:r>
+                        <a:rPr sz="1100" b="0" dirty="0" err="1">
+                          <a:solidFill>
+                            <a:srgbClr val="FFFFFF"/>
+                          </a:solidFill>
+                          <a:latin typeface="Calibri"/>
+                        </a:rPr>
+                        <a:t>package_sessions</a:t>
+                      </a:r>
+                      <a:endParaRPr sz="1100" b="0" dirty="0">
+                        <a:solidFill>
+                          <a:srgbClr val="FFFFFF"/>
+                        </a:solidFill>
+                        <a:latin typeface="Calibri"/>
+                      </a:endParaRPr>
+                    </a:p>
+                  </a:txBody>
+                  <a:tcPr>
+                    <a:solidFill>
+                      <a:srgbClr val="1E293B"/>
+                    </a:solidFill>
+                  </a:tcPr>
+                </a:tc>
+                <a:extLst>
+                  <a:ext uri="{0D108BD9-81ED-4DB2-BD59-A6C34878D82A}">
+                    <a16:rowId xmlns:a16="http://schemas.microsoft.com/office/drawing/2014/main" val="10005"/>
+                  </a:ext>
+                </a:extLst>
+              </a:tr>
+            </a:tbl>
+          </a:graphicData>
+        </a:graphic>
+      </p:graphicFrame>
+    </p:spTree>
+    <p:extLst>
+      <p:ext uri="{BB962C8B-B14F-4D97-AF65-F5344CB8AC3E}">
+        <p14:creationId xmlns:p14="http://schemas.microsoft.com/office/powerpoint/2010/main" val="1855665131"/>
       </p:ext>
     </p:extLst>
   </p:cSld>
@@ -6493,21 +7921,21 @@
 </file>
 
 <file path=customXml/item1.xml><?xml version="1.0" encoding="utf-8"?>
+<?mso-contentType ?>
+<FormTemplates xmlns="http://schemas.microsoft.com/sharepoint/v3/contenttype/forms">
+  <Display>DocumentLibraryForm</Display>
+  <Edit>DocumentLibraryForm</Edit>
+  <New>DocumentLibraryForm</New>
+</FormTemplates>
+</file>
+
+<file path=customXml/item2.xml><?xml version="1.0" encoding="utf-8"?>
 <p:properties xmlns:p="http://schemas.microsoft.com/office/2006/metadata/properties" xmlns:xsi="http://www.w3.org/2001/XMLSchema-instance" xmlns:pc="http://schemas.microsoft.com/office/infopath/2007/PartnerControls">
   <documentManagement>
     <Status xmlns="71af3243-3dd4-4a8d-8c0d-dd76da1f02a5">Not started</Status>
     <MediaServiceKeyPoints xmlns="71af3243-3dd4-4a8d-8c0d-dd76da1f02a5" xsi:nil="true"/>
   </documentManagement>
 </p:properties>
-</file>
-
-<file path=customXml/item2.xml><?xml version="1.0" encoding="utf-8"?>
-<?mso-contentType ?>
-<FormTemplates xmlns="http://schemas.microsoft.com/sharepoint/v3/contenttype/forms">
-  <Display>DocumentLibraryForm</Display>
-  <Edit>DocumentLibraryForm</Edit>
-  <New>DocumentLibraryForm</New>
-</FormTemplates>
 </file>
 
 <file path=customXml/item3.xml><?xml version="1.0" encoding="utf-8"?>
@@ -6732,19 +8160,19 @@
 </file>
 
 <file path=customXml/itemProps1.xml><?xml version="1.0" encoding="utf-8"?>
+<ds:datastoreItem xmlns:ds="http://schemas.openxmlformats.org/officeDocument/2006/customXml" ds:itemID="{927BD4C1-B6B1-4715-ABF9-E660A51A4EA0}">
+  <ds:schemaRefs>
+    <ds:schemaRef ds:uri="http://schemas.microsoft.com/sharepoint/v3/contenttype/forms"/>
+  </ds:schemaRefs>
+</ds:datastoreItem>
+</file>
+
+<file path=customXml/itemProps2.xml><?xml version="1.0" encoding="utf-8"?>
 <ds:datastoreItem xmlns:ds="http://schemas.openxmlformats.org/officeDocument/2006/customXml" ds:itemID="{8D289AE2-D2AE-49D1-AFAC-3A79F6794255}">
   <ds:schemaRefs>
     <ds:schemaRef ds:uri="http://schemas.microsoft.com/office/2006/metadata/properties"/>
     <ds:schemaRef ds:uri="http://schemas.microsoft.com/office/infopath/2007/PartnerControls"/>
     <ds:schemaRef ds:uri="71af3243-3dd4-4a8d-8c0d-dd76da1f02a5"/>
-  </ds:schemaRefs>
-</ds:datastoreItem>
-</file>
-
-<file path=customXml/itemProps2.xml><?xml version="1.0" encoding="utf-8"?>
-<ds:datastoreItem xmlns:ds="http://schemas.openxmlformats.org/officeDocument/2006/customXml" ds:itemID="{927BD4C1-B6B1-4715-ABF9-E660A51A4EA0}">
-  <ds:schemaRefs>
-    <ds:schemaRef ds:uri="http://schemas.microsoft.com/sharepoint/v3/contenttype/forms"/>
   </ds:schemaRefs>
 </ds:datastoreItem>
 </file>

--- a/Testarea sistemelor software – Testare unitară în Python.pptx
+++ b/Testarea sistemelor software – Testare unitară în Python.pptx
@@ -6,10 +6,15 @@
   </p:sldMasterIdLst>
   <p:sldIdLst>
     <p:sldId id="257" r:id="rId5"/>
-    <p:sldId id="258" r:id="rId6"/>
-    <p:sldId id="259" r:id="rId7"/>
-    <p:sldId id="260" r:id="rId8"/>
-    <p:sldId id="261" r:id="rId9"/>
+    <p:sldId id="262" r:id="rId6"/>
+    <p:sldId id="263" r:id="rId7"/>
+    <p:sldId id="264" r:id="rId8"/>
+    <p:sldId id="265" r:id="rId9"/>
+    <p:sldId id="266" r:id="rId10"/>
+    <p:sldId id="267" r:id="rId11"/>
+    <p:sldId id="268" r:id="rId12"/>
+    <p:sldId id="269" r:id="rId13"/>
+    <p:sldId id="270" r:id="rId14"/>
   </p:sldIdLst>
   <p:sldSz cx="12192000" cy="6858000"/>
   <p:notesSz cx="6858000" cy="9144000"/>
@@ -110,7 +115,7 @@
   </p:defaultTextStyle>
   <p:extLst>
     <p:ext uri="{EFAFB233-063F-42B5-8137-9DF3F51BA10A}">
-      <p15:sldGuideLst xmlns:p15="http://schemas.microsoft.com/office/powerpoint/2012/main"/>
+      <p15:sldGuideLst xmlns:p15="http://schemas.microsoft.com/office/powerpoint/2012/main" xmlns=""/>
     </p:ext>
   </p:extLst>
 </p:presentation>
@@ -336,7 +341,7 @@
           <p:cNvPr id="8" name="Date Placeholder 7">
             <a:extLst>
               <a:ext uri="{FF2B5EF4-FFF2-40B4-BE49-F238E27FC236}">
-                <a16:creationId xmlns:a16="http://schemas.microsoft.com/office/drawing/2014/main" id="{7FA0ACE7-29A8-47D3-A7D9-257B711D8023}"/>
+                <a16:creationId xmlns:a16="http://schemas.microsoft.com/office/drawing/2014/main" xmlns="" id="{7FA0ACE7-29A8-47D3-A7D9-257B711D8023}"/>
               </a:ext>
             </a:extLst>
           </p:cNvPr>
@@ -365,7 +370,7 @@
           <p:cNvPr id="9" name="Footer Placeholder 8">
             <a:extLst>
               <a:ext uri="{FF2B5EF4-FFF2-40B4-BE49-F238E27FC236}">
-                <a16:creationId xmlns:a16="http://schemas.microsoft.com/office/drawing/2014/main" id="{DEC604B9-52E9-4810-8359-47206518D038}"/>
+                <a16:creationId xmlns:a16="http://schemas.microsoft.com/office/drawing/2014/main" xmlns="" id="{DEC604B9-52E9-4810-8359-47206518D038}"/>
               </a:ext>
             </a:extLst>
           </p:cNvPr>
@@ -390,7 +395,7 @@
           <p:cNvPr id="10" name="Slide Number Placeholder 9">
             <a:extLst>
               <a:ext uri="{FF2B5EF4-FFF2-40B4-BE49-F238E27FC236}">
-                <a16:creationId xmlns:a16="http://schemas.microsoft.com/office/drawing/2014/main" id="{5898A89F-CA25-400F-B05A-AECBF2517E4F}"/>
+                <a16:creationId xmlns:a16="http://schemas.microsoft.com/office/drawing/2014/main" xmlns="" id="{5898A89F-CA25-400F-B05A-AECBF2517E4F}"/>
               </a:ext>
             </a:extLst>
           </p:cNvPr>
@@ -772,7 +777,7 @@
           <p:cNvPr id="8" name="Rectangle 7">
             <a:extLst>
               <a:ext uri="{FF2B5EF4-FFF2-40B4-BE49-F238E27FC236}">
-                <a16:creationId xmlns:a16="http://schemas.microsoft.com/office/drawing/2014/main" id="{F6423B97-A5D4-47B9-8861-73B3707A04CF}"/>
+                <a16:creationId xmlns:a16="http://schemas.microsoft.com/office/drawing/2014/main" xmlns="" id="{F6423B97-A5D4-47B9-8861-73B3707A04CF}"/>
               </a:ext>
             </a:extLst>
           </p:cNvPr>
@@ -815,7 +820,7 @@
           <p:cNvPr id="9" name="Rectangle 8">
             <a:extLst>
               <a:ext uri="{FF2B5EF4-FFF2-40B4-BE49-F238E27FC236}">
-                <a16:creationId xmlns:a16="http://schemas.microsoft.com/office/drawing/2014/main" id="{1AEC0421-37B4-4481-A10D-69FDF5EC7909}"/>
+                <a16:creationId xmlns:a16="http://schemas.microsoft.com/office/drawing/2014/main" xmlns="" id="{1AEC0421-37B4-4481-A10D-69FDF5EC7909}"/>
               </a:ext>
             </a:extLst>
           </p:cNvPr>
@@ -858,7 +863,7 @@
           <p:cNvPr id="10" name="Rectangle 9">
             <a:extLst>
               <a:ext uri="{FF2B5EF4-FFF2-40B4-BE49-F238E27FC236}">
-                <a16:creationId xmlns:a16="http://schemas.microsoft.com/office/drawing/2014/main" id="{5F7265B5-9F97-4F1E-99E9-74F7B7E62337}"/>
+                <a16:creationId xmlns:a16="http://schemas.microsoft.com/office/drawing/2014/main" xmlns="" id="{5F7265B5-9F97-4F1E-99E9-74F7B7E62337}"/>
               </a:ext>
             </a:extLst>
           </p:cNvPr>
@@ -901,7 +906,7 @@
           <p:cNvPr id="11" name="Date Placeholder 10">
             <a:extLst>
               <a:ext uri="{FF2B5EF4-FFF2-40B4-BE49-F238E27FC236}">
-                <a16:creationId xmlns:a16="http://schemas.microsoft.com/office/drawing/2014/main" id="{5C74A470-3BD3-4F33-80E5-67E6E87FCBE7}"/>
+                <a16:creationId xmlns:a16="http://schemas.microsoft.com/office/drawing/2014/main" xmlns="" id="{5C74A470-3BD3-4F33-80E5-67E6E87FCBE7}"/>
               </a:ext>
             </a:extLst>
           </p:cNvPr>
@@ -930,7 +935,7 @@
           <p:cNvPr id="12" name="Footer Placeholder 11">
             <a:extLst>
               <a:ext uri="{FF2B5EF4-FFF2-40B4-BE49-F238E27FC236}">
-                <a16:creationId xmlns:a16="http://schemas.microsoft.com/office/drawing/2014/main" id="{9A3A30BA-DB50-4D7D-BCDE-17D20FB354DF}"/>
+                <a16:creationId xmlns:a16="http://schemas.microsoft.com/office/drawing/2014/main" xmlns="" id="{9A3A30BA-DB50-4D7D-BCDE-17D20FB354DF}"/>
               </a:ext>
             </a:extLst>
           </p:cNvPr>
@@ -955,7 +960,7 @@
           <p:cNvPr id="13" name="Slide Number Placeholder 12">
             <a:extLst>
               <a:ext uri="{FF2B5EF4-FFF2-40B4-BE49-F238E27FC236}">
-                <a16:creationId xmlns:a16="http://schemas.microsoft.com/office/drawing/2014/main" id="{76FF9E58-C0B2-436B-A21C-DB45A00D6515}"/>
+                <a16:creationId xmlns:a16="http://schemas.microsoft.com/office/drawing/2014/main" xmlns="" id="{76FF9E58-C0B2-436B-A21C-DB45A00D6515}"/>
               </a:ext>
             </a:extLst>
           </p:cNvPr>
@@ -1099,7 +1104,7 @@
           <p:cNvPr id="8" name="Date Placeholder 7">
             <a:extLst>
               <a:ext uri="{FF2B5EF4-FFF2-40B4-BE49-F238E27FC236}">
-                <a16:creationId xmlns:a16="http://schemas.microsoft.com/office/drawing/2014/main" id="{770E6237-3456-439F-802D-3BA93FC7E3E5}"/>
+                <a16:creationId xmlns:a16="http://schemas.microsoft.com/office/drawing/2014/main" xmlns="" id="{770E6237-3456-439F-802D-3BA93FC7E3E5}"/>
               </a:ext>
             </a:extLst>
           </p:cNvPr>
@@ -1128,7 +1133,7 @@
           <p:cNvPr id="9" name="Footer Placeholder 8">
             <a:extLst>
               <a:ext uri="{FF2B5EF4-FFF2-40B4-BE49-F238E27FC236}">
-                <a16:creationId xmlns:a16="http://schemas.microsoft.com/office/drawing/2014/main" id="{1356D3B5-6063-4A89-B88F-9D3043916FF8}"/>
+                <a16:creationId xmlns:a16="http://schemas.microsoft.com/office/drawing/2014/main" xmlns="" id="{1356D3B5-6063-4A89-B88F-9D3043916FF8}"/>
               </a:ext>
             </a:extLst>
           </p:cNvPr>
@@ -1153,7 +1158,7 @@
           <p:cNvPr id="10" name="Slide Number Placeholder 9">
             <a:extLst>
               <a:ext uri="{FF2B5EF4-FFF2-40B4-BE49-F238E27FC236}">
-                <a16:creationId xmlns:a16="http://schemas.microsoft.com/office/drawing/2014/main" id="{02B78BF7-69D3-4CE0-A631-50EFD41EEEB8}"/>
+                <a16:creationId xmlns:a16="http://schemas.microsoft.com/office/drawing/2014/main" xmlns="" id="{02B78BF7-69D3-4CE0-A631-50EFD41EEEB8}"/>
               </a:ext>
             </a:extLst>
           </p:cNvPr>
@@ -1411,7 +1416,7 @@
           <p:cNvPr id="7" name="Date Placeholder 6">
             <a:extLst>
               <a:ext uri="{FF2B5EF4-FFF2-40B4-BE49-F238E27FC236}">
-                <a16:creationId xmlns:a16="http://schemas.microsoft.com/office/drawing/2014/main" id="{61582016-5696-4A93-887F-BBB3B9002FE5}"/>
+                <a16:creationId xmlns:a16="http://schemas.microsoft.com/office/drawing/2014/main" xmlns="" id="{61582016-5696-4A93-887F-BBB3B9002FE5}"/>
               </a:ext>
             </a:extLst>
           </p:cNvPr>
@@ -1440,7 +1445,7 @@
           <p:cNvPr id="9" name="Footer Placeholder 8">
             <a:extLst>
               <a:ext uri="{FF2B5EF4-FFF2-40B4-BE49-F238E27FC236}">
-                <a16:creationId xmlns:a16="http://schemas.microsoft.com/office/drawing/2014/main" id="{857CFCD5-1192-4E18-8A8F-29E153B44DA4}"/>
+                <a16:creationId xmlns:a16="http://schemas.microsoft.com/office/drawing/2014/main" xmlns="" id="{857CFCD5-1192-4E18-8A8F-29E153B44DA4}"/>
               </a:ext>
             </a:extLst>
           </p:cNvPr>
@@ -1465,7 +1470,7 @@
           <p:cNvPr id="10" name="Slide Number Placeholder 9">
             <a:extLst>
               <a:ext uri="{FF2B5EF4-FFF2-40B4-BE49-F238E27FC236}">
-                <a16:creationId xmlns:a16="http://schemas.microsoft.com/office/drawing/2014/main" id="{E39A109E-5018-4794-92B3-FD5E5BCD95E8}"/>
+                <a16:creationId xmlns:a16="http://schemas.microsoft.com/office/drawing/2014/main" xmlns="" id="{E39A109E-5018-4794-92B3-FD5E5BCD95E8}"/>
               </a:ext>
             </a:extLst>
           </p:cNvPr>
@@ -2676,7 +2681,7 @@
           <p:cNvPr id="8" name="Date Placeholder 7">
             <a:extLst>
               <a:ext uri="{FF2B5EF4-FFF2-40B4-BE49-F238E27FC236}">
-                <a16:creationId xmlns:a16="http://schemas.microsoft.com/office/drawing/2014/main" id="{0B919CC2-2A65-446F-B538-9E6249035445}"/>
+                <a16:creationId xmlns:a16="http://schemas.microsoft.com/office/drawing/2014/main" xmlns="" id="{0B919CC2-2A65-446F-B538-9E6249035445}"/>
               </a:ext>
             </a:extLst>
           </p:cNvPr>
@@ -2710,7 +2715,7 @@
           <p:cNvPr id="10" name="Footer Placeholder 9">
             <a:extLst>
               <a:ext uri="{FF2B5EF4-FFF2-40B4-BE49-F238E27FC236}">
-                <a16:creationId xmlns:a16="http://schemas.microsoft.com/office/drawing/2014/main" id="{B72412AE-119E-4982-8B24-63365EFCA796}"/>
+                <a16:creationId xmlns:a16="http://schemas.microsoft.com/office/drawing/2014/main" xmlns="" id="{B72412AE-119E-4982-8B24-63365EFCA796}"/>
               </a:ext>
             </a:extLst>
           </p:cNvPr>
@@ -2740,7 +2745,7 @@
           <p:cNvPr id="11" name="Slide Number Placeholder 10">
             <a:extLst>
               <a:ext uri="{FF2B5EF4-FFF2-40B4-BE49-F238E27FC236}">
-                <a16:creationId xmlns:a16="http://schemas.microsoft.com/office/drawing/2014/main" id="{7FC4BB19-6AD1-45CF-9F99-00B109890FAB}"/>
+                <a16:creationId xmlns:a16="http://schemas.microsoft.com/office/drawing/2014/main" xmlns="" id="{7FC4BB19-6AD1-45CF-9F99-00B109890FAB}"/>
               </a:ext>
             </a:extLst>
           </p:cNvPr>
@@ -3852,10 +3857,10 @@
           <p:cNvPr id="18" name="Rectangle 17">
             <a:extLst>
               <a:ext uri="{FF2B5EF4-FFF2-40B4-BE49-F238E27FC236}">
-                <a16:creationId xmlns:a16="http://schemas.microsoft.com/office/drawing/2014/main" id="{D6D7A0BC-0046-4CAA-8E7F-DCAFE511EA0E}"/>
+                <a16:creationId xmlns:a16="http://schemas.microsoft.com/office/drawing/2014/main" xmlns="" id="{D6D7A0BC-0046-4CAA-8E7F-DCAFE511EA0E}"/>
               </a:ext>
               <a:ext uri="{C183D7F6-B498-43B3-948B-1728B52AA6E4}">
-                <adec:decorative xmlns:adec="http://schemas.microsoft.com/office/drawing/2017/decorative" val="1"/>
+                <adec:decorative xmlns:adec="http://schemas.microsoft.com/office/drawing/2017/decorative" xmlns="" val="1"/>
               </a:ext>
             </a:extLst>
           </p:cNvPr>
@@ -3865,7 +3870,7 @@
           <p:nvPr>
             <p:extLst>
               <p:ext uri="{386F3935-93C4-4BCD-93E2-E3B085C9AB24}">
-                <p16:designElem xmlns:p16="http://schemas.microsoft.com/office/powerpoint/2015/main" val="1"/>
+                <p16:designElem xmlns:p16="http://schemas.microsoft.com/office/powerpoint/2015/main" xmlns="" val="1"/>
               </p:ext>
             </p:extLst>
           </p:nvPr>
@@ -3912,7 +3917,7 @@
           <p:cNvPr id="2" name="Title 1">
             <a:extLst>
               <a:ext uri="{FF2B5EF4-FFF2-40B4-BE49-F238E27FC236}">
-                <a16:creationId xmlns:a16="http://schemas.microsoft.com/office/drawing/2014/main" id="{1C21E816-31F5-48BB-BD02-D15F2F18B48A}"/>
+                <a16:creationId xmlns:a16="http://schemas.microsoft.com/office/drawing/2014/main" xmlns="" id="{1C21E816-31F5-48BB-BD02-D15F2F18B48A}"/>
               </a:ext>
             </a:extLst>
           </p:cNvPr>
@@ -3925,13 +3930,13 @@
         </p:nvSpPr>
         <p:spPr>
           <a:xfrm>
-            <a:off x="581191" y="1020431"/>
-            <a:ext cx="10993549" cy="1475013"/>
+            <a:off x="596715" y="721852"/>
+            <a:ext cx="10993549" cy="724393"/>
           </a:xfrm>
         </p:spPr>
         <p:txBody>
           <a:bodyPr>
-            <a:normAutofit/>
+            <a:normAutofit fontScale="90000"/>
           </a:bodyPr>
           <a:lstStyle/>
           <a:p>
@@ -3952,8 +3957,20 @@
               <a:t> software – </a:t>
             </a:r>
             <a:r>
+              <a:rPr lang="ro-RO" sz="2800" dirty="0" smtClean="0"/>
+              <a:t>t1 - </a:t>
+            </a:r>
+            <a:r>
+              <a:rPr lang="en-US" sz="2800" dirty="0" err="1" smtClean="0"/>
+              <a:t>Testare</a:t>
+            </a:r>
+            <a:r>
+              <a:rPr lang="en-US" sz="2800" dirty="0" smtClean="0"/>
+              <a:t> </a:t>
+            </a:r>
+            <a:r>
               <a:rPr lang="en-US" sz="2800" dirty="0" err="1"/>
-              <a:t>Testare</a:t>
+              <a:t>unitară</a:t>
             </a:r>
             <a:r>
               <a:rPr lang="en-US" sz="2800" dirty="0"/>
@@ -3961,64 +3978,12 @@
             </a:r>
             <a:r>
               <a:rPr lang="en-US" sz="2800" dirty="0" err="1"/>
-              <a:t>unitară</a:t>
-            </a:r>
-            <a:r>
-              <a:rPr lang="en-US" sz="2800" dirty="0"/>
-              <a:t> </a:t>
-            </a:r>
-            <a:r>
-              <a:rPr lang="en-US" sz="2800" dirty="0" err="1"/>
               <a:t>în</a:t>
             </a:r>
             <a:r>
               <a:rPr lang="en-US" sz="2800" dirty="0"/>
               <a:t> Python</a:t>
             </a:r>
-          </a:p>
-        </p:txBody>
-      </p:sp>
-      <p:sp>
-        <p:nvSpPr>
-          <p:cNvPr id="3" name="Subtitle 2">
-            <a:extLst>
-              <a:ext uri="{FF2B5EF4-FFF2-40B4-BE49-F238E27FC236}">
-                <a16:creationId xmlns:a16="http://schemas.microsoft.com/office/drawing/2014/main" id="{835D6E6B-3353-491C-A3C6-F278D6CED8B3}"/>
-              </a:ext>
-            </a:extLst>
-          </p:cNvPr>
-          <p:cNvSpPr>
-            <a:spLocks noGrp="1"/>
-          </p:cNvSpPr>
-          <p:nvPr>
-            <p:ph type="subTitle" idx="1"/>
-          </p:nvPr>
-        </p:nvSpPr>
-        <p:spPr>
-          <a:xfrm>
-            <a:off x="581194" y="2495445"/>
-            <a:ext cx="10993546" cy="468233"/>
-          </a:xfrm>
-        </p:spPr>
-        <p:txBody>
-          <a:bodyPr>
-            <a:normAutofit/>
-          </a:bodyPr>
-          <a:lstStyle/>
-          <a:p>
-            <a:r>
-              <a:rPr lang="en-US" dirty="0" err="1"/>
-              <a:t>FitnessClassBooking</a:t>
-            </a:r>
-            <a:r>
-              <a:rPr lang="en-US" dirty="0"/>
-              <a:t> · </a:t>
-            </a:r>
-            <a:r>
-              <a:rPr lang="en-US" dirty="0" err="1"/>
-              <a:t>evaluate_client_package</a:t>
-            </a:r>
-            <a:endParaRPr lang="en-US" dirty="0"/>
           </a:p>
         </p:txBody>
       </p:sp>
@@ -4027,10 +3992,10 @@
           <p:cNvPr id="20" name="Rectangle 19">
             <a:extLst>
               <a:ext uri="{FF2B5EF4-FFF2-40B4-BE49-F238E27FC236}">
-                <a16:creationId xmlns:a16="http://schemas.microsoft.com/office/drawing/2014/main" id="{E7C6334F-6411-41EC-AD7D-179EDD8B58CB}"/>
+                <a16:creationId xmlns:a16="http://schemas.microsoft.com/office/drawing/2014/main" xmlns="" id="{E7C6334F-6411-41EC-AD7D-179EDD8B58CB}"/>
               </a:ext>
               <a:ext uri="{C183D7F6-B498-43B3-948B-1728B52AA6E4}">
-                <adec:decorative xmlns:adec="http://schemas.microsoft.com/office/drawing/2017/decorative" val="1"/>
+                <adec:decorative xmlns:adec="http://schemas.microsoft.com/office/drawing/2017/decorative" xmlns="" val="1"/>
               </a:ext>
             </a:extLst>
           </p:cNvPr>
@@ -4040,7 +4005,7 @@
           <p:nvPr>
             <p:extLst>
               <p:ext uri="{386F3935-93C4-4BCD-93E2-E3B085C9AB24}">
-                <p16:designElem xmlns:p16="http://schemas.microsoft.com/office/powerpoint/2015/main" val="1"/>
+                <p16:designElem xmlns:p16="http://schemas.microsoft.com/office/powerpoint/2015/main" xmlns="" val="1"/>
               </p:ext>
             </p:extLst>
           </p:nvPr>
@@ -4081,10 +4046,10 @@
           <p:cNvPr id="22" name="Rectangle 21">
             <a:extLst>
               <a:ext uri="{FF2B5EF4-FFF2-40B4-BE49-F238E27FC236}">
-                <a16:creationId xmlns:a16="http://schemas.microsoft.com/office/drawing/2014/main" id="{E6B02CEE-3AF8-4349-9B3E-8970E6DF62B3}"/>
+                <a16:creationId xmlns:a16="http://schemas.microsoft.com/office/drawing/2014/main" xmlns="" id="{E6B02CEE-3AF8-4349-9B3E-8970E6DF62B3}"/>
               </a:ext>
               <a:ext uri="{C183D7F6-B498-43B3-948B-1728B52AA6E4}">
-                <adec:decorative xmlns:adec="http://schemas.microsoft.com/office/drawing/2017/decorative" val="1"/>
+                <adec:decorative xmlns:adec="http://schemas.microsoft.com/office/drawing/2017/decorative" xmlns="" val="1"/>
               </a:ext>
             </a:extLst>
           </p:cNvPr>
@@ -4094,7 +4059,7 @@
           <p:nvPr>
             <p:extLst>
               <p:ext uri="{386F3935-93C4-4BCD-93E2-E3B085C9AB24}">
-                <p16:designElem xmlns:p16="http://schemas.microsoft.com/office/powerpoint/2015/main" val="1"/>
+                <p16:designElem xmlns:p16="http://schemas.microsoft.com/office/powerpoint/2015/main" xmlns="" val="1"/>
               </p:ext>
             </p:extLst>
           </p:nvPr>
@@ -4135,10 +4100,10 @@
           <p:cNvPr id="24" name="Rectangle 23">
             <a:extLst>
               <a:ext uri="{FF2B5EF4-FFF2-40B4-BE49-F238E27FC236}">
-                <a16:creationId xmlns:a16="http://schemas.microsoft.com/office/drawing/2014/main" id="{AAA01CF0-3FB5-44EB-B7DE-F2E86374C2FB}"/>
+                <a16:creationId xmlns:a16="http://schemas.microsoft.com/office/drawing/2014/main" xmlns="" id="{AAA01CF0-3FB5-44EB-B7DE-F2E86374C2FB}"/>
               </a:ext>
               <a:ext uri="{C183D7F6-B498-43B3-948B-1728B52AA6E4}">
-                <adec:decorative xmlns:adec="http://schemas.microsoft.com/office/drawing/2017/decorative" val="1"/>
+                <adec:decorative xmlns:adec="http://schemas.microsoft.com/office/drawing/2017/decorative" xmlns="" val="1"/>
               </a:ext>
             </a:extLst>
           </p:cNvPr>
@@ -4148,7 +4113,7 @@
           <p:nvPr>
             <p:extLst>
               <p:ext uri="{386F3935-93C4-4BCD-93E2-E3B085C9AB24}">
-                <p16:designElem xmlns:p16="http://schemas.microsoft.com/office/powerpoint/2015/main" val="1"/>
+                <p16:designElem xmlns:p16="http://schemas.microsoft.com/office/powerpoint/2015/main" xmlns="" val="1"/>
               </p:ext>
             </p:extLst>
           </p:nvPr>
@@ -4184,21 +4149,896 @@
           </a:fontRef>
         </p:style>
       </p:sp>
-      <p:pic>
-        <p:nvPicPr>
-          <p:cNvPr id="6" name="Picture 5" descr="abstract image">
+      <p:sp>
+        <p:nvSpPr>
+          <p:cNvPr id="9" name="Subtitle 2">
             <a:extLst>
               <a:ext uri="{FF2B5EF4-FFF2-40B4-BE49-F238E27FC236}">
-                <a16:creationId xmlns:a16="http://schemas.microsoft.com/office/drawing/2014/main" id="{F1A8C364-94D4-4630-BAD0-78722F347055}"/>
+                <a16:creationId xmlns:a16="http://schemas.microsoft.com/office/drawing/2014/main" xmlns="" id="{835D6E6B-3353-491C-A3C6-F278D6CED8B3}"/>
               </a:ext>
             </a:extLst>
           </p:cNvPr>
+          <p:cNvSpPr txBox="1">
+            <a:spLocks/>
+          </p:cNvSpPr>
+          <p:nvPr/>
+        </p:nvSpPr>
+        <p:spPr>
+          <a:xfrm>
+            <a:off x="6472728" y="1638059"/>
+            <a:ext cx="4810966" cy="810694"/>
+          </a:xfrm>
+          <a:prstGeom prst="rect">
+            <a:avLst/>
+          </a:prstGeom>
+        </p:spPr>
+        <p:txBody>
+          <a:bodyPr vert="horz" lIns="91440" tIns="45720" rIns="91440" bIns="45720" rtlCol="0" anchor="t">
+            <a:normAutofit fontScale="85000" lnSpcReduction="20000"/>
+          </a:bodyPr>
+          <a:lstStyle>
+            <a:lvl1pPr marL="0" indent="0" algn="l" defTabSz="457200" rtl="0" eaLnBrk="1" latinLnBrk="0" hangingPunct="1">
+              <a:lnSpc>
+                <a:spcPct val="110000"/>
+              </a:lnSpc>
+              <a:spcBef>
+                <a:spcPct val="20000"/>
+              </a:spcBef>
+              <a:spcAft>
+                <a:spcPts val="600"/>
+              </a:spcAft>
+              <a:buClr>
+                <a:schemeClr val="accent1"/>
+              </a:buClr>
+              <a:buSzPct val="92000"/>
+              <a:buFont typeface="Wingdings 2" panose="05020102010507070707" pitchFamily="18" charset="2"/>
+              <a:buNone/>
+              <a:defRPr sz="1600" kern="1200" cap="all">
+                <a:solidFill>
+                  <a:schemeClr val="accent1"/>
+                </a:solidFill>
+                <a:latin typeface="+mn-lt"/>
+                <a:ea typeface="+mn-ea"/>
+                <a:cs typeface="+mn-cs"/>
+              </a:defRPr>
+            </a:lvl1pPr>
+            <a:lvl2pPr marL="457200" indent="0" algn="ctr" defTabSz="457200" rtl="0" eaLnBrk="1" latinLnBrk="0" hangingPunct="1">
+              <a:spcBef>
+                <a:spcPct val="20000"/>
+              </a:spcBef>
+              <a:spcAft>
+                <a:spcPts val="600"/>
+              </a:spcAft>
+              <a:buClr>
+                <a:schemeClr val="accent1"/>
+              </a:buClr>
+              <a:buSzPct val="92000"/>
+              <a:buFont typeface="Wingdings 2" panose="05020102010507070707" pitchFamily="18" charset="2"/>
+              <a:buNone/>
+              <a:defRPr sz="1400" kern="1200">
+                <a:solidFill>
+                  <a:schemeClr val="tx1">
+                    <a:tint val="75000"/>
+                  </a:schemeClr>
+                </a:solidFill>
+                <a:latin typeface="+mn-lt"/>
+                <a:ea typeface="+mn-ea"/>
+                <a:cs typeface="+mn-cs"/>
+              </a:defRPr>
+            </a:lvl2pPr>
+            <a:lvl3pPr marL="914400" indent="0" algn="ctr" defTabSz="457200" rtl="0" eaLnBrk="1" latinLnBrk="0" hangingPunct="1">
+              <a:spcBef>
+                <a:spcPct val="20000"/>
+              </a:spcBef>
+              <a:spcAft>
+                <a:spcPts val="600"/>
+              </a:spcAft>
+              <a:buClr>
+                <a:schemeClr val="accent1"/>
+              </a:buClr>
+              <a:buSzPct val="92000"/>
+              <a:buFont typeface="Wingdings 2" panose="05020102010507070707" pitchFamily="18" charset="2"/>
+              <a:buNone/>
+              <a:defRPr sz="1300" kern="1200">
+                <a:solidFill>
+                  <a:schemeClr val="tx1">
+                    <a:tint val="75000"/>
+                  </a:schemeClr>
+                </a:solidFill>
+                <a:latin typeface="+mn-lt"/>
+                <a:ea typeface="+mn-ea"/>
+                <a:cs typeface="+mn-cs"/>
+              </a:defRPr>
+            </a:lvl3pPr>
+            <a:lvl4pPr marL="1371600" indent="0" algn="ctr" defTabSz="457200" rtl="0" eaLnBrk="1" latinLnBrk="0" hangingPunct="1">
+              <a:spcBef>
+                <a:spcPct val="20000"/>
+              </a:spcBef>
+              <a:spcAft>
+                <a:spcPts val="600"/>
+              </a:spcAft>
+              <a:buClr>
+                <a:schemeClr val="accent1"/>
+              </a:buClr>
+              <a:buSzPct val="92000"/>
+              <a:buFont typeface="Wingdings 2" panose="05020102010507070707" pitchFamily="18" charset="2"/>
+              <a:buNone/>
+              <a:defRPr sz="1100" kern="1200">
+                <a:solidFill>
+                  <a:schemeClr val="tx1">
+                    <a:tint val="75000"/>
+                  </a:schemeClr>
+                </a:solidFill>
+                <a:latin typeface="+mn-lt"/>
+                <a:ea typeface="+mn-ea"/>
+                <a:cs typeface="+mn-cs"/>
+              </a:defRPr>
+            </a:lvl4pPr>
+            <a:lvl5pPr marL="1828800" indent="0" algn="ctr" defTabSz="457200" rtl="0" eaLnBrk="1" latinLnBrk="0" hangingPunct="1">
+              <a:spcBef>
+                <a:spcPct val="20000"/>
+              </a:spcBef>
+              <a:spcAft>
+                <a:spcPts val="600"/>
+              </a:spcAft>
+              <a:buClr>
+                <a:schemeClr val="accent1"/>
+              </a:buClr>
+              <a:buSzPct val="92000"/>
+              <a:buFont typeface="Wingdings 2" panose="05020102010507070707" pitchFamily="18" charset="2"/>
+              <a:buNone/>
+              <a:defRPr sz="1100" kern="1200">
+                <a:solidFill>
+                  <a:schemeClr val="tx1">
+                    <a:tint val="75000"/>
+                  </a:schemeClr>
+                </a:solidFill>
+                <a:latin typeface="+mn-lt"/>
+                <a:ea typeface="+mn-ea"/>
+                <a:cs typeface="+mn-cs"/>
+              </a:defRPr>
+            </a:lvl5pPr>
+            <a:lvl6pPr marL="2286000" indent="0" algn="ctr" defTabSz="457200" rtl="0" eaLnBrk="1" latinLnBrk="0" hangingPunct="1">
+              <a:spcBef>
+                <a:spcPct val="20000"/>
+              </a:spcBef>
+              <a:spcAft>
+                <a:spcPts val="600"/>
+              </a:spcAft>
+              <a:buClr>
+                <a:schemeClr val="accent2"/>
+              </a:buClr>
+              <a:buSzPct val="92000"/>
+              <a:buFont typeface="Wingdings 2" panose="05020102010507070707" pitchFamily="18" charset="2"/>
+              <a:buNone/>
+              <a:defRPr sz="1200" kern="1200">
+                <a:solidFill>
+                  <a:schemeClr val="tx1">
+                    <a:tint val="75000"/>
+                  </a:schemeClr>
+                </a:solidFill>
+                <a:latin typeface="+mn-lt"/>
+                <a:ea typeface="+mn-ea"/>
+                <a:cs typeface="+mn-cs"/>
+              </a:defRPr>
+            </a:lvl6pPr>
+            <a:lvl7pPr marL="2743200" indent="0" algn="ctr" defTabSz="457200" rtl="0" eaLnBrk="1" latinLnBrk="0" hangingPunct="1">
+              <a:spcBef>
+                <a:spcPct val="20000"/>
+              </a:spcBef>
+              <a:spcAft>
+                <a:spcPts val="600"/>
+              </a:spcAft>
+              <a:buClr>
+                <a:schemeClr val="accent2"/>
+              </a:buClr>
+              <a:buSzPct val="92000"/>
+              <a:buFont typeface="Wingdings 2" panose="05020102010507070707" pitchFamily="18" charset="2"/>
+              <a:buNone/>
+              <a:defRPr sz="1200" kern="1200">
+                <a:solidFill>
+                  <a:schemeClr val="tx1">
+                    <a:tint val="75000"/>
+                  </a:schemeClr>
+                </a:solidFill>
+                <a:latin typeface="+mn-lt"/>
+                <a:ea typeface="+mn-ea"/>
+                <a:cs typeface="+mn-cs"/>
+              </a:defRPr>
+            </a:lvl7pPr>
+            <a:lvl8pPr marL="3200400" indent="0" algn="ctr" defTabSz="457200" rtl="0" eaLnBrk="1" latinLnBrk="0" hangingPunct="1">
+              <a:spcBef>
+                <a:spcPct val="20000"/>
+              </a:spcBef>
+              <a:spcAft>
+                <a:spcPts val="600"/>
+              </a:spcAft>
+              <a:buClr>
+                <a:schemeClr val="accent2"/>
+              </a:buClr>
+              <a:buSzPct val="92000"/>
+              <a:buFont typeface="Wingdings 2" panose="05020102010507070707" pitchFamily="18" charset="2"/>
+              <a:buNone/>
+              <a:defRPr sz="1200" kern="1200">
+                <a:solidFill>
+                  <a:schemeClr val="tx1">
+                    <a:tint val="75000"/>
+                  </a:schemeClr>
+                </a:solidFill>
+                <a:latin typeface="+mn-lt"/>
+                <a:ea typeface="+mn-ea"/>
+                <a:cs typeface="+mn-cs"/>
+              </a:defRPr>
+            </a:lvl8pPr>
+            <a:lvl9pPr marL="3657600" indent="0" algn="ctr" defTabSz="457200" rtl="0" eaLnBrk="1" latinLnBrk="0" hangingPunct="1">
+              <a:spcBef>
+                <a:spcPct val="20000"/>
+              </a:spcBef>
+              <a:spcAft>
+                <a:spcPts val="600"/>
+              </a:spcAft>
+              <a:buClr>
+                <a:schemeClr val="accent2"/>
+              </a:buClr>
+              <a:buSzPct val="92000"/>
+              <a:buFont typeface="Wingdings 2" panose="05020102010507070707" pitchFamily="18" charset="2"/>
+              <a:buNone/>
+              <a:defRPr sz="1200" kern="1200">
+                <a:solidFill>
+                  <a:schemeClr val="tx1">
+                    <a:tint val="75000"/>
+                  </a:schemeClr>
+                </a:solidFill>
+                <a:latin typeface="+mn-lt"/>
+                <a:ea typeface="+mn-ea"/>
+                <a:cs typeface="+mn-cs"/>
+              </a:defRPr>
+            </a:lvl9pPr>
+          </a:lstStyle>
+          <a:p>
+            <a:r>
+              <a:rPr lang="ro-RO" dirty="0" smtClean="0">
+                <a:latin typeface="Arial" pitchFamily="34" charset="0"/>
+                <a:cs typeface="Arial" pitchFamily="34" charset="0"/>
+              </a:rPr>
+              <a:t>Proiect realizat de: mihăilă denisa (352)</a:t>
+            </a:r>
+          </a:p>
+          <a:p>
+            <a:r>
+              <a:rPr lang="ro-RO" dirty="0" smtClean="0">
+                <a:latin typeface="Arial" pitchFamily="34" charset="0"/>
+                <a:cs typeface="Arial" pitchFamily="34" charset="0"/>
+              </a:rPr>
+              <a:t>				     Nițe dan-alexandru (344)</a:t>
+            </a:r>
+            <a:br>
+              <a:rPr lang="ro-RO" dirty="0" smtClean="0">
+                <a:latin typeface="Arial" pitchFamily="34" charset="0"/>
+                <a:cs typeface="Arial" pitchFamily="34" charset="0"/>
+              </a:rPr>
+            </a:br>
+            <a:endParaRPr lang="en-US" dirty="0">
+              <a:latin typeface="Arial" pitchFamily="34" charset="0"/>
+              <a:cs typeface="Arial" pitchFamily="34" charset="0"/>
+            </a:endParaRPr>
+          </a:p>
+        </p:txBody>
+      </p:sp>
+      <p:sp>
+        <p:nvSpPr>
+          <p:cNvPr id="10" name="Content Placeholder 3">
+            <a:extLst>
+              <a:ext uri="{FF2B5EF4-FFF2-40B4-BE49-F238E27FC236}">
+                <a16:creationId xmlns:a16="http://schemas.microsoft.com/office/drawing/2014/main" xmlns="" id="{1B021E2C-E4CD-07DF-0E58-8CBDCC812FD4}"/>
+              </a:ext>
+            </a:extLst>
+          </p:cNvPr>
+          <p:cNvSpPr txBox="1">
+            <a:spLocks/>
+          </p:cNvSpPr>
+          <p:nvPr/>
+        </p:nvSpPr>
+        <p:spPr>
+          <a:xfrm>
+            <a:off x="446534" y="2682019"/>
+            <a:ext cx="11496650" cy="2739067"/>
+          </a:xfrm>
+          <a:prstGeom prst="rect">
+            <a:avLst/>
+          </a:prstGeom>
+        </p:spPr>
+        <p:txBody>
+          <a:bodyPr/>
+          <a:lstStyle>
+            <a:lvl1pPr marL="306000" indent="-306000" algn="l" defTabSz="457200" rtl="0" eaLnBrk="1" latinLnBrk="0" hangingPunct="1">
+              <a:lnSpc>
+                <a:spcPct val="110000"/>
+              </a:lnSpc>
+              <a:spcBef>
+                <a:spcPct val="20000"/>
+              </a:spcBef>
+              <a:spcAft>
+                <a:spcPts val="600"/>
+              </a:spcAft>
+              <a:buClr>
+                <a:schemeClr val="accent1"/>
+              </a:buClr>
+              <a:buSzPct val="92000"/>
+              <a:buFont typeface="Wingdings 2" panose="05020102010507070707" pitchFamily="18" charset="2"/>
+              <a:buChar char=""/>
+              <a:defRPr sz="1700" kern="1200">
+                <a:solidFill>
+                  <a:schemeClr val="tx1">
+                    <a:lumMod val="75000"/>
+                    <a:lumOff val="25000"/>
+                  </a:schemeClr>
+                </a:solidFill>
+                <a:latin typeface="+mn-lt"/>
+                <a:ea typeface="+mn-ea"/>
+                <a:cs typeface="+mn-cs"/>
+              </a:defRPr>
+            </a:lvl1pPr>
+            <a:lvl2pPr marL="630000" indent="-306000" algn="l" defTabSz="457200" rtl="0" eaLnBrk="1" latinLnBrk="0" hangingPunct="1">
+              <a:spcBef>
+                <a:spcPct val="20000"/>
+              </a:spcBef>
+              <a:spcAft>
+                <a:spcPts val="600"/>
+              </a:spcAft>
+              <a:buClr>
+                <a:schemeClr val="accent1"/>
+              </a:buClr>
+              <a:buSzPct val="92000"/>
+              <a:buFont typeface="Wingdings 2" panose="05020102010507070707" pitchFamily="18" charset="2"/>
+              <a:buChar char=""/>
+              <a:defRPr sz="1400" kern="1200">
+                <a:solidFill>
+                  <a:schemeClr val="tx1">
+                    <a:lumMod val="75000"/>
+                    <a:lumOff val="25000"/>
+                  </a:schemeClr>
+                </a:solidFill>
+                <a:latin typeface="+mn-lt"/>
+                <a:ea typeface="+mn-ea"/>
+                <a:cs typeface="+mn-cs"/>
+              </a:defRPr>
+            </a:lvl2pPr>
+            <a:lvl3pPr marL="900000" indent="-270000" algn="l" defTabSz="457200" rtl="0" eaLnBrk="1" latinLnBrk="0" hangingPunct="1">
+              <a:spcBef>
+                <a:spcPct val="20000"/>
+              </a:spcBef>
+              <a:spcAft>
+                <a:spcPts val="600"/>
+              </a:spcAft>
+              <a:buClr>
+                <a:schemeClr val="accent1"/>
+              </a:buClr>
+              <a:buSzPct val="92000"/>
+              <a:buFont typeface="Wingdings 2" panose="05020102010507070707" pitchFamily="18" charset="2"/>
+              <a:buChar char=""/>
+              <a:defRPr sz="1300" kern="1200">
+                <a:solidFill>
+                  <a:schemeClr val="tx1">
+                    <a:lumMod val="75000"/>
+                    <a:lumOff val="25000"/>
+                  </a:schemeClr>
+                </a:solidFill>
+                <a:latin typeface="+mn-lt"/>
+                <a:ea typeface="+mn-ea"/>
+                <a:cs typeface="+mn-cs"/>
+              </a:defRPr>
+            </a:lvl3pPr>
+            <a:lvl4pPr marL="1242000" indent="-234000" algn="l" defTabSz="457200" rtl="0" eaLnBrk="1" latinLnBrk="0" hangingPunct="1">
+              <a:spcBef>
+                <a:spcPct val="20000"/>
+              </a:spcBef>
+              <a:spcAft>
+                <a:spcPts val="600"/>
+              </a:spcAft>
+              <a:buClr>
+                <a:schemeClr val="accent1"/>
+              </a:buClr>
+              <a:buSzPct val="92000"/>
+              <a:buFont typeface="Wingdings 2" panose="05020102010507070707" pitchFamily="18" charset="2"/>
+              <a:buChar char=""/>
+              <a:defRPr sz="1100" kern="1200">
+                <a:solidFill>
+                  <a:schemeClr val="tx1">
+                    <a:lumMod val="75000"/>
+                    <a:lumOff val="25000"/>
+                  </a:schemeClr>
+                </a:solidFill>
+                <a:latin typeface="+mn-lt"/>
+                <a:ea typeface="+mn-ea"/>
+                <a:cs typeface="+mn-cs"/>
+              </a:defRPr>
+            </a:lvl4pPr>
+            <a:lvl5pPr marL="1602000" indent="-234000" algn="l" defTabSz="457200" rtl="0" eaLnBrk="1" latinLnBrk="0" hangingPunct="1">
+              <a:spcBef>
+                <a:spcPct val="20000"/>
+              </a:spcBef>
+              <a:spcAft>
+                <a:spcPts val="600"/>
+              </a:spcAft>
+              <a:buClr>
+                <a:schemeClr val="accent1"/>
+              </a:buClr>
+              <a:buSzPct val="92000"/>
+              <a:buFont typeface="Wingdings 2" panose="05020102010507070707" pitchFamily="18" charset="2"/>
+              <a:buChar char=""/>
+              <a:defRPr sz="1100" kern="1200">
+                <a:solidFill>
+                  <a:schemeClr val="tx1">
+                    <a:lumMod val="75000"/>
+                    <a:lumOff val="25000"/>
+                  </a:schemeClr>
+                </a:solidFill>
+                <a:latin typeface="+mn-lt"/>
+                <a:ea typeface="+mn-ea"/>
+                <a:cs typeface="+mn-cs"/>
+              </a:defRPr>
+            </a:lvl5pPr>
+            <a:lvl6pPr marL="1900000" indent="-228600" algn="l" defTabSz="457200" rtl="0" eaLnBrk="1" latinLnBrk="0" hangingPunct="1">
+              <a:spcBef>
+                <a:spcPct val="20000"/>
+              </a:spcBef>
+              <a:spcAft>
+                <a:spcPts val="600"/>
+              </a:spcAft>
+              <a:buClr>
+                <a:schemeClr val="accent2"/>
+              </a:buClr>
+              <a:buSzPct val="92000"/>
+              <a:buFont typeface="Wingdings 2" panose="05020102010507070707" pitchFamily="18" charset="2"/>
+              <a:buChar char=""/>
+              <a:defRPr sz="1200" kern="1200">
+                <a:solidFill>
+                  <a:schemeClr val="tx2"/>
+                </a:solidFill>
+                <a:latin typeface="+mn-lt"/>
+                <a:ea typeface="+mn-ea"/>
+                <a:cs typeface="+mn-cs"/>
+              </a:defRPr>
+            </a:lvl6pPr>
+            <a:lvl7pPr marL="2200000" indent="-228600" algn="l" defTabSz="457200" rtl="0" eaLnBrk="1" latinLnBrk="0" hangingPunct="1">
+              <a:spcBef>
+                <a:spcPct val="20000"/>
+              </a:spcBef>
+              <a:spcAft>
+                <a:spcPts val="600"/>
+              </a:spcAft>
+              <a:buClr>
+                <a:schemeClr val="accent2"/>
+              </a:buClr>
+              <a:buSzPct val="92000"/>
+              <a:buFont typeface="Wingdings 2" panose="05020102010507070707" pitchFamily="18" charset="2"/>
+              <a:buChar char=""/>
+              <a:defRPr sz="1200" kern="1200">
+                <a:solidFill>
+                  <a:schemeClr val="tx2"/>
+                </a:solidFill>
+                <a:latin typeface="+mn-lt"/>
+                <a:ea typeface="+mn-ea"/>
+                <a:cs typeface="+mn-cs"/>
+              </a:defRPr>
+            </a:lvl7pPr>
+            <a:lvl8pPr marL="2500000" indent="-228600" algn="l" defTabSz="457200" rtl="0" eaLnBrk="1" latinLnBrk="0" hangingPunct="1">
+              <a:spcBef>
+                <a:spcPct val="20000"/>
+              </a:spcBef>
+              <a:spcAft>
+                <a:spcPts val="600"/>
+              </a:spcAft>
+              <a:buClr>
+                <a:schemeClr val="accent2"/>
+              </a:buClr>
+              <a:buSzPct val="92000"/>
+              <a:buFont typeface="Wingdings 2" panose="05020102010507070707" pitchFamily="18" charset="2"/>
+              <a:buChar char=""/>
+              <a:defRPr sz="1200" kern="1200">
+                <a:solidFill>
+                  <a:schemeClr val="tx2"/>
+                </a:solidFill>
+                <a:latin typeface="+mn-lt"/>
+                <a:ea typeface="+mn-ea"/>
+                <a:cs typeface="+mn-cs"/>
+              </a:defRPr>
+            </a:lvl8pPr>
+            <a:lvl9pPr marL="2800000" indent="-228600" algn="l" defTabSz="457200" rtl="0" eaLnBrk="1" latinLnBrk="0" hangingPunct="1">
+              <a:spcBef>
+                <a:spcPct val="20000"/>
+              </a:spcBef>
+              <a:spcAft>
+                <a:spcPts val="600"/>
+              </a:spcAft>
+              <a:buClr>
+                <a:schemeClr val="accent2"/>
+              </a:buClr>
+              <a:buSzPct val="92000"/>
+              <a:buFont typeface="Wingdings 2" panose="05020102010507070707" pitchFamily="18" charset="2"/>
+              <a:buChar char=""/>
+              <a:defRPr sz="1200" kern="1200">
+                <a:solidFill>
+                  <a:schemeClr val="tx2"/>
+                </a:solidFill>
+                <a:latin typeface="+mn-lt"/>
+                <a:ea typeface="+mn-ea"/>
+                <a:cs typeface="+mn-cs"/>
+              </a:defRPr>
+            </a:lvl9pPr>
+          </a:lstStyle>
+          <a:p>
+            <a:r>
+              <a:rPr lang="ro-RO" sz="1600" b="1" dirty="0" smtClean="0">
+                <a:latin typeface="Arial" pitchFamily="34" charset="0"/>
+                <a:cs typeface="Arial" pitchFamily="34" charset="0"/>
+              </a:rPr>
+              <a:t>Clasa implementată: </a:t>
+            </a:r>
+            <a:r>
+              <a:rPr lang="en-US" sz="1600" i="1" dirty="0" err="1" smtClean="0">
+                <a:latin typeface="Arial" pitchFamily="34" charset="0"/>
+                <a:cs typeface="Arial" pitchFamily="34" charset="0"/>
+              </a:rPr>
+              <a:t>FitnessClassBooking</a:t>
+            </a:r>
+            <a:r>
+              <a:rPr lang="ro-RO" sz="1600" dirty="0" smtClean="0">
+                <a:latin typeface="Arial" pitchFamily="34" charset="0"/>
+                <a:cs typeface="Arial" pitchFamily="34" charset="0"/>
+              </a:rPr>
+              <a:t> </a:t>
+            </a:r>
+            <a:r>
+              <a:rPr lang="ro-RO" sz="1600" dirty="0" smtClean="0">
+                <a:latin typeface="Arial" pitchFamily="34" charset="0"/>
+                <a:cs typeface="Arial" pitchFamily="34" charset="0"/>
+                <a:sym typeface="Wingdings" pitchFamily="2" charset="2"/>
+              </a:rPr>
+              <a:t></a:t>
+            </a:r>
+            <a:r>
+              <a:rPr lang="en-US" sz="1600" dirty="0" smtClean="0">
+                <a:latin typeface="Arial" pitchFamily="34" charset="0"/>
+                <a:cs typeface="Arial" pitchFamily="34" charset="0"/>
+                <a:sym typeface="Wingdings" pitchFamily="2" charset="2"/>
+              </a:rPr>
+              <a:t> </a:t>
+            </a:r>
+            <a:r>
+              <a:rPr lang="vi-VN" sz="1600" dirty="0">
+                <a:latin typeface="Arial" pitchFamily="34" charset="0"/>
+                <a:cs typeface="Arial" pitchFamily="34" charset="0"/>
+                <a:sym typeface="Wingdings" pitchFamily="2" charset="2"/>
+              </a:rPr>
+              <a:t>modelează evaluarea unui pachet de ședințe pentru o clasă de fitness.</a:t>
+            </a:r>
+            <a:endParaRPr lang="ro-RO" sz="1600" dirty="0" smtClean="0">
+              <a:latin typeface="Arial" pitchFamily="34" charset="0"/>
+              <a:cs typeface="Arial" pitchFamily="34" charset="0"/>
+            </a:endParaRPr>
+          </a:p>
+          <a:p>
+            <a:r>
+              <a:rPr lang="ro-RO" sz="1600" b="1" dirty="0" smtClean="0">
+                <a:latin typeface="Arial" pitchFamily="34" charset="0"/>
+                <a:cs typeface="Arial" pitchFamily="34" charset="0"/>
+              </a:rPr>
+              <a:t>Metoda testată: </a:t>
+            </a:r>
+            <a:r>
+              <a:rPr lang="en-US" sz="1600" i="1" dirty="0" err="1" smtClean="0">
+                <a:latin typeface="Arial" pitchFamily="34" charset="0"/>
+                <a:cs typeface="Arial" pitchFamily="34" charset="0"/>
+              </a:rPr>
+              <a:t>evaluate_client_package</a:t>
+            </a:r>
+            <a:r>
+              <a:rPr lang="en-US" sz="1600" dirty="0" smtClean="0">
+                <a:latin typeface="Arial" pitchFamily="34" charset="0"/>
+                <a:cs typeface="Arial" pitchFamily="34" charset="0"/>
+              </a:rPr>
+              <a:t>(self,</a:t>
+            </a:r>
+            <a:r>
+              <a:rPr lang="ro-RO" sz="1600" dirty="0" smtClean="0">
+                <a:latin typeface="Arial" pitchFamily="34" charset="0"/>
+                <a:cs typeface="Arial" pitchFamily="34" charset="0"/>
+              </a:rPr>
+              <a:t> </a:t>
+            </a:r>
+            <a:r>
+              <a:rPr lang="en-US" sz="1600" dirty="0" err="1" smtClean="0">
+                <a:latin typeface="Arial" pitchFamily="34" charset="0"/>
+                <a:cs typeface="Arial" pitchFamily="34" charset="0"/>
+              </a:rPr>
+              <a:t>session_history</a:t>
+            </a:r>
+            <a:r>
+              <a:rPr lang="en-US" sz="1600" dirty="0">
+                <a:latin typeface="Arial" pitchFamily="34" charset="0"/>
+                <a:cs typeface="Arial" pitchFamily="34" charset="0"/>
+              </a:rPr>
+              <a:t>: list[</a:t>
+            </a:r>
+            <a:r>
+              <a:rPr lang="en-US" sz="1600" dirty="0" err="1">
+                <a:latin typeface="Arial" pitchFamily="34" charset="0"/>
+                <a:cs typeface="Arial" pitchFamily="34" charset="0"/>
+              </a:rPr>
+              <a:t>str</a:t>
+            </a:r>
+            <a:r>
+              <a:rPr lang="en-US" sz="1600" dirty="0" smtClean="0">
+                <a:latin typeface="Arial" pitchFamily="34" charset="0"/>
+                <a:cs typeface="Arial" pitchFamily="34" charset="0"/>
+              </a:rPr>
+              <a:t>],</a:t>
+            </a:r>
+            <a:r>
+              <a:rPr lang="ro-RO" sz="1600" dirty="0" smtClean="0">
+                <a:latin typeface="Arial" pitchFamily="34" charset="0"/>
+                <a:cs typeface="Arial" pitchFamily="34" charset="0"/>
+              </a:rPr>
+              <a:t> </a:t>
+            </a:r>
+            <a:r>
+              <a:rPr lang="en-US" sz="1600" dirty="0" err="1" smtClean="0">
+                <a:latin typeface="Arial" pitchFamily="34" charset="0"/>
+                <a:cs typeface="Arial" pitchFamily="34" charset="0"/>
+              </a:rPr>
+              <a:t>package_sessions</a:t>
+            </a:r>
+            <a:r>
+              <a:rPr lang="en-US" sz="1600" dirty="0">
+                <a:latin typeface="Arial" pitchFamily="34" charset="0"/>
+                <a:cs typeface="Arial" pitchFamily="34" charset="0"/>
+              </a:rPr>
+              <a:t>: </a:t>
+            </a:r>
+            <a:r>
+              <a:rPr lang="en-US" sz="1600" dirty="0" err="1">
+                <a:latin typeface="Arial" pitchFamily="34" charset="0"/>
+                <a:cs typeface="Arial" pitchFamily="34" charset="0"/>
+              </a:rPr>
+              <a:t>int</a:t>
+            </a:r>
+            <a:r>
+              <a:rPr lang="en-US" sz="1600" dirty="0" smtClean="0">
+                <a:latin typeface="Arial" pitchFamily="34" charset="0"/>
+                <a:cs typeface="Arial" pitchFamily="34" charset="0"/>
+              </a:rPr>
+              <a:t>,</a:t>
+            </a:r>
+            <a:r>
+              <a:rPr lang="ro-RO" sz="1600" dirty="0" smtClean="0">
+                <a:latin typeface="Arial" pitchFamily="34" charset="0"/>
+                <a:cs typeface="Arial" pitchFamily="34" charset="0"/>
+              </a:rPr>
+              <a:t> </a:t>
+            </a:r>
+            <a:r>
+              <a:rPr lang="en-US" sz="1600" dirty="0" err="1" smtClean="0">
+                <a:latin typeface="Arial" pitchFamily="34" charset="0"/>
+                <a:cs typeface="Arial" pitchFamily="34" charset="0"/>
+              </a:rPr>
+              <a:t>has_membership</a:t>
+            </a:r>
+            <a:r>
+              <a:rPr lang="en-US" sz="1600" dirty="0">
+                <a:latin typeface="Arial" pitchFamily="34" charset="0"/>
+                <a:cs typeface="Arial" pitchFamily="34" charset="0"/>
+              </a:rPr>
+              <a:t>: </a:t>
+            </a:r>
+            <a:r>
+              <a:rPr lang="en-US" sz="1600" dirty="0" err="1" smtClean="0">
+                <a:latin typeface="Arial" pitchFamily="34" charset="0"/>
+                <a:cs typeface="Arial" pitchFamily="34" charset="0"/>
+              </a:rPr>
+              <a:t>bool</a:t>
+            </a:r>
+            <a:r>
+              <a:rPr lang="en-US" sz="1600" dirty="0" smtClean="0">
+                <a:latin typeface="Arial" pitchFamily="34" charset="0"/>
+                <a:cs typeface="Arial" pitchFamily="34" charset="0"/>
+              </a:rPr>
+              <a:t>)</a:t>
+            </a:r>
+            <a:endParaRPr lang="ro-RO" sz="1600" dirty="0" smtClean="0">
+              <a:latin typeface="Arial" pitchFamily="34" charset="0"/>
+              <a:cs typeface="Arial" pitchFamily="34" charset="0"/>
+            </a:endParaRPr>
+          </a:p>
+          <a:p>
+            <a:r>
+              <a:rPr lang="en-US" sz="1600" b="1" dirty="0">
+                <a:latin typeface="Arial" pitchFamily="34" charset="0"/>
+                <a:cs typeface="Arial" pitchFamily="34" charset="0"/>
+              </a:rPr>
+              <a:t>Framework </a:t>
+            </a:r>
+            <a:r>
+              <a:rPr lang="en-US" sz="1600" b="1" dirty="0" err="1" smtClean="0">
+                <a:latin typeface="Arial" pitchFamily="34" charset="0"/>
+                <a:cs typeface="Arial" pitchFamily="34" charset="0"/>
+              </a:rPr>
+              <a:t>testare</a:t>
+            </a:r>
+            <a:r>
+              <a:rPr lang="ro-RO" sz="1600" b="1" dirty="0" smtClean="0">
+                <a:latin typeface="Arial" pitchFamily="34" charset="0"/>
+                <a:cs typeface="Arial" pitchFamily="34" charset="0"/>
+              </a:rPr>
+              <a:t>: </a:t>
+            </a:r>
+            <a:r>
+              <a:rPr lang="en-US" sz="1600" dirty="0" err="1">
+                <a:latin typeface="Arial" pitchFamily="34" charset="0"/>
+                <a:cs typeface="Arial" pitchFamily="34" charset="0"/>
+              </a:rPr>
+              <a:t>pytest</a:t>
+            </a:r>
+            <a:r>
+              <a:rPr lang="en-US" sz="1600" dirty="0">
+                <a:latin typeface="Arial" pitchFamily="34" charset="0"/>
+                <a:cs typeface="Arial" pitchFamily="34" charset="0"/>
+              </a:rPr>
+              <a:t> </a:t>
+            </a:r>
+            <a:r>
+              <a:rPr lang="en-US" sz="1600" dirty="0" smtClean="0">
+                <a:latin typeface="Arial" pitchFamily="34" charset="0"/>
+                <a:cs typeface="Arial" pitchFamily="34" charset="0"/>
+              </a:rPr>
+              <a:t>9.0.3</a:t>
+            </a:r>
+            <a:endParaRPr lang="ro-RO" sz="1600" dirty="0" smtClean="0">
+              <a:latin typeface="Arial" pitchFamily="34" charset="0"/>
+              <a:cs typeface="Arial" pitchFamily="34" charset="0"/>
+            </a:endParaRPr>
+          </a:p>
+          <a:p>
+            <a:r>
+              <a:rPr lang="en-US" sz="1600" b="1" dirty="0" smtClean="0">
+                <a:latin typeface="Arial" pitchFamily="34" charset="0"/>
+                <a:cs typeface="Arial" pitchFamily="34" charset="0"/>
+              </a:rPr>
+              <a:t>Coverage</a:t>
+            </a:r>
+            <a:r>
+              <a:rPr lang="ro-RO" sz="1600" b="1" dirty="0" smtClean="0">
+                <a:latin typeface="Arial" pitchFamily="34" charset="0"/>
+                <a:cs typeface="Arial" pitchFamily="34" charset="0"/>
+              </a:rPr>
+              <a:t>:</a:t>
+            </a:r>
+            <a:r>
+              <a:rPr lang="ro-RO" sz="1600" dirty="0" smtClean="0">
+                <a:latin typeface="Arial" pitchFamily="34" charset="0"/>
+                <a:cs typeface="Arial" pitchFamily="34" charset="0"/>
+              </a:rPr>
+              <a:t> </a:t>
+            </a:r>
+            <a:r>
+              <a:rPr lang="en-US" sz="1600" dirty="0">
+                <a:latin typeface="Arial" pitchFamily="34" charset="0"/>
+                <a:cs typeface="Arial" pitchFamily="34" charset="0"/>
+              </a:rPr>
+              <a:t>coverage.py </a:t>
+            </a:r>
+            <a:r>
+              <a:rPr lang="en-US" sz="1600" dirty="0" smtClean="0">
+                <a:latin typeface="Arial" pitchFamily="34" charset="0"/>
+                <a:cs typeface="Arial" pitchFamily="34" charset="0"/>
+              </a:rPr>
+              <a:t>7.13.5</a:t>
+            </a:r>
+            <a:endParaRPr lang="ro-RO" sz="1600" dirty="0" smtClean="0">
+              <a:latin typeface="Arial" pitchFamily="34" charset="0"/>
+              <a:cs typeface="Arial" pitchFamily="34" charset="0"/>
+            </a:endParaRPr>
+          </a:p>
+          <a:p>
+            <a:r>
+              <a:rPr lang="en-US" sz="1600" b="1" dirty="0">
+                <a:latin typeface="Arial" pitchFamily="34" charset="0"/>
+                <a:cs typeface="Arial" pitchFamily="34" charset="0"/>
+              </a:rPr>
+              <a:t>Mutation </a:t>
+            </a:r>
+            <a:r>
+              <a:rPr lang="en-US" sz="1600" b="1" dirty="0" smtClean="0">
+                <a:latin typeface="Arial" pitchFamily="34" charset="0"/>
+                <a:cs typeface="Arial" pitchFamily="34" charset="0"/>
+              </a:rPr>
+              <a:t>testing</a:t>
+            </a:r>
+            <a:r>
+              <a:rPr lang="ro-RO" sz="1600" b="1" dirty="0" smtClean="0">
+                <a:latin typeface="Arial" pitchFamily="34" charset="0"/>
+                <a:cs typeface="Arial" pitchFamily="34" charset="0"/>
+              </a:rPr>
+              <a:t>: </a:t>
+            </a:r>
+            <a:r>
+              <a:rPr lang="en-US" sz="1600" dirty="0" err="1">
+                <a:latin typeface="Arial" pitchFamily="34" charset="0"/>
+                <a:cs typeface="Arial" pitchFamily="34" charset="0"/>
+              </a:rPr>
+              <a:t>mutmut</a:t>
+            </a:r>
+            <a:r>
+              <a:rPr lang="en-US" sz="1600" dirty="0">
+                <a:latin typeface="Arial" pitchFamily="34" charset="0"/>
+                <a:cs typeface="Arial" pitchFamily="34" charset="0"/>
+              </a:rPr>
+              <a:t> </a:t>
+            </a:r>
+            <a:r>
+              <a:rPr lang="en-US" sz="1600" dirty="0" smtClean="0">
+                <a:latin typeface="Arial" pitchFamily="34" charset="0"/>
+                <a:cs typeface="Arial" pitchFamily="34" charset="0"/>
+              </a:rPr>
+              <a:t>2.5.1</a:t>
+            </a:r>
+          </a:p>
+          <a:p>
+            <a:r>
+              <a:rPr lang="en-US" sz="1600" b="1" dirty="0" err="1" smtClean="0">
+                <a:latin typeface="Arial" pitchFamily="34" charset="0"/>
+                <a:cs typeface="Arial" pitchFamily="34" charset="0"/>
+              </a:rPr>
+              <a:t>Mediu</a:t>
+            </a:r>
+            <a:r>
+              <a:rPr lang="en-US" sz="1600" b="1" dirty="0" smtClean="0">
+                <a:latin typeface="Arial" pitchFamily="34" charset="0"/>
+                <a:cs typeface="Arial" pitchFamily="34" charset="0"/>
+              </a:rPr>
+              <a:t> </a:t>
+            </a:r>
+            <a:r>
+              <a:rPr lang="en-US" sz="1600" b="1" dirty="0" err="1" smtClean="0">
+                <a:latin typeface="Arial" pitchFamily="34" charset="0"/>
+                <a:cs typeface="Arial" pitchFamily="34" charset="0"/>
+              </a:rPr>
+              <a:t>rulare</a:t>
+            </a:r>
+            <a:r>
+              <a:rPr lang="ro-RO" sz="1600" b="1" dirty="0" smtClean="0">
+                <a:latin typeface="Arial" pitchFamily="34" charset="0"/>
+                <a:cs typeface="Arial" pitchFamily="34" charset="0"/>
+              </a:rPr>
+              <a:t>: </a:t>
+            </a:r>
+            <a:r>
+              <a:rPr lang="en-US" sz="1600" dirty="0" smtClean="0">
+                <a:latin typeface="Arial" pitchFamily="34" charset="0"/>
+                <a:cs typeface="Arial" pitchFamily="34" charset="0"/>
+              </a:rPr>
+              <a:t>Windows </a:t>
+            </a:r>
+            <a:r>
+              <a:rPr lang="en-US" sz="1600" dirty="0">
+                <a:latin typeface="Arial" pitchFamily="34" charset="0"/>
+                <a:cs typeface="Arial" pitchFamily="34" charset="0"/>
+              </a:rPr>
+              <a:t>11 Pro · Python 3.13.3 · WSL Ubuntu 24.04.1</a:t>
+            </a:r>
+          </a:p>
+        </p:txBody>
+      </p:sp>
+      <p:pic>
+        <p:nvPicPr>
+          <p:cNvPr id="1026" name="Picture 2"/>
           <p:cNvPicPr>
-            <a:picLocks noChangeAspect="1"/>
+            <a:picLocks noChangeAspect="1" noChangeArrowheads="1"/>
           </p:cNvPicPr>
           <p:nvPr/>
         </p:nvPicPr>
-        <p:blipFill rotWithShape="1">
+        <p:blipFill>
           <a:blip r:embed="rId2">
             <a:extLst>
               <a:ext uri="{28A0092B-C50C-407E-A947-70E740481C1C}">
@@ -4207,22 +5047,466 @@
             </a:extLst>
           </a:blip>
           <a:srcRect/>
-          <a:stretch/>
+          <a:stretch>
+            <a:fillRect/>
+          </a:stretch>
         </p:blipFill>
-        <p:spPr>
-          <a:xfrm>
-            <a:off x="448733" y="3081867"/>
-            <a:ext cx="11260667" cy="3310466"/>
+        <p:spPr bwMode="auto">
+          <a:xfrm>
+            <a:off x="7740682" y="4428623"/>
+            <a:ext cx="3612548" cy="1499733"/>
           </a:xfrm>
           <a:prstGeom prst="rect">
             <a:avLst/>
           </a:prstGeom>
+          <a:noFill/>
+          <a:ln>
+            <a:noFill/>
+          </a:ln>
+          <a:effectLst/>
+          <a:extLst>
+            <a:ext uri="{909E8E84-426E-40DD-AFC4-6F175D3DCCD1}">
+              <a14:hiddenFill xmlns:a14="http://schemas.microsoft.com/office/drawing/2010/main">
+                <a:solidFill>
+                  <a:schemeClr val="accent1"/>
+                </a:solidFill>
+              </a14:hiddenFill>
+            </a:ext>
+            <a:ext uri="{91240B29-F687-4F45-9708-019B960494DF}">
+              <a14:hiddenLine xmlns:a14="http://schemas.microsoft.com/office/drawing/2010/main" w="9525">
+                <a:solidFill>
+                  <a:schemeClr val="tx1"/>
+                </a:solidFill>
+                <a:miter lim="800000"/>
+                <a:headEnd/>
+                <a:tailEnd/>
+              </a14:hiddenLine>
+            </a:ext>
+            <a:ext uri="{AF507438-7753-43E0-B8FC-AC1667EBCBE1}">
+              <a14:hiddenEffects xmlns:a14="http://schemas.microsoft.com/office/drawing/2010/main">
+                <a:effectLst>
+                  <a:outerShdw dist="35921" dir="2700000" algn="ctr" rotWithShape="0">
+                    <a:schemeClr val="bg2"/>
+                  </a:outerShdw>
+                </a:effectLst>
+              </a14:hiddenEffects>
+            </a:ext>
+          </a:extLst>
         </p:spPr>
       </p:pic>
     </p:spTree>
     <p:extLst>
       <p:ext uri="{BB962C8B-B14F-4D97-AF65-F5344CB8AC3E}">
         <p14:creationId xmlns:p14="http://schemas.microsoft.com/office/powerpoint/2010/main" val="2475805559"/>
+      </p:ext>
+    </p:extLst>
+  </p:cSld>
+  <p:clrMapOvr>
+    <a:masterClrMapping/>
+  </p:clrMapOvr>
+</p:sld>
+</file>
+
+<file path=ppt/slides/slide10.xml><?xml version="1.0" encoding="utf-8"?>
+<p:sld xmlns:a="http://schemas.openxmlformats.org/drawingml/2006/main" xmlns:r="http://schemas.openxmlformats.org/officeDocument/2006/relationships" xmlns:p="http://schemas.openxmlformats.org/presentationml/2006/main">
+  <p:cSld>
+    <p:spTree>
+      <p:nvGrpSpPr>
+        <p:cNvPr id="1" name=""/>
+        <p:cNvGrpSpPr/>
+        <p:nvPr/>
+      </p:nvGrpSpPr>
+      <p:grpSpPr>
+        <a:xfrm>
+          <a:off x="0" y="0"/>
+          <a:ext cx="0" cy="0"/>
+          <a:chOff x="0" y="0"/>
+          <a:chExt cx="0" cy="0"/>
+        </a:xfrm>
+      </p:grpSpPr>
+      <p:sp>
+        <p:nvSpPr>
+          <p:cNvPr id="2" name="Title 1"/>
+          <p:cNvSpPr>
+            <a:spLocks noGrp="1"/>
+          </p:cNvSpPr>
+          <p:nvPr>
+            <p:ph type="title"/>
+          </p:nvPr>
+        </p:nvSpPr>
+        <p:spPr>
+          <a:xfrm>
+            <a:off x="581192" y="702156"/>
+            <a:ext cx="10960775" cy="678775"/>
+          </a:xfrm>
+        </p:spPr>
+        <p:txBody>
+          <a:bodyPr>
+            <a:noAutofit/>
+          </a:bodyPr>
+          <a:lstStyle/>
+          <a:p>
+            <a:r>
+              <a:rPr lang="it-IT" sz="2000" b="1" dirty="0"/>
+              <a:t>Utilizarea AI și rezultate </a:t>
+            </a:r>
+            <a:r>
+              <a:rPr lang="it-IT" sz="2000" b="1" dirty="0" smtClean="0"/>
+              <a:t>finale</a:t>
+            </a:r>
+            <a:r>
+              <a:rPr lang="ro-RO" sz="2000" b="1" dirty="0" smtClean="0"/>
+              <a:t/>
+            </a:r>
+            <a:br>
+              <a:rPr lang="ro-RO" sz="2000" b="1" dirty="0" smtClean="0"/>
+            </a:br>
+            <a:r>
+              <a:rPr lang="vi-VN" sz="2000" dirty="0"/>
+              <a:t>ChatGPT/Codex ca instrument de verificare · Nu înlocuiește validarea manuală</a:t>
+            </a:r>
+            <a:endParaRPr lang="en-US" sz="2000" dirty="0"/>
+          </a:p>
+        </p:txBody>
+      </p:sp>
+      <p:sp>
+        <p:nvSpPr>
+          <p:cNvPr id="4" name="Rectangle 3"/>
+          <p:cNvSpPr/>
+          <p:nvPr/>
+        </p:nvSpPr>
+        <p:spPr>
+          <a:xfrm>
+            <a:off x="485516" y="1648799"/>
+            <a:ext cx="2170274" cy="369332"/>
+          </a:xfrm>
+          <a:prstGeom prst="rect">
+            <a:avLst/>
+          </a:prstGeom>
+        </p:spPr>
+        <p:txBody>
+          <a:bodyPr wrap="none">
+            <a:spAutoFit/>
+          </a:bodyPr>
+          <a:lstStyle/>
+          <a:p>
+            <a:r>
+              <a:rPr lang="en-US" dirty="0"/>
+              <a:t>Cum a </a:t>
+            </a:r>
+            <a:r>
+              <a:rPr lang="en-US" dirty="0" err="1"/>
+              <a:t>fost</a:t>
+            </a:r>
+            <a:r>
+              <a:rPr lang="en-US" dirty="0"/>
+              <a:t> </a:t>
+            </a:r>
+            <a:r>
+              <a:rPr lang="en-US" dirty="0" err="1"/>
+              <a:t>utilizat</a:t>
+            </a:r>
+            <a:r>
+              <a:rPr lang="en-US" dirty="0"/>
+              <a:t> AI</a:t>
+            </a:r>
+          </a:p>
+        </p:txBody>
+      </p:sp>
+      <p:pic>
+        <p:nvPicPr>
+          <p:cNvPr id="10242" name="Picture 2"/>
+          <p:cNvPicPr>
+            <a:picLocks noChangeAspect="1" noChangeArrowheads="1"/>
+          </p:cNvPicPr>
+          <p:nvPr/>
+        </p:nvPicPr>
+        <p:blipFill>
+          <a:blip r:embed="rId2">
+            <a:extLst>
+              <a:ext uri="{28A0092B-C50C-407E-A947-70E740481C1C}">
+                <a14:useLocalDpi xmlns:a14="http://schemas.microsoft.com/office/drawing/2010/main" val="0"/>
+              </a:ext>
+            </a:extLst>
+          </a:blip>
+          <a:srcRect/>
+          <a:stretch>
+            <a:fillRect/>
+          </a:stretch>
+        </p:blipFill>
+        <p:spPr bwMode="auto">
+          <a:xfrm>
+            <a:off x="92173" y="2108881"/>
+            <a:ext cx="4229100" cy="1203325"/>
+          </a:xfrm>
+          <a:prstGeom prst="rect">
+            <a:avLst/>
+          </a:prstGeom>
+          <a:noFill/>
+          <a:ln>
+            <a:noFill/>
+          </a:ln>
+          <a:effectLst/>
+          <a:extLst>
+            <a:ext uri="{909E8E84-426E-40DD-AFC4-6F175D3DCCD1}">
+              <a14:hiddenFill xmlns:a14="http://schemas.microsoft.com/office/drawing/2010/main">
+                <a:solidFill>
+                  <a:schemeClr val="accent1"/>
+                </a:solidFill>
+              </a14:hiddenFill>
+            </a:ext>
+            <a:ext uri="{91240B29-F687-4F45-9708-019B960494DF}">
+              <a14:hiddenLine xmlns:a14="http://schemas.microsoft.com/office/drawing/2010/main" w="9525">
+                <a:solidFill>
+                  <a:schemeClr val="tx1"/>
+                </a:solidFill>
+                <a:miter lim="800000"/>
+                <a:headEnd/>
+                <a:tailEnd/>
+              </a14:hiddenLine>
+            </a:ext>
+            <a:ext uri="{AF507438-7753-43E0-B8FC-AC1667EBCBE1}">
+              <a14:hiddenEffects xmlns:a14="http://schemas.microsoft.com/office/drawing/2010/main">
+                <a:effectLst>
+                  <a:outerShdw dist="35921" dir="2700000" algn="ctr" rotWithShape="0">
+                    <a:schemeClr val="bg2"/>
+                  </a:outerShdw>
+                </a:effectLst>
+              </a14:hiddenEffects>
+            </a:ext>
+          </a:extLst>
+        </p:spPr>
+      </p:pic>
+      <p:sp>
+        <p:nvSpPr>
+          <p:cNvPr id="5" name="Rectangle 4"/>
+          <p:cNvSpPr/>
+          <p:nvPr/>
+        </p:nvSpPr>
+        <p:spPr>
+          <a:xfrm>
+            <a:off x="424900" y="3465549"/>
+            <a:ext cx="2474395" cy="369332"/>
+          </a:xfrm>
+          <a:prstGeom prst="rect">
+            <a:avLst/>
+          </a:prstGeom>
+        </p:spPr>
+        <p:txBody>
+          <a:bodyPr wrap="none">
+            <a:spAutoFit/>
+          </a:bodyPr>
+          <a:lstStyle/>
+          <a:p>
+            <a:r>
+              <a:rPr lang="it-IT" dirty="0"/>
+              <a:t>Suita AI vs suita proprie</a:t>
+            </a:r>
+            <a:endParaRPr lang="en-US" dirty="0"/>
+          </a:p>
+        </p:txBody>
+      </p:sp>
+      <p:pic>
+        <p:nvPicPr>
+          <p:cNvPr id="10243" name="Picture 3"/>
+          <p:cNvPicPr>
+            <a:picLocks noChangeAspect="1" noChangeArrowheads="1"/>
+          </p:cNvPicPr>
+          <p:nvPr/>
+        </p:nvPicPr>
+        <p:blipFill>
+          <a:blip r:embed="rId3">
+            <a:extLst>
+              <a:ext uri="{28A0092B-C50C-407E-A947-70E740481C1C}">
+                <a14:useLocalDpi xmlns:a14="http://schemas.microsoft.com/office/drawing/2010/main" val="0"/>
+              </a:ext>
+            </a:extLst>
+          </a:blip>
+          <a:srcRect/>
+          <a:stretch>
+            <a:fillRect/>
+          </a:stretch>
+        </p:blipFill>
+        <p:spPr bwMode="auto">
+          <a:xfrm>
+            <a:off x="92173" y="3801450"/>
+            <a:ext cx="4180679" cy="1377040"/>
+          </a:xfrm>
+          <a:prstGeom prst="rect">
+            <a:avLst/>
+          </a:prstGeom>
+          <a:noFill/>
+          <a:ln>
+            <a:noFill/>
+          </a:ln>
+          <a:effectLst/>
+          <a:extLst>
+            <a:ext uri="{909E8E84-426E-40DD-AFC4-6F175D3DCCD1}">
+              <a14:hiddenFill xmlns:a14="http://schemas.microsoft.com/office/drawing/2010/main">
+                <a:solidFill>
+                  <a:schemeClr val="accent1"/>
+                </a:solidFill>
+              </a14:hiddenFill>
+            </a:ext>
+            <a:ext uri="{91240B29-F687-4F45-9708-019B960494DF}">
+              <a14:hiddenLine xmlns:a14="http://schemas.microsoft.com/office/drawing/2010/main" w="9525">
+                <a:solidFill>
+                  <a:schemeClr val="tx1"/>
+                </a:solidFill>
+                <a:miter lim="800000"/>
+                <a:headEnd/>
+                <a:tailEnd/>
+              </a14:hiddenLine>
+            </a:ext>
+            <a:ext uri="{AF507438-7753-43E0-B8FC-AC1667EBCBE1}">
+              <a14:hiddenEffects xmlns:a14="http://schemas.microsoft.com/office/drawing/2010/main">
+                <a:effectLst>
+                  <a:outerShdw dist="35921" dir="2700000" algn="ctr" rotWithShape="0">
+                    <a:schemeClr val="bg2"/>
+                  </a:outerShdw>
+                </a:effectLst>
+              </a14:hiddenEffects>
+            </a:ext>
+          </a:extLst>
+        </p:spPr>
+      </p:pic>
+      <p:sp>
+        <p:nvSpPr>
+          <p:cNvPr id="6" name="Rectangle 5"/>
+          <p:cNvSpPr/>
+          <p:nvPr/>
+        </p:nvSpPr>
+        <p:spPr>
+          <a:xfrm>
+            <a:off x="6068239" y="1690177"/>
+            <a:ext cx="1697709" cy="369332"/>
+          </a:xfrm>
+          <a:prstGeom prst="rect">
+            <a:avLst/>
+          </a:prstGeom>
+        </p:spPr>
+        <p:txBody>
+          <a:bodyPr wrap="none">
+            <a:spAutoFit/>
+          </a:bodyPr>
+          <a:lstStyle/>
+          <a:p>
+            <a:r>
+              <a:rPr lang="en-US" dirty="0" err="1"/>
+              <a:t>Rezultate</a:t>
+            </a:r>
+            <a:r>
+              <a:rPr lang="en-US" dirty="0"/>
+              <a:t> finale</a:t>
+            </a:r>
+          </a:p>
+        </p:txBody>
+      </p:sp>
+      <p:pic>
+        <p:nvPicPr>
+          <p:cNvPr id="10244" name="Picture 4"/>
+          <p:cNvPicPr>
+            <a:picLocks noChangeAspect="1" noChangeArrowheads="1"/>
+          </p:cNvPicPr>
+          <p:nvPr/>
+        </p:nvPicPr>
+        <p:blipFill>
+          <a:blip r:embed="rId4">
+            <a:extLst>
+              <a:ext uri="{28A0092B-C50C-407E-A947-70E740481C1C}">
+                <a14:useLocalDpi xmlns:a14="http://schemas.microsoft.com/office/drawing/2010/main" val="0"/>
+              </a:ext>
+            </a:extLst>
+          </a:blip>
+          <a:srcRect/>
+          <a:stretch>
+            <a:fillRect/>
+          </a:stretch>
+        </p:blipFill>
+        <p:spPr bwMode="auto">
+          <a:xfrm>
+            <a:off x="5159699" y="2108881"/>
+            <a:ext cx="4216686" cy="1239968"/>
+          </a:xfrm>
+          <a:prstGeom prst="rect">
+            <a:avLst/>
+          </a:prstGeom>
+          <a:noFill/>
+          <a:ln>
+            <a:noFill/>
+          </a:ln>
+          <a:effectLst/>
+          <a:extLst>
+            <a:ext uri="{909E8E84-426E-40DD-AFC4-6F175D3DCCD1}">
+              <a14:hiddenFill xmlns:a14="http://schemas.microsoft.com/office/drawing/2010/main">
+                <a:solidFill>
+                  <a:schemeClr val="accent1"/>
+                </a:solidFill>
+              </a14:hiddenFill>
+            </a:ext>
+            <a:ext uri="{91240B29-F687-4F45-9708-019B960494DF}">
+              <a14:hiddenLine xmlns:a14="http://schemas.microsoft.com/office/drawing/2010/main" w="9525">
+                <a:solidFill>
+                  <a:schemeClr val="tx1"/>
+                </a:solidFill>
+                <a:miter lim="800000"/>
+                <a:headEnd/>
+                <a:tailEnd/>
+              </a14:hiddenLine>
+            </a:ext>
+            <a:ext uri="{AF507438-7753-43E0-B8FC-AC1667EBCBE1}">
+              <a14:hiddenEffects xmlns:a14="http://schemas.microsoft.com/office/drawing/2010/main">
+                <a:effectLst>
+                  <a:outerShdw dist="35921" dir="2700000" algn="ctr" rotWithShape="0">
+                    <a:schemeClr val="bg2"/>
+                  </a:outerShdw>
+                </a:effectLst>
+              </a14:hiddenEffects>
+            </a:ext>
+          </a:extLst>
+        </p:spPr>
+      </p:pic>
+      <p:sp>
+        <p:nvSpPr>
+          <p:cNvPr id="7" name="Rectangle 6"/>
+          <p:cNvSpPr/>
+          <p:nvPr/>
+        </p:nvSpPr>
+        <p:spPr>
+          <a:xfrm>
+            <a:off x="4830147" y="3889805"/>
+            <a:ext cx="6096000" cy="1200329"/>
+          </a:xfrm>
+          <a:prstGeom prst="rect">
+            <a:avLst/>
+          </a:prstGeom>
+        </p:spPr>
+        <p:txBody>
+          <a:bodyPr>
+            <a:spAutoFit/>
+          </a:bodyPr>
+          <a:lstStyle/>
+          <a:p>
+            <a:r>
+              <a:rPr lang="vi-VN" dirty="0"/>
+              <a:t>Metoda </a:t>
+            </a:r>
+            <a:r>
+              <a:rPr lang="vi-VN" b="1" dirty="0"/>
+              <a:t>evaluate_client_package</a:t>
+            </a:r>
+            <a:r>
+              <a:rPr lang="vi-VN" dirty="0"/>
+              <a:t> a permis ilustrarea tuturor strategiilor cerute: partiționare, frontiere, acoperire la trei niveluri, circuite independente și mutation testing cu două instrumente complementare. </a:t>
+            </a:r>
+            <a:endParaRPr lang="en-US" dirty="0"/>
+          </a:p>
+        </p:txBody>
+      </p:sp>
+    </p:spTree>
+    <p:extLst>
+      <p:ext uri="{BB962C8B-B14F-4D97-AF65-F5344CB8AC3E}">
+        <p14:creationId xmlns:p14="http://schemas.microsoft.com/office/powerpoint/2010/main" val="4054460708"/>
       </p:ext>
     </p:extLst>
   </p:cSld>
@@ -4251,13 +5535,7 @@
       </p:grpSpPr>
       <p:sp>
         <p:nvSpPr>
-          <p:cNvPr id="2" name="Title 1">
-            <a:extLst>
-              <a:ext uri="{FF2B5EF4-FFF2-40B4-BE49-F238E27FC236}">
-                <a16:creationId xmlns:a16="http://schemas.microsoft.com/office/drawing/2014/main" id="{5E562972-3449-42D1-8185-B4BEFD52AB44}"/>
-              </a:ext>
-            </a:extLst>
-          </p:cNvPr>
+          <p:cNvPr id="2" name="Title 1"/>
           <p:cNvSpPr>
             <a:spLocks noGrp="1"/>
           </p:cNvSpPr>
@@ -4265,361 +5543,1193 @@
             <p:ph type="title"/>
           </p:nvPr>
         </p:nvSpPr>
-        <p:spPr/>
+        <p:spPr>
+          <a:xfrm>
+            <a:off x="581192" y="702156"/>
+            <a:ext cx="11334020" cy="464171"/>
+          </a:xfrm>
+        </p:spPr>
         <p:txBody>
-          <a:bodyPr/>
+          <a:bodyPr>
+            <a:noAutofit/>
+          </a:bodyPr>
           <a:lstStyle/>
           <a:p>
             <a:r>
-              <a:rPr lang="en-US" dirty="0" err="1"/>
-              <a:t>Statistici</a:t>
-            </a:r>
-            <a:r>
-              <a:rPr lang="en-US" dirty="0"/>
+              <a:rPr lang="en-US" sz="2200" b="1" dirty="0" err="1" smtClean="0">
+                <a:latin typeface="Arial" pitchFamily="34" charset="0"/>
+                <a:cs typeface="Arial" pitchFamily="34" charset="0"/>
+              </a:rPr>
+              <a:t>Metoda</a:t>
+            </a:r>
+            <a:r>
+              <a:rPr lang="en-US" sz="2200" b="1" dirty="0" smtClean="0">
+                <a:latin typeface="Arial" pitchFamily="34" charset="0"/>
+                <a:cs typeface="Arial" pitchFamily="34" charset="0"/>
+              </a:rPr>
               <a:t> </a:t>
             </a:r>
             <a:r>
-              <a:rPr lang="en-US" dirty="0" err="1"/>
-              <a:t>principale</a:t>
-            </a:r>
-            <a:r>
-              <a:rPr lang="en-US" dirty="0"/>
-              <a:t>:</a:t>
-            </a:r>
+              <a:rPr lang="vi-VN" sz="2200" b="1" dirty="0" smtClean="0">
+                <a:latin typeface="Arial" pitchFamily="34" charset="0"/>
+                <a:cs typeface="Arial" pitchFamily="34" charset="0"/>
+              </a:rPr>
+              <a:t>testată</a:t>
+            </a:r>
+            <a:r>
+              <a:rPr lang="en-US" sz="2200" b="1" dirty="0" smtClean="0">
+                <a:latin typeface="Arial" pitchFamily="34" charset="0"/>
+                <a:cs typeface="Arial" pitchFamily="34" charset="0"/>
+              </a:rPr>
+              <a:t> - </a:t>
+            </a:r>
+            <a:r>
+              <a:rPr lang="vi-VN" sz="2200" b="1" dirty="0">
+                <a:latin typeface="Arial" pitchFamily="34" charset="0"/>
+                <a:cs typeface="Arial" pitchFamily="34" charset="0"/>
+              </a:rPr>
+              <a:t>Evaluarea stării unui pachet de ședințe de fitness</a:t>
+            </a:r>
+            <a:endParaRPr lang="en-US" sz="2200" dirty="0">
+              <a:latin typeface="Arial" pitchFamily="34" charset="0"/>
+              <a:cs typeface="Arial" pitchFamily="34" charset="0"/>
+            </a:endParaRPr>
           </a:p>
         </p:txBody>
       </p:sp>
-      <p:graphicFrame>
-        <p:nvGraphicFramePr>
-          <p:cNvPr id="7" name="Content Placeholder 6">
+      <p:sp>
+        <p:nvSpPr>
+          <p:cNvPr id="3" name="Content Placeholder 2"/>
+          <p:cNvSpPr>
+            <a:spLocks noGrp="1"/>
+          </p:cNvSpPr>
+          <p:nvPr>
+            <p:ph idx="1"/>
+          </p:nvPr>
+        </p:nvSpPr>
+        <p:spPr>
+          <a:xfrm>
+            <a:off x="581192" y="1278293"/>
+            <a:ext cx="11610808" cy="3247053"/>
+          </a:xfrm>
+        </p:spPr>
+        <p:txBody>
+          <a:bodyPr>
+            <a:normAutofit fontScale="85000" lnSpcReduction="10000"/>
+          </a:bodyPr>
+          <a:lstStyle/>
+          <a:p>
+            <a:pPr marL="0" indent="0">
+              <a:buNone/>
+            </a:pPr>
+            <a:r>
+              <a:rPr lang="en-US" b="1" dirty="0" err="1">
+                <a:latin typeface="Tahoma" pitchFamily="34" charset="0"/>
+                <a:ea typeface="Tahoma" pitchFamily="34" charset="0"/>
+                <a:cs typeface="Tahoma" pitchFamily="34" charset="0"/>
+              </a:rPr>
+              <a:t>Descrierea</a:t>
+            </a:r>
+            <a:r>
+              <a:rPr lang="en-US" b="1" dirty="0">
+                <a:latin typeface="Tahoma" pitchFamily="34" charset="0"/>
+                <a:ea typeface="Tahoma" pitchFamily="34" charset="0"/>
+                <a:cs typeface="Tahoma" pitchFamily="34" charset="0"/>
+              </a:rPr>
+              <a:t> </a:t>
+            </a:r>
+            <a:r>
+              <a:rPr lang="en-US" b="1" dirty="0" err="1">
+                <a:latin typeface="Tahoma" pitchFamily="34" charset="0"/>
+                <a:ea typeface="Tahoma" pitchFamily="34" charset="0"/>
+                <a:cs typeface="Tahoma" pitchFamily="34" charset="0"/>
+              </a:rPr>
+              <a:t>clasei</a:t>
+            </a:r>
+            <a:r>
+              <a:rPr lang="en-US" b="1" dirty="0">
+                <a:latin typeface="Tahoma" pitchFamily="34" charset="0"/>
+                <a:ea typeface="Tahoma" pitchFamily="34" charset="0"/>
+                <a:cs typeface="Tahoma" pitchFamily="34" charset="0"/>
+              </a:rPr>
+              <a:t> </a:t>
+            </a:r>
+            <a:r>
+              <a:rPr lang="en-US" b="1" dirty="0" err="1">
+                <a:latin typeface="Tahoma" pitchFamily="34" charset="0"/>
+                <a:ea typeface="Tahoma" pitchFamily="34" charset="0"/>
+                <a:cs typeface="Tahoma" pitchFamily="34" charset="0"/>
+              </a:rPr>
+              <a:t>și</a:t>
+            </a:r>
+            <a:r>
+              <a:rPr lang="en-US" b="1" dirty="0">
+                <a:latin typeface="Tahoma" pitchFamily="34" charset="0"/>
+                <a:ea typeface="Tahoma" pitchFamily="34" charset="0"/>
+                <a:cs typeface="Tahoma" pitchFamily="34" charset="0"/>
+              </a:rPr>
+              <a:t> </a:t>
+            </a:r>
+            <a:r>
+              <a:rPr lang="en-US" b="1" dirty="0" err="1" smtClean="0">
+                <a:latin typeface="Tahoma" pitchFamily="34" charset="0"/>
+                <a:ea typeface="Tahoma" pitchFamily="34" charset="0"/>
+                <a:cs typeface="Tahoma" pitchFamily="34" charset="0"/>
+              </a:rPr>
+              <a:t>metodei</a:t>
+            </a:r>
+            <a:r>
+              <a:rPr lang="en-US" b="1" dirty="0" smtClean="0">
+                <a:latin typeface="Tahoma" pitchFamily="34" charset="0"/>
+                <a:ea typeface="Tahoma" pitchFamily="34" charset="0"/>
+                <a:cs typeface="Tahoma" pitchFamily="34" charset="0"/>
+              </a:rPr>
+              <a:t>: </a:t>
+            </a:r>
+          </a:p>
+          <a:p>
+            <a:r>
+              <a:rPr lang="vi-VN" b="1" dirty="0" smtClean="0">
+                <a:latin typeface="Tahoma" pitchFamily="34" charset="0"/>
+                <a:ea typeface="Tahoma" pitchFamily="34" charset="0"/>
+                <a:cs typeface="Tahoma" pitchFamily="34" charset="0"/>
+              </a:rPr>
+              <a:t>FitnessClassBooking</a:t>
+            </a:r>
+            <a:r>
+              <a:rPr lang="vi-VN" dirty="0">
+                <a:latin typeface="Tahoma" pitchFamily="34" charset="0"/>
+                <a:ea typeface="Tahoma" pitchFamily="34" charset="0"/>
+                <a:cs typeface="Tahoma" pitchFamily="34" charset="0"/>
+              </a:rPr>
+              <a:t> este o clasă Python care modelează o clasă de fitness dintr-un sistem de rezervări. Constructorul primește tipul clasei (class_name), instructorul și prețul per ședință, și validează aceste date la creare.</a:t>
+            </a:r>
+          </a:p>
+          <a:p>
+            <a:r>
+              <a:rPr lang="vi-VN" b="1" dirty="0">
+                <a:latin typeface="Tahoma" pitchFamily="34" charset="0"/>
+                <a:ea typeface="Tahoma" pitchFamily="34" charset="0"/>
+                <a:cs typeface="Tahoma" pitchFamily="34" charset="0"/>
+              </a:rPr>
+              <a:t>evaluate_client_package</a:t>
+            </a:r>
+            <a:r>
+              <a:rPr lang="vi-VN" dirty="0">
+                <a:latin typeface="Tahoma" pitchFamily="34" charset="0"/>
+                <a:ea typeface="Tahoma" pitchFamily="34" charset="0"/>
+                <a:cs typeface="Tahoma" pitchFamily="34" charset="0"/>
+              </a:rPr>
+              <a:t> este metoda principală testată. Primește istoricul ședințelor unui client (session_history), numărul de ședințe din pachetul cumpărat (package_sessions) și dacă clientul are membership (has_membership). Pe baza acestora calculează câte ședințe au fost consumate, câte au rămas, costul total al pachetului (cu sau fără discount) și statusul final al pachetului.</a:t>
+            </a:r>
+          </a:p>
+          <a:p>
+            <a:pPr marL="0" indent="0">
+              <a:buNone/>
+            </a:pPr>
+            <a:r>
+              <a:rPr lang="vi-VN" b="1" dirty="0">
+                <a:latin typeface="Tahoma" pitchFamily="34" charset="0"/>
+                <a:ea typeface="Tahoma" pitchFamily="34" charset="0"/>
+                <a:cs typeface="Tahoma" pitchFamily="34" charset="0"/>
+              </a:rPr>
+              <a:t>Semnăturile metodelor</a:t>
+            </a:r>
+          </a:p>
+          <a:p>
+            <a:r>
+              <a:rPr lang="en-US" dirty="0">
+                <a:latin typeface="Tahoma" pitchFamily="34" charset="0"/>
+                <a:ea typeface="Tahoma" pitchFamily="34" charset="0"/>
+                <a:cs typeface="Tahoma" pitchFamily="34" charset="0"/>
+              </a:rPr>
+              <a:t>booking = </a:t>
+            </a:r>
+            <a:r>
+              <a:rPr lang="en-US" dirty="0" err="1">
+                <a:latin typeface="Tahoma" pitchFamily="34" charset="0"/>
+                <a:ea typeface="Tahoma" pitchFamily="34" charset="0"/>
+                <a:cs typeface="Tahoma" pitchFamily="34" charset="0"/>
+              </a:rPr>
+              <a:t>FitnessClassBooking</a:t>
+            </a:r>
+            <a:r>
+              <a:rPr lang="en-US" dirty="0">
+                <a:latin typeface="Tahoma" pitchFamily="34" charset="0"/>
+                <a:ea typeface="Tahoma" pitchFamily="34" charset="0"/>
+                <a:cs typeface="Tahoma" pitchFamily="34" charset="0"/>
+              </a:rPr>
+              <a:t>(</a:t>
+            </a:r>
+            <a:r>
+              <a:rPr lang="en-US" dirty="0" err="1">
+                <a:latin typeface="Tahoma" pitchFamily="34" charset="0"/>
+                <a:ea typeface="Tahoma" pitchFamily="34" charset="0"/>
+                <a:cs typeface="Tahoma" pitchFamily="34" charset="0"/>
+              </a:rPr>
+              <a:t>class_name</a:t>
+            </a:r>
+            <a:r>
+              <a:rPr lang="en-US" dirty="0">
+                <a:latin typeface="Tahoma" pitchFamily="34" charset="0"/>
+                <a:ea typeface="Tahoma" pitchFamily="34" charset="0"/>
+                <a:cs typeface="Tahoma" pitchFamily="34" charset="0"/>
+              </a:rPr>
+              <a:t>, instructor, </a:t>
+            </a:r>
+            <a:r>
+              <a:rPr lang="en-US" dirty="0" err="1">
+                <a:latin typeface="Tahoma" pitchFamily="34" charset="0"/>
+                <a:ea typeface="Tahoma" pitchFamily="34" charset="0"/>
+                <a:cs typeface="Tahoma" pitchFamily="34" charset="0"/>
+              </a:rPr>
+              <a:t>price_per_session</a:t>
+            </a:r>
+            <a:r>
+              <a:rPr lang="en-US" dirty="0">
+                <a:latin typeface="Tahoma" pitchFamily="34" charset="0"/>
+                <a:ea typeface="Tahoma" pitchFamily="34" charset="0"/>
+                <a:cs typeface="Tahoma" pitchFamily="34" charset="0"/>
+              </a:rPr>
+              <a:t>) </a:t>
+            </a:r>
+            <a:endParaRPr lang="en-US" dirty="0" smtClean="0">
+              <a:latin typeface="Tahoma" pitchFamily="34" charset="0"/>
+              <a:ea typeface="Tahoma" pitchFamily="34" charset="0"/>
+              <a:cs typeface="Tahoma" pitchFamily="34" charset="0"/>
+            </a:endParaRPr>
+          </a:p>
+          <a:p>
+            <a:r>
+              <a:rPr lang="en-US" dirty="0" smtClean="0">
+                <a:latin typeface="Tahoma" pitchFamily="34" charset="0"/>
+                <a:ea typeface="Tahoma" pitchFamily="34" charset="0"/>
+                <a:cs typeface="Tahoma" pitchFamily="34" charset="0"/>
+              </a:rPr>
+              <a:t>result </a:t>
+            </a:r>
+            <a:r>
+              <a:rPr lang="en-US" dirty="0">
+                <a:latin typeface="Tahoma" pitchFamily="34" charset="0"/>
+                <a:ea typeface="Tahoma" pitchFamily="34" charset="0"/>
+                <a:cs typeface="Tahoma" pitchFamily="34" charset="0"/>
+              </a:rPr>
+              <a:t>= </a:t>
+            </a:r>
+            <a:r>
+              <a:rPr lang="en-US" dirty="0" err="1">
+                <a:latin typeface="Tahoma" pitchFamily="34" charset="0"/>
+                <a:ea typeface="Tahoma" pitchFamily="34" charset="0"/>
+                <a:cs typeface="Tahoma" pitchFamily="34" charset="0"/>
+              </a:rPr>
+              <a:t>booking.evaluate_client_package</a:t>
+            </a:r>
+            <a:r>
+              <a:rPr lang="en-US" dirty="0">
+                <a:latin typeface="Tahoma" pitchFamily="34" charset="0"/>
+                <a:ea typeface="Tahoma" pitchFamily="34" charset="0"/>
+                <a:cs typeface="Tahoma" pitchFamily="34" charset="0"/>
+              </a:rPr>
+              <a:t>(</a:t>
+            </a:r>
+            <a:r>
+              <a:rPr lang="en-US" dirty="0" err="1">
+                <a:latin typeface="Tahoma" pitchFamily="34" charset="0"/>
+                <a:ea typeface="Tahoma" pitchFamily="34" charset="0"/>
+                <a:cs typeface="Tahoma" pitchFamily="34" charset="0"/>
+              </a:rPr>
+              <a:t>session_history</a:t>
+            </a:r>
+            <a:r>
+              <a:rPr lang="en-US" dirty="0">
+                <a:latin typeface="Tahoma" pitchFamily="34" charset="0"/>
+                <a:ea typeface="Tahoma" pitchFamily="34" charset="0"/>
+                <a:cs typeface="Tahoma" pitchFamily="34" charset="0"/>
+              </a:rPr>
+              <a:t>, </a:t>
+            </a:r>
+            <a:r>
+              <a:rPr lang="en-US" dirty="0" err="1">
+                <a:latin typeface="Tahoma" pitchFamily="34" charset="0"/>
+                <a:ea typeface="Tahoma" pitchFamily="34" charset="0"/>
+                <a:cs typeface="Tahoma" pitchFamily="34" charset="0"/>
+              </a:rPr>
+              <a:t>package_sessions</a:t>
+            </a:r>
+            <a:r>
+              <a:rPr lang="en-US" dirty="0">
+                <a:latin typeface="Tahoma" pitchFamily="34" charset="0"/>
+                <a:ea typeface="Tahoma" pitchFamily="34" charset="0"/>
+                <a:cs typeface="Tahoma" pitchFamily="34" charset="0"/>
+              </a:rPr>
+              <a:t>, </a:t>
+            </a:r>
+            <a:r>
+              <a:rPr lang="en-US" dirty="0" err="1">
+                <a:latin typeface="Tahoma" pitchFamily="34" charset="0"/>
+                <a:ea typeface="Tahoma" pitchFamily="34" charset="0"/>
+                <a:cs typeface="Tahoma" pitchFamily="34" charset="0"/>
+              </a:rPr>
+              <a:t>has_membership</a:t>
+            </a:r>
+            <a:r>
+              <a:rPr lang="en-US" dirty="0" smtClean="0">
+                <a:latin typeface="Tahoma" pitchFamily="34" charset="0"/>
+                <a:ea typeface="Tahoma" pitchFamily="34" charset="0"/>
+                <a:cs typeface="Tahoma" pitchFamily="34" charset="0"/>
+              </a:rPr>
+              <a:t>)</a:t>
+            </a:r>
+            <a:endParaRPr lang="en-US" b="1" dirty="0" smtClean="0">
+              <a:latin typeface="Tahoma" pitchFamily="34" charset="0"/>
+              <a:ea typeface="Tahoma" pitchFamily="34" charset="0"/>
+              <a:cs typeface="Tahoma" pitchFamily="34" charset="0"/>
+            </a:endParaRPr>
+          </a:p>
+          <a:p>
+            <a:pPr marL="0" indent="0">
+              <a:buNone/>
+            </a:pPr>
+            <a:r>
+              <a:rPr lang="en-US" b="1" dirty="0" err="1">
+                <a:latin typeface="Tahoma" pitchFamily="34" charset="0"/>
+                <a:ea typeface="Tahoma" pitchFamily="34" charset="0"/>
+                <a:cs typeface="Tahoma" pitchFamily="34" charset="0"/>
+              </a:rPr>
+              <a:t>Statusurile</a:t>
+            </a:r>
+            <a:r>
+              <a:rPr lang="en-US" b="1" dirty="0">
+                <a:latin typeface="Tahoma" pitchFamily="34" charset="0"/>
+                <a:ea typeface="Tahoma" pitchFamily="34" charset="0"/>
+                <a:cs typeface="Tahoma" pitchFamily="34" charset="0"/>
+              </a:rPr>
+              <a:t> din </a:t>
+            </a:r>
+            <a:r>
+              <a:rPr lang="en-US" b="1" dirty="0" err="1" smtClean="0">
+                <a:latin typeface="Tahoma" pitchFamily="34" charset="0"/>
+                <a:ea typeface="Tahoma" pitchFamily="34" charset="0"/>
+                <a:cs typeface="Tahoma" pitchFamily="34" charset="0"/>
+              </a:rPr>
+              <a:t>session_history</a:t>
+            </a:r>
+            <a:r>
+              <a:rPr lang="en-US" b="1" dirty="0" smtClean="0">
+                <a:latin typeface="Tahoma" pitchFamily="34" charset="0"/>
+                <a:ea typeface="Tahoma" pitchFamily="34" charset="0"/>
+                <a:cs typeface="Tahoma" pitchFamily="34" charset="0"/>
+              </a:rPr>
+              <a:t>                                                 </a:t>
+            </a:r>
+            <a:r>
+              <a:rPr lang="en-US" sz="1600" b="1" dirty="0" err="1">
+                <a:latin typeface="Tahoma" pitchFamily="34" charset="0"/>
+                <a:ea typeface="Tahoma" pitchFamily="34" charset="0"/>
+                <a:cs typeface="Tahoma" pitchFamily="34" charset="0"/>
+              </a:rPr>
+              <a:t>Statusul</a:t>
+            </a:r>
+            <a:r>
+              <a:rPr lang="en-US" sz="1600" b="1" dirty="0">
+                <a:latin typeface="Tahoma" pitchFamily="34" charset="0"/>
+                <a:ea typeface="Tahoma" pitchFamily="34" charset="0"/>
+                <a:cs typeface="Tahoma" pitchFamily="34" charset="0"/>
+              </a:rPr>
+              <a:t> final al </a:t>
+            </a:r>
+            <a:r>
+              <a:rPr lang="en-US" sz="1600" b="1" dirty="0" err="1">
+                <a:latin typeface="Tahoma" pitchFamily="34" charset="0"/>
+                <a:ea typeface="Tahoma" pitchFamily="34" charset="0"/>
+                <a:cs typeface="Tahoma" pitchFamily="34" charset="0"/>
+              </a:rPr>
+              <a:t>pachetului</a:t>
+            </a:r>
+            <a:endParaRPr lang="en-US" sz="1600" b="1" dirty="0">
+              <a:latin typeface="Tahoma" pitchFamily="34" charset="0"/>
+              <a:ea typeface="Tahoma" pitchFamily="34" charset="0"/>
+              <a:cs typeface="Tahoma" pitchFamily="34" charset="0"/>
+            </a:endParaRPr>
+          </a:p>
+          <a:p>
+            <a:pPr marL="0" indent="0">
+              <a:buNone/>
+            </a:pPr>
+            <a:endParaRPr lang="en-US" b="1" dirty="0">
+              <a:latin typeface="Tahoma" pitchFamily="34" charset="0"/>
+              <a:ea typeface="Tahoma" pitchFamily="34" charset="0"/>
+              <a:cs typeface="Tahoma" pitchFamily="34" charset="0"/>
+            </a:endParaRPr>
+          </a:p>
+        </p:txBody>
+      </p:sp>
+      <p:pic>
+        <p:nvPicPr>
+          <p:cNvPr id="2050" name="Picture 2"/>
+          <p:cNvPicPr>
+            <a:picLocks noChangeAspect="1" noChangeArrowheads="1"/>
+          </p:cNvPicPr>
+          <p:nvPr/>
+        </p:nvPicPr>
+        <p:blipFill>
+          <a:blip r:embed="rId2">
             <a:extLst>
-              <a:ext uri="{FF2B5EF4-FFF2-40B4-BE49-F238E27FC236}">
-                <a16:creationId xmlns:a16="http://schemas.microsoft.com/office/drawing/2014/main" id="{92AB8C41-677D-FD6E-0A57-97DE5565969E}"/>
+              <a:ext uri="{28A0092B-C50C-407E-A947-70E740481C1C}">
+                <a14:useLocalDpi xmlns:a14="http://schemas.microsoft.com/office/drawing/2010/main" val="0"/>
               </a:ext>
             </a:extLst>
-          </p:cNvPr>
-          <p:cNvGraphicFramePr>
-            <a:graphicFrameLocks noGrp="1"/>
-          </p:cNvGraphicFramePr>
-          <p:nvPr>
-            <p:ph idx="1"/>
-            <p:extLst>
-              <p:ext uri="{D42A27DB-BD31-4B8C-83A1-F6EECF244321}">
-                <p14:modId xmlns:p14="http://schemas.microsoft.com/office/powerpoint/2010/main" val="1369175910"/>
-              </p:ext>
-            </p:extLst>
-          </p:nvPr>
-        </p:nvGraphicFramePr>
-        <p:xfrm>
-          <a:off x="581025" y="2341563"/>
-          <a:ext cx="11029950" cy="3742716"/>
-        </p:xfrm>
-        <a:graphic>
-          <a:graphicData uri="http://schemas.openxmlformats.org/drawingml/2006/table">
-            <a:tbl>
-              <a:tblPr firstRow="1" bandRow="1">
-                <a:tableStyleId>{5C22544A-7EE6-4342-B048-85BDC9FD1C3A}</a:tableStyleId>
-              </a:tblPr>
-              <a:tblGrid>
-                <a:gridCol w="5514975">
-                  <a:extLst>
-                    <a:ext uri="{9D8B030D-6E8A-4147-A177-3AD203B41FA5}">
-                      <a16:colId xmlns:a16="http://schemas.microsoft.com/office/drawing/2014/main" val="2883498173"/>
-                    </a:ext>
-                  </a:extLst>
-                </a:gridCol>
-                <a:gridCol w="5514975">
-                  <a:extLst>
-                    <a:ext uri="{9D8B030D-6E8A-4147-A177-3AD203B41FA5}">
-                      <a16:colId xmlns:a16="http://schemas.microsoft.com/office/drawing/2014/main" val="425193750"/>
-                    </a:ext>
-                  </a:extLst>
-                </a:gridCol>
-              </a:tblGrid>
-              <a:tr h="623786">
-                <a:tc>
-                  <a:txBody>
-                    <a:bodyPr/>
-                    <a:lstStyle/>
-                    <a:p>
-                      <a:r>
-                        <a:rPr lang="en-US" dirty="0"/>
-                        <a:t>Statistica</a:t>
-                      </a:r>
-                    </a:p>
-                  </a:txBody>
-                  <a:tcPr/>
-                </a:tc>
-                <a:tc>
-                  <a:txBody>
-                    <a:bodyPr/>
-                    <a:lstStyle/>
-                    <a:p>
-                      <a:r>
-                        <a:rPr lang="en-US" dirty="0" err="1"/>
-                        <a:t>Valoare</a:t>
-                      </a:r>
-                      <a:endParaRPr lang="en-US" dirty="0"/>
-                    </a:p>
-                  </a:txBody>
-                  <a:tcPr/>
-                </a:tc>
-                <a:extLst>
-                  <a:ext uri="{0D108BD9-81ED-4DB2-BD59-A6C34878D82A}">
-                    <a16:rowId xmlns:a16="http://schemas.microsoft.com/office/drawing/2014/main" val="3470100653"/>
-                  </a:ext>
-                </a:extLst>
-              </a:tr>
-              <a:tr h="623786">
-                <a:tc>
-                  <a:txBody>
-                    <a:bodyPr/>
-                    <a:lstStyle/>
-                    <a:p>
-                      <a:pPr>
-                        <a:buNone/>
-                      </a:pPr>
-                      <a:r>
-                        <a:rPr lang="en-US" dirty="0">
-                          <a:effectLst/>
-                        </a:rPr>
-                        <a:t>Teste </a:t>
-                      </a:r>
-                      <a:r>
-                        <a:rPr lang="en-US" dirty="0" err="1">
-                          <a:effectLst/>
-                        </a:rPr>
-                        <a:t>principale</a:t>
-                      </a:r>
-                      <a:endParaRPr lang="en-US" dirty="0">
-                        <a:effectLst/>
-                      </a:endParaRPr>
-                    </a:p>
-                  </a:txBody>
-                  <a:tcPr marL="95250" marR="95250" marT="47625" marB="47625" anchor="ctr"/>
-                </a:tc>
-                <a:tc>
-                  <a:txBody>
-                    <a:bodyPr/>
-                    <a:lstStyle/>
-                    <a:p>
-                      <a:pPr>
-                        <a:buNone/>
-                      </a:pPr>
-                      <a:r>
-                        <a:rPr lang="en-US" b="1">
-                          <a:effectLst/>
-                        </a:rPr>
-                        <a:t>100 passed</a:t>
-                      </a:r>
-                      <a:endParaRPr lang="en-US">
-                        <a:effectLst/>
-                      </a:endParaRPr>
-                    </a:p>
-                  </a:txBody>
-                  <a:tcPr marL="95250" marR="95250" marT="47625" marB="47625" anchor="ctr"/>
-                </a:tc>
-                <a:extLst>
-                  <a:ext uri="{0D108BD9-81ED-4DB2-BD59-A6C34878D82A}">
-                    <a16:rowId xmlns:a16="http://schemas.microsoft.com/office/drawing/2014/main" val="638426398"/>
-                  </a:ext>
-                </a:extLst>
-              </a:tr>
-              <a:tr h="623786">
-                <a:tc>
-                  <a:txBody>
-                    <a:bodyPr/>
-                    <a:lstStyle/>
-                    <a:p>
-                      <a:pPr>
-                        <a:buNone/>
-                      </a:pPr>
-                      <a:r>
-                        <a:rPr lang="en-US">
-                          <a:effectLst/>
-                        </a:rPr>
-                        <a:t>Coverage</a:t>
-                      </a:r>
-                    </a:p>
-                  </a:txBody>
-                  <a:tcPr marL="95250" marR="95250" marT="47625" marB="47625" anchor="ctr"/>
-                </a:tc>
-                <a:tc>
-                  <a:txBody>
-                    <a:bodyPr/>
-                    <a:lstStyle/>
-                    <a:p>
-                      <a:pPr>
-                        <a:buNone/>
-                      </a:pPr>
-                      <a:r>
-                        <a:rPr lang="en-US" b="1">
-                          <a:effectLst/>
-                        </a:rPr>
-                        <a:t>100%</a:t>
-                      </a:r>
-                      <a:r>
-                        <a:rPr lang="en-US">
-                          <a:effectLst/>
-                        </a:rPr>
-                        <a:t> (statement + branch)</a:t>
-                      </a:r>
-                    </a:p>
-                  </a:txBody>
-                  <a:tcPr marL="95250" marR="95250" marT="47625" marB="47625" anchor="ctr"/>
-                </a:tc>
-                <a:extLst>
-                  <a:ext uri="{0D108BD9-81ED-4DB2-BD59-A6C34878D82A}">
-                    <a16:rowId xmlns:a16="http://schemas.microsoft.com/office/drawing/2014/main" val="2662970216"/>
-                  </a:ext>
-                </a:extLst>
-              </a:tr>
-              <a:tr h="623786">
-                <a:tc>
-                  <a:txBody>
-                    <a:bodyPr/>
-                    <a:lstStyle/>
-                    <a:p>
-                      <a:pPr>
-                        <a:buNone/>
-                      </a:pPr>
-                      <a:r>
-                        <a:rPr lang="en-US">
-                          <a:effectLst/>
-                        </a:rPr>
-                        <a:t>Mutanți survived (mutmut)</a:t>
-                      </a:r>
-                    </a:p>
-                  </a:txBody>
-                  <a:tcPr marL="95250" marR="95250" marT="47625" marB="47625" anchor="ctr"/>
-                </a:tc>
-                <a:tc>
-                  <a:txBody>
-                    <a:bodyPr/>
-                    <a:lstStyle/>
-                    <a:p>
-                      <a:pPr>
-                        <a:buNone/>
-                      </a:pPr>
-                      <a:r>
-                        <a:rPr lang="en-US" b="1">
-                          <a:effectLst/>
-                        </a:rPr>
-                        <a:t>0</a:t>
-                      </a:r>
-                      <a:endParaRPr lang="en-US">
-                        <a:effectLst/>
-                      </a:endParaRPr>
-                    </a:p>
-                  </a:txBody>
-                  <a:tcPr marL="95250" marR="95250" marT="47625" marB="47625" anchor="ctr"/>
-                </a:tc>
-                <a:extLst>
-                  <a:ext uri="{0D108BD9-81ED-4DB2-BD59-A6C34878D82A}">
-                    <a16:rowId xmlns:a16="http://schemas.microsoft.com/office/drawing/2014/main" val="1779799031"/>
-                  </a:ext>
-                </a:extLst>
-              </a:tr>
-              <a:tr h="623786">
-                <a:tc>
-                  <a:txBody>
-                    <a:bodyPr/>
-                    <a:lstStyle/>
-                    <a:p>
-                      <a:pPr>
-                        <a:buNone/>
-                      </a:pPr>
-                      <a:r>
-                        <a:rPr lang="en-US">
-                          <a:effectLst/>
-                        </a:rPr>
-                        <a:t>Kill rate (Cosmic Ray)</a:t>
-                      </a:r>
-                    </a:p>
-                  </a:txBody>
-                  <a:tcPr marL="95250" marR="95250" marT="47625" marB="47625" anchor="ctr"/>
-                </a:tc>
-                <a:tc>
-                  <a:txBody>
-                    <a:bodyPr/>
-                    <a:lstStyle/>
-                    <a:p>
-                      <a:pPr>
-                        <a:buNone/>
-                      </a:pPr>
-                      <a:r>
-                        <a:rPr lang="en-US" b="1">
-                          <a:effectLst/>
-                        </a:rPr>
-                        <a:t>94.58%</a:t>
-                      </a:r>
-                      <a:endParaRPr lang="en-US">
-                        <a:effectLst/>
-                      </a:endParaRPr>
-                    </a:p>
-                  </a:txBody>
-                  <a:tcPr marL="95250" marR="95250" marT="47625" marB="47625" anchor="ctr"/>
-                </a:tc>
-                <a:extLst>
-                  <a:ext uri="{0D108BD9-81ED-4DB2-BD59-A6C34878D82A}">
-                    <a16:rowId xmlns:a16="http://schemas.microsoft.com/office/drawing/2014/main" val="56274996"/>
-                  </a:ext>
-                </a:extLst>
-              </a:tr>
-              <a:tr h="623786">
-                <a:tc>
-                  <a:txBody>
-                    <a:bodyPr/>
-                    <a:lstStyle/>
-                    <a:p>
-                      <a:pPr>
-                        <a:buNone/>
-                      </a:pPr>
-                      <a:r>
-                        <a:rPr lang="en-US">
-                          <a:effectLst/>
-                        </a:rPr>
-                        <a:t>Teste AI</a:t>
-                      </a:r>
-                    </a:p>
-                  </a:txBody>
-                  <a:tcPr marL="95250" marR="95250" marT="47625" marB="47625" anchor="ctr"/>
-                </a:tc>
-                <a:tc>
-                  <a:txBody>
-                    <a:bodyPr/>
-                    <a:lstStyle/>
-                    <a:p>
-                      <a:pPr>
-                        <a:buNone/>
-                      </a:pPr>
-                      <a:r>
-                        <a:rPr lang="en-US" b="1" dirty="0">
-                          <a:effectLst/>
-                        </a:rPr>
-                        <a:t>70 passed</a:t>
-                      </a:r>
-                      <a:endParaRPr lang="en-US" dirty="0">
-                        <a:effectLst/>
-                      </a:endParaRPr>
-                    </a:p>
-                  </a:txBody>
-                  <a:tcPr marL="95250" marR="95250" marT="47625" marB="47625" anchor="ctr"/>
-                </a:tc>
-                <a:extLst>
-                  <a:ext uri="{0D108BD9-81ED-4DB2-BD59-A6C34878D82A}">
-                    <a16:rowId xmlns:a16="http://schemas.microsoft.com/office/drawing/2014/main" val="2267445962"/>
-                  </a:ext>
-                </a:extLst>
-              </a:tr>
-            </a:tbl>
-          </a:graphicData>
-        </a:graphic>
-      </p:graphicFrame>
+          </a:blip>
+          <a:srcRect/>
+          <a:stretch>
+            <a:fillRect/>
+          </a:stretch>
+        </p:blipFill>
+        <p:spPr bwMode="auto">
+          <a:xfrm>
+            <a:off x="394088" y="4288809"/>
+            <a:ext cx="3916654" cy="1160343"/>
+          </a:xfrm>
+          <a:prstGeom prst="rect">
+            <a:avLst/>
+          </a:prstGeom>
+          <a:noFill/>
+          <a:ln>
+            <a:noFill/>
+          </a:ln>
+          <a:effectLst/>
+          <a:extLst>
+            <a:ext uri="{909E8E84-426E-40DD-AFC4-6F175D3DCCD1}">
+              <a14:hiddenFill xmlns:a14="http://schemas.microsoft.com/office/drawing/2010/main">
+                <a:solidFill>
+                  <a:schemeClr val="accent1"/>
+                </a:solidFill>
+              </a14:hiddenFill>
+            </a:ext>
+            <a:ext uri="{91240B29-F687-4F45-9708-019B960494DF}">
+              <a14:hiddenLine xmlns:a14="http://schemas.microsoft.com/office/drawing/2010/main" w="9525">
+                <a:solidFill>
+                  <a:schemeClr val="tx1"/>
+                </a:solidFill>
+                <a:miter lim="800000"/>
+                <a:headEnd/>
+                <a:tailEnd/>
+              </a14:hiddenLine>
+            </a:ext>
+            <a:ext uri="{AF507438-7753-43E0-B8FC-AC1667EBCBE1}">
+              <a14:hiddenEffects xmlns:a14="http://schemas.microsoft.com/office/drawing/2010/main">
+                <a:effectLst>
+                  <a:outerShdw dist="35921" dir="2700000" algn="ctr" rotWithShape="0">
+                    <a:schemeClr val="bg2"/>
+                  </a:outerShdw>
+                </a:effectLst>
+              </a14:hiddenEffects>
+            </a:ext>
+          </a:extLst>
+        </p:spPr>
+      </p:pic>
+      <p:pic>
+        <p:nvPicPr>
+          <p:cNvPr id="2051" name="Picture 3"/>
+          <p:cNvPicPr>
+            <a:picLocks noChangeAspect="1" noChangeArrowheads="1"/>
+          </p:cNvPicPr>
+          <p:nvPr/>
+        </p:nvPicPr>
+        <p:blipFill>
+          <a:blip r:embed="rId3">
+            <a:extLst>
+              <a:ext uri="{28A0092B-C50C-407E-A947-70E740481C1C}">
+                <a14:useLocalDpi xmlns:a14="http://schemas.microsoft.com/office/drawing/2010/main" val="0"/>
+              </a:ext>
+            </a:extLst>
+          </a:blip>
+          <a:srcRect/>
+          <a:stretch>
+            <a:fillRect/>
+          </a:stretch>
+        </p:blipFill>
+        <p:spPr bwMode="auto">
+          <a:xfrm>
+            <a:off x="5057213" y="4288810"/>
+            <a:ext cx="4569430" cy="1160343"/>
+          </a:xfrm>
+          <a:prstGeom prst="rect">
+            <a:avLst/>
+          </a:prstGeom>
+          <a:noFill/>
+          <a:ln>
+            <a:noFill/>
+          </a:ln>
+          <a:effectLst/>
+          <a:extLst>
+            <a:ext uri="{909E8E84-426E-40DD-AFC4-6F175D3DCCD1}">
+              <a14:hiddenFill xmlns:a14="http://schemas.microsoft.com/office/drawing/2010/main">
+                <a:solidFill>
+                  <a:schemeClr val="accent1"/>
+                </a:solidFill>
+              </a14:hiddenFill>
+            </a:ext>
+            <a:ext uri="{91240B29-F687-4F45-9708-019B960494DF}">
+              <a14:hiddenLine xmlns:a14="http://schemas.microsoft.com/office/drawing/2010/main" w="9525">
+                <a:solidFill>
+                  <a:schemeClr val="tx1"/>
+                </a:solidFill>
+                <a:miter lim="800000"/>
+                <a:headEnd/>
+                <a:tailEnd/>
+              </a14:hiddenLine>
+            </a:ext>
+            <a:ext uri="{AF507438-7753-43E0-B8FC-AC1667EBCBE1}">
+              <a14:hiddenEffects xmlns:a14="http://schemas.microsoft.com/office/drawing/2010/main">
+                <a:effectLst>
+                  <a:outerShdw dist="35921" dir="2700000" algn="ctr" rotWithShape="0">
+                    <a:schemeClr val="bg2"/>
+                  </a:outerShdw>
+                </a:effectLst>
+              </a14:hiddenEffects>
+            </a:ext>
+          </a:extLst>
+        </p:spPr>
+      </p:pic>
+      <p:sp>
+        <p:nvSpPr>
+          <p:cNvPr id="7" name="Content Placeholder 2"/>
+          <p:cNvSpPr txBox="1">
+            <a:spLocks/>
+          </p:cNvSpPr>
+          <p:nvPr/>
+        </p:nvSpPr>
+        <p:spPr>
+          <a:xfrm>
+            <a:off x="496724" y="5551864"/>
+            <a:ext cx="4420510" cy="957944"/>
+          </a:xfrm>
+          <a:prstGeom prst="rect">
+            <a:avLst/>
+          </a:prstGeom>
+        </p:spPr>
+        <p:txBody>
+          <a:bodyPr vert="horz" lIns="91440" tIns="45720" rIns="91440" bIns="45720" rtlCol="0" anchor="ctr">
+            <a:noAutofit/>
+          </a:bodyPr>
+          <a:lstStyle>
+            <a:lvl1pPr marL="306000" indent="-306000" algn="l" defTabSz="457200" rtl="0" eaLnBrk="1" latinLnBrk="0" hangingPunct="1">
+              <a:lnSpc>
+                <a:spcPct val="110000"/>
+              </a:lnSpc>
+              <a:spcBef>
+                <a:spcPct val="20000"/>
+              </a:spcBef>
+              <a:spcAft>
+                <a:spcPts val="600"/>
+              </a:spcAft>
+              <a:buClr>
+                <a:schemeClr val="accent1"/>
+              </a:buClr>
+              <a:buSzPct val="92000"/>
+              <a:buFont typeface="Wingdings 2" panose="05020102010507070707" pitchFamily="18" charset="2"/>
+              <a:buChar char=""/>
+              <a:defRPr sz="1700" kern="1200">
+                <a:solidFill>
+                  <a:schemeClr val="tx1">
+                    <a:lumMod val="75000"/>
+                    <a:lumOff val="25000"/>
+                  </a:schemeClr>
+                </a:solidFill>
+                <a:latin typeface="+mn-lt"/>
+                <a:ea typeface="+mn-ea"/>
+                <a:cs typeface="+mn-cs"/>
+              </a:defRPr>
+            </a:lvl1pPr>
+            <a:lvl2pPr marL="630000" indent="-306000" algn="l" defTabSz="457200" rtl="0" eaLnBrk="1" latinLnBrk="0" hangingPunct="1">
+              <a:spcBef>
+                <a:spcPct val="20000"/>
+              </a:spcBef>
+              <a:spcAft>
+                <a:spcPts val="600"/>
+              </a:spcAft>
+              <a:buClr>
+                <a:schemeClr val="accent1"/>
+              </a:buClr>
+              <a:buSzPct val="92000"/>
+              <a:buFont typeface="Wingdings 2" panose="05020102010507070707" pitchFamily="18" charset="2"/>
+              <a:buChar char=""/>
+              <a:defRPr sz="1400" kern="1200">
+                <a:solidFill>
+                  <a:schemeClr val="tx1">
+                    <a:lumMod val="75000"/>
+                    <a:lumOff val="25000"/>
+                  </a:schemeClr>
+                </a:solidFill>
+                <a:latin typeface="+mn-lt"/>
+                <a:ea typeface="+mn-ea"/>
+                <a:cs typeface="+mn-cs"/>
+              </a:defRPr>
+            </a:lvl2pPr>
+            <a:lvl3pPr marL="900000" indent="-270000" algn="l" defTabSz="457200" rtl="0" eaLnBrk="1" latinLnBrk="0" hangingPunct="1">
+              <a:spcBef>
+                <a:spcPct val="20000"/>
+              </a:spcBef>
+              <a:spcAft>
+                <a:spcPts val="600"/>
+              </a:spcAft>
+              <a:buClr>
+                <a:schemeClr val="accent1"/>
+              </a:buClr>
+              <a:buSzPct val="92000"/>
+              <a:buFont typeface="Wingdings 2" panose="05020102010507070707" pitchFamily="18" charset="2"/>
+              <a:buChar char=""/>
+              <a:defRPr sz="1300" kern="1200">
+                <a:solidFill>
+                  <a:schemeClr val="tx1">
+                    <a:lumMod val="75000"/>
+                    <a:lumOff val="25000"/>
+                  </a:schemeClr>
+                </a:solidFill>
+                <a:latin typeface="+mn-lt"/>
+                <a:ea typeface="+mn-ea"/>
+                <a:cs typeface="+mn-cs"/>
+              </a:defRPr>
+            </a:lvl3pPr>
+            <a:lvl4pPr marL="1242000" indent="-234000" algn="l" defTabSz="457200" rtl="0" eaLnBrk="1" latinLnBrk="0" hangingPunct="1">
+              <a:spcBef>
+                <a:spcPct val="20000"/>
+              </a:spcBef>
+              <a:spcAft>
+                <a:spcPts val="600"/>
+              </a:spcAft>
+              <a:buClr>
+                <a:schemeClr val="accent1"/>
+              </a:buClr>
+              <a:buSzPct val="92000"/>
+              <a:buFont typeface="Wingdings 2" panose="05020102010507070707" pitchFamily="18" charset="2"/>
+              <a:buChar char=""/>
+              <a:defRPr sz="1100" kern="1200">
+                <a:solidFill>
+                  <a:schemeClr val="tx1">
+                    <a:lumMod val="75000"/>
+                    <a:lumOff val="25000"/>
+                  </a:schemeClr>
+                </a:solidFill>
+                <a:latin typeface="+mn-lt"/>
+                <a:ea typeface="+mn-ea"/>
+                <a:cs typeface="+mn-cs"/>
+              </a:defRPr>
+            </a:lvl4pPr>
+            <a:lvl5pPr marL="1602000" indent="-234000" algn="l" defTabSz="457200" rtl="0" eaLnBrk="1" latinLnBrk="0" hangingPunct="1">
+              <a:spcBef>
+                <a:spcPct val="20000"/>
+              </a:spcBef>
+              <a:spcAft>
+                <a:spcPts val="600"/>
+              </a:spcAft>
+              <a:buClr>
+                <a:schemeClr val="accent1"/>
+              </a:buClr>
+              <a:buSzPct val="92000"/>
+              <a:buFont typeface="Wingdings 2" panose="05020102010507070707" pitchFamily="18" charset="2"/>
+              <a:buChar char=""/>
+              <a:defRPr sz="1100" kern="1200">
+                <a:solidFill>
+                  <a:schemeClr val="tx1">
+                    <a:lumMod val="75000"/>
+                    <a:lumOff val="25000"/>
+                  </a:schemeClr>
+                </a:solidFill>
+                <a:latin typeface="+mn-lt"/>
+                <a:ea typeface="+mn-ea"/>
+                <a:cs typeface="+mn-cs"/>
+              </a:defRPr>
+            </a:lvl5pPr>
+            <a:lvl6pPr marL="1900000" indent="-228600" algn="l" defTabSz="457200" rtl="0" eaLnBrk="1" latinLnBrk="0" hangingPunct="1">
+              <a:spcBef>
+                <a:spcPct val="20000"/>
+              </a:spcBef>
+              <a:spcAft>
+                <a:spcPts val="600"/>
+              </a:spcAft>
+              <a:buClr>
+                <a:schemeClr val="accent2"/>
+              </a:buClr>
+              <a:buSzPct val="92000"/>
+              <a:buFont typeface="Wingdings 2" panose="05020102010507070707" pitchFamily="18" charset="2"/>
+              <a:buChar char=""/>
+              <a:defRPr sz="1200" kern="1200">
+                <a:solidFill>
+                  <a:schemeClr val="tx2"/>
+                </a:solidFill>
+                <a:latin typeface="+mn-lt"/>
+                <a:ea typeface="+mn-ea"/>
+                <a:cs typeface="+mn-cs"/>
+              </a:defRPr>
+            </a:lvl6pPr>
+            <a:lvl7pPr marL="2200000" indent="-228600" algn="l" defTabSz="457200" rtl="0" eaLnBrk="1" latinLnBrk="0" hangingPunct="1">
+              <a:spcBef>
+                <a:spcPct val="20000"/>
+              </a:spcBef>
+              <a:spcAft>
+                <a:spcPts val="600"/>
+              </a:spcAft>
+              <a:buClr>
+                <a:schemeClr val="accent2"/>
+              </a:buClr>
+              <a:buSzPct val="92000"/>
+              <a:buFont typeface="Wingdings 2" panose="05020102010507070707" pitchFamily="18" charset="2"/>
+              <a:buChar char=""/>
+              <a:defRPr sz="1200" kern="1200">
+                <a:solidFill>
+                  <a:schemeClr val="tx2"/>
+                </a:solidFill>
+                <a:latin typeface="+mn-lt"/>
+                <a:ea typeface="+mn-ea"/>
+                <a:cs typeface="+mn-cs"/>
+              </a:defRPr>
+            </a:lvl7pPr>
+            <a:lvl8pPr marL="2500000" indent="-228600" algn="l" defTabSz="457200" rtl="0" eaLnBrk="1" latinLnBrk="0" hangingPunct="1">
+              <a:spcBef>
+                <a:spcPct val="20000"/>
+              </a:spcBef>
+              <a:spcAft>
+                <a:spcPts val="600"/>
+              </a:spcAft>
+              <a:buClr>
+                <a:schemeClr val="accent2"/>
+              </a:buClr>
+              <a:buSzPct val="92000"/>
+              <a:buFont typeface="Wingdings 2" panose="05020102010507070707" pitchFamily="18" charset="2"/>
+              <a:buChar char=""/>
+              <a:defRPr sz="1200" kern="1200">
+                <a:solidFill>
+                  <a:schemeClr val="tx2"/>
+                </a:solidFill>
+                <a:latin typeface="+mn-lt"/>
+                <a:ea typeface="+mn-ea"/>
+                <a:cs typeface="+mn-cs"/>
+              </a:defRPr>
+            </a:lvl8pPr>
+            <a:lvl9pPr marL="2800000" indent="-228600" algn="l" defTabSz="457200" rtl="0" eaLnBrk="1" latinLnBrk="0" hangingPunct="1">
+              <a:spcBef>
+                <a:spcPct val="20000"/>
+              </a:spcBef>
+              <a:spcAft>
+                <a:spcPts val="600"/>
+              </a:spcAft>
+              <a:buClr>
+                <a:schemeClr val="accent2"/>
+              </a:buClr>
+              <a:buSzPct val="92000"/>
+              <a:buFont typeface="Wingdings 2" panose="05020102010507070707" pitchFamily="18" charset="2"/>
+              <a:buChar char=""/>
+              <a:defRPr sz="1200" kern="1200">
+                <a:solidFill>
+                  <a:schemeClr val="tx2"/>
+                </a:solidFill>
+                <a:latin typeface="+mn-lt"/>
+                <a:ea typeface="+mn-ea"/>
+                <a:cs typeface="+mn-cs"/>
+              </a:defRPr>
+            </a:lvl9pPr>
+          </a:lstStyle>
+          <a:p>
+            <a:pPr marL="0" indent="0">
+              <a:buNone/>
+            </a:pPr>
+            <a:r>
+              <a:rPr lang="en-US" sz="1400" b="1" dirty="0" err="1" smtClean="0">
+                <a:latin typeface="Tahoma" pitchFamily="34" charset="0"/>
+                <a:ea typeface="Tahoma" pitchFamily="34" charset="0"/>
+                <a:cs typeface="Tahoma" pitchFamily="34" charset="0"/>
+              </a:rPr>
+              <a:t>Exemplu</a:t>
+            </a:r>
+            <a:r>
+              <a:rPr lang="en-US" sz="1400" b="1" dirty="0" smtClean="0">
+                <a:latin typeface="Tahoma" pitchFamily="34" charset="0"/>
+                <a:ea typeface="Tahoma" pitchFamily="34" charset="0"/>
+                <a:cs typeface="Tahoma" pitchFamily="34" charset="0"/>
+              </a:rPr>
+              <a:t>:</a:t>
+            </a:r>
+          </a:p>
+          <a:p>
+            <a:pPr marL="0" indent="0">
+              <a:buNone/>
+            </a:pPr>
+            <a:r>
+              <a:rPr lang="en-US" sz="1400" b="1" dirty="0" smtClean="0">
+                <a:latin typeface="Tahoma" pitchFamily="34" charset="0"/>
+                <a:ea typeface="Tahoma" pitchFamily="34" charset="0"/>
+                <a:cs typeface="Tahoma" pitchFamily="34" charset="0"/>
+              </a:rPr>
+              <a:t> </a:t>
+            </a:r>
+            <a:br>
+              <a:rPr lang="en-US" sz="1400" b="1" dirty="0" smtClean="0">
+                <a:latin typeface="Tahoma" pitchFamily="34" charset="0"/>
+                <a:ea typeface="Tahoma" pitchFamily="34" charset="0"/>
+                <a:cs typeface="Tahoma" pitchFamily="34" charset="0"/>
+              </a:rPr>
+            </a:br>
+            <a:r>
+              <a:rPr lang="en-US" sz="1400" b="1" dirty="0" smtClean="0">
+                <a:latin typeface="Tahoma" pitchFamily="34" charset="0"/>
+                <a:ea typeface="Tahoma" pitchFamily="34" charset="0"/>
+                <a:cs typeface="Tahoma" pitchFamily="34" charset="0"/>
+              </a:rPr>
+              <a:t>Input: </a:t>
+            </a:r>
+            <a:r>
+              <a:rPr lang="en-US" sz="1400" dirty="0"/>
+              <a:t>["attended", "attended", "cancelled", "</a:t>
+            </a:r>
+            <a:r>
+              <a:rPr lang="en-US" sz="1400" dirty="0" err="1"/>
+              <a:t>no_show</a:t>
+            </a:r>
+            <a:r>
+              <a:rPr lang="en-US" sz="1400" dirty="0"/>
+              <a:t>"], </a:t>
+            </a:r>
+            <a:r>
+              <a:rPr lang="en-US" sz="1400" dirty="0" err="1"/>
+              <a:t>package_sessions</a:t>
+            </a:r>
+            <a:r>
+              <a:rPr lang="en-US" sz="1400" dirty="0"/>
+              <a:t>=5, </a:t>
+            </a:r>
+            <a:r>
+              <a:rPr lang="en-US" sz="1400" dirty="0" err="1"/>
+              <a:t>has_membership</a:t>
+            </a:r>
+            <a:r>
+              <a:rPr lang="en-US" sz="1400" dirty="0"/>
+              <a:t>=True</a:t>
+            </a:r>
+            <a:endParaRPr lang="en-US" sz="1400" b="1" dirty="0">
+              <a:latin typeface="Tahoma" pitchFamily="34" charset="0"/>
+              <a:ea typeface="Tahoma" pitchFamily="34" charset="0"/>
+              <a:cs typeface="Tahoma" pitchFamily="34" charset="0"/>
+            </a:endParaRPr>
+          </a:p>
+        </p:txBody>
+      </p:sp>
+      <p:sp>
+        <p:nvSpPr>
+          <p:cNvPr id="9" name="Content Placeholder 2"/>
+          <p:cNvSpPr txBox="1">
+            <a:spLocks/>
+          </p:cNvSpPr>
+          <p:nvPr/>
+        </p:nvSpPr>
+        <p:spPr>
+          <a:xfrm>
+            <a:off x="5057213" y="5847791"/>
+            <a:ext cx="6857999" cy="957944"/>
+          </a:xfrm>
+          <a:prstGeom prst="rect">
+            <a:avLst/>
+          </a:prstGeom>
+        </p:spPr>
+        <p:txBody>
+          <a:bodyPr vert="horz" lIns="91440" tIns="45720" rIns="91440" bIns="45720" rtlCol="0" anchor="ctr">
+            <a:normAutofit/>
+          </a:bodyPr>
+          <a:lstStyle>
+            <a:lvl1pPr marL="306000" indent="-306000" algn="l" defTabSz="457200" rtl="0" eaLnBrk="1" latinLnBrk="0" hangingPunct="1">
+              <a:lnSpc>
+                <a:spcPct val="110000"/>
+              </a:lnSpc>
+              <a:spcBef>
+                <a:spcPct val="20000"/>
+              </a:spcBef>
+              <a:spcAft>
+                <a:spcPts val="600"/>
+              </a:spcAft>
+              <a:buClr>
+                <a:schemeClr val="accent1"/>
+              </a:buClr>
+              <a:buSzPct val="92000"/>
+              <a:buFont typeface="Wingdings 2" panose="05020102010507070707" pitchFamily="18" charset="2"/>
+              <a:buChar char=""/>
+              <a:defRPr sz="1700" kern="1200">
+                <a:solidFill>
+                  <a:schemeClr val="tx1">
+                    <a:lumMod val="75000"/>
+                    <a:lumOff val="25000"/>
+                  </a:schemeClr>
+                </a:solidFill>
+                <a:latin typeface="+mn-lt"/>
+                <a:ea typeface="+mn-ea"/>
+                <a:cs typeface="+mn-cs"/>
+              </a:defRPr>
+            </a:lvl1pPr>
+            <a:lvl2pPr marL="630000" indent="-306000" algn="l" defTabSz="457200" rtl="0" eaLnBrk="1" latinLnBrk="0" hangingPunct="1">
+              <a:spcBef>
+                <a:spcPct val="20000"/>
+              </a:spcBef>
+              <a:spcAft>
+                <a:spcPts val="600"/>
+              </a:spcAft>
+              <a:buClr>
+                <a:schemeClr val="accent1"/>
+              </a:buClr>
+              <a:buSzPct val="92000"/>
+              <a:buFont typeface="Wingdings 2" panose="05020102010507070707" pitchFamily="18" charset="2"/>
+              <a:buChar char=""/>
+              <a:defRPr sz="1400" kern="1200">
+                <a:solidFill>
+                  <a:schemeClr val="tx1">
+                    <a:lumMod val="75000"/>
+                    <a:lumOff val="25000"/>
+                  </a:schemeClr>
+                </a:solidFill>
+                <a:latin typeface="+mn-lt"/>
+                <a:ea typeface="+mn-ea"/>
+                <a:cs typeface="+mn-cs"/>
+              </a:defRPr>
+            </a:lvl2pPr>
+            <a:lvl3pPr marL="900000" indent="-270000" algn="l" defTabSz="457200" rtl="0" eaLnBrk="1" latinLnBrk="0" hangingPunct="1">
+              <a:spcBef>
+                <a:spcPct val="20000"/>
+              </a:spcBef>
+              <a:spcAft>
+                <a:spcPts val="600"/>
+              </a:spcAft>
+              <a:buClr>
+                <a:schemeClr val="accent1"/>
+              </a:buClr>
+              <a:buSzPct val="92000"/>
+              <a:buFont typeface="Wingdings 2" panose="05020102010507070707" pitchFamily="18" charset="2"/>
+              <a:buChar char=""/>
+              <a:defRPr sz="1300" kern="1200">
+                <a:solidFill>
+                  <a:schemeClr val="tx1">
+                    <a:lumMod val="75000"/>
+                    <a:lumOff val="25000"/>
+                  </a:schemeClr>
+                </a:solidFill>
+                <a:latin typeface="+mn-lt"/>
+                <a:ea typeface="+mn-ea"/>
+                <a:cs typeface="+mn-cs"/>
+              </a:defRPr>
+            </a:lvl3pPr>
+            <a:lvl4pPr marL="1242000" indent="-234000" algn="l" defTabSz="457200" rtl="0" eaLnBrk="1" latinLnBrk="0" hangingPunct="1">
+              <a:spcBef>
+                <a:spcPct val="20000"/>
+              </a:spcBef>
+              <a:spcAft>
+                <a:spcPts val="600"/>
+              </a:spcAft>
+              <a:buClr>
+                <a:schemeClr val="accent1"/>
+              </a:buClr>
+              <a:buSzPct val="92000"/>
+              <a:buFont typeface="Wingdings 2" panose="05020102010507070707" pitchFamily="18" charset="2"/>
+              <a:buChar char=""/>
+              <a:defRPr sz="1100" kern="1200">
+                <a:solidFill>
+                  <a:schemeClr val="tx1">
+                    <a:lumMod val="75000"/>
+                    <a:lumOff val="25000"/>
+                  </a:schemeClr>
+                </a:solidFill>
+                <a:latin typeface="+mn-lt"/>
+                <a:ea typeface="+mn-ea"/>
+                <a:cs typeface="+mn-cs"/>
+              </a:defRPr>
+            </a:lvl4pPr>
+            <a:lvl5pPr marL="1602000" indent="-234000" algn="l" defTabSz="457200" rtl="0" eaLnBrk="1" latinLnBrk="0" hangingPunct="1">
+              <a:spcBef>
+                <a:spcPct val="20000"/>
+              </a:spcBef>
+              <a:spcAft>
+                <a:spcPts val="600"/>
+              </a:spcAft>
+              <a:buClr>
+                <a:schemeClr val="accent1"/>
+              </a:buClr>
+              <a:buSzPct val="92000"/>
+              <a:buFont typeface="Wingdings 2" panose="05020102010507070707" pitchFamily="18" charset="2"/>
+              <a:buChar char=""/>
+              <a:defRPr sz="1100" kern="1200">
+                <a:solidFill>
+                  <a:schemeClr val="tx1">
+                    <a:lumMod val="75000"/>
+                    <a:lumOff val="25000"/>
+                  </a:schemeClr>
+                </a:solidFill>
+                <a:latin typeface="+mn-lt"/>
+                <a:ea typeface="+mn-ea"/>
+                <a:cs typeface="+mn-cs"/>
+              </a:defRPr>
+            </a:lvl5pPr>
+            <a:lvl6pPr marL="1900000" indent="-228600" algn="l" defTabSz="457200" rtl="0" eaLnBrk="1" latinLnBrk="0" hangingPunct="1">
+              <a:spcBef>
+                <a:spcPct val="20000"/>
+              </a:spcBef>
+              <a:spcAft>
+                <a:spcPts val="600"/>
+              </a:spcAft>
+              <a:buClr>
+                <a:schemeClr val="accent2"/>
+              </a:buClr>
+              <a:buSzPct val="92000"/>
+              <a:buFont typeface="Wingdings 2" panose="05020102010507070707" pitchFamily="18" charset="2"/>
+              <a:buChar char=""/>
+              <a:defRPr sz="1200" kern="1200">
+                <a:solidFill>
+                  <a:schemeClr val="tx2"/>
+                </a:solidFill>
+                <a:latin typeface="+mn-lt"/>
+                <a:ea typeface="+mn-ea"/>
+                <a:cs typeface="+mn-cs"/>
+              </a:defRPr>
+            </a:lvl6pPr>
+            <a:lvl7pPr marL="2200000" indent="-228600" algn="l" defTabSz="457200" rtl="0" eaLnBrk="1" latinLnBrk="0" hangingPunct="1">
+              <a:spcBef>
+                <a:spcPct val="20000"/>
+              </a:spcBef>
+              <a:spcAft>
+                <a:spcPts val="600"/>
+              </a:spcAft>
+              <a:buClr>
+                <a:schemeClr val="accent2"/>
+              </a:buClr>
+              <a:buSzPct val="92000"/>
+              <a:buFont typeface="Wingdings 2" panose="05020102010507070707" pitchFamily="18" charset="2"/>
+              <a:buChar char=""/>
+              <a:defRPr sz="1200" kern="1200">
+                <a:solidFill>
+                  <a:schemeClr val="tx2"/>
+                </a:solidFill>
+                <a:latin typeface="+mn-lt"/>
+                <a:ea typeface="+mn-ea"/>
+                <a:cs typeface="+mn-cs"/>
+              </a:defRPr>
+            </a:lvl7pPr>
+            <a:lvl8pPr marL="2500000" indent="-228600" algn="l" defTabSz="457200" rtl="0" eaLnBrk="1" latinLnBrk="0" hangingPunct="1">
+              <a:spcBef>
+                <a:spcPct val="20000"/>
+              </a:spcBef>
+              <a:spcAft>
+                <a:spcPts val="600"/>
+              </a:spcAft>
+              <a:buClr>
+                <a:schemeClr val="accent2"/>
+              </a:buClr>
+              <a:buSzPct val="92000"/>
+              <a:buFont typeface="Wingdings 2" panose="05020102010507070707" pitchFamily="18" charset="2"/>
+              <a:buChar char=""/>
+              <a:defRPr sz="1200" kern="1200">
+                <a:solidFill>
+                  <a:schemeClr val="tx2"/>
+                </a:solidFill>
+                <a:latin typeface="+mn-lt"/>
+                <a:ea typeface="+mn-ea"/>
+                <a:cs typeface="+mn-cs"/>
+              </a:defRPr>
+            </a:lvl8pPr>
+            <a:lvl9pPr marL="2800000" indent="-228600" algn="l" defTabSz="457200" rtl="0" eaLnBrk="1" latinLnBrk="0" hangingPunct="1">
+              <a:spcBef>
+                <a:spcPct val="20000"/>
+              </a:spcBef>
+              <a:spcAft>
+                <a:spcPts val="600"/>
+              </a:spcAft>
+              <a:buClr>
+                <a:schemeClr val="accent2"/>
+              </a:buClr>
+              <a:buSzPct val="92000"/>
+              <a:buFont typeface="Wingdings 2" panose="05020102010507070707" pitchFamily="18" charset="2"/>
+              <a:buChar char=""/>
+              <a:defRPr sz="1200" kern="1200">
+                <a:solidFill>
+                  <a:schemeClr val="tx2"/>
+                </a:solidFill>
+                <a:latin typeface="+mn-lt"/>
+                <a:ea typeface="+mn-ea"/>
+                <a:cs typeface="+mn-cs"/>
+              </a:defRPr>
+            </a:lvl9pPr>
+          </a:lstStyle>
+          <a:p>
+            <a:pPr marL="0" indent="0">
+              <a:buNone/>
+            </a:pPr>
+            <a:r>
+              <a:rPr lang="en-US" sz="1400" b="1" dirty="0" smtClean="0">
+                <a:latin typeface="Tahoma" pitchFamily="34" charset="0"/>
+                <a:ea typeface="Tahoma" pitchFamily="34" charset="0"/>
+                <a:cs typeface="Tahoma" pitchFamily="34" charset="0"/>
+              </a:rPr>
+              <a:t>Output: </a:t>
+            </a:r>
+            <a:r>
+              <a:rPr lang="en-US" sz="1400" dirty="0"/>
+              <a:t>attended=2 </a:t>
+            </a:r>
+            <a:r>
+              <a:rPr lang="en-US" sz="1400" dirty="0" smtClean="0"/>
+              <a:t>; </a:t>
+            </a:r>
+            <a:r>
+              <a:rPr lang="en-US" sz="1400" dirty="0" err="1"/>
+              <a:t>no_show</a:t>
+            </a:r>
+            <a:r>
+              <a:rPr lang="en-US" sz="1400" dirty="0"/>
+              <a:t>=1 </a:t>
+            </a:r>
+            <a:r>
+              <a:rPr lang="en-US" sz="1400" dirty="0" smtClean="0"/>
+              <a:t>; </a:t>
+            </a:r>
+            <a:r>
+              <a:rPr lang="en-US" sz="1400" dirty="0"/>
+              <a:t>cancelled=1 </a:t>
+            </a:r>
+            <a:r>
+              <a:rPr lang="en-US" sz="1400" dirty="0" smtClean="0"/>
+              <a:t>; </a:t>
+            </a:r>
+            <a:r>
+              <a:rPr lang="en-US" sz="1400" dirty="0" err="1" smtClean="0"/>
+              <a:t>used_sessions</a:t>
+            </a:r>
+            <a:r>
+              <a:rPr lang="en-US" sz="1400" dirty="0" smtClean="0"/>
+              <a:t>=3 ; remaining=2 ; </a:t>
+            </a:r>
+            <a:r>
+              <a:rPr lang="en-US" sz="1400" dirty="0" err="1"/>
+              <a:t>total_cost</a:t>
+            </a:r>
+            <a:r>
+              <a:rPr lang="en-US" sz="1400" dirty="0"/>
+              <a:t> = 5 × 50 × 0.80 = 200.0 </a:t>
+            </a:r>
+            <a:r>
+              <a:rPr lang="en-US" sz="1400" dirty="0" smtClean="0"/>
+              <a:t>; status </a:t>
+            </a:r>
+            <a:r>
+              <a:rPr lang="en-US" sz="1400" dirty="0"/>
+              <a:t>= "active"</a:t>
+            </a:r>
+            <a:endParaRPr lang="en-US" sz="1400" b="1" dirty="0">
+              <a:latin typeface="Tahoma" pitchFamily="34" charset="0"/>
+              <a:ea typeface="Tahoma" pitchFamily="34" charset="0"/>
+              <a:cs typeface="Tahoma" pitchFamily="34" charset="0"/>
+            </a:endParaRPr>
+          </a:p>
+        </p:txBody>
+      </p:sp>
     </p:spTree>
     <p:extLst>
       <p:ext uri="{BB962C8B-B14F-4D97-AF65-F5344CB8AC3E}">
-        <p14:creationId xmlns:p14="http://schemas.microsoft.com/office/powerpoint/2010/main" val="263784652"/>
+        <p14:creationId xmlns:p14="http://schemas.microsoft.com/office/powerpoint/2010/main" val="3924051073"/>
       </p:ext>
     </p:extLst>
   </p:cSld>
@@ -4648,13 +6758,7 @@
       </p:grpSpPr>
       <p:sp>
         <p:nvSpPr>
-          <p:cNvPr id="2" name="Title 1">
-            <a:extLst>
-              <a:ext uri="{FF2B5EF4-FFF2-40B4-BE49-F238E27FC236}">
-                <a16:creationId xmlns:a16="http://schemas.microsoft.com/office/drawing/2014/main" id="{10DA9274-2633-402D-9E55-53CFF5E84A67}"/>
-              </a:ext>
-            </a:extLst>
-          </p:cNvPr>
+          <p:cNvPr id="2" name="Title 1"/>
           <p:cNvSpPr>
             <a:spLocks noGrp="1"/>
           </p:cNvSpPr>
@@ -4664,1402 +6768,513 @@
         </p:nvSpPr>
         <p:spPr>
           <a:xfrm>
-            <a:off x="581193" y="729658"/>
-            <a:ext cx="11029616" cy="466096"/>
-          </a:xfrm>
-        </p:spPr>
-        <p:txBody>
-          <a:bodyPr>
-            <a:normAutofit fontScale="90000"/>
-          </a:bodyPr>
-          <a:lstStyle/>
-          <a:p>
-            <a:r>
-              <a:rPr lang="en-US" b="1" dirty="0"/>
-              <a:t>Cerin</a:t>
-            </a:r>
-            <a:r>
-              <a:rPr lang="ro-RO" b="1" dirty="0"/>
-              <a:t>t</a:t>
-            </a:r>
-            <a:r>
-              <a:rPr lang="en-US" b="1" dirty="0" err="1"/>
-              <a:t>ele</a:t>
-            </a:r>
-            <a:r>
-              <a:rPr lang="en-US" b="1" dirty="0"/>
-              <a:t> </a:t>
-            </a:r>
-            <a:r>
-              <a:rPr lang="en-US" b="1" dirty="0" err="1"/>
-              <a:t>temei</a:t>
-            </a:r>
-            <a:r>
-              <a:rPr lang="en-US" b="1" dirty="0"/>
-              <a:t> T1 </a:t>
-            </a:r>
-            <a:r>
-              <a:rPr lang="ro-RO" b="1" dirty="0"/>
-              <a:t>s</a:t>
-            </a:r>
-            <a:r>
-              <a:rPr lang="en-US" b="1" dirty="0" err="1"/>
-              <a:t>i</a:t>
-            </a:r>
-            <a:r>
-              <a:rPr lang="en-US" b="1" dirty="0"/>
-              <a:t> </a:t>
-            </a:r>
-            <a:r>
-              <a:rPr lang="ro-RO" b="1" dirty="0"/>
-              <a:t>corespondenta in cod</a:t>
-            </a:r>
-            <a:endParaRPr lang="en-US" dirty="0"/>
-          </a:p>
-        </p:txBody>
-      </p:sp>
-      <p:graphicFrame>
-        <p:nvGraphicFramePr>
-          <p:cNvPr id="6" name="Content Placeholder 5">
-            <a:extLst>
-              <a:ext uri="{FF2B5EF4-FFF2-40B4-BE49-F238E27FC236}">
-                <a16:creationId xmlns:a16="http://schemas.microsoft.com/office/drawing/2014/main" id="{61427154-225F-6860-C801-BB4DC047DA96}"/>
-              </a:ext>
-            </a:extLst>
-          </p:cNvPr>
-          <p:cNvGraphicFramePr>
-            <a:graphicFrameLocks noGrp="1"/>
-          </p:cNvGraphicFramePr>
-          <p:nvPr>
-            <p:ph sz="half" idx="1"/>
-            <p:extLst>
-              <p:ext uri="{D42A27DB-BD31-4B8C-83A1-F6EECF244321}">
-                <p14:modId xmlns:p14="http://schemas.microsoft.com/office/powerpoint/2010/main" val="2500580020"/>
-              </p:ext>
-            </p:extLst>
-          </p:nvPr>
-        </p:nvGraphicFramePr>
-        <p:xfrm>
-          <a:off x="581192" y="1383290"/>
-          <a:ext cx="5793400" cy="2404696"/>
-        </p:xfrm>
-        <a:graphic>
-          <a:graphicData uri="http://schemas.openxmlformats.org/drawingml/2006/table">
-            <a:tbl>
-              <a:tblPr firstRow="1" bandRow="1">
-                <a:tableStyleId>{93296810-A885-4BE3-A3E7-6D5BEEA58F35}</a:tableStyleId>
-              </a:tblPr>
-              <a:tblGrid>
-                <a:gridCol w="2896700">
-                  <a:extLst>
-                    <a:ext uri="{9D8B030D-6E8A-4147-A177-3AD203B41FA5}">
-                      <a16:colId xmlns:a16="http://schemas.microsoft.com/office/drawing/2014/main" val="4109069834"/>
-                    </a:ext>
-                  </a:extLst>
-                </a:gridCol>
-                <a:gridCol w="2896700">
-                  <a:extLst>
-                    <a:ext uri="{9D8B030D-6E8A-4147-A177-3AD203B41FA5}">
-                      <a16:colId xmlns:a16="http://schemas.microsoft.com/office/drawing/2014/main" val="4130365598"/>
-                    </a:ext>
-                  </a:extLst>
-                </a:gridCol>
-              </a:tblGrid>
-              <a:tr h="297442">
-                <a:tc>
-                  <a:txBody>
-                    <a:bodyPr/>
-                    <a:lstStyle/>
-                    <a:p>
-                      <a:r>
-                        <a:rPr lang="en-US" dirty="0" err="1"/>
-                        <a:t>Strategie</a:t>
-                      </a:r>
-                      <a:r>
-                        <a:rPr lang="en-US" dirty="0"/>
-                        <a:t> </a:t>
-                      </a:r>
-                      <a:r>
-                        <a:rPr lang="en-US" dirty="0" err="1"/>
-                        <a:t>cerut</a:t>
-                      </a:r>
-                      <a:r>
-                        <a:rPr lang="ro-RO" dirty="0"/>
-                        <a:t>ă</a:t>
-                      </a:r>
-                      <a:endParaRPr lang="en-US" dirty="0"/>
-                    </a:p>
-                  </a:txBody>
-                  <a:tcPr/>
-                </a:tc>
-                <a:tc>
-                  <a:txBody>
-                    <a:bodyPr/>
-                    <a:lstStyle/>
-                    <a:p>
-                      <a:r>
-                        <a:rPr lang="en-US" sz="1800" b="1" i="0" kern="1200" dirty="0" err="1">
-                          <a:solidFill>
-                            <a:schemeClr val="lt1"/>
-                          </a:solidFill>
-                          <a:effectLst/>
-                          <a:latin typeface="+mn-lt"/>
-                          <a:ea typeface="+mn-ea"/>
-                          <a:cs typeface="+mn-cs"/>
-                        </a:rPr>
-                        <a:t>Fișier</a:t>
-                      </a:r>
-                      <a:r>
-                        <a:rPr lang="en-US" sz="1800" b="1" i="0" kern="1200" dirty="0">
-                          <a:solidFill>
-                            <a:schemeClr val="lt1"/>
-                          </a:solidFill>
-                          <a:effectLst/>
-                          <a:latin typeface="+mn-lt"/>
-                          <a:ea typeface="+mn-ea"/>
-                          <a:cs typeface="+mn-cs"/>
-                        </a:rPr>
-                        <a:t> de teste</a:t>
-                      </a:r>
-                      <a:endParaRPr lang="en-US" dirty="0"/>
-                    </a:p>
-                  </a:txBody>
-                  <a:tcPr/>
-                </a:tc>
-                <a:extLst>
-                  <a:ext uri="{0D108BD9-81ED-4DB2-BD59-A6C34878D82A}">
-                    <a16:rowId xmlns:a16="http://schemas.microsoft.com/office/drawing/2014/main" val="2239755292"/>
-                  </a:ext>
-                </a:extLst>
-              </a:tr>
-              <a:tr h="279229">
-                <a:tc>
-                  <a:txBody>
-                    <a:bodyPr/>
-                    <a:lstStyle/>
-                    <a:p>
-                      <a:r>
-                        <a:rPr lang="es-ES" sz="1200" b="0" i="0" kern="1200" dirty="0" err="1">
-                          <a:solidFill>
-                            <a:schemeClr val="tx1"/>
-                          </a:solidFill>
-                          <a:effectLst/>
-                          <a:latin typeface="+mn-lt"/>
-                          <a:ea typeface="+mn-ea"/>
-                          <a:cs typeface="+mn-cs"/>
-                        </a:rPr>
-                        <a:t>Partiționare</a:t>
-                      </a:r>
-                      <a:r>
-                        <a:rPr lang="es-ES" sz="1200" b="0" i="0" kern="1200" dirty="0">
-                          <a:solidFill>
-                            <a:schemeClr val="tx1"/>
-                          </a:solidFill>
-                          <a:effectLst/>
-                          <a:latin typeface="+mn-lt"/>
-                          <a:ea typeface="+mn-ea"/>
-                          <a:cs typeface="+mn-cs"/>
-                        </a:rPr>
-                        <a:t> </a:t>
-                      </a:r>
-                      <a:r>
-                        <a:rPr lang="es-ES" sz="1200" b="0" i="0" kern="1200" dirty="0" err="1">
-                          <a:solidFill>
-                            <a:schemeClr val="tx1"/>
-                          </a:solidFill>
-                          <a:effectLst/>
-                          <a:latin typeface="+mn-lt"/>
-                          <a:ea typeface="+mn-ea"/>
-                          <a:cs typeface="+mn-cs"/>
-                        </a:rPr>
-                        <a:t>în</a:t>
-                      </a:r>
-                      <a:r>
-                        <a:rPr lang="es-ES" sz="1200" b="0" i="0" kern="1200" dirty="0">
-                          <a:solidFill>
-                            <a:schemeClr val="tx1"/>
-                          </a:solidFill>
-                          <a:effectLst/>
-                          <a:latin typeface="+mn-lt"/>
-                          <a:ea typeface="+mn-ea"/>
-                          <a:cs typeface="+mn-cs"/>
-                        </a:rPr>
-                        <a:t> clase de </a:t>
-                      </a:r>
-                      <a:r>
-                        <a:rPr lang="es-ES" sz="1200" b="0" i="0" kern="1200" dirty="0" err="1">
-                          <a:solidFill>
-                            <a:schemeClr val="tx1"/>
-                          </a:solidFill>
-                          <a:effectLst/>
-                          <a:latin typeface="+mn-lt"/>
-                          <a:ea typeface="+mn-ea"/>
-                          <a:cs typeface="+mn-cs"/>
-                        </a:rPr>
-                        <a:t>echivalență</a:t>
-                      </a:r>
-                      <a:endParaRPr lang="en-US" sz="1200" dirty="0">
-                        <a:solidFill>
-                          <a:schemeClr val="tx1"/>
-                        </a:solidFill>
-                      </a:endParaRPr>
-                    </a:p>
-                  </a:txBody>
-                  <a:tcPr/>
-                </a:tc>
-                <a:tc>
-                  <a:txBody>
-                    <a:bodyPr/>
-                    <a:lstStyle/>
-                    <a:p>
-                      <a:pPr>
-                        <a:buNone/>
-                      </a:pPr>
-                      <a:r>
-                        <a:rPr lang="en-US" sz="1200" dirty="0">
-                          <a:solidFill>
-                            <a:schemeClr val="tx1"/>
-                          </a:solidFill>
-                          <a:effectLst/>
-                          <a:latin typeface="Consolas" panose="020B0609020204030204" pitchFamily="49" charset="0"/>
-                        </a:rPr>
-                        <a:t>test_equivalence_partitioning.py</a:t>
-                      </a:r>
-                      <a:endParaRPr lang="en-US" sz="1200" dirty="0">
-                        <a:solidFill>
-                          <a:schemeClr val="tx1"/>
-                        </a:solidFill>
-                        <a:effectLst/>
-                      </a:endParaRPr>
-                    </a:p>
-                  </a:txBody>
-                  <a:tcPr marL="95250" marR="95250" marT="47625" marB="47625" anchor="ctr"/>
-                </a:tc>
-                <a:extLst>
-                  <a:ext uri="{0D108BD9-81ED-4DB2-BD59-A6C34878D82A}">
-                    <a16:rowId xmlns:a16="http://schemas.microsoft.com/office/drawing/2014/main" val="704993225"/>
-                  </a:ext>
-                </a:extLst>
-              </a:tr>
-              <a:tr h="279229">
-                <a:tc>
-                  <a:txBody>
-                    <a:bodyPr/>
-                    <a:lstStyle/>
-                    <a:p>
-                      <a:pPr>
-                        <a:buNone/>
-                      </a:pPr>
-                      <a:r>
-                        <a:rPr lang="en-US" sz="1200" dirty="0">
-                          <a:solidFill>
-                            <a:schemeClr val="tx1"/>
-                          </a:solidFill>
-                          <a:effectLst/>
-                        </a:rPr>
-                        <a:t>Analiza </a:t>
-                      </a:r>
-                      <a:r>
-                        <a:rPr lang="en-US" sz="1200" dirty="0" err="1">
-                          <a:solidFill>
-                            <a:schemeClr val="tx1"/>
-                          </a:solidFill>
-                          <a:effectLst/>
-                        </a:rPr>
-                        <a:t>valorilor</a:t>
-                      </a:r>
-                      <a:r>
-                        <a:rPr lang="en-US" sz="1200" dirty="0">
-                          <a:solidFill>
-                            <a:schemeClr val="tx1"/>
-                          </a:solidFill>
-                          <a:effectLst/>
-                        </a:rPr>
-                        <a:t> de </a:t>
-                      </a:r>
-                      <a:r>
-                        <a:rPr lang="en-US" sz="1200" dirty="0" err="1">
-                          <a:solidFill>
-                            <a:schemeClr val="tx1"/>
-                          </a:solidFill>
-                          <a:effectLst/>
-                        </a:rPr>
-                        <a:t>frontieră</a:t>
-                      </a:r>
-                      <a:endParaRPr lang="en-US" sz="1200" dirty="0">
-                        <a:solidFill>
-                          <a:schemeClr val="tx1"/>
-                        </a:solidFill>
-                        <a:effectLst/>
-                      </a:endParaRPr>
-                    </a:p>
-                  </a:txBody>
-                  <a:tcPr marL="95250" marR="95250" marT="47625" marB="47625" anchor="ctr"/>
-                </a:tc>
-                <a:tc>
-                  <a:txBody>
-                    <a:bodyPr/>
-                    <a:lstStyle/>
-                    <a:p>
-                      <a:pPr>
-                        <a:buNone/>
-                      </a:pPr>
-                      <a:r>
-                        <a:rPr lang="en-US" sz="1200">
-                          <a:solidFill>
-                            <a:schemeClr val="tx1"/>
-                          </a:solidFill>
-                          <a:effectLst/>
-                          <a:latin typeface="Consolas" panose="020B0609020204030204" pitchFamily="49" charset="0"/>
-                        </a:rPr>
-                        <a:t>test_boundary_value_analysis.py</a:t>
-                      </a:r>
-                      <a:endParaRPr lang="en-US" sz="1200">
-                        <a:solidFill>
-                          <a:schemeClr val="tx1"/>
-                        </a:solidFill>
-                        <a:effectLst/>
-                      </a:endParaRPr>
-                    </a:p>
-                  </a:txBody>
-                  <a:tcPr marL="95250" marR="95250" marT="47625" marB="47625" anchor="ctr"/>
-                </a:tc>
-                <a:extLst>
-                  <a:ext uri="{0D108BD9-81ED-4DB2-BD59-A6C34878D82A}">
-                    <a16:rowId xmlns:a16="http://schemas.microsoft.com/office/drawing/2014/main" val="2384153292"/>
-                  </a:ext>
-                </a:extLst>
-              </a:tr>
-              <a:tr h="279229">
-                <a:tc>
-                  <a:txBody>
-                    <a:bodyPr/>
-                    <a:lstStyle/>
-                    <a:p>
-                      <a:pPr>
-                        <a:buNone/>
-                      </a:pPr>
-                      <a:r>
-                        <a:rPr lang="en-US" sz="1200">
-                          <a:solidFill>
-                            <a:schemeClr val="tx1"/>
-                          </a:solidFill>
-                          <a:effectLst/>
-                        </a:rPr>
-                        <a:t>Acoperire instrucțiune / decizie / condiție</a:t>
-                      </a:r>
-                    </a:p>
-                  </a:txBody>
-                  <a:tcPr marL="95250" marR="95250" marT="47625" marB="47625" anchor="ctr"/>
-                </a:tc>
-                <a:tc>
-                  <a:txBody>
-                    <a:bodyPr/>
-                    <a:lstStyle/>
-                    <a:p>
-                      <a:pPr>
-                        <a:buNone/>
-                      </a:pPr>
-                      <a:r>
-                        <a:rPr lang="en-US" sz="1200" dirty="0">
-                          <a:solidFill>
-                            <a:schemeClr val="tx1"/>
-                          </a:solidFill>
-                          <a:effectLst/>
-                          <a:latin typeface="Consolas" panose="020B0609020204030204" pitchFamily="49" charset="0"/>
-                        </a:rPr>
-                        <a:t>test_coverage.py</a:t>
-                      </a:r>
-                      <a:endParaRPr lang="en-US" sz="1200" dirty="0">
-                        <a:solidFill>
-                          <a:schemeClr val="tx1"/>
-                        </a:solidFill>
-                        <a:effectLst/>
-                      </a:endParaRPr>
-                    </a:p>
-                  </a:txBody>
-                  <a:tcPr marL="95250" marR="95250" marT="47625" marB="47625" anchor="ctr"/>
-                </a:tc>
-                <a:extLst>
-                  <a:ext uri="{0D108BD9-81ED-4DB2-BD59-A6C34878D82A}">
-                    <a16:rowId xmlns:a16="http://schemas.microsoft.com/office/drawing/2014/main" val="1902070994"/>
-                  </a:ext>
-                </a:extLst>
-              </a:tr>
-              <a:tr h="279229">
-                <a:tc>
-                  <a:txBody>
-                    <a:bodyPr/>
-                    <a:lstStyle/>
-                    <a:p>
-                      <a:pPr>
-                        <a:buNone/>
-                      </a:pPr>
-                      <a:r>
-                        <a:rPr lang="en-US" sz="1200">
-                          <a:solidFill>
-                            <a:schemeClr val="tx1"/>
-                          </a:solidFill>
-                          <a:effectLst/>
-                        </a:rPr>
-                        <a:t>Circuite independente</a:t>
-                      </a:r>
-                    </a:p>
-                  </a:txBody>
-                  <a:tcPr marL="95250" marR="95250" marT="47625" marB="47625" anchor="ctr"/>
-                </a:tc>
-                <a:tc>
-                  <a:txBody>
-                    <a:bodyPr/>
-                    <a:lstStyle/>
-                    <a:p>
-                      <a:pPr>
-                        <a:buNone/>
-                      </a:pPr>
-                      <a:r>
-                        <a:rPr lang="en-US" sz="1200">
-                          <a:solidFill>
-                            <a:schemeClr val="tx1"/>
-                          </a:solidFill>
-                          <a:effectLst/>
-                          <a:latin typeface="Consolas" panose="020B0609020204030204" pitchFamily="49" charset="0"/>
-                        </a:rPr>
-                        <a:t>test_independent_circuits.py</a:t>
-                      </a:r>
-                      <a:endParaRPr lang="en-US" sz="1200">
-                        <a:solidFill>
-                          <a:schemeClr val="tx1"/>
-                        </a:solidFill>
-                        <a:effectLst/>
-                      </a:endParaRPr>
-                    </a:p>
-                  </a:txBody>
-                  <a:tcPr marL="95250" marR="95250" marT="47625" marB="47625" anchor="ctr"/>
-                </a:tc>
-                <a:extLst>
-                  <a:ext uri="{0D108BD9-81ED-4DB2-BD59-A6C34878D82A}">
-                    <a16:rowId xmlns:a16="http://schemas.microsoft.com/office/drawing/2014/main" val="859600517"/>
-                  </a:ext>
-                </a:extLst>
-              </a:tr>
-              <a:tr h="374900">
-                <a:tc>
-                  <a:txBody>
-                    <a:bodyPr/>
-                    <a:lstStyle/>
-                    <a:p>
-                      <a:pPr>
-                        <a:buNone/>
-                      </a:pPr>
-                      <a:r>
-                        <a:rPr lang="en-US" sz="1200">
-                          <a:solidFill>
-                            <a:schemeClr val="tx1"/>
-                          </a:solidFill>
-                          <a:effectLst/>
-                        </a:rPr>
-                        <a:t>Analiză pe baza unui generator de mutanți</a:t>
-                      </a:r>
-                    </a:p>
-                  </a:txBody>
-                  <a:tcPr marL="95250" marR="95250" marT="47625" marB="47625" anchor="ctr"/>
-                </a:tc>
-                <a:tc>
-                  <a:txBody>
-                    <a:bodyPr/>
-                    <a:lstStyle/>
-                    <a:p>
-                      <a:pPr>
-                        <a:buNone/>
-                      </a:pPr>
-                      <a:r>
-                        <a:rPr lang="en-US" sz="1200">
-                          <a:solidFill>
-                            <a:schemeClr val="tx1"/>
-                          </a:solidFill>
-                          <a:effectLst/>
-                          <a:latin typeface="Consolas" panose="020B0609020204030204" pitchFamily="49" charset="0"/>
-                        </a:rPr>
-                        <a:t>test_mutation.py</a:t>
-                      </a:r>
-                      <a:endParaRPr lang="en-US" sz="1200">
-                        <a:solidFill>
-                          <a:schemeClr val="tx1"/>
-                        </a:solidFill>
-                        <a:effectLst/>
-                      </a:endParaRPr>
-                    </a:p>
-                  </a:txBody>
-                  <a:tcPr marL="95250" marR="95250" marT="47625" marB="47625" anchor="ctr"/>
-                </a:tc>
-                <a:extLst>
-                  <a:ext uri="{0D108BD9-81ED-4DB2-BD59-A6C34878D82A}">
-                    <a16:rowId xmlns:a16="http://schemas.microsoft.com/office/drawing/2014/main" val="1333195930"/>
-                  </a:ext>
-                </a:extLst>
-              </a:tr>
-              <a:tr h="374900">
-                <a:tc>
-                  <a:txBody>
-                    <a:bodyPr/>
-                    <a:lstStyle/>
-                    <a:p>
-                      <a:pPr>
-                        <a:buNone/>
-                      </a:pPr>
-                      <a:r>
-                        <a:rPr lang="it-IT" sz="1200">
-                          <a:solidFill>
-                            <a:schemeClr val="tx1"/>
-                          </a:solidFill>
-                          <a:effectLst/>
-                        </a:rPr>
-                        <a:t>Teste suplimentare pentru mutanți neechivalenți</a:t>
-                      </a:r>
-                    </a:p>
-                  </a:txBody>
-                  <a:tcPr marL="95250" marR="95250" marT="47625" marB="47625" anchor="ctr"/>
-                </a:tc>
-                <a:tc>
-                  <a:txBody>
-                    <a:bodyPr/>
-                    <a:lstStyle/>
-                    <a:p>
-                      <a:pPr>
-                        <a:buNone/>
-                      </a:pPr>
-                      <a:r>
-                        <a:rPr lang="en-US" sz="1200" dirty="0">
-                          <a:solidFill>
-                            <a:schemeClr val="tx1"/>
-                          </a:solidFill>
-                          <a:effectLst/>
-                          <a:latin typeface="Consolas" panose="020B0609020204030204" pitchFamily="49" charset="0"/>
-                        </a:rPr>
-                        <a:t>test_mutation.py</a:t>
-                      </a:r>
-                      <a:endParaRPr lang="en-US" sz="1200" dirty="0">
-                        <a:solidFill>
-                          <a:schemeClr val="tx1"/>
-                        </a:solidFill>
-                        <a:effectLst/>
-                      </a:endParaRPr>
-                    </a:p>
-                  </a:txBody>
-                  <a:tcPr marL="95250" marR="95250" marT="47625" marB="47625" anchor="ctr"/>
-                </a:tc>
-                <a:extLst>
-                  <a:ext uri="{0D108BD9-81ED-4DB2-BD59-A6C34878D82A}">
-                    <a16:rowId xmlns:a16="http://schemas.microsoft.com/office/drawing/2014/main" val="2082694751"/>
-                  </a:ext>
-                </a:extLst>
-              </a:tr>
-            </a:tbl>
-          </a:graphicData>
-        </a:graphic>
-      </p:graphicFrame>
-      <p:sp>
-        <p:nvSpPr>
-          <p:cNvPr id="4" name="Content Placeholder 3">
-            <a:extLst>
-              <a:ext uri="{FF2B5EF4-FFF2-40B4-BE49-F238E27FC236}">
-                <a16:creationId xmlns:a16="http://schemas.microsoft.com/office/drawing/2014/main" id="{1B021E2C-E4CD-07DF-0E58-8CBDCC812FD4}"/>
-              </a:ext>
-            </a:extLst>
-          </p:cNvPr>
-          <p:cNvSpPr>
-            <a:spLocks noGrp="1"/>
-          </p:cNvSpPr>
-          <p:nvPr>
-            <p:ph sz="half" idx="2"/>
-          </p:nvPr>
-        </p:nvSpPr>
-        <p:spPr/>
+            <a:off x="721151" y="802431"/>
+            <a:ext cx="4569306" cy="715219"/>
+          </a:xfrm>
+        </p:spPr>
         <p:txBody>
           <a:bodyPr/>
           <a:lstStyle/>
           <a:p>
             <a:r>
-              <a:rPr lang="en-US" b="1" dirty="0"/>
-              <a:t>Python: bool </a:t>
-            </a:r>
-            <a:r>
-              <a:rPr lang="en-US" b="1" dirty="0" err="1"/>
-              <a:t>este</a:t>
-            </a:r>
-            <a:r>
-              <a:rPr lang="en-US" b="1" dirty="0"/>
+              <a:rPr lang="en-US" dirty="0" err="1" smtClean="0"/>
+              <a:t>Strategiile</a:t>
+            </a:r>
+            <a:r>
+              <a:rPr lang="en-US" dirty="0" smtClean="0"/>
+              <a:t> de </a:t>
+            </a:r>
+            <a:r>
+              <a:rPr lang="en-US" dirty="0" err="1" smtClean="0"/>
+              <a:t>testare</a:t>
+            </a:r>
+            <a:r>
+              <a:rPr lang="en-US" dirty="0" smtClean="0"/>
               <a:t> </a:t>
             </a:r>
-            <a:r>
-              <a:rPr lang="en-US" b="1" dirty="0" err="1"/>
-              <a:t>subclasă</a:t>
-            </a:r>
-            <a:r>
-              <a:rPr lang="en-US" b="1" dirty="0"/>
-              <a:t> a int</a:t>
-            </a:r>
-            <a:r>
-              <a:rPr lang="en-US" dirty="0"/>
-              <a:t> → True </a:t>
-            </a:r>
-            <a:r>
-              <a:rPr lang="en-US" dirty="0" err="1"/>
-              <a:t>și</a:t>
-            </a:r>
-            <a:r>
-              <a:rPr lang="en-US" dirty="0"/>
-              <a:t> False </a:t>
-            </a:r>
-            <a:r>
-              <a:rPr lang="en-US" dirty="0" err="1"/>
-              <a:t>ar</a:t>
-            </a:r>
-            <a:r>
-              <a:rPr lang="en-US" dirty="0"/>
-              <a:t> </a:t>
-            </a:r>
-            <a:r>
-              <a:rPr lang="en-US" dirty="0" err="1"/>
-              <a:t>trece</a:t>
-            </a:r>
-            <a:r>
-              <a:rPr lang="en-US" dirty="0"/>
-              <a:t> ca 1 </a:t>
-            </a:r>
-            <a:r>
-              <a:rPr lang="en-US" dirty="0" err="1"/>
-              <a:t>și</a:t>
-            </a:r>
-            <a:r>
-              <a:rPr lang="en-US" dirty="0"/>
-              <a:t> 0 </a:t>
-            </a:r>
-            <a:r>
-              <a:rPr lang="en-US" dirty="0" err="1"/>
-              <a:t>prin</a:t>
-            </a:r>
-            <a:r>
-              <a:rPr lang="en-US" dirty="0"/>
-              <a:t> </a:t>
-            </a:r>
-            <a:r>
-              <a:rPr lang="en-US" dirty="0" err="1"/>
-              <a:t>validări</a:t>
-            </a:r>
-            <a:r>
-              <a:rPr lang="en-US" dirty="0"/>
-              <a:t> </a:t>
-            </a:r>
-            <a:r>
-              <a:rPr lang="en-US" dirty="0" err="1"/>
-              <a:t>numerice</a:t>
-            </a:r>
-            <a:r>
-              <a:rPr lang="en-US" dirty="0"/>
-              <a:t> </a:t>
-            </a:r>
-            <a:r>
-              <a:rPr lang="en-US" dirty="0" err="1"/>
-              <a:t>dacă</a:t>
-            </a:r>
-            <a:r>
-              <a:rPr lang="en-US" dirty="0"/>
-              <a:t> nu sunt </a:t>
-            </a:r>
-            <a:r>
-              <a:rPr lang="en-US" dirty="0" err="1"/>
-              <a:t>respinse</a:t>
-            </a:r>
-            <a:r>
-              <a:rPr lang="en-US" dirty="0"/>
-              <a:t> explicit. </a:t>
-            </a:r>
-            <a:r>
-              <a:rPr lang="en-US" dirty="0" err="1"/>
-              <a:t>Implementarea</a:t>
-            </a:r>
-            <a:r>
-              <a:rPr lang="en-US" dirty="0"/>
-              <a:t> </a:t>
-            </a:r>
-            <a:r>
-              <a:rPr lang="en-US" dirty="0" err="1"/>
-              <a:t>conține</a:t>
-            </a:r>
-            <a:r>
-              <a:rPr lang="en-US" dirty="0"/>
-              <a:t> </a:t>
-            </a:r>
-            <a:r>
-              <a:rPr lang="en-US" dirty="0" err="1"/>
-              <a:t>verificare</a:t>
-            </a:r>
-            <a:r>
-              <a:rPr lang="en-US" dirty="0"/>
-              <a:t> </a:t>
-            </a:r>
-            <a:r>
-              <a:rPr lang="en-US" dirty="0" err="1"/>
-              <a:t>separată</a:t>
-            </a:r>
-            <a:r>
-              <a:rPr lang="en-US" dirty="0"/>
-              <a:t> </a:t>
-            </a:r>
-            <a:r>
-              <a:rPr lang="en-US" dirty="0" err="1"/>
-              <a:t>pentru</a:t>
-            </a:r>
-            <a:r>
-              <a:rPr lang="en-US" dirty="0"/>
-              <a:t> bool la </a:t>
-            </a:r>
-            <a:r>
-              <a:rPr lang="en-US" dirty="0" err="1"/>
-              <a:t>toți</a:t>
-            </a:r>
-            <a:r>
-              <a:rPr lang="en-US" dirty="0"/>
-              <a:t> </a:t>
-            </a:r>
-            <a:r>
-              <a:rPr lang="en-US" dirty="0" err="1"/>
-              <a:t>parametrii</a:t>
-            </a:r>
-            <a:r>
-              <a:rPr lang="en-US" dirty="0"/>
-              <a:t> </a:t>
-            </a:r>
-            <a:r>
-              <a:rPr lang="en-US" dirty="0" err="1"/>
-              <a:t>numerici</a:t>
-            </a:r>
-            <a:r>
-              <a:rPr lang="en-US" dirty="0"/>
-              <a:t>.</a:t>
-            </a:r>
+            <a:endParaRPr lang="en-US" dirty="0"/>
           </a:p>
         </p:txBody>
       </p:sp>
-      <p:graphicFrame>
-        <p:nvGraphicFramePr>
-          <p:cNvPr id="9" name="Content Placeholder 5">
+      <p:pic>
+        <p:nvPicPr>
+          <p:cNvPr id="3074" name="Picture 2"/>
+          <p:cNvPicPr>
+            <a:picLocks noGrp="1" noChangeAspect="1" noChangeArrowheads="1"/>
+          </p:cNvPicPr>
+          <p:nvPr>
+            <p:ph idx="1"/>
+          </p:nvPr>
+        </p:nvPicPr>
+        <p:blipFill>
+          <a:blip r:embed="rId2">
             <a:extLst>
-              <a:ext uri="{FF2B5EF4-FFF2-40B4-BE49-F238E27FC236}">
-                <a16:creationId xmlns:a16="http://schemas.microsoft.com/office/drawing/2014/main" id="{AFA8B733-E06F-DA3C-CCDB-48A6FA2BF877}"/>
+              <a:ext uri="{28A0092B-C50C-407E-A947-70E740481C1C}">
+                <a14:useLocalDpi xmlns:a14="http://schemas.microsoft.com/office/drawing/2010/main" val="0"/>
               </a:ext>
             </a:extLst>
-          </p:cNvPr>
-          <p:cNvGraphicFramePr>
-            <a:graphicFrameLocks/>
-          </p:cNvGraphicFramePr>
-          <p:nvPr>
-            <p:extLst>
-              <p:ext uri="{D42A27DB-BD31-4B8C-83A1-F6EECF244321}">
-                <p14:modId xmlns:p14="http://schemas.microsoft.com/office/powerpoint/2010/main" val="3824383543"/>
-              </p:ext>
-            </p:extLst>
-          </p:nvPr>
-        </p:nvGraphicFramePr>
-        <p:xfrm>
-          <a:off x="581192" y="3975522"/>
-          <a:ext cx="5793400" cy="2710404"/>
-        </p:xfrm>
-        <a:graphic>
-          <a:graphicData uri="http://schemas.openxmlformats.org/drawingml/2006/table">
-            <a:tbl>
-              <a:tblPr firstRow="1" bandRow="1">
-                <a:tableStyleId>{93296810-A885-4BE3-A3E7-6D5BEEA58F35}</a:tableStyleId>
-              </a:tblPr>
-              <a:tblGrid>
-                <a:gridCol w="2896700">
-                  <a:extLst>
-                    <a:ext uri="{9D8B030D-6E8A-4147-A177-3AD203B41FA5}">
-                      <a16:colId xmlns:a16="http://schemas.microsoft.com/office/drawing/2014/main" val="4109069834"/>
-                    </a:ext>
-                  </a:extLst>
-                </a:gridCol>
-                <a:gridCol w="2896700">
-                  <a:extLst>
-                    <a:ext uri="{9D8B030D-6E8A-4147-A177-3AD203B41FA5}">
-                      <a16:colId xmlns:a16="http://schemas.microsoft.com/office/drawing/2014/main" val="4130365598"/>
-                    </a:ext>
-                  </a:extLst>
-                </a:gridCol>
-              </a:tblGrid>
-              <a:tr h="288788">
-                <a:tc>
-                  <a:txBody>
-                    <a:bodyPr/>
-                    <a:lstStyle/>
-                    <a:p>
-                      <a:pPr algn="l">
-                        <a:buNone/>
-                      </a:pPr>
-                      <a:r>
-                        <a:rPr lang="en-US" sz="1200" dirty="0" err="1">
-                          <a:effectLst/>
-                        </a:rPr>
-                        <a:t>Cerință</a:t>
-                      </a:r>
-                      <a:endParaRPr lang="en-US" sz="1200" dirty="0">
-                        <a:effectLst/>
-                      </a:endParaRPr>
-                    </a:p>
-                  </a:txBody>
-                  <a:tcPr marL="95250" marR="95250" marT="47625" marB="47625" anchor="ctr"/>
-                </a:tc>
-                <a:tc>
-                  <a:txBody>
-                    <a:bodyPr/>
-                    <a:lstStyle/>
-                    <a:p>
-                      <a:pPr algn="l">
-                        <a:buNone/>
-                      </a:pPr>
-                      <a:r>
-                        <a:rPr lang="en-US" sz="1200" dirty="0" err="1">
-                          <a:effectLst/>
-                        </a:rPr>
-                        <a:t>Implementare</a:t>
-                      </a:r>
-                      <a:r>
-                        <a:rPr lang="en-US" sz="1200" dirty="0">
-                          <a:effectLst/>
-                        </a:rPr>
-                        <a:t> </a:t>
-                      </a:r>
-                      <a:r>
-                        <a:rPr lang="en-US" sz="1200" dirty="0" err="1">
-                          <a:effectLst/>
-                        </a:rPr>
-                        <a:t>în</a:t>
-                      </a:r>
-                      <a:r>
-                        <a:rPr lang="en-US" sz="1200" dirty="0">
-                          <a:effectLst/>
-                        </a:rPr>
-                        <a:t> cod</a:t>
-                      </a:r>
-                    </a:p>
-                  </a:txBody>
-                  <a:tcPr marL="95250" marR="95250" marT="47625" marB="47625" anchor="ctr"/>
-                </a:tc>
-                <a:extLst>
-                  <a:ext uri="{0D108BD9-81ED-4DB2-BD59-A6C34878D82A}">
-                    <a16:rowId xmlns:a16="http://schemas.microsoft.com/office/drawing/2014/main" val="2239755292"/>
-                  </a:ext>
-                </a:extLst>
-              </a:tr>
-              <a:tr h="392361">
-                <a:tc>
-                  <a:txBody>
-                    <a:bodyPr/>
-                    <a:lstStyle/>
-                    <a:p>
-                      <a:pPr>
-                        <a:buNone/>
-                      </a:pPr>
-                      <a:r>
-                        <a:rPr lang="en-US" sz="1200">
-                          <a:solidFill>
-                            <a:schemeClr val="tx1"/>
-                          </a:solidFill>
-                          <a:effectLst/>
-                        </a:rPr>
-                        <a:t>Minimum 3 parametri</a:t>
-                      </a:r>
-                    </a:p>
-                  </a:txBody>
-                  <a:tcPr marL="95250" marR="95250" marT="47625" marB="47625" anchor="ctr"/>
-                </a:tc>
-                <a:tc>
-                  <a:txBody>
-                    <a:bodyPr/>
-                    <a:lstStyle/>
-                    <a:p>
-                      <a:pPr>
-                        <a:buNone/>
-                      </a:pPr>
-                      <a:r>
-                        <a:rPr lang="en-US" sz="1200">
-                          <a:solidFill>
-                            <a:schemeClr val="tx1"/>
-                          </a:solidFill>
-                          <a:effectLst/>
-                          <a:latin typeface="Consolas" panose="020B0609020204030204" pitchFamily="49" charset="0"/>
-                        </a:rPr>
-                        <a:t>session_history</a:t>
-                      </a:r>
-                      <a:r>
-                        <a:rPr lang="en-US" sz="1200">
-                          <a:solidFill>
-                            <a:schemeClr val="tx1"/>
-                          </a:solidFill>
-                          <a:effectLst/>
-                        </a:rPr>
-                        <a:t>, </a:t>
-                      </a:r>
-                      <a:r>
-                        <a:rPr lang="en-US" sz="1200">
-                          <a:solidFill>
-                            <a:schemeClr val="tx1"/>
-                          </a:solidFill>
-                          <a:effectLst/>
-                          <a:latin typeface="Consolas" panose="020B0609020204030204" pitchFamily="49" charset="0"/>
-                        </a:rPr>
-                        <a:t>package_sessions</a:t>
-                      </a:r>
-                      <a:r>
-                        <a:rPr lang="en-US" sz="1200">
-                          <a:solidFill>
-                            <a:schemeClr val="tx1"/>
-                          </a:solidFill>
-                          <a:effectLst/>
-                        </a:rPr>
-                        <a:t>, </a:t>
-                      </a:r>
-                      <a:r>
-                        <a:rPr lang="en-US" sz="1200">
-                          <a:solidFill>
-                            <a:schemeClr val="tx1"/>
-                          </a:solidFill>
-                          <a:effectLst/>
-                          <a:latin typeface="Consolas" panose="020B0609020204030204" pitchFamily="49" charset="0"/>
-                        </a:rPr>
-                        <a:t>has_membership</a:t>
-                      </a:r>
-                      <a:endParaRPr lang="en-US" sz="1200">
-                        <a:solidFill>
-                          <a:schemeClr val="tx1"/>
-                        </a:solidFill>
-                        <a:effectLst/>
-                      </a:endParaRPr>
-                    </a:p>
-                  </a:txBody>
-                  <a:tcPr marL="95250" marR="95250" marT="47625" marB="47625" anchor="ctr"/>
-                </a:tc>
-                <a:extLst>
-                  <a:ext uri="{0D108BD9-81ED-4DB2-BD59-A6C34878D82A}">
-                    <a16:rowId xmlns:a16="http://schemas.microsoft.com/office/drawing/2014/main" val="704993225"/>
-                  </a:ext>
-                </a:extLst>
-              </a:tr>
-              <a:tr h="359006">
-                <a:tc>
-                  <a:txBody>
-                    <a:bodyPr/>
-                    <a:lstStyle/>
-                    <a:p>
-                      <a:pPr>
-                        <a:buNone/>
-                      </a:pPr>
-                      <a:r>
-                        <a:rPr lang="en-US" sz="1200">
-                          <a:solidFill>
-                            <a:schemeClr val="tx1"/>
-                          </a:solidFill>
-                          <a:effectLst/>
-                        </a:rPr>
-                        <a:t>Instrucțiune repetitivă</a:t>
-                      </a:r>
-                    </a:p>
-                  </a:txBody>
-                  <a:tcPr marL="95250" marR="95250" marT="47625" marB="47625" anchor="ctr"/>
-                </a:tc>
-                <a:tc>
-                  <a:txBody>
-                    <a:bodyPr/>
-                    <a:lstStyle/>
-                    <a:p>
-                      <a:pPr>
-                        <a:buNone/>
-                      </a:pPr>
-                      <a:r>
-                        <a:rPr lang="en-US" sz="1200">
-                          <a:solidFill>
-                            <a:schemeClr val="tx1"/>
-                          </a:solidFill>
-                          <a:effectLst/>
-                          <a:latin typeface="Consolas" panose="020B0609020204030204" pitchFamily="49" charset="0"/>
-                        </a:rPr>
-                        <a:t>for session_status in session_history</a:t>
-                      </a:r>
-                      <a:endParaRPr lang="en-US" sz="1200">
-                        <a:solidFill>
-                          <a:schemeClr val="tx1"/>
-                        </a:solidFill>
-                        <a:effectLst/>
-                      </a:endParaRPr>
-                    </a:p>
-                  </a:txBody>
-                  <a:tcPr marL="95250" marR="95250" marT="47625" marB="47625" anchor="ctr"/>
-                </a:tc>
-                <a:extLst>
-                  <a:ext uri="{0D108BD9-81ED-4DB2-BD59-A6C34878D82A}">
-                    <a16:rowId xmlns:a16="http://schemas.microsoft.com/office/drawing/2014/main" val="2384153292"/>
-                  </a:ext>
-                </a:extLst>
-              </a:tr>
-              <a:tr h="392361">
-                <a:tc>
-                  <a:txBody>
-                    <a:bodyPr/>
-                    <a:lstStyle/>
-                    <a:p>
-                      <a:pPr>
-                        <a:buNone/>
-                      </a:pPr>
-                      <a:r>
-                        <a:rPr lang="en-US" sz="1200">
-                          <a:solidFill>
-                            <a:schemeClr val="tx1"/>
-                          </a:solidFill>
-                          <a:effectLst/>
-                          <a:latin typeface="Consolas" panose="020B0609020204030204" pitchFamily="49" charset="0"/>
-                        </a:rPr>
-                        <a:t>if</a:t>
-                      </a:r>
-                      <a:r>
-                        <a:rPr lang="en-US" sz="1200">
-                          <a:solidFill>
-                            <a:schemeClr val="tx1"/>
-                          </a:solidFill>
-                          <a:effectLst/>
-                        </a:rPr>
-                        <a:t> cu </a:t>
-                      </a:r>
-                      <a:r>
-                        <a:rPr lang="en-US" sz="1200">
-                          <a:solidFill>
-                            <a:schemeClr val="tx1"/>
-                          </a:solidFill>
-                          <a:effectLst/>
-                          <a:latin typeface="Consolas" panose="020B0609020204030204" pitchFamily="49" charset="0"/>
-                        </a:rPr>
-                        <a:t>else</a:t>
-                      </a:r>
-                      <a:endParaRPr lang="en-US" sz="1200">
-                        <a:solidFill>
-                          <a:schemeClr val="tx1"/>
-                        </a:solidFill>
-                        <a:effectLst/>
-                      </a:endParaRPr>
-                    </a:p>
-                  </a:txBody>
-                  <a:tcPr marL="95250" marR="95250" marT="47625" marB="47625" anchor="ctr"/>
-                </a:tc>
-                <a:tc>
-                  <a:txBody>
-                    <a:bodyPr/>
-                    <a:lstStyle/>
-                    <a:p>
-                      <a:pPr>
-                        <a:buNone/>
-                      </a:pPr>
-                      <a:r>
-                        <a:rPr lang="en-US" sz="1200" dirty="0">
-                          <a:solidFill>
-                            <a:schemeClr val="tx1"/>
-                          </a:solidFill>
-                          <a:effectLst/>
-                          <a:latin typeface="Consolas" panose="020B0609020204030204" pitchFamily="49" charset="0"/>
-                        </a:rPr>
-                        <a:t>if </a:t>
-                      </a:r>
-                      <a:r>
-                        <a:rPr lang="en-US" sz="1200" dirty="0" err="1">
-                          <a:solidFill>
-                            <a:schemeClr val="tx1"/>
-                          </a:solidFill>
-                          <a:effectLst/>
-                          <a:latin typeface="Consolas" panose="020B0609020204030204" pitchFamily="49" charset="0"/>
-                        </a:rPr>
-                        <a:t>session_status</a:t>
-                      </a:r>
-                      <a:r>
-                        <a:rPr lang="en-US" sz="1200" dirty="0">
-                          <a:solidFill>
-                            <a:schemeClr val="tx1"/>
-                          </a:solidFill>
-                          <a:effectLst/>
-                          <a:latin typeface="Consolas" panose="020B0609020204030204" pitchFamily="49" charset="0"/>
-                        </a:rPr>
-                        <a:t> == "attended": … else: …</a:t>
-                      </a:r>
-                      <a:endParaRPr lang="en-US" sz="1200" dirty="0">
-                        <a:solidFill>
-                          <a:schemeClr val="tx1"/>
-                        </a:solidFill>
-                        <a:effectLst/>
-                      </a:endParaRPr>
-                    </a:p>
-                  </a:txBody>
-                  <a:tcPr marL="95250" marR="95250" marT="47625" marB="47625" anchor="ctr"/>
-                </a:tc>
-                <a:extLst>
-                  <a:ext uri="{0D108BD9-81ED-4DB2-BD59-A6C34878D82A}">
-                    <a16:rowId xmlns:a16="http://schemas.microsoft.com/office/drawing/2014/main" val="1902070994"/>
-                  </a:ext>
-                </a:extLst>
-              </a:tr>
-              <a:tr h="288788">
-                <a:tc>
-                  <a:txBody>
-                    <a:bodyPr/>
-                    <a:lstStyle/>
-                    <a:p>
-                      <a:pPr>
-                        <a:buNone/>
-                      </a:pPr>
-                      <a:r>
-                        <a:rPr lang="en-US" sz="1200">
-                          <a:solidFill>
-                            <a:schemeClr val="tx1"/>
-                          </a:solidFill>
-                          <a:effectLst/>
-                          <a:latin typeface="Consolas" panose="020B0609020204030204" pitchFamily="49" charset="0"/>
-                        </a:rPr>
-                        <a:t>if</a:t>
-                      </a:r>
-                      <a:r>
-                        <a:rPr lang="en-US" sz="1200">
-                          <a:solidFill>
-                            <a:schemeClr val="tx1"/>
-                          </a:solidFill>
-                          <a:effectLst/>
-                        </a:rPr>
-                        <a:t> fără </a:t>
-                      </a:r>
-                      <a:r>
-                        <a:rPr lang="en-US" sz="1200">
-                          <a:solidFill>
-                            <a:schemeClr val="tx1"/>
-                          </a:solidFill>
-                          <a:effectLst/>
-                          <a:latin typeface="Consolas" panose="020B0609020204030204" pitchFamily="49" charset="0"/>
-                        </a:rPr>
-                        <a:t>else</a:t>
-                      </a:r>
-                      <a:endParaRPr lang="en-US" sz="1200">
-                        <a:solidFill>
-                          <a:schemeClr val="tx1"/>
-                        </a:solidFill>
-                        <a:effectLst/>
-                      </a:endParaRPr>
-                    </a:p>
-                  </a:txBody>
-                  <a:tcPr marL="95250" marR="95250" marT="47625" marB="47625" anchor="ctr"/>
-                </a:tc>
-                <a:tc>
-                  <a:txBody>
-                    <a:bodyPr/>
-                    <a:lstStyle/>
-                    <a:p>
-                      <a:pPr>
-                        <a:buNone/>
-                      </a:pPr>
-                      <a:r>
-                        <a:rPr lang="en-US" sz="1200">
-                          <a:solidFill>
-                            <a:schemeClr val="tx1"/>
-                          </a:solidFill>
-                          <a:effectLst/>
-                          <a:latin typeface="Consolas" panose="020B0609020204030204" pitchFamily="49" charset="0"/>
-                        </a:rPr>
-                        <a:t>if has_membership: …</a:t>
-                      </a:r>
-                      <a:endParaRPr lang="en-US" sz="1200">
-                        <a:solidFill>
-                          <a:schemeClr val="tx1"/>
-                        </a:solidFill>
-                        <a:effectLst/>
-                      </a:endParaRPr>
-                    </a:p>
-                  </a:txBody>
-                  <a:tcPr marL="95250" marR="95250" marT="47625" marB="47625" anchor="ctr"/>
-                </a:tc>
-                <a:extLst>
-                  <a:ext uri="{0D108BD9-81ED-4DB2-BD59-A6C34878D82A}">
-                    <a16:rowId xmlns:a16="http://schemas.microsoft.com/office/drawing/2014/main" val="859600517"/>
-                  </a:ext>
-                </a:extLst>
-              </a:tr>
-              <a:tr h="288788">
-                <a:tc>
-                  <a:txBody>
-                    <a:bodyPr/>
-                    <a:lstStyle/>
-                    <a:p>
-                      <a:pPr>
-                        <a:buNone/>
-                      </a:pPr>
-                      <a:r>
-                        <a:rPr lang="en-US" sz="1200">
-                          <a:solidFill>
-                            <a:schemeClr val="tx1"/>
-                          </a:solidFill>
-                          <a:effectLst/>
-                        </a:rPr>
-                        <a:t>Condiție simplă</a:t>
-                      </a:r>
-                    </a:p>
-                  </a:txBody>
-                  <a:tcPr marL="95250" marR="95250" marT="47625" marB="47625" anchor="ctr"/>
-                </a:tc>
-                <a:tc>
-                  <a:txBody>
-                    <a:bodyPr/>
-                    <a:lstStyle/>
-                    <a:p>
-                      <a:pPr>
-                        <a:buNone/>
-                      </a:pPr>
-                      <a:r>
-                        <a:rPr lang="en-US" sz="1200">
-                          <a:solidFill>
-                            <a:schemeClr val="tx1"/>
-                          </a:solidFill>
-                          <a:effectLst/>
-                          <a:latin typeface="Consolas" panose="020B0609020204030204" pitchFamily="49" charset="0"/>
-                        </a:rPr>
-                        <a:t>if has_membership</a:t>
-                      </a:r>
-                      <a:endParaRPr lang="en-US" sz="1200">
-                        <a:solidFill>
-                          <a:schemeClr val="tx1"/>
-                        </a:solidFill>
-                        <a:effectLst/>
-                      </a:endParaRPr>
-                    </a:p>
-                  </a:txBody>
-                  <a:tcPr marL="95250" marR="95250" marT="47625" marB="47625" anchor="ctr"/>
-                </a:tc>
-                <a:extLst>
-                  <a:ext uri="{0D108BD9-81ED-4DB2-BD59-A6C34878D82A}">
-                    <a16:rowId xmlns:a16="http://schemas.microsoft.com/office/drawing/2014/main" val="1333195930"/>
-                  </a:ext>
-                </a:extLst>
-              </a:tr>
-              <a:tr h="359006">
-                <a:tc>
-                  <a:txBody>
-                    <a:bodyPr/>
-                    <a:lstStyle/>
-                    <a:p>
-                      <a:pPr>
-                        <a:buNone/>
-                      </a:pPr>
-                      <a:r>
-                        <a:rPr lang="en-US" sz="1200" dirty="0" err="1">
-                          <a:solidFill>
-                            <a:schemeClr val="tx1"/>
-                          </a:solidFill>
-                          <a:effectLst/>
-                        </a:rPr>
-                        <a:t>Condiție</a:t>
-                      </a:r>
-                      <a:r>
-                        <a:rPr lang="en-US" sz="1200" dirty="0">
-                          <a:solidFill>
-                            <a:schemeClr val="tx1"/>
-                          </a:solidFill>
-                          <a:effectLst/>
-                        </a:rPr>
-                        <a:t> </a:t>
-                      </a:r>
-                      <a:r>
-                        <a:rPr lang="en-US" sz="1200" dirty="0" err="1">
-                          <a:solidFill>
-                            <a:schemeClr val="tx1"/>
-                          </a:solidFill>
-                          <a:effectLst/>
-                        </a:rPr>
-                        <a:t>compusă</a:t>
-                      </a:r>
-                      <a:endParaRPr lang="en-US" sz="1200" dirty="0">
-                        <a:solidFill>
-                          <a:schemeClr val="tx1"/>
-                        </a:solidFill>
-                        <a:effectLst/>
-                      </a:endParaRPr>
-                    </a:p>
-                  </a:txBody>
-                  <a:tcPr marL="95250" marR="95250" marT="47625" marB="47625" anchor="ctr"/>
-                </a:tc>
-                <a:tc>
-                  <a:txBody>
-                    <a:bodyPr/>
-                    <a:lstStyle/>
-                    <a:p>
-                      <a:pPr>
-                        <a:buNone/>
-                      </a:pPr>
-                      <a:r>
-                        <a:rPr lang="en-US" sz="1200" dirty="0" err="1">
-                          <a:solidFill>
-                            <a:schemeClr val="tx1"/>
-                          </a:solidFill>
-                          <a:effectLst/>
-                          <a:latin typeface="Consolas" panose="020B0609020204030204" pitchFamily="49" charset="0"/>
-                        </a:rPr>
-                        <a:t>remaining_sessions</a:t>
-                      </a:r>
-                      <a:r>
-                        <a:rPr lang="en-US" sz="1200" dirty="0">
-                          <a:solidFill>
-                            <a:schemeClr val="tx1"/>
-                          </a:solidFill>
-                          <a:effectLst/>
-                          <a:latin typeface="Consolas" panose="020B0609020204030204" pitchFamily="49" charset="0"/>
-                        </a:rPr>
-                        <a:t> == 0 and </a:t>
-                      </a:r>
-                      <a:r>
-                        <a:rPr lang="en-US" sz="1200" dirty="0" err="1">
-                          <a:solidFill>
-                            <a:schemeClr val="tx1"/>
-                          </a:solidFill>
-                          <a:effectLst/>
-                          <a:latin typeface="Consolas" panose="020B0609020204030204" pitchFamily="49" charset="0"/>
-                        </a:rPr>
-                        <a:t>no_show</a:t>
-                      </a:r>
-                      <a:r>
-                        <a:rPr lang="en-US" sz="1200" dirty="0">
-                          <a:solidFill>
-                            <a:schemeClr val="tx1"/>
-                          </a:solidFill>
-                          <a:effectLst/>
-                          <a:latin typeface="Consolas" panose="020B0609020204030204" pitchFamily="49" charset="0"/>
-                        </a:rPr>
-                        <a:t> == 0</a:t>
-                      </a:r>
-                      <a:endParaRPr lang="en-US" sz="1200" dirty="0">
-                        <a:solidFill>
-                          <a:schemeClr val="tx1"/>
-                        </a:solidFill>
-                        <a:effectLst/>
-                      </a:endParaRPr>
-                    </a:p>
-                  </a:txBody>
-                  <a:tcPr marL="95250" marR="95250" marT="47625" marB="47625" anchor="ctr"/>
-                </a:tc>
-                <a:extLst>
-                  <a:ext uri="{0D108BD9-81ED-4DB2-BD59-A6C34878D82A}">
-                    <a16:rowId xmlns:a16="http://schemas.microsoft.com/office/drawing/2014/main" val="2082694751"/>
-                  </a:ext>
-                </a:extLst>
-              </a:tr>
-            </a:tbl>
-          </a:graphicData>
-        </a:graphic>
-      </p:graphicFrame>
+          </a:blip>
+          <a:srcRect/>
+          <a:stretch>
+            <a:fillRect/>
+          </a:stretch>
+        </p:blipFill>
+        <p:spPr bwMode="auto">
+          <a:xfrm>
+            <a:off x="167200" y="1591529"/>
+            <a:ext cx="6027878" cy="2206030"/>
+          </a:xfrm>
+          <a:prstGeom prst="rect">
+            <a:avLst/>
+          </a:prstGeom>
+          <a:noFill/>
+          <a:ln>
+            <a:noFill/>
+          </a:ln>
+          <a:effectLst/>
+          <a:extLst>
+            <a:ext uri="{909E8E84-426E-40DD-AFC4-6F175D3DCCD1}">
+              <a14:hiddenFill xmlns:a14="http://schemas.microsoft.com/office/drawing/2010/main">
+                <a:solidFill>
+                  <a:schemeClr val="accent1"/>
+                </a:solidFill>
+              </a14:hiddenFill>
+            </a:ext>
+            <a:ext uri="{91240B29-F687-4F45-9708-019B960494DF}">
+              <a14:hiddenLine xmlns:a14="http://schemas.microsoft.com/office/drawing/2010/main" w="9525">
+                <a:solidFill>
+                  <a:schemeClr val="tx1"/>
+                </a:solidFill>
+                <a:miter lim="800000"/>
+                <a:headEnd/>
+                <a:tailEnd/>
+              </a14:hiddenLine>
+            </a:ext>
+            <a:ext uri="{AF507438-7753-43E0-B8FC-AC1667EBCBE1}">
+              <a14:hiddenEffects xmlns:a14="http://schemas.microsoft.com/office/drawing/2010/main">
+                <a:effectLst>
+                  <a:outerShdw dist="35921" dir="2700000" algn="ctr" rotWithShape="0">
+                    <a:schemeClr val="bg2"/>
+                  </a:outerShdw>
+                </a:effectLst>
+              </a14:hiddenEffects>
+            </a:ext>
+          </a:extLst>
+        </p:spPr>
+      </p:pic>
+      <p:sp>
+        <p:nvSpPr>
+          <p:cNvPr id="5" name="Title 1"/>
+          <p:cNvSpPr txBox="1">
+            <a:spLocks/>
+          </p:cNvSpPr>
+          <p:nvPr/>
+        </p:nvSpPr>
+        <p:spPr>
+          <a:xfrm>
+            <a:off x="149290" y="3670039"/>
+            <a:ext cx="6195526" cy="715219"/>
+          </a:xfrm>
+          <a:prstGeom prst="rect">
+            <a:avLst/>
+          </a:prstGeom>
+        </p:spPr>
+        <p:txBody>
+          <a:bodyPr vert="horz" lIns="91440" tIns="45720" rIns="91440" bIns="45720" rtlCol="0" anchor="b">
+            <a:noAutofit/>
+          </a:bodyPr>
+          <a:lstStyle>
+            <a:lvl1pPr algn="l" defTabSz="457200" rtl="0" eaLnBrk="1" latinLnBrk="0" hangingPunct="1">
+              <a:lnSpc>
+                <a:spcPct val="100000"/>
+              </a:lnSpc>
+              <a:spcBef>
+                <a:spcPct val="0"/>
+              </a:spcBef>
+              <a:buNone/>
+              <a:defRPr sz="2800" b="0" kern="1200" cap="all">
+                <a:solidFill>
+                  <a:schemeClr val="tx1">
+                    <a:lumMod val="75000"/>
+                    <a:lumOff val="25000"/>
+                  </a:schemeClr>
+                </a:solidFill>
+                <a:latin typeface="+mj-lt"/>
+                <a:ea typeface="+mj-ea"/>
+                <a:cs typeface="+mj-cs"/>
+              </a:defRPr>
+            </a:lvl1pPr>
+            <a:lvl2pPr eaLnBrk="1" hangingPunct="1">
+              <a:defRPr>
+                <a:solidFill>
+                  <a:schemeClr val="tx2"/>
+                </a:solidFill>
+              </a:defRPr>
+            </a:lvl2pPr>
+            <a:lvl3pPr eaLnBrk="1" hangingPunct="1">
+              <a:defRPr>
+                <a:solidFill>
+                  <a:schemeClr val="tx2"/>
+                </a:solidFill>
+              </a:defRPr>
+            </a:lvl3pPr>
+            <a:lvl4pPr eaLnBrk="1" hangingPunct="1">
+              <a:defRPr>
+                <a:solidFill>
+                  <a:schemeClr val="tx2"/>
+                </a:solidFill>
+              </a:defRPr>
+            </a:lvl4pPr>
+            <a:lvl5pPr eaLnBrk="1" hangingPunct="1">
+              <a:defRPr>
+                <a:solidFill>
+                  <a:schemeClr val="tx2"/>
+                </a:solidFill>
+              </a:defRPr>
+            </a:lvl5pPr>
+            <a:lvl6pPr eaLnBrk="1" hangingPunct="1">
+              <a:defRPr>
+                <a:solidFill>
+                  <a:schemeClr val="tx2"/>
+                </a:solidFill>
+              </a:defRPr>
+            </a:lvl6pPr>
+            <a:lvl7pPr eaLnBrk="1" hangingPunct="1">
+              <a:defRPr>
+                <a:solidFill>
+                  <a:schemeClr val="tx2"/>
+                </a:solidFill>
+              </a:defRPr>
+            </a:lvl7pPr>
+            <a:lvl8pPr eaLnBrk="1" hangingPunct="1">
+              <a:defRPr>
+                <a:solidFill>
+                  <a:schemeClr val="tx2"/>
+                </a:solidFill>
+              </a:defRPr>
+            </a:lvl8pPr>
+            <a:lvl9pPr eaLnBrk="1" hangingPunct="1">
+              <a:defRPr>
+                <a:solidFill>
+                  <a:schemeClr val="tx2"/>
+                </a:solidFill>
+              </a:defRPr>
+            </a:lvl9pPr>
+          </a:lstStyle>
+          <a:p>
+            <a:r>
+              <a:rPr lang="en-US" dirty="0" err="1" smtClean="0"/>
+              <a:t>Distribu</a:t>
+            </a:r>
+            <a:r>
+              <a:rPr lang="ro-RO" dirty="0" smtClean="0"/>
+              <a:t>tia celor 100 de teste</a:t>
+            </a:r>
+            <a:endParaRPr lang="en-US" dirty="0"/>
+          </a:p>
+        </p:txBody>
+      </p:sp>
+      <p:pic>
+        <p:nvPicPr>
+          <p:cNvPr id="3075" name="Picture 3"/>
+          <p:cNvPicPr>
+            <a:picLocks noChangeAspect="1" noChangeArrowheads="1"/>
+          </p:cNvPicPr>
+          <p:nvPr/>
+        </p:nvPicPr>
+        <p:blipFill>
+          <a:blip r:embed="rId3">
+            <a:extLst>
+              <a:ext uri="{28A0092B-C50C-407E-A947-70E740481C1C}">
+                <a14:useLocalDpi xmlns:a14="http://schemas.microsoft.com/office/drawing/2010/main" val="0"/>
+              </a:ext>
+            </a:extLst>
+          </a:blip>
+          <a:srcRect/>
+          <a:stretch>
+            <a:fillRect/>
+          </a:stretch>
+        </p:blipFill>
+        <p:spPr bwMode="auto">
+          <a:xfrm>
+            <a:off x="190785" y="4534545"/>
+            <a:ext cx="6112535" cy="1903575"/>
+          </a:xfrm>
+          <a:prstGeom prst="rect">
+            <a:avLst/>
+          </a:prstGeom>
+          <a:noFill/>
+          <a:ln>
+            <a:noFill/>
+          </a:ln>
+          <a:effectLst/>
+          <a:extLst>
+            <a:ext uri="{909E8E84-426E-40DD-AFC4-6F175D3DCCD1}">
+              <a14:hiddenFill xmlns:a14="http://schemas.microsoft.com/office/drawing/2010/main">
+                <a:solidFill>
+                  <a:schemeClr val="accent1"/>
+                </a:solidFill>
+              </a14:hiddenFill>
+            </a:ext>
+            <a:ext uri="{91240B29-F687-4F45-9708-019B960494DF}">
+              <a14:hiddenLine xmlns:a14="http://schemas.microsoft.com/office/drawing/2010/main" w="9525">
+                <a:solidFill>
+                  <a:schemeClr val="tx1"/>
+                </a:solidFill>
+                <a:miter lim="800000"/>
+                <a:headEnd/>
+                <a:tailEnd/>
+              </a14:hiddenLine>
+            </a:ext>
+            <a:ext uri="{AF507438-7753-43E0-B8FC-AC1667EBCBE1}">
+              <a14:hiddenEffects xmlns:a14="http://schemas.microsoft.com/office/drawing/2010/main">
+                <a:effectLst>
+                  <a:outerShdw dist="35921" dir="2700000" algn="ctr" rotWithShape="0">
+                    <a:schemeClr val="bg2"/>
+                  </a:outerShdw>
+                </a:effectLst>
+              </a14:hiddenEffects>
+            </a:ext>
+          </a:extLst>
+        </p:spPr>
+      </p:pic>
+      <p:sp>
+        <p:nvSpPr>
+          <p:cNvPr id="7" name="Title 1"/>
+          <p:cNvSpPr txBox="1">
+            <a:spLocks/>
+          </p:cNvSpPr>
+          <p:nvPr/>
+        </p:nvSpPr>
+        <p:spPr>
+          <a:xfrm>
+            <a:off x="5924939" y="758889"/>
+            <a:ext cx="6267061" cy="715219"/>
+          </a:xfrm>
+          <a:prstGeom prst="rect">
+            <a:avLst/>
+          </a:prstGeom>
+        </p:spPr>
+        <p:txBody>
+          <a:bodyPr vert="horz" lIns="91440" tIns="45720" rIns="91440" bIns="45720" rtlCol="0" anchor="b">
+            <a:normAutofit/>
+          </a:bodyPr>
+          <a:lstStyle>
+            <a:lvl1pPr algn="l" defTabSz="457200" rtl="0" eaLnBrk="1" latinLnBrk="0" hangingPunct="1">
+              <a:lnSpc>
+                <a:spcPct val="100000"/>
+              </a:lnSpc>
+              <a:spcBef>
+                <a:spcPct val="0"/>
+              </a:spcBef>
+              <a:buNone/>
+              <a:defRPr sz="2800" b="0" kern="1200" cap="all">
+                <a:solidFill>
+                  <a:schemeClr val="tx1">
+                    <a:lumMod val="75000"/>
+                    <a:lumOff val="25000"/>
+                  </a:schemeClr>
+                </a:solidFill>
+                <a:latin typeface="+mj-lt"/>
+                <a:ea typeface="+mj-ea"/>
+                <a:cs typeface="+mj-cs"/>
+              </a:defRPr>
+            </a:lvl1pPr>
+            <a:lvl2pPr eaLnBrk="1" hangingPunct="1">
+              <a:defRPr>
+                <a:solidFill>
+                  <a:schemeClr val="tx2"/>
+                </a:solidFill>
+              </a:defRPr>
+            </a:lvl2pPr>
+            <a:lvl3pPr eaLnBrk="1" hangingPunct="1">
+              <a:defRPr>
+                <a:solidFill>
+                  <a:schemeClr val="tx2"/>
+                </a:solidFill>
+              </a:defRPr>
+            </a:lvl3pPr>
+            <a:lvl4pPr eaLnBrk="1" hangingPunct="1">
+              <a:defRPr>
+                <a:solidFill>
+                  <a:schemeClr val="tx2"/>
+                </a:solidFill>
+              </a:defRPr>
+            </a:lvl4pPr>
+            <a:lvl5pPr eaLnBrk="1" hangingPunct="1">
+              <a:defRPr>
+                <a:solidFill>
+                  <a:schemeClr val="tx2"/>
+                </a:solidFill>
+              </a:defRPr>
+            </a:lvl5pPr>
+            <a:lvl6pPr eaLnBrk="1" hangingPunct="1">
+              <a:defRPr>
+                <a:solidFill>
+                  <a:schemeClr val="tx2"/>
+                </a:solidFill>
+              </a:defRPr>
+            </a:lvl6pPr>
+            <a:lvl7pPr eaLnBrk="1" hangingPunct="1">
+              <a:defRPr>
+                <a:solidFill>
+                  <a:schemeClr val="tx2"/>
+                </a:solidFill>
+              </a:defRPr>
+            </a:lvl7pPr>
+            <a:lvl8pPr eaLnBrk="1" hangingPunct="1">
+              <a:defRPr>
+                <a:solidFill>
+                  <a:schemeClr val="tx2"/>
+                </a:solidFill>
+              </a:defRPr>
+            </a:lvl8pPr>
+            <a:lvl9pPr eaLnBrk="1" hangingPunct="1">
+              <a:defRPr>
+                <a:solidFill>
+                  <a:schemeClr val="tx2"/>
+                </a:solidFill>
+              </a:defRPr>
+            </a:lvl9pPr>
+          </a:lstStyle>
+          <a:p>
+            <a:r>
+              <a:rPr lang="ro-RO" sz="2000" dirty="0" smtClean="0"/>
+              <a:t>Obiectul verificat de teste – outputul metodei</a:t>
+            </a:r>
+            <a:endParaRPr lang="en-US" sz="2000" dirty="0"/>
+          </a:p>
+        </p:txBody>
+      </p:sp>
+      <p:pic>
+        <p:nvPicPr>
+          <p:cNvPr id="3076" name="Picture 4"/>
+          <p:cNvPicPr>
+            <a:picLocks noChangeAspect="1" noChangeArrowheads="1"/>
+          </p:cNvPicPr>
+          <p:nvPr/>
+        </p:nvPicPr>
+        <p:blipFill>
+          <a:blip r:embed="rId4">
+            <a:extLst>
+              <a:ext uri="{28A0092B-C50C-407E-A947-70E740481C1C}">
+                <a14:useLocalDpi xmlns:a14="http://schemas.microsoft.com/office/drawing/2010/main" val="0"/>
+              </a:ext>
+            </a:extLst>
+          </a:blip>
+          <a:srcRect/>
+          <a:stretch>
+            <a:fillRect/>
+          </a:stretch>
+        </p:blipFill>
+        <p:spPr bwMode="auto">
+          <a:xfrm>
+            <a:off x="6303320" y="1627706"/>
+            <a:ext cx="5761038" cy="1417637"/>
+          </a:xfrm>
+          <a:prstGeom prst="rect">
+            <a:avLst/>
+          </a:prstGeom>
+          <a:noFill/>
+          <a:ln>
+            <a:noFill/>
+          </a:ln>
+          <a:effectLst/>
+          <a:extLst>
+            <a:ext uri="{909E8E84-426E-40DD-AFC4-6F175D3DCCD1}">
+              <a14:hiddenFill xmlns:a14="http://schemas.microsoft.com/office/drawing/2010/main">
+                <a:solidFill>
+                  <a:schemeClr val="accent1"/>
+                </a:solidFill>
+              </a14:hiddenFill>
+            </a:ext>
+            <a:ext uri="{91240B29-F687-4F45-9708-019B960494DF}">
+              <a14:hiddenLine xmlns:a14="http://schemas.microsoft.com/office/drawing/2010/main" w="9525">
+                <a:solidFill>
+                  <a:schemeClr val="tx1"/>
+                </a:solidFill>
+                <a:miter lim="800000"/>
+                <a:headEnd/>
+                <a:tailEnd/>
+              </a14:hiddenLine>
+            </a:ext>
+            <a:ext uri="{AF507438-7753-43E0-B8FC-AC1667EBCBE1}">
+              <a14:hiddenEffects xmlns:a14="http://schemas.microsoft.com/office/drawing/2010/main">
+                <a:effectLst>
+                  <a:outerShdw dist="35921" dir="2700000" algn="ctr" rotWithShape="0">
+                    <a:schemeClr val="bg2"/>
+                  </a:outerShdw>
+                </a:effectLst>
+              </a14:hiddenEffects>
+            </a:ext>
+          </a:extLst>
+        </p:spPr>
+      </p:pic>
+      <p:sp>
+        <p:nvSpPr>
+          <p:cNvPr id="4" name="Rectangle 3"/>
+          <p:cNvSpPr/>
+          <p:nvPr/>
+        </p:nvSpPr>
+        <p:spPr>
+          <a:xfrm>
+            <a:off x="6723667" y="3295396"/>
+            <a:ext cx="5182194" cy="923330"/>
+          </a:xfrm>
+          <a:prstGeom prst="rect">
+            <a:avLst/>
+          </a:prstGeom>
+        </p:spPr>
+        <p:txBody>
+          <a:bodyPr wrap="square">
+            <a:spAutoFit/>
+          </a:bodyPr>
+          <a:lstStyle/>
+          <a:p>
+            <a:r>
+              <a:rPr lang="vi-VN" dirty="0"/>
+              <a:t>Testele verifică fiecare câmp din acest </a:t>
+            </a:r>
+            <a:r>
+              <a:rPr lang="vi-VN" dirty="0" smtClean="0"/>
+              <a:t>dicționar</a:t>
+            </a:r>
+            <a:r>
+              <a:rPr lang="ro-RO" dirty="0" smtClean="0"/>
+              <a:t> (</a:t>
+            </a:r>
+            <a:r>
+              <a:rPr lang="vi-VN" dirty="0" smtClean="0"/>
+              <a:t>atât </a:t>
+            </a:r>
+            <a:r>
+              <a:rPr lang="vi-VN" dirty="0"/>
+              <a:t>individual, cât și </a:t>
+            </a:r>
+            <a:r>
+              <a:rPr lang="vi-VN" dirty="0" smtClean="0"/>
+              <a:t>combinat</a:t>
+            </a:r>
+            <a:r>
+              <a:rPr lang="ro-RO" dirty="0" smtClean="0"/>
+              <a:t>)</a:t>
+            </a:r>
+            <a:r>
+              <a:rPr lang="vi-VN" dirty="0" smtClean="0"/>
+              <a:t> </a:t>
+            </a:r>
+            <a:r>
+              <a:rPr lang="vi-VN" dirty="0"/>
+              <a:t>pentru a confirma că logica metodei este corectă.</a:t>
+            </a:r>
+            <a:endParaRPr lang="en-US" dirty="0"/>
+          </a:p>
+        </p:txBody>
+      </p:sp>
     </p:spTree>
     <p:extLst>
       <p:ext uri="{BB962C8B-B14F-4D97-AF65-F5344CB8AC3E}">
-        <p14:creationId xmlns:p14="http://schemas.microsoft.com/office/powerpoint/2010/main" val="1498890535"/>
+        <p14:creationId xmlns:p14="http://schemas.microsoft.com/office/powerpoint/2010/main" val="932287663"/>
       </p:ext>
     </p:extLst>
   </p:cSld>
@@ -6088,13 +7303,7 @@
       </p:grpSpPr>
       <p:sp>
         <p:nvSpPr>
-          <p:cNvPr id="2" name="Title 1">
-            <a:extLst>
-              <a:ext uri="{FF2B5EF4-FFF2-40B4-BE49-F238E27FC236}">
-                <a16:creationId xmlns:a16="http://schemas.microsoft.com/office/drawing/2014/main" id="{264FDE86-3C1A-178A-35A5-BF4D8A27B544}"/>
-              </a:ext>
-            </a:extLst>
-          </p:cNvPr>
+          <p:cNvPr id="2" name="Title 1"/>
           <p:cNvSpPr>
             <a:spLocks noGrp="1"/>
           </p:cNvSpPr>
@@ -6104,777 +7313,380 @@
         </p:nvSpPr>
         <p:spPr>
           <a:xfrm>
-            <a:off x="767857" y="933450"/>
-            <a:ext cx="3259020" cy="1722419"/>
+            <a:off x="581192" y="702156"/>
+            <a:ext cx="11029616" cy="604130"/>
           </a:xfrm>
         </p:spPr>
         <p:txBody>
-          <a:bodyPr>
-            <a:normAutofit fontScale="90000"/>
-          </a:bodyPr>
+          <a:bodyPr/>
           <a:lstStyle/>
           <a:p>
             <a:r>
-              <a:rPr lang="en-US" dirty="0" err="1"/>
-              <a:t>Clasa</a:t>
-            </a:r>
-            <a:r>
-              <a:rPr lang="en-US" dirty="0"/>
-              <a:t> </a:t>
-            </a:r>
-            <a:r>
-              <a:rPr lang="en-US" dirty="0" err="1"/>
-              <a:t>FitnessClassBooking</a:t>
-            </a:r>
-            <a:r>
-              <a:rPr lang="en-US" dirty="0"/>
-              <a:t> </a:t>
-            </a:r>
-            <a:br>
-              <a:rPr lang="ro-RO" dirty="0"/>
-            </a:br>
-            <a:r>
-              <a:rPr lang="en-US" sz="2000" dirty="0"/>
-              <a:t>Func</a:t>
-            </a:r>
-            <a:r>
-              <a:rPr lang="ro-RO" sz="2000" dirty="0"/>
-              <a:t>t</a:t>
-            </a:r>
-            <a:r>
-              <a:rPr lang="en-US" sz="2000" dirty="0" err="1"/>
-              <a:t>ionalitate</a:t>
-            </a:r>
-            <a:r>
-              <a:rPr lang="ro-RO" sz="2000" dirty="0"/>
-              <a:t>a</a:t>
-            </a:r>
-            <a:r>
-              <a:rPr lang="en-US" sz="2000" dirty="0"/>
-              <a:t> </a:t>
-            </a:r>
-            <a:r>
-              <a:rPr lang="en-US" sz="2000" dirty="0" err="1"/>
-              <a:t>testată</a:t>
-            </a:r>
-            <a:endParaRPr lang="en-US" sz="2000" dirty="0"/>
+              <a:rPr lang="nb-NO" b="1" dirty="0"/>
+              <a:t>Validări și reguli de </a:t>
+            </a:r>
+            <a:r>
+              <a:rPr lang="nb-NO" b="1" dirty="0" smtClean="0"/>
+              <a:t>business</a:t>
+            </a:r>
+            <a:endParaRPr lang="en-US" dirty="0"/>
           </a:p>
         </p:txBody>
       </p:sp>
-      <p:graphicFrame>
-        <p:nvGraphicFramePr>
-          <p:cNvPr id="8" name="Content Placeholder 7">
-            <a:extLst>
-              <a:ext uri="{FF2B5EF4-FFF2-40B4-BE49-F238E27FC236}">
-                <a16:creationId xmlns:a16="http://schemas.microsoft.com/office/drawing/2014/main" id="{F6EF54FB-E507-46C7-00C7-CB0661E5ED5A}"/>
-              </a:ext>
-            </a:extLst>
-          </p:cNvPr>
-          <p:cNvGraphicFramePr>
-            <a:graphicFrameLocks noGrp="1"/>
-          </p:cNvGraphicFramePr>
-          <p:nvPr>
-            <p:ph idx="1"/>
-            <p:extLst>
-              <p:ext uri="{D42A27DB-BD31-4B8C-83A1-F6EECF244321}">
-                <p14:modId xmlns:p14="http://schemas.microsoft.com/office/powerpoint/2010/main" val="2895779132"/>
-              </p:ext>
-            </p:extLst>
-          </p:nvPr>
-        </p:nvGraphicFramePr>
-        <p:xfrm>
-          <a:off x="767857" y="2836654"/>
-          <a:ext cx="3031851" cy="3168964"/>
-        </p:xfrm>
-        <a:graphic>
-          <a:graphicData uri="http://schemas.openxmlformats.org/drawingml/2006/table">
-            <a:tbl>
-              <a:tblPr firstRow="1" bandRow="1">
-                <a:tableStyleId>{93296810-A885-4BE3-A3E7-6D5BEEA58F35}</a:tableStyleId>
-              </a:tblPr>
-              <a:tblGrid>
-                <a:gridCol w="1010617">
-                  <a:extLst>
-                    <a:ext uri="{9D8B030D-6E8A-4147-A177-3AD203B41FA5}">
-                      <a16:colId xmlns:a16="http://schemas.microsoft.com/office/drawing/2014/main" val="2499345031"/>
-                    </a:ext>
-                  </a:extLst>
-                </a:gridCol>
-                <a:gridCol w="1010617">
-                  <a:extLst>
-                    <a:ext uri="{9D8B030D-6E8A-4147-A177-3AD203B41FA5}">
-                      <a16:colId xmlns:a16="http://schemas.microsoft.com/office/drawing/2014/main" val="2745786238"/>
-                    </a:ext>
-                  </a:extLst>
-                </a:gridCol>
-                <a:gridCol w="1010617">
-                  <a:extLst>
-                    <a:ext uri="{9D8B030D-6E8A-4147-A177-3AD203B41FA5}">
-                      <a16:colId xmlns:a16="http://schemas.microsoft.com/office/drawing/2014/main" val="4232967936"/>
-                    </a:ext>
-                  </a:extLst>
-                </a:gridCol>
-              </a:tblGrid>
-              <a:tr h="651164">
-                <a:tc>
-                  <a:txBody>
-                    <a:bodyPr/>
-                    <a:lstStyle/>
-                    <a:p>
-                      <a:pPr algn="l">
-                        <a:buNone/>
-                      </a:pPr>
-                      <a:r>
-                        <a:rPr lang="en-US" sz="1200" dirty="0">
-                          <a:effectLst/>
-                        </a:rPr>
-                        <a:t>Status</a:t>
-                      </a:r>
-                    </a:p>
-                  </a:txBody>
-                  <a:tcPr marL="95250" marR="95250" marT="47625" marB="47625" anchor="ctr"/>
-                </a:tc>
-                <a:tc>
-                  <a:txBody>
-                    <a:bodyPr/>
-                    <a:lstStyle/>
-                    <a:p>
-                      <a:pPr algn="l">
-                        <a:buNone/>
-                      </a:pPr>
-                      <a:r>
-                        <a:rPr lang="en-US" sz="1200">
-                          <a:effectLst/>
-                        </a:rPr>
-                        <a:t>Semnificație</a:t>
-                      </a:r>
-                    </a:p>
-                  </a:txBody>
-                  <a:tcPr marL="95250" marR="95250" marT="47625" marB="47625" anchor="ctr"/>
-                </a:tc>
-                <a:tc>
-                  <a:txBody>
-                    <a:bodyPr/>
-                    <a:lstStyle/>
-                    <a:p>
-                      <a:pPr algn="l">
-                        <a:buNone/>
-                      </a:pPr>
-                      <a:r>
-                        <a:rPr lang="en-US" sz="1200" dirty="0" err="1">
-                          <a:effectLst/>
-                        </a:rPr>
-                        <a:t>Consumă</a:t>
-                      </a:r>
-                      <a:r>
-                        <a:rPr lang="en-US" sz="1200" dirty="0">
-                          <a:effectLst/>
-                        </a:rPr>
-                        <a:t> </a:t>
-                      </a:r>
-                      <a:r>
-                        <a:rPr lang="en-US" sz="1200" dirty="0" err="1">
-                          <a:effectLst/>
-                        </a:rPr>
-                        <a:t>ședință</a:t>
-                      </a:r>
-                      <a:r>
-                        <a:rPr lang="en-US" sz="1200" dirty="0">
-                          <a:effectLst/>
-                        </a:rPr>
-                        <a:t> din </a:t>
-                      </a:r>
-                      <a:r>
-                        <a:rPr lang="en-US" sz="1200" dirty="0" err="1">
-                          <a:effectLst/>
-                        </a:rPr>
-                        <a:t>pachet</a:t>
-                      </a:r>
-                      <a:r>
-                        <a:rPr lang="en-US" sz="1200" dirty="0">
-                          <a:effectLst/>
-                        </a:rPr>
-                        <a:t>?</a:t>
-                      </a:r>
-                    </a:p>
-                  </a:txBody>
-                  <a:tcPr marL="95250" marR="95250" marT="47625" marB="47625" anchor="ctr"/>
-                </a:tc>
-                <a:extLst>
-                  <a:ext uri="{0D108BD9-81ED-4DB2-BD59-A6C34878D82A}">
-                    <a16:rowId xmlns:a16="http://schemas.microsoft.com/office/drawing/2014/main" val="929505174"/>
-                  </a:ext>
-                </a:extLst>
-              </a:tr>
-              <a:tr h="856986">
-                <a:tc>
-                  <a:txBody>
-                    <a:bodyPr/>
-                    <a:lstStyle/>
-                    <a:p>
-                      <a:pPr>
-                        <a:buNone/>
-                      </a:pPr>
-                      <a:r>
-                        <a:rPr lang="en-US" sz="1200">
-                          <a:solidFill>
-                            <a:schemeClr val="tx1"/>
-                          </a:solidFill>
-                          <a:effectLst/>
-                          <a:latin typeface="Consolas" panose="020B0609020204030204" pitchFamily="49" charset="0"/>
-                        </a:rPr>
-                        <a:t>attended</a:t>
-                      </a:r>
-                      <a:endParaRPr lang="en-US" sz="1200">
-                        <a:solidFill>
-                          <a:schemeClr val="tx1"/>
-                        </a:solidFill>
-                        <a:effectLst/>
-                      </a:endParaRPr>
-                    </a:p>
-                  </a:txBody>
-                  <a:tcPr marL="95250" marR="95250" marT="47625" marB="47625" anchor="ctr"/>
-                </a:tc>
-                <a:tc>
-                  <a:txBody>
-                    <a:bodyPr/>
-                    <a:lstStyle/>
-                    <a:p>
-                      <a:pPr>
-                        <a:buNone/>
-                      </a:pPr>
-                      <a:r>
-                        <a:rPr lang="en-US" sz="1200">
-                          <a:solidFill>
-                            <a:schemeClr val="tx1"/>
-                          </a:solidFill>
-                          <a:effectLst/>
-                        </a:rPr>
-                        <a:t>Clientul a participat la ședință</a:t>
-                      </a:r>
-                    </a:p>
-                  </a:txBody>
-                  <a:tcPr marL="95250" marR="95250" marT="47625" marB="47625" anchor="ctr"/>
-                </a:tc>
-                <a:tc>
-                  <a:txBody>
-                    <a:bodyPr/>
-                    <a:lstStyle/>
-                    <a:p>
-                      <a:pPr>
-                        <a:buNone/>
-                      </a:pPr>
-                      <a:r>
-                        <a:rPr lang="en-US" sz="1200" b="1">
-                          <a:solidFill>
-                            <a:schemeClr val="tx1"/>
-                          </a:solidFill>
-                          <a:effectLst/>
-                        </a:rPr>
-                        <a:t>Da</a:t>
-                      </a:r>
-                      <a:endParaRPr lang="en-US" sz="1200">
-                        <a:solidFill>
-                          <a:schemeClr val="tx1"/>
-                        </a:solidFill>
-                        <a:effectLst/>
-                      </a:endParaRPr>
-                    </a:p>
-                  </a:txBody>
-                  <a:tcPr marL="95250" marR="95250" marT="47625" marB="47625" anchor="ctr"/>
-                </a:tc>
-                <a:extLst>
-                  <a:ext uri="{0D108BD9-81ED-4DB2-BD59-A6C34878D82A}">
-                    <a16:rowId xmlns:a16="http://schemas.microsoft.com/office/drawing/2014/main" val="2445302600"/>
-                  </a:ext>
-                </a:extLst>
-              </a:tr>
-              <a:tr h="928582">
-                <a:tc>
-                  <a:txBody>
-                    <a:bodyPr/>
-                    <a:lstStyle/>
-                    <a:p>
-                      <a:pPr>
-                        <a:buNone/>
-                      </a:pPr>
-                      <a:r>
-                        <a:rPr lang="en-US" sz="1200">
-                          <a:solidFill>
-                            <a:schemeClr val="tx1"/>
-                          </a:solidFill>
-                          <a:effectLst/>
-                          <a:latin typeface="Consolas" panose="020B0609020204030204" pitchFamily="49" charset="0"/>
-                        </a:rPr>
-                        <a:t>no_show</a:t>
-                      </a:r>
-                      <a:endParaRPr lang="en-US" sz="1200">
-                        <a:solidFill>
-                          <a:schemeClr val="tx1"/>
-                        </a:solidFill>
-                        <a:effectLst/>
-                      </a:endParaRPr>
-                    </a:p>
-                  </a:txBody>
-                  <a:tcPr marL="95250" marR="95250" marT="47625" marB="47625" anchor="ctr"/>
-                </a:tc>
-                <a:tc>
-                  <a:txBody>
-                    <a:bodyPr/>
-                    <a:lstStyle/>
-                    <a:p>
-                      <a:pPr>
-                        <a:buNone/>
-                      </a:pPr>
-                      <a:r>
-                        <a:rPr lang="pt-BR" sz="1200">
-                          <a:solidFill>
-                            <a:schemeClr val="tx1"/>
-                          </a:solidFill>
-                          <a:effectLst/>
-                        </a:rPr>
-                        <a:t>Clientul nu s-a prezentat și nu a anunțat</a:t>
-                      </a:r>
-                    </a:p>
-                  </a:txBody>
-                  <a:tcPr marL="95250" marR="95250" marT="47625" marB="47625" anchor="ctr"/>
-                </a:tc>
-                <a:tc>
-                  <a:txBody>
-                    <a:bodyPr/>
-                    <a:lstStyle/>
-                    <a:p>
-                      <a:pPr>
-                        <a:buNone/>
-                      </a:pPr>
-                      <a:r>
-                        <a:rPr lang="en-US" sz="1200" b="1">
-                          <a:solidFill>
-                            <a:schemeClr val="tx1"/>
-                          </a:solidFill>
-                          <a:effectLst/>
-                        </a:rPr>
-                        <a:t>Da</a:t>
-                      </a:r>
-                      <a:endParaRPr lang="en-US" sz="1200">
-                        <a:solidFill>
-                          <a:schemeClr val="tx1"/>
-                        </a:solidFill>
-                        <a:effectLst/>
-                      </a:endParaRPr>
-                    </a:p>
-                  </a:txBody>
-                  <a:tcPr marL="95250" marR="95250" marT="47625" marB="47625" anchor="ctr"/>
-                </a:tc>
-                <a:extLst>
-                  <a:ext uri="{0D108BD9-81ED-4DB2-BD59-A6C34878D82A}">
-                    <a16:rowId xmlns:a16="http://schemas.microsoft.com/office/drawing/2014/main" val="3212780542"/>
-                  </a:ext>
-                </a:extLst>
-              </a:tr>
-              <a:tr h="651164">
-                <a:tc>
-                  <a:txBody>
-                    <a:bodyPr/>
-                    <a:lstStyle/>
-                    <a:p>
-                      <a:pPr>
-                        <a:buNone/>
-                      </a:pPr>
-                      <a:r>
-                        <a:rPr lang="en-US" sz="1200">
-                          <a:solidFill>
-                            <a:schemeClr val="tx1"/>
-                          </a:solidFill>
-                          <a:effectLst/>
-                          <a:latin typeface="Consolas" panose="020B0609020204030204" pitchFamily="49" charset="0"/>
-                        </a:rPr>
-                        <a:t>cancelled</a:t>
-                      </a:r>
-                      <a:endParaRPr lang="en-US" sz="1200">
-                        <a:solidFill>
-                          <a:schemeClr val="tx1"/>
-                        </a:solidFill>
-                        <a:effectLst/>
-                      </a:endParaRPr>
-                    </a:p>
-                  </a:txBody>
-                  <a:tcPr marL="95250" marR="95250" marT="47625" marB="47625" anchor="ctr"/>
-                </a:tc>
-                <a:tc>
-                  <a:txBody>
-                    <a:bodyPr/>
-                    <a:lstStyle/>
-                    <a:p>
-                      <a:pPr>
-                        <a:buNone/>
-                      </a:pPr>
-                      <a:r>
-                        <a:rPr lang="en-US" sz="1200">
-                          <a:solidFill>
-                            <a:schemeClr val="tx1"/>
-                          </a:solidFill>
-                          <a:effectLst/>
-                        </a:rPr>
-                        <a:t>Clientul a anulat la timp</a:t>
-                      </a:r>
-                    </a:p>
-                  </a:txBody>
-                  <a:tcPr marL="95250" marR="95250" marT="47625" marB="47625" anchor="ctr"/>
-                </a:tc>
-                <a:tc>
-                  <a:txBody>
-                    <a:bodyPr/>
-                    <a:lstStyle/>
-                    <a:p>
-                      <a:pPr>
-                        <a:buNone/>
-                      </a:pPr>
-                      <a:r>
-                        <a:rPr lang="en-US" sz="1200" b="1" dirty="0">
-                          <a:solidFill>
-                            <a:schemeClr val="tx1"/>
-                          </a:solidFill>
-                          <a:effectLst/>
-                        </a:rPr>
-                        <a:t>Nu</a:t>
-                      </a:r>
-                      <a:endParaRPr lang="en-US" sz="1200" dirty="0">
-                        <a:solidFill>
-                          <a:schemeClr val="tx1"/>
-                        </a:solidFill>
-                        <a:effectLst/>
-                      </a:endParaRPr>
-                    </a:p>
-                  </a:txBody>
-                  <a:tcPr marL="95250" marR="95250" marT="47625" marB="47625" anchor="ctr"/>
-                </a:tc>
-                <a:extLst>
-                  <a:ext uri="{0D108BD9-81ED-4DB2-BD59-A6C34878D82A}">
-                    <a16:rowId xmlns:a16="http://schemas.microsoft.com/office/drawing/2014/main" val="692863160"/>
-                  </a:ext>
-                </a:extLst>
-              </a:tr>
-            </a:tbl>
-          </a:graphicData>
-        </a:graphic>
-      </p:graphicFrame>
-      <p:sp>
-        <p:nvSpPr>
-          <p:cNvPr id="4" name="Text Placeholder 3">
-            <a:extLst>
-              <a:ext uri="{FF2B5EF4-FFF2-40B4-BE49-F238E27FC236}">
-                <a16:creationId xmlns:a16="http://schemas.microsoft.com/office/drawing/2014/main" id="{3A746267-5A55-F8A8-E748-36CD2B74931B}"/>
-              </a:ext>
-            </a:extLst>
-          </p:cNvPr>
+      <p:sp>
+        <p:nvSpPr>
+          <p:cNvPr id="3" name="Content Placeholder 2"/>
           <p:cNvSpPr>
             <a:spLocks noGrp="1"/>
           </p:cNvSpPr>
           <p:nvPr>
-            <p:ph type="body" sz="half" idx="2"/>
+            <p:ph idx="1"/>
           </p:nvPr>
         </p:nvSpPr>
         <p:spPr>
           <a:xfrm>
-            <a:off x="4580074" y="1917537"/>
-            <a:ext cx="3031852" cy="3001392"/>
+            <a:off x="515877" y="1343608"/>
+            <a:ext cx="11548605" cy="5187821"/>
           </a:xfrm>
         </p:spPr>
         <p:txBody>
-          <a:bodyPr>
-            <a:normAutofit/>
-          </a:bodyPr>
+          <a:bodyPr/>
           <a:lstStyle/>
           <a:p>
             <a:r>
-              <a:rPr lang="en-US" b="1" dirty="0" err="1">
-                <a:solidFill>
-                  <a:schemeClr val="tx1"/>
-                </a:solidFill>
-              </a:rPr>
-              <a:t>Exemplu</a:t>
-            </a:r>
-            <a:r>
-              <a:rPr lang="en-US" b="1" dirty="0">
-                <a:solidFill>
-                  <a:schemeClr val="tx1"/>
-                </a:solidFill>
-              </a:rPr>
-              <a:t> </a:t>
-            </a:r>
-            <a:r>
-              <a:rPr lang="en-US" b="1" dirty="0" err="1">
-                <a:solidFill>
-                  <a:schemeClr val="tx1"/>
-                </a:solidFill>
-              </a:rPr>
-              <a:t>complet</a:t>
-            </a:r>
-            <a:r>
-              <a:rPr lang="en-US" b="1" dirty="0">
-                <a:solidFill>
-                  <a:schemeClr val="tx1"/>
-                </a:solidFill>
-              </a:rPr>
-              <a:t> de </a:t>
-            </a:r>
-            <a:r>
-              <a:rPr lang="en-US" b="1" dirty="0" err="1">
-                <a:solidFill>
-                  <a:schemeClr val="tx1"/>
-                </a:solidFill>
-              </a:rPr>
-              <a:t>calcul</a:t>
-            </a:r>
-            <a:r>
-              <a:rPr lang="ro-RO" b="1" dirty="0">
-                <a:solidFill>
-                  <a:schemeClr val="tx1"/>
-                </a:solidFill>
-              </a:rPr>
-              <a:t>   </a:t>
-            </a:r>
-            <a:r>
-              <a:rPr lang="ro-RO" sz="1400" dirty="0">
-                <a:solidFill>
-                  <a:schemeClr val="tx1"/>
-                </a:solidFill>
-              </a:rPr>
-              <a:t>input:</a:t>
-            </a:r>
-          </a:p>
-          <a:p>
-            <a:endParaRPr lang="ro-RO" sz="1400" dirty="0">
-              <a:solidFill>
-                <a:schemeClr val="tx1"/>
-              </a:solidFill>
-            </a:endParaRPr>
-          </a:p>
-          <a:p>
-            <a:endParaRPr lang="ro-RO" sz="1400" dirty="0">
-              <a:solidFill>
-                <a:schemeClr val="tx1"/>
-              </a:solidFill>
-            </a:endParaRPr>
-          </a:p>
-          <a:p>
-            <a:r>
-              <a:rPr lang="ro-RO" sz="1400" dirty="0">
-                <a:solidFill>
-                  <a:schemeClr val="tx1"/>
-                </a:solidFill>
-              </a:rPr>
-              <a:t>output:</a:t>
-            </a:r>
-            <a:endParaRPr lang="en-US" sz="1400" dirty="0">
-              <a:solidFill>
-                <a:schemeClr val="tx1"/>
-              </a:solidFill>
-            </a:endParaRPr>
-          </a:p>
-          <a:p>
-            <a:endParaRPr lang="en-US" b="1" dirty="0">
-              <a:solidFill>
-                <a:schemeClr val="tx1"/>
-              </a:solidFill>
-            </a:endParaRPr>
+              <a:rPr lang="vi-VN" b="1" dirty="0"/>
+              <a:t>Validări constructor __init</a:t>
+            </a:r>
+            <a:r>
+              <a:rPr lang="vi-VN" b="1" dirty="0" smtClean="0"/>
+              <a:t>__</a:t>
+            </a:r>
+            <a:endParaRPr lang="ro-RO" b="1" dirty="0"/>
+          </a:p>
+          <a:p>
+            <a:pPr marL="0" indent="0">
+              <a:buNone/>
+            </a:pPr>
+            <a:endParaRPr lang="ro-RO" b="1" dirty="0" smtClean="0"/>
+          </a:p>
+          <a:p>
+            <a:pPr marL="0" indent="0">
+              <a:buNone/>
+            </a:pPr>
+            <a:endParaRPr lang="vi-VN" b="1" dirty="0"/>
+          </a:p>
+          <a:p>
+            <a:r>
+              <a:rPr lang="vi-VN" b="1" dirty="0"/>
+              <a:t>Validări metodă </a:t>
+            </a:r>
+            <a:r>
+              <a:rPr lang="vi-VN" b="1" dirty="0" smtClean="0"/>
+              <a:t>evaluate_client_package</a:t>
+            </a:r>
+            <a:endParaRPr lang="ro-RO" b="1" dirty="0" smtClean="0"/>
+          </a:p>
+          <a:p>
+            <a:endParaRPr lang="ro-RO" b="1" dirty="0"/>
+          </a:p>
+          <a:p>
+            <a:endParaRPr lang="ro-RO" b="1" dirty="0" smtClean="0"/>
+          </a:p>
+          <a:p>
+            <a:pPr marL="0" indent="0">
+              <a:buNone/>
+            </a:pPr>
+            <a:endParaRPr lang="ro-RO" dirty="0" smtClean="0"/>
+          </a:p>
+          <a:p>
+            <a:r>
+              <a:rPr lang="vi-VN" b="1" dirty="0"/>
+              <a:t>Cazul special bool / </a:t>
+            </a:r>
+            <a:r>
+              <a:rPr lang="vi-VN" b="1" dirty="0" smtClean="0"/>
+              <a:t>int</a:t>
+            </a:r>
+            <a:endParaRPr lang="ro-RO" b="1" dirty="0" smtClean="0"/>
+          </a:p>
+          <a:p>
+            <a:endParaRPr lang="ro-RO" b="1" dirty="0"/>
+          </a:p>
+          <a:p>
+            <a:pPr marL="0" indent="0">
+              <a:buNone/>
+            </a:pPr>
+            <a:endParaRPr lang="ro-RO" b="1" dirty="0" smtClean="0"/>
+          </a:p>
+          <a:p>
+            <a:r>
+              <a:rPr lang="vi-VN" b="1" dirty="0"/>
+              <a:t>Formula costului</a:t>
+            </a:r>
+            <a:endParaRPr lang="vi-VN" b="1" dirty="0"/>
           </a:p>
         </p:txBody>
       </p:sp>
       <p:pic>
         <p:nvPicPr>
-          <p:cNvPr id="6" name="Picture 5">
-            <a:extLst>
-              <a:ext uri="{FF2B5EF4-FFF2-40B4-BE49-F238E27FC236}">
-                <a16:creationId xmlns:a16="http://schemas.microsoft.com/office/drawing/2014/main" id="{42535FF0-8D3F-118C-F412-CF0FE31596CF}"/>
-              </a:ext>
-            </a:extLst>
-          </p:cNvPr>
+          <p:cNvPr id="4098" name="Picture 2"/>
           <p:cNvPicPr>
-            <a:picLocks noChangeAspect="1"/>
+            <a:picLocks noChangeAspect="1" noChangeArrowheads="1"/>
           </p:cNvPicPr>
           <p:nvPr/>
         </p:nvPicPr>
         <p:blipFill>
-          <a:blip r:embed="rId2"/>
+          <a:blip r:embed="rId2">
+            <a:extLst>
+              <a:ext uri="{28A0092B-C50C-407E-A947-70E740481C1C}">
+                <a14:useLocalDpi xmlns:a14="http://schemas.microsoft.com/office/drawing/2010/main" val="0"/>
+              </a:ext>
+            </a:extLst>
+          </a:blip>
+          <a:srcRect/>
           <a:stretch>
             <a:fillRect/>
           </a:stretch>
         </p:blipFill>
-        <p:spPr>
-          <a:xfrm>
-            <a:off x="4639760" y="755325"/>
-            <a:ext cx="7173326" cy="1162212"/>
+        <p:spPr bwMode="auto">
+          <a:xfrm>
+            <a:off x="4332289" y="1482405"/>
+            <a:ext cx="4046602" cy="1066716"/>
           </a:xfrm>
           <a:prstGeom prst="rect">
             <a:avLst/>
           </a:prstGeom>
+          <a:noFill/>
+          <a:ln>
+            <a:noFill/>
+          </a:ln>
+          <a:effectLst/>
+          <a:extLst>
+            <a:ext uri="{909E8E84-426E-40DD-AFC4-6F175D3DCCD1}">
+              <a14:hiddenFill xmlns:a14="http://schemas.microsoft.com/office/drawing/2010/main">
+                <a:solidFill>
+                  <a:schemeClr val="accent1"/>
+                </a:solidFill>
+              </a14:hiddenFill>
+            </a:ext>
+            <a:ext uri="{91240B29-F687-4F45-9708-019B960494DF}">
+              <a14:hiddenLine xmlns:a14="http://schemas.microsoft.com/office/drawing/2010/main" w="9525">
+                <a:solidFill>
+                  <a:schemeClr val="tx1"/>
+                </a:solidFill>
+                <a:miter lim="800000"/>
+                <a:headEnd/>
+                <a:tailEnd/>
+              </a14:hiddenLine>
+            </a:ext>
+            <a:ext uri="{AF507438-7753-43E0-B8FC-AC1667EBCBE1}">
+              <a14:hiddenEffects xmlns:a14="http://schemas.microsoft.com/office/drawing/2010/main">
+                <a:effectLst>
+                  <a:outerShdw dist="35921" dir="2700000" algn="ctr" rotWithShape="0">
+                    <a:schemeClr val="bg2"/>
+                  </a:outerShdw>
+                </a:effectLst>
+              </a14:hiddenEffects>
+            </a:ext>
+          </a:extLst>
         </p:spPr>
       </p:pic>
       <p:pic>
         <p:nvPicPr>
-          <p:cNvPr id="10" name="Picture 9">
-            <a:extLst>
-              <a:ext uri="{FF2B5EF4-FFF2-40B4-BE49-F238E27FC236}">
-                <a16:creationId xmlns:a16="http://schemas.microsoft.com/office/drawing/2014/main" id="{9EF30BD4-7735-70DF-30E3-F1F80D6D1648}"/>
-              </a:ext>
-            </a:extLst>
-          </p:cNvPr>
+          <p:cNvPr id="4099" name="Picture 3"/>
           <p:cNvPicPr>
-            <a:picLocks noChangeAspect="1"/>
+            <a:picLocks noChangeAspect="1" noChangeArrowheads="1"/>
           </p:cNvPicPr>
           <p:nvPr/>
         </p:nvPicPr>
         <p:blipFill>
-          <a:blip r:embed="rId3"/>
+          <a:blip r:embed="rId3">
+            <a:extLst>
+              <a:ext uri="{28A0092B-C50C-407E-A947-70E740481C1C}">
+                <a14:useLocalDpi xmlns:a14="http://schemas.microsoft.com/office/drawing/2010/main" val="0"/>
+              </a:ext>
+            </a:extLst>
+          </a:blip>
+          <a:srcRect/>
           <a:stretch>
             <a:fillRect/>
           </a:stretch>
         </p:blipFill>
-        <p:spPr>
-          <a:xfrm>
-            <a:off x="4639760" y="2497525"/>
-            <a:ext cx="4644917" cy="815874"/>
+        <p:spPr bwMode="auto">
+          <a:xfrm>
+            <a:off x="6046269" y="2651758"/>
+            <a:ext cx="3913083" cy="1789614"/>
           </a:xfrm>
           <a:prstGeom prst="rect">
             <a:avLst/>
           </a:prstGeom>
+          <a:noFill/>
+          <a:ln>
+            <a:noFill/>
+          </a:ln>
+          <a:effectLst/>
+          <a:extLst>
+            <a:ext uri="{909E8E84-426E-40DD-AFC4-6F175D3DCCD1}">
+              <a14:hiddenFill xmlns:a14="http://schemas.microsoft.com/office/drawing/2010/main">
+                <a:solidFill>
+                  <a:schemeClr val="accent1"/>
+                </a:solidFill>
+              </a14:hiddenFill>
+            </a:ext>
+            <a:ext uri="{91240B29-F687-4F45-9708-019B960494DF}">
+              <a14:hiddenLine xmlns:a14="http://schemas.microsoft.com/office/drawing/2010/main" w="9525">
+                <a:solidFill>
+                  <a:schemeClr val="tx1"/>
+                </a:solidFill>
+                <a:miter lim="800000"/>
+                <a:headEnd/>
+                <a:tailEnd/>
+              </a14:hiddenLine>
+            </a:ext>
+            <a:ext uri="{AF507438-7753-43E0-B8FC-AC1667EBCBE1}">
+              <a14:hiddenEffects xmlns:a14="http://schemas.microsoft.com/office/drawing/2010/main">
+                <a:effectLst>
+                  <a:outerShdw dist="35921" dir="2700000" algn="ctr" rotWithShape="0">
+                    <a:schemeClr val="bg2"/>
+                  </a:outerShdw>
+                </a:effectLst>
+              </a14:hiddenEffects>
+            </a:ext>
+          </a:extLst>
         </p:spPr>
       </p:pic>
       <p:pic>
         <p:nvPicPr>
-          <p:cNvPr id="14" name="Picture 13">
-            <a:extLst>
-              <a:ext uri="{FF2B5EF4-FFF2-40B4-BE49-F238E27FC236}">
-                <a16:creationId xmlns:a16="http://schemas.microsoft.com/office/drawing/2014/main" id="{29E8646B-11F2-247A-5BB1-5582D21D7FE1}"/>
-              </a:ext>
-            </a:extLst>
-          </p:cNvPr>
+          <p:cNvPr id="4100" name="Picture 4"/>
           <p:cNvPicPr>
-            <a:picLocks noChangeAspect="1"/>
+            <a:picLocks noChangeAspect="1" noChangeArrowheads="1"/>
           </p:cNvPicPr>
           <p:nvPr/>
         </p:nvPicPr>
         <p:blipFill>
-          <a:blip r:embed="rId4"/>
+          <a:blip r:embed="rId4">
+            <a:extLst>
+              <a:ext uri="{28A0092B-C50C-407E-A947-70E740481C1C}">
+                <a14:useLocalDpi xmlns:a14="http://schemas.microsoft.com/office/drawing/2010/main" val="0"/>
+              </a:ext>
+            </a:extLst>
+          </a:blip>
+          <a:srcRect/>
           <a:stretch>
             <a:fillRect/>
           </a:stretch>
         </p:blipFill>
-        <p:spPr>
-          <a:xfrm>
-            <a:off x="4713445" y="3534362"/>
-            <a:ext cx="3796403" cy="1458221"/>
+        <p:spPr bwMode="auto">
+          <a:xfrm>
+            <a:off x="940772" y="6263789"/>
+            <a:ext cx="7529756" cy="510235"/>
           </a:xfrm>
           <a:prstGeom prst="rect">
             <a:avLst/>
           </a:prstGeom>
+          <a:noFill/>
+          <a:ln>
+            <a:noFill/>
+          </a:ln>
+          <a:effectLst/>
+          <a:extLst>
+            <a:ext uri="{909E8E84-426E-40DD-AFC4-6F175D3DCCD1}">
+              <a14:hiddenFill xmlns:a14="http://schemas.microsoft.com/office/drawing/2010/main">
+                <a:solidFill>
+                  <a:schemeClr val="accent1"/>
+                </a:solidFill>
+              </a14:hiddenFill>
+            </a:ext>
+            <a:ext uri="{91240B29-F687-4F45-9708-019B960494DF}">
+              <a14:hiddenLine xmlns:a14="http://schemas.microsoft.com/office/drawing/2010/main" w="9525">
+                <a:solidFill>
+                  <a:schemeClr val="tx1"/>
+                </a:solidFill>
+                <a:miter lim="800000"/>
+                <a:headEnd/>
+                <a:tailEnd/>
+              </a14:hiddenLine>
+            </a:ext>
+            <a:ext uri="{AF507438-7753-43E0-B8FC-AC1667EBCBE1}">
+              <a14:hiddenEffects xmlns:a14="http://schemas.microsoft.com/office/drawing/2010/main">
+                <a:effectLst>
+                  <a:outerShdw dist="35921" dir="2700000" algn="ctr" rotWithShape="0">
+                    <a:schemeClr val="bg2"/>
+                  </a:outerShdw>
+                </a:effectLst>
+              </a14:hiddenEffects>
+            </a:ext>
+          </a:extLst>
         </p:spPr>
       </p:pic>
-      <p:sp>
-        <p:nvSpPr>
-          <p:cNvPr id="16" name="Rectangle 15">
+      <p:pic>
+        <p:nvPicPr>
+          <p:cNvPr id="4101" name="Picture 5"/>
+          <p:cNvPicPr>
+            <a:picLocks noChangeAspect="1" noChangeArrowheads="1"/>
+          </p:cNvPicPr>
+          <p:nvPr/>
+        </p:nvPicPr>
+        <p:blipFill>
+          <a:blip r:embed="rId5">
             <a:extLst>
-              <a:ext uri="{FF2B5EF4-FFF2-40B4-BE49-F238E27FC236}">
-                <a16:creationId xmlns:a16="http://schemas.microsoft.com/office/drawing/2014/main" id="{88B60573-B48C-14F3-A8D1-3CAC9EF9914D}"/>
+              <a:ext uri="{28A0092B-C50C-407E-A947-70E740481C1C}">
+                <a14:useLocalDpi xmlns:a14="http://schemas.microsoft.com/office/drawing/2010/main" val="0"/>
               </a:ext>
             </a:extLst>
-          </p:cNvPr>
-          <p:cNvSpPr/>
-          <p:nvPr/>
-        </p:nvSpPr>
-        <p:spPr>
-          <a:xfrm>
-            <a:off x="9407770" y="2400299"/>
-            <a:ext cx="2497015" cy="1274885"/>
+          </a:blip>
+          <a:srcRect/>
+          <a:stretch>
+            <a:fillRect/>
+          </a:stretch>
+        </p:blipFill>
+        <p:spPr bwMode="auto">
+          <a:xfrm>
+            <a:off x="3533743" y="4658535"/>
+            <a:ext cx="4062412" cy="1273175"/>
           </a:xfrm>
           <a:prstGeom prst="rect">
             <a:avLst/>
           </a:prstGeom>
-          <a:solidFill>
-            <a:schemeClr val="accent4">
-              <a:alpha val="50000"/>
-            </a:schemeClr>
-          </a:solidFill>
+          <a:noFill/>
           <a:ln>
             <a:noFill/>
           </a:ln>
-        </p:spPr>
-        <p:style>
-          <a:lnRef idx="0">
-            <a:scrgbClr r="0" g="0" b="0"/>
-          </a:lnRef>
-          <a:fillRef idx="0">
-            <a:scrgbClr r="0" g="0" b="0"/>
-          </a:fillRef>
-          <a:effectRef idx="0">
-            <a:scrgbClr r="0" g="0" b="0"/>
-          </a:effectRef>
-          <a:fontRef idx="minor">
-            <a:schemeClr val="lt1"/>
-          </a:fontRef>
-        </p:style>
-        <p:txBody>
-          <a:bodyPr rtlCol="0" anchor="ctr"/>
-          <a:lstStyle/>
-          <a:p>
-            <a:br>
-              <a:rPr lang="ro-RO" sz="1400" dirty="0"/>
-            </a:br>
-            <a:r>
-              <a:rPr lang="ro-RO" sz="1400" dirty="0"/>
-              <a:t>Constantele clasei:</a:t>
-            </a:r>
-            <a:br>
-              <a:rPr lang="ro-RO" sz="1400" dirty="0"/>
-            </a:br>
-            <a:r>
-              <a:rPr lang="en-US" sz="1200" b="1" dirty="0"/>
-              <a:t>VALID_CLASSES = {"dance", "</a:t>
-            </a:r>
-            <a:r>
-              <a:rPr lang="en-US" sz="1200" b="1" dirty="0" err="1"/>
-              <a:t>pilates</a:t>
-            </a:r>
-            <a:r>
-              <a:rPr lang="en-US" sz="1200" b="1" dirty="0"/>
-              <a:t>", "yoga", "</a:t>
-            </a:r>
-            <a:r>
-              <a:rPr lang="en-US" sz="1200" b="1" dirty="0" err="1"/>
-              <a:t>zumba</a:t>
-            </a:r>
-            <a:r>
-              <a:rPr lang="en-US" sz="1200" b="1" dirty="0"/>
-              <a:t>"}</a:t>
-            </a:r>
-          </a:p>
-          <a:p>
-            <a:r>
-              <a:rPr lang="en-US" sz="1200" b="1" dirty="0"/>
-              <a:t>MAX_PACKAGE_SESSIONS = 20</a:t>
-            </a:r>
-          </a:p>
-          <a:p>
-            <a:r>
-              <a:rPr lang="en-US" sz="1200" b="1" dirty="0"/>
-              <a:t>MEMBERSHIP_DISCOUNT = 0.20</a:t>
-            </a:r>
-          </a:p>
-          <a:p>
-            <a:pPr algn="ctr"/>
-            <a:br>
-              <a:rPr lang="ro-RO" sz="1400" dirty="0"/>
-            </a:br>
-            <a:endParaRPr lang="en-US" sz="1400" dirty="0"/>
-          </a:p>
-        </p:txBody>
-      </p:sp>
+          <a:effectLst/>
+          <a:extLst>
+            <a:ext uri="{909E8E84-426E-40DD-AFC4-6F175D3DCCD1}">
+              <a14:hiddenFill xmlns:a14="http://schemas.microsoft.com/office/drawing/2010/main">
+                <a:solidFill>
+                  <a:schemeClr val="accent1"/>
+                </a:solidFill>
+              </a14:hiddenFill>
+            </a:ext>
+            <a:ext uri="{91240B29-F687-4F45-9708-019B960494DF}">
+              <a14:hiddenLine xmlns:a14="http://schemas.microsoft.com/office/drawing/2010/main" w="9525">
+                <a:solidFill>
+                  <a:schemeClr val="tx1"/>
+                </a:solidFill>
+                <a:miter lim="800000"/>
+                <a:headEnd/>
+                <a:tailEnd/>
+              </a14:hiddenLine>
+            </a:ext>
+            <a:ext uri="{AF507438-7753-43E0-B8FC-AC1667EBCBE1}">
+              <a14:hiddenEffects xmlns:a14="http://schemas.microsoft.com/office/drawing/2010/main">
+                <a:effectLst>
+                  <a:outerShdw dist="35921" dir="2700000" algn="ctr" rotWithShape="0">
+                    <a:schemeClr val="bg2"/>
+                  </a:outerShdw>
+                </a:effectLst>
+              </a14:hiddenEffects>
+            </a:ext>
+          </a:extLst>
+        </p:spPr>
+      </p:pic>
     </p:spTree>
     <p:extLst>
       <p:ext uri="{BB962C8B-B14F-4D97-AF65-F5344CB8AC3E}">
-        <p14:creationId xmlns:p14="http://schemas.microsoft.com/office/powerpoint/2010/main" val="628085033"/>
+        <p14:creationId xmlns:p14="http://schemas.microsoft.com/office/powerpoint/2010/main" val="1177070483"/>
       </p:ext>
     </p:extLst>
   </p:cSld>
@@ -6903,13 +7715,7 @@
       </p:grpSpPr>
       <p:sp>
         <p:nvSpPr>
-          <p:cNvPr id="5" name="Title 4">
-            <a:extLst>
-              <a:ext uri="{FF2B5EF4-FFF2-40B4-BE49-F238E27FC236}">
-                <a16:creationId xmlns:a16="http://schemas.microsoft.com/office/drawing/2014/main" id="{1D7B3796-1AA2-1F4B-DD7E-74ED6AF55D89}"/>
-              </a:ext>
-            </a:extLst>
-          </p:cNvPr>
+          <p:cNvPr id="2" name="Title 1"/>
           <p:cNvSpPr>
             <a:spLocks noGrp="1"/>
           </p:cNvSpPr>
@@ -6919,8 +7725,395 @@
         </p:nvSpPr>
         <p:spPr>
           <a:xfrm>
+            <a:off x="177282" y="403073"/>
+            <a:ext cx="11681926" cy="988332"/>
+          </a:xfrm>
+        </p:spPr>
+        <p:txBody>
+          <a:bodyPr>
+            <a:noAutofit/>
+          </a:bodyPr>
+          <a:lstStyle/>
+          <a:p>
+            <a:r>
+              <a:rPr lang="es-ES" sz="2000" b="1" dirty="0" err="1">
+                <a:latin typeface="Arial" pitchFamily="34" charset="0"/>
+                <a:cs typeface="Arial" pitchFamily="34" charset="0"/>
+              </a:rPr>
+              <a:t>Partiționare</a:t>
+            </a:r>
+            <a:r>
+              <a:rPr lang="es-ES" sz="2000" b="1" dirty="0">
+                <a:latin typeface="Arial" pitchFamily="34" charset="0"/>
+                <a:cs typeface="Arial" pitchFamily="34" charset="0"/>
+              </a:rPr>
+              <a:t> </a:t>
+            </a:r>
+            <a:r>
+              <a:rPr lang="es-ES" sz="2000" b="1" dirty="0" err="1">
+                <a:latin typeface="Arial" pitchFamily="34" charset="0"/>
+                <a:cs typeface="Arial" pitchFamily="34" charset="0"/>
+              </a:rPr>
+              <a:t>în</a:t>
+            </a:r>
+            <a:r>
+              <a:rPr lang="es-ES" sz="2000" b="1" dirty="0">
+                <a:latin typeface="Arial" pitchFamily="34" charset="0"/>
+                <a:cs typeface="Arial" pitchFamily="34" charset="0"/>
+              </a:rPr>
+              <a:t> clase de </a:t>
+            </a:r>
+            <a:r>
+              <a:rPr lang="es-ES" sz="2000" b="1" dirty="0" err="1" smtClean="0">
+                <a:latin typeface="Arial" pitchFamily="34" charset="0"/>
+                <a:cs typeface="Arial" pitchFamily="34" charset="0"/>
+              </a:rPr>
+              <a:t>echivalență</a:t>
+            </a:r>
+            <a:r>
+              <a:rPr lang="ro-RO" sz="2000" b="1" dirty="0">
+                <a:latin typeface="Arial" pitchFamily="34" charset="0"/>
+                <a:cs typeface="Arial" pitchFamily="34" charset="0"/>
+              </a:rPr>
+              <a:t> </a:t>
+            </a:r>
+            <a:r>
+              <a:rPr lang="ro-RO" sz="2000" b="1" dirty="0" smtClean="0">
+                <a:latin typeface="Arial" pitchFamily="34" charset="0"/>
+                <a:cs typeface="Arial" pitchFamily="34" charset="0"/>
+              </a:rPr>
+              <a:t>– 23 de teste</a:t>
+            </a:r>
+            <a:br>
+              <a:rPr lang="ro-RO" sz="2000" b="1" dirty="0" smtClean="0">
+                <a:latin typeface="Arial" pitchFamily="34" charset="0"/>
+                <a:cs typeface="Arial" pitchFamily="34" charset="0"/>
+              </a:rPr>
+            </a:br>
+            <a:r>
+              <a:rPr lang="it-IT" sz="2000" dirty="0">
+                <a:latin typeface="Arial" pitchFamily="34" charset="0"/>
+                <a:cs typeface="Arial" pitchFamily="34" charset="0"/>
+              </a:rPr>
+              <a:t>Grupuri de valori cu comportament identic · câte un reprezentant per clasă</a:t>
+            </a:r>
+            <a:endParaRPr lang="en-US" sz="2000" dirty="0">
+              <a:latin typeface="Arial" pitchFamily="34" charset="0"/>
+              <a:cs typeface="Arial" pitchFamily="34" charset="0"/>
+            </a:endParaRPr>
+          </a:p>
+        </p:txBody>
+      </p:sp>
+      <p:sp>
+        <p:nvSpPr>
+          <p:cNvPr id="4" name="Rectangle 3"/>
+          <p:cNvSpPr/>
+          <p:nvPr/>
+        </p:nvSpPr>
+        <p:spPr>
+          <a:xfrm>
+            <a:off x="1874060" y="1555493"/>
+            <a:ext cx="1352614" cy="369332"/>
+          </a:xfrm>
+          <a:prstGeom prst="rect">
+            <a:avLst/>
+          </a:prstGeom>
+        </p:spPr>
+        <p:txBody>
+          <a:bodyPr wrap="none">
+            <a:spAutoFit/>
+          </a:bodyPr>
+          <a:lstStyle/>
+          <a:p>
+            <a:r>
+              <a:rPr lang="en-US" dirty="0" err="1"/>
+              <a:t>Clase</a:t>
+            </a:r>
+            <a:r>
+              <a:rPr lang="en-US" dirty="0"/>
+              <a:t> </a:t>
+            </a:r>
+            <a:r>
+              <a:rPr lang="en-US" dirty="0" err="1"/>
+              <a:t>valide</a:t>
+            </a:r>
+            <a:endParaRPr lang="en-US" dirty="0"/>
+          </a:p>
+        </p:txBody>
+      </p:sp>
+      <p:sp>
+        <p:nvSpPr>
+          <p:cNvPr id="6" name="Rectangle 5"/>
+          <p:cNvSpPr/>
+          <p:nvPr/>
+        </p:nvSpPr>
+        <p:spPr>
+          <a:xfrm>
+            <a:off x="7066383" y="1598101"/>
+            <a:ext cx="3049104" cy="369332"/>
+          </a:xfrm>
+          <a:prstGeom prst="rect">
+            <a:avLst/>
+          </a:prstGeom>
+        </p:spPr>
+        <p:txBody>
+          <a:bodyPr wrap="none">
+            <a:spAutoFit/>
+          </a:bodyPr>
+          <a:lstStyle/>
+          <a:p>
+            <a:r>
+              <a:rPr lang="en-US" dirty="0" err="1"/>
+              <a:t>Clase</a:t>
+            </a:r>
+            <a:r>
+              <a:rPr lang="en-US" dirty="0"/>
+              <a:t> </a:t>
+            </a:r>
+            <a:r>
+              <a:rPr lang="en-US" dirty="0" err="1"/>
+              <a:t>invalide</a:t>
+            </a:r>
+            <a:r>
+              <a:rPr lang="en-US" dirty="0"/>
+              <a:t> </a:t>
+            </a:r>
+            <a:r>
+              <a:rPr lang="en-US" dirty="0" smtClean="0"/>
+              <a:t>(</a:t>
+            </a:r>
+            <a:r>
+              <a:rPr lang="ro-RO" dirty="0" smtClean="0"/>
+              <a:t>=</a:t>
+            </a:r>
+            <a:r>
+              <a:rPr lang="en-US" dirty="0" smtClean="0"/>
+              <a:t>&gt; </a:t>
+            </a:r>
+            <a:r>
+              <a:rPr lang="en-US" dirty="0" err="1" smtClean="0"/>
+              <a:t>ValueError</a:t>
+            </a:r>
+            <a:r>
+              <a:rPr lang="en-US" dirty="0"/>
+              <a:t>)</a:t>
+            </a:r>
+          </a:p>
+        </p:txBody>
+      </p:sp>
+      <p:pic>
+        <p:nvPicPr>
+          <p:cNvPr id="5125" name="Picture 5"/>
+          <p:cNvPicPr>
+            <a:picLocks noChangeAspect="1" noChangeArrowheads="1"/>
+          </p:cNvPicPr>
+          <p:nvPr/>
+        </p:nvPicPr>
+        <p:blipFill>
+          <a:blip r:embed="rId2">
+            <a:extLst>
+              <a:ext uri="{28A0092B-C50C-407E-A947-70E740481C1C}">
+                <a14:useLocalDpi xmlns:a14="http://schemas.microsoft.com/office/drawing/2010/main" val="0"/>
+              </a:ext>
+            </a:extLst>
+          </a:blip>
+          <a:srcRect/>
+          <a:stretch>
+            <a:fillRect/>
+          </a:stretch>
+        </p:blipFill>
+        <p:spPr bwMode="auto">
+          <a:xfrm>
+            <a:off x="48446" y="2004755"/>
+            <a:ext cx="5003842" cy="3372401"/>
+          </a:xfrm>
+          <a:prstGeom prst="rect">
+            <a:avLst/>
+          </a:prstGeom>
+          <a:noFill/>
+          <a:ln>
+            <a:noFill/>
+          </a:ln>
+          <a:effectLst/>
+          <a:extLst>
+            <a:ext uri="{909E8E84-426E-40DD-AFC4-6F175D3DCCD1}">
+              <a14:hiddenFill xmlns:a14="http://schemas.microsoft.com/office/drawing/2010/main">
+                <a:solidFill>
+                  <a:schemeClr val="accent1"/>
+                </a:solidFill>
+              </a14:hiddenFill>
+            </a:ext>
+            <a:ext uri="{91240B29-F687-4F45-9708-019B960494DF}">
+              <a14:hiddenLine xmlns:a14="http://schemas.microsoft.com/office/drawing/2010/main" w="9525">
+                <a:solidFill>
+                  <a:schemeClr val="tx1"/>
+                </a:solidFill>
+                <a:miter lim="800000"/>
+                <a:headEnd/>
+                <a:tailEnd/>
+              </a14:hiddenLine>
+            </a:ext>
+            <a:ext uri="{AF507438-7753-43E0-B8FC-AC1667EBCBE1}">
+              <a14:hiddenEffects xmlns:a14="http://schemas.microsoft.com/office/drawing/2010/main">
+                <a:effectLst>
+                  <a:outerShdw dist="35921" dir="2700000" algn="ctr" rotWithShape="0">
+                    <a:schemeClr val="bg2"/>
+                  </a:outerShdw>
+                </a:effectLst>
+              </a14:hiddenEffects>
+            </a:ext>
+          </a:extLst>
+        </p:spPr>
+      </p:pic>
+      <p:pic>
+        <p:nvPicPr>
+          <p:cNvPr id="5127" name="Picture 7"/>
+          <p:cNvPicPr>
+            <a:picLocks noChangeAspect="1" noChangeArrowheads="1"/>
+          </p:cNvPicPr>
+          <p:nvPr/>
+        </p:nvPicPr>
+        <p:blipFill>
+          <a:blip r:embed="rId3">
+            <a:extLst>
+              <a:ext uri="{28A0092B-C50C-407E-A947-70E740481C1C}">
+                <a14:useLocalDpi xmlns:a14="http://schemas.microsoft.com/office/drawing/2010/main" val="0"/>
+              </a:ext>
+            </a:extLst>
+          </a:blip>
+          <a:srcRect/>
+          <a:stretch>
+            <a:fillRect/>
+          </a:stretch>
+        </p:blipFill>
+        <p:spPr bwMode="auto">
+          <a:xfrm>
+            <a:off x="5127625" y="2004755"/>
+            <a:ext cx="7064375" cy="2225675"/>
+          </a:xfrm>
+          <a:prstGeom prst="rect">
+            <a:avLst/>
+          </a:prstGeom>
+          <a:noFill/>
+          <a:ln>
+            <a:noFill/>
+          </a:ln>
+          <a:effectLst/>
+          <a:extLst>
+            <a:ext uri="{909E8E84-426E-40DD-AFC4-6F175D3DCCD1}">
+              <a14:hiddenFill xmlns:a14="http://schemas.microsoft.com/office/drawing/2010/main">
+                <a:solidFill>
+                  <a:schemeClr val="accent1"/>
+                </a:solidFill>
+              </a14:hiddenFill>
+            </a:ext>
+            <a:ext uri="{91240B29-F687-4F45-9708-019B960494DF}">
+              <a14:hiddenLine xmlns:a14="http://schemas.microsoft.com/office/drawing/2010/main" w="9525">
+                <a:solidFill>
+                  <a:schemeClr val="tx1"/>
+                </a:solidFill>
+                <a:miter lim="800000"/>
+                <a:headEnd/>
+                <a:tailEnd/>
+              </a14:hiddenLine>
+            </a:ext>
+            <a:ext uri="{AF507438-7753-43E0-B8FC-AC1667EBCBE1}">
+              <a14:hiddenEffects xmlns:a14="http://schemas.microsoft.com/office/drawing/2010/main">
+                <a:effectLst>
+                  <a:outerShdw dist="35921" dir="2700000" algn="ctr" rotWithShape="0">
+                    <a:schemeClr val="bg2"/>
+                  </a:outerShdw>
+                </a:effectLst>
+              </a14:hiddenEffects>
+            </a:ext>
+          </a:extLst>
+        </p:spPr>
+      </p:pic>
+      <p:sp>
+        <p:nvSpPr>
+          <p:cNvPr id="8" name="Rectangle 7"/>
+          <p:cNvSpPr/>
+          <p:nvPr/>
+        </p:nvSpPr>
+        <p:spPr>
+          <a:xfrm>
+            <a:off x="5127625" y="4321719"/>
+            <a:ext cx="7098587" cy="1077218"/>
+          </a:xfrm>
+          <a:prstGeom prst="rect">
+            <a:avLst/>
+          </a:prstGeom>
+        </p:spPr>
+        <p:txBody>
+          <a:bodyPr wrap="square">
+            <a:spAutoFit/>
+          </a:bodyPr>
+          <a:lstStyle/>
+          <a:p>
+            <a:r>
+              <a:rPr lang="vi-VN" sz="1600" b="1" dirty="0"/>
+              <a:t>price_per_session</a:t>
+            </a:r>
+            <a:r>
+              <a:rPr lang="vi-VN" sz="1600" dirty="0"/>
+              <a:t> și </a:t>
+            </a:r>
+            <a:r>
+              <a:rPr lang="vi-VN" sz="1600" b="1" dirty="0"/>
+              <a:t>package_sessions</a:t>
+            </a:r>
+            <a:r>
+              <a:rPr lang="vi-VN" sz="1600" dirty="0"/>
+              <a:t> au câte o clasă invalidă separată pentru bool față de restul valorilor numerice invalide. Motivul: în Python bool este subclasă a lui int, deci True și False ar trece de isinstance(..., int) fără o verificare explicită pusă înaintea ei.</a:t>
+            </a:r>
+            <a:endParaRPr lang="en-US" sz="1600" dirty="0"/>
+          </a:p>
+        </p:txBody>
+      </p:sp>
+    </p:spTree>
+    <p:extLst>
+      <p:ext uri="{BB962C8B-B14F-4D97-AF65-F5344CB8AC3E}">
+        <p14:creationId xmlns:p14="http://schemas.microsoft.com/office/powerpoint/2010/main" val="3723932437"/>
+      </p:ext>
+    </p:extLst>
+  </p:cSld>
+  <p:clrMapOvr>
+    <a:masterClrMapping/>
+  </p:clrMapOvr>
+</p:sld>
+</file>
+
+<file path=ppt/slides/slide6.xml><?xml version="1.0" encoding="utf-8"?>
+<p:sld xmlns:a="http://schemas.openxmlformats.org/drawingml/2006/main" xmlns:r="http://schemas.openxmlformats.org/officeDocument/2006/relationships" xmlns:p="http://schemas.openxmlformats.org/presentationml/2006/main">
+  <p:cSld>
+    <p:spTree>
+      <p:nvGrpSpPr>
+        <p:cNvPr id="1" name=""/>
+        <p:cNvGrpSpPr/>
+        <p:nvPr/>
+      </p:nvGrpSpPr>
+      <p:grpSpPr>
+        <a:xfrm>
+          <a:off x="0" y="0"/>
+          <a:ext cx="0" cy="0"/>
+          <a:chOff x="0" y="0"/>
+          <a:chExt cx="0" cy="0"/>
+        </a:xfrm>
+      </p:grpSpPr>
+      <p:sp>
+        <p:nvSpPr>
+          <p:cNvPr id="2" name="Title 1"/>
+          <p:cNvSpPr>
+            <a:spLocks noGrp="1"/>
+          </p:cNvSpPr>
+          <p:nvPr>
+            <p:ph type="title"/>
+          </p:nvPr>
+        </p:nvSpPr>
+        <p:spPr>
+          <a:xfrm>
             <a:off x="581192" y="702156"/>
-            <a:ext cx="11029616" cy="572729"/>
+            <a:ext cx="11029616" cy="566807"/>
           </a:xfrm>
         </p:spPr>
         <p:txBody>
@@ -6928,720 +8121,2048 @@
           <a:lstStyle/>
           <a:p>
             <a:r>
-              <a:rPr lang="nb-NO" dirty="0"/>
-              <a:t>Validări </a:t>
-            </a:r>
-            <a:r>
-              <a:rPr lang="ro-RO" dirty="0"/>
-              <a:t>s</a:t>
-            </a:r>
-            <a:r>
-              <a:rPr lang="nb-NO" dirty="0"/>
-              <a:t>i reguli de business</a:t>
+              <a:rPr lang="vi-VN" b="1" dirty="0"/>
+              <a:t>Analiza valorilor de </a:t>
+            </a:r>
+            <a:r>
+              <a:rPr lang="vi-VN" b="1" dirty="0" smtClean="0"/>
+              <a:t>frontieră</a:t>
+            </a:r>
+            <a:r>
+              <a:rPr lang="ro-RO" b="1" dirty="0" smtClean="0"/>
+              <a:t> – 16 teste</a:t>
             </a:r>
             <a:endParaRPr lang="en-US" dirty="0"/>
           </a:p>
         </p:txBody>
       </p:sp>
-      <p:graphicFrame>
-        <p:nvGraphicFramePr>
-          <p:cNvPr id="6" name="Content Placeholder 5">
+      <p:sp>
+        <p:nvSpPr>
+          <p:cNvPr id="5" name="Rectangle 4"/>
+          <p:cNvSpPr/>
+          <p:nvPr/>
+        </p:nvSpPr>
+        <p:spPr>
+          <a:xfrm>
+            <a:off x="253683" y="1618089"/>
+            <a:ext cx="4945713" cy="369332"/>
+          </a:xfrm>
+          <a:prstGeom prst="rect">
+            <a:avLst/>
+          </a:prstGeom>
+        </p:spPr>
+        <p:txBody>
+          <a:bodyPr wrap="none">
+            <a:spAutoFit/>
+          </a:bodyPr>
+          <a:lstStyle/>
+          <a:p>
+            <a:r>
+              <a:rPr lang="fr-FR" dirty="0" err="1"/>
+              <a:t>Frontierele</a:t>
+            </a:r>
+            <a:r>
+              <a:rPr lang="fr-FR" dirty="0"/>
+              <a:t> </a:t>
+            </a:r>
+            <a:r>
+              <a:rPr lang="fr-FR" b="1" dirty="0" err="1"/>
+              <a:t>package_sessions</a:t>
+            </a:r>
+            <a:r>
+              <a:rPr lang="fr-FR" dirty="0"/>
+              <a:t> </a:t>
+            </a:r>
+            <a:r>
+              <a:rPr lang="ro-RO" dirty="0" smtClean="0"/>
+              <a:t>--</a:t>
+            </a:r>
+            <a:r>
+              <a:rPr lang="fr-FR" dirty="0" smtClean="0"/>
+              <a:t> </a:t>
+            </a:r>
+            <a:r>
+              <a:rPr lang="fr-FR" dirty="0" err="1"/>
+              <a:t>intervalul</a:t>
+            </a:r>
+            <a:r>
+              <a:rPr lang="fr-FR" dirty="0"/>
+              <a:t> [1, 20]</a:t>
+            </a:r>
+            <a:endParaRPr lang="en-US" dirty="0"/>
+          </a:p>
+        </p:txBody>
+      </p:sp>
+      <p:pic>
+        <p:nvPicPr>
+          <p:cNvPr id="6146" name="Picture 2"/>
+          <p:cNvPicPr>
+            <a:picLocks noChangeAspect="1" noChangeArrowheads="1"/>
+          </p:cNvPicPr>
+          <p:nvPr/>
+        </p:nvPicPr>
+        <p:blipFill>
+          <a:blip r:embed="rId2">
             <a:extLst>
-              <a:ext uri="{FF2B5EF4-FFF2-40B4-BE49-F238E27FC236}">
-                <a16:creationId xmlns:a16="http://schemas.microsoft.com/office/drawing/2014/main" id="{F6675575-EF92-9029-378E-A616DA4237DD}"/>
+              <a:ext uri="{28A0092B-C50C-407E-A947-70E740481C1C}">
+                <a14:useLocalDpi xmlns:a14="http://schemas.microsoft.com/office/drawing/2010/main" val="0"/>
               </a:ext>
             </a:extLst>
-          </p:cNvPr>
-          <p:cNvGraphicFramePr>
-            <a:graphicFrameLocks noGrp="1"/>
-          </p:cNvGraphicFramePr>
+          </a:blip>
+          <a:srcRect/>
+          <a:stretch>
+            <a:fillRect/>
+          </a:stretch>
+        </p:blipFill>
+        <p:spPr bwMode="auto">
+          <a:xfrm>
+            <a:off x="310775" y="1980809"/>
+            <a:ext cx="4831531" cy="2236628"/>
+          </a:xfrm>
+          <a:prstGeom prst="rect">
+            <a:avLst/>
+          </a:prstGeom>
+          <a:noFill/>
+          <a:ln>
+            <a:noFill/>
+          </a:ln>
+          <a:effectLst/>
+          <a:extLst>
+            <a:ext uri="{909E8E84-426E-40DD-AFC4-6F175D3DCCD1}">
+              <a14:hiddenFill xmlns:a14="http://schemas.microsoft.com/office/drawing/2010/main">
+                <a:solidFill>
+                  <a:schemeClr val="accent1"/>
+                </a:solidFill>
+              </a14:hiddenFill>
+            </a:ext>
+            <a:ext uri="{91240B29-F687-4F45-9708-019B960494DF}">
+              <a14:hiddenLine xmlns:a14="http://schemas.microsoft.com/office/drawing/2010/main" w="9525">
+                <a:solidFill>
+                  <a:schemeClr val="tx1"/>
+                </a:solidFill>
+                <a:miter lim="800000"/>
+                <a:headEnd/>
+                <a:tailEnd/>
+              </a14:hiddenLine>
+            </a:ext>
+            <a:ext uri="{AF507438-7753-43E0-B8FC-AC1667EBCBE1}">
+              <a14:hiddenEffects xmlns:a14="http://schemas.microsoft.com/office/drawing/2010/main">
+                <a:effectLst>
+                  <a:outerShdw dist="35921" dir="2700000" algn="ctr" rotWithShape="0">
+                    <a:schemeClr val="bg2"/>
+                  </a:outerShdw>
+                </a:effectLst>
+              </a14:hiddenEffects>
+            </a:ext>
+          </a:extLst>
+        </p:spPr>
+      </p:pic>
+      <p:sp>
+        <p:nvSpPr>
+          <p:cNvPr id="6" name="Rectangle 5"/>
+          <p:cNvSpPr/>
+          <p:nvPr/>
+        </p:nvSpPr>
+        <p:spPr>
+          <a:xfrm>
+            <a:off x="310776" y="4391999"/>
+            <a:ext cx="4471865" cy="369332"/>
+          </a:xfrm>
+          <a:prstGeom prst="rect">
+            <a:avLst/>
+          </a:prstGeom>
+        </p:spPr>
+        <p:txBody>
+          <a:bodyPr wrap="none">
+            <a:spAutoFit/>
+          </a:bodyPr>
+          <a:lstStyle/>
+          <a:p>
+            <a:r>
+              <a:rPr lang="en-US" dirty="0" err="1"/>
+              <a:t>Frontierele</a:t>
+            </a:r>
+            <a:r>
+              <a:rPr lang="en-US" dirty="0"/>
+              <a:t> </a:t>
+            </a:r>
+            <a:r>
+              <a:rPr lang="en-US" b="1" dirty="0" err="1"/>
+              <a:t>price_per_session</a:t>
+            </a:r>
+            <a:r>
+              <a:rPr lang="en-US" dirty="0"/>
+              <a:t> </a:t>
+            </a:r>
+            <a:r>
+              <a:rPr lang="ro-RO" dirty="0" smtClean="0"/>
+              <a:t>--</a:t>
+            </a:r>
+            <a:r>
+              <a:rPr lang="en-US" dirty="0" smtClean="0"/>
+              <a:t> </a:t>
+            </a:r>
+            <a:r>
+              <a:rPr lang="en-US" dirty="0" err="1"/>
+              <a:t>condiție</a:t>
+            </a:r>
+            <a:r>
+              <a:rPr lang="en-US" dirty="0"/>
+              <a:t> &gt; 0</a:t>
+            </a:r>
+          </a:p>
+        </p:txBody>
+      </p:sp>
+      <p:pic>
+        <p:nvPicPr>
+          <p:cNvPr id="6147" name="Picture 3"/>
+          <p:cNvPicPr>
+            <a:picLocks noChangeAspect="1" noChangeArrowheads="1"/>
+          </p:cNvPicPr>
+          <p:nvPr/>
+        </p:nvPicPr>
+        <p:blipFill>
+          <a:blip r:embed="rId3">
+            <a:extLst>
+              <a:ext uri="{28A0092B-C50C-407E-A947-70E740481C1C}">
+                <a14:useLocalDpi xmlns:a14="http://schemas.microsoft.com/office/drawing/2010/main" val="0"/>
+              </a:ext>
+            </a:extLst>
+          </a:blip>
+          <a:srcRect/>
+          <a:stretch>
+            <a:fillRect/>
+          </a:stretch>
+        </p:blipFill>
+        <p:spPr bwMode="auto">
+          <a:xfrm>
+            <a:off x="693331" y="4858509"/>
+            <a:ext cx="3024058" cy="1327688"/>
+          </a:xfrm>
+          <a:prstGeom prst="rect">
+            <a:avLst/>
+          </a:prstGeom>
+          <a:noFill/>
+          <a:ln>
+            <a:noFill/>
+          </a:ln>
+          <a:effectLst/>
+          <a:extLst>
+            <a:ext uri="{909E8E84-426E-40DD-AFC4-6F175D3DCCD1}">
+              <a14:hiddenFill xmlns:a14="http://schemas.microsoft.com/office/drawing/2010/main">
+                <a:solidFill>
+                  <a:schemeClr val="accent1"/>
+                </a:solidFill>
+              </a14:hiddenFill>
+            </a:ext>
+            <a:ext uri="{91240B29-F687-4F45-9708-019B960494DF}">
+              <a14:hiddenLine xmlns:a14="http://schemas.microsoft.com/office/drawing/2010/main" w="9525">
+                <a:solidFill>
+                  <a:schemeClr val="tx1"/>
+                </a:solidFill>
+                <a:miter lim="800000"/>
+                <a:headEnd/>
+                <a:tailEnd/>
+              </a14:hiddenLine>
+            </a:ext>
+            <a:ext uri="{AF507438-7753-43E0-B8FC-AC1667EBCBE1}">
+              <a14:hiddenEffects xmlns:a14="http://schemas.microsoft.com/office/drawing/2010/main">
+                <a:effectLst>
+                  <a:outerShdw dist="35921" dir="2700000" algn="ctr" rotWithShape="0">
+                    <a:schemeClr val="bg2"/>
+                  </a:outerShdw>
+                </a:effectLst>
+              </a14:hiddenEffects>
+            </a:ext>
+          </a:extLst>
+        </p:spPr>
+      </p:pic>
+      <p:pic>
+        <p:nvPicPr>
+          <p:cNvPr id="6148" name="Picture 4"/>
+          <p:cNvPicPr>
+            <a:picLocks noChangeAspect="1" noChangeArrowheads="1"/>
+          </p:cNvPicPr>
+          <p:nvPr/>
+        </p:nvPicPr>
+        <p:blipFill>
+          <a:blip r:embed="rId4">
+            <a:extLst>
+              <a:ext uri="{28A0092B-C50C-407E-A947-70E740481C1C}">
+                <a14:useLocalDpi xmlns:a14="http://schemas.microsoft.com/office/drawing/2010/main" val="0"/>
+              </a:ext>
+            </a:extLst>
+          </a:blip>
+          <a:srcRect/>
+          <a:stretch>
+            <a:fillRect/>
+          </a:stretch>
+        </p:blipFill>
+        <p:spPr bwMode="auto">
+          <a:xfrm>
+            <a:off x="6026098" y="2170325"/>
+            <a:ext cx="2416629" cy="924535"/>
+          </a:xfrm>
+          <a:prstGeom prst="rect">
+            <a:avLst/>
+          </a:prstGeom>
+          <a:noFill/>
+          <a:ln>
+            <a:noFill/>
+          </a:ln>
+          <a:effectLst/>
+          <a:extLst>
+            <a:ext uri="{909E8E84-426E-40DD-AFC4-6F175D3DCCD1}">
+              <a14:hiddenFill xmlns:a14="http://schemas.microsoft.com/office/drawing/2010/main">
+                <a:solidFill>
+                  <a:schemeClr val="accent1"/>
+                </a:solidFill>
+              </a14:hiddenFill>
+            </a:ext>
+            <a:ext uri="{91240B29-F687-4F45-9708-019B960494DF}">
+              <a14:hiddenLine xmlns:a14="http://schemas.microsoft.com/office/drawing/2010/main" w="9525">
+                <a:solidFill>
+                  <a:schemeClr val="tx1"/>
+                </a:solidFill>
+                <a:miter lim="800000"/>
+                <a:headEnd/>
+                <a:tailEnd/>
+              </a14:hiddenLine>
+            </a:ext>
+            <a:ext uri="{AF507438-7753-43E0-B8FC-AC1667EBCBE1}">
+              <a14:hiddenEffects xmlns:a14="http://schemas.microsoft.com/office/drawing/2010/main">
+                <a:effectLst>
+                  <a:outerShdw dist="35921" dir="2700000" algn="ctr" rotWithShape="0">
+                    <a:schemeClr val="bg2"/>
+                  </a:outerShdw>
+                </a:effectLst>
+              </a14:hiddenEffects>
+            </a:ext>
+          </a:extLst>
+        </p:spPr>
+      </p:pic>
+      <p:sp>
+        <p:nvSpPr>
+          <p:cNvPr id="8" name="Rectangle 7"/>
+          <p:cNvSpPr/>
+          <p:nvPr/>
+        </p:nvSpPr>
+        <p:spPr>
+          <a:xfrm>
+            <a:off x="6026098" y="1618089"/>
+            <a:ext cx="4803816" cy="369332"/>
+          </a:xfrm>
+          <a:prstGeom prst="rect">
+            <a:avLst/>
+          </a:prstGeom>
+        </p:spPr>
+        <p:txBody>
+          <a:bodyPr wrap="none">
+            <a:spAutoFit/>
+          </a:bodyPr>
+          <a:lstStyle/>
+          <a:p>
+            <a:r>
+              <a:rPr lang="vi-VN" dirty="0"/>
+              <a:t>Frontierele </a:t>
+            </a:r>
+            <a:r>
+              <a:rPr lang="vi-VN" b="1" dirty="0" smtClean="0"/>
+              <a:t>instructor</a:t>
+            </a:r>
+            <a:r>
+              <a:rPr lang="ro-RO" dirty="0" smtClean="0"/>
+              <a:t> --</a:t>
+            </a:r>
+            <a:r>
+              <a:rPr lang="vi-VN" dirty="0" smtClean="0"/>
+              <a:t> </a:t>
+            </a:r>
+            <a:r>
+              <a:rPr lang="vi-VN" dirty="0"/>
+              <a:t>lungime după strip()</a:t>
+            </a:r>
+            <a:endParaRPr lang="en-US" dirty="0"/>
+          </a:p>
+        </p:txBody>
+      </p:sp>
+      <p:sp>
+        <p:nvSpPr>
+          <p:cNvPr id="9" name="Rectangle 8"/>
+          <p:cNvSpPr/>
+          <p:nvPr/>
+        </p:nvSpPr>
+        <p:spPr>
+          <a:xfrm>
+            <a:off x="6026098" y="3241246"/>
+            <a:ext cx="6066020" cy="369332"/>
+          </a:xfrm>
+          <a:prstGeom prst="rect">
+            <a:avLst/>
+          </a:prstGeom>
+        </p:spPr>
+        <p:txBody>
+          <a:bodyPr wrap="none">
+            <a:spAutoFit/>
+          </a:bodyPr>
+          <a:lstStyle/>
+          <a:p>
+            <a:r>
+              <a:rPr lang="vi-VN" dirty="0"/>
+              <a:t>Frontiera de </a:t>
+            </a:r>
+            <a:r>
+              <a:rPr lang="vi-VN" b="1" dirty="0"/>
+              <a:t>consum</a:t>
+            </a:r>
+            <a:r>
+              <a:rPr lang="vi-VN" dirty="0"/>
+              <a:t> </a:t>
+            </a:r>
+            <a:r>
+              <a:rPr lang="ro-RO" dirty="0" smtClean="0"/>
+              <a:t>--</a:t>
+            </a:r>
+            <a:r>
+              <a:rPr lang="vi-VN" dirty="0" smtClean="0"/>
+              <a:t> </a:t>
+            </a:r>
+            <a:r>
+              <a:rPr lang="vi-VN" dirty="0"/>
+              <a:t>momentul completării pachetului</a:t>
+            </a:r>
+            <a:endParaRPr lang="en-US" dirty="0"/>
+          </a:p>
+        </p:txBody>
+      </p:sp>
+      <p:pic>
+        <p:nvPicPr>
+          <p:cNvPr id="6150" name="Picture 6"/>
+          <p:cNvPicPr>
+            <a:picLocks noChangeAspect="1" noChangeArrowheads="1"/>
+          </p:cNvPicPr>
+          <p:nvPr/>
+        </p:nvPicPr>
+        <p:blipFill>
+          <a:blip r:embed="rId5">
+            <a:extLst>
+              <a:ext uri="{28A0092B-C50C-407E-A947-70E740481C1C}">
+                <a14:useLocalDpi xmlns:a14="http://schemas.microsoft.com/office/drawing/2010/main" val="0"/>
+              </a:ext>
+            </a:extLst>
+          </a:blip>
+          <a:srcRect/>
+          <a:stretch>
+            <a:fillRect/>
+          </a:stretch>
+        </p:blipFill>
+        <p:spPr bwMode="auto">
+          <a:xfrm>
+            <a:off x="6026098" y="3764128"/>
+            <a:ext cx="4897351" cy="2422069"/>
+          </a:xfrm>
+          <a:prstGeom prst="rect">
+            <a:avLst/>
+          </a:prstGeom>
+          <a:noFill/>
+          <a:ln>
+            <a:noFill/>
+          </a:ln>
+          <a:effectLst/>
+          <a:extLst>
+            <a:ext uri="{909E8E84-426E-40DD-AFC4-6F175D3DCCD1}">
+              <a14:hiddenFill xmlns:a14="http://schemas.microsoft.com/office/drawing/2010/main">
+                <a:solidFill>
+                  <a:schemeClr val="accent1"/>
+                </a:solidFill>
+              </a14:hiddenFill>
+            </a:ext>
+            <a:ext uri="{91240B29-F687-4F45-9708-019B960494DF}">
+              <a14:hiddenLine xmlns:a14="http://schemas.microsoft.com/office/drawing/2010/main" w="9525">
+                <a:solidFill>
+                  <a:schemeClr val="tx1"/>
+                </a:solidFill>
+                <a:miter lim="800000"/>
+                <a:headEnd/>
+                <a:tailEnd/>
+              </a14:hiddenLine>
+            </a:ext>
+            <a:ext uri="{AF507438-7753-43E0-B8FC-AC1667EBCBE1}">
+              <a14:hiddenEffects xmlns:a14="http://schemas.microsoft.com/office/drawing/2010/main">
+                <a:effectLst>
+                  <a:outerShdw dist="35921" dir="2700000" algn="ctr" rotWithShape="0">
+                    <a:schemeClr val="bg2"/>
+                  </a:outerShdw>
+                </a:effectLst>
+              </a14:hiddenEffects>
+            </a:ext>
+          </a:extLst>
+        </p:spPr>
+      </p:pic>
+    </p:spTree>
+    <p:extLst>
+      <p:ext uri="{BB962C8B-B14F-4D97-AF65-F5344CB8AC3E}">
+        <p14:creationId xmlns:p14="http://schemas.microsoft.com/office/powerpoint/2010/main" val="4260479718"/>
+      </p:ext>
+    </p:extLst>
+  </p:cSld>
+  <p:clrMapOvr>
+    <a:masterClrMapping/>
+  </p:clrMapOvr>
+</p:sld>
+</file>
+
+<file path=ppt/slides/slide7.xml><?xml version="1.0" encoding="utf-8"?>
+<p:sld xmlns:a="http://schemas.openxmlformats.org/drawingml/2006/main" xmlns:r="http://schemas.openxmlformats.org/officeDocument/2006/relationships" xmlns:p="http://schemas.openxmlformats.org/presentationml/2006/main">
+  <p:cSld>
+    <p:spTree>
+      <p:nvGrpSpPr>
+        <p:cNvPr id="1" name=""/>
+        <p:cNvGrpSpPr/>
+        <p:nvPr/>
+      </p:nvGrpSpPr>
+      <p:grpSpPr>
+        <a:xfrm>
+          <a:off x="0" y="0"/>
+          <a:ext cx="0" cy="0"/>
+          <a:chOff x="0" y="0"/>
+          <a:chExt cx="0" cy="0"/>
+        </a:xfrm>
+      </p:grpSpPr>
+      <p:sp>
+        <p:nvSpPr>
+          <p:cNvPr id="2" name="Title 1"/>
+          <p:cNvSpPr>
+            <a:spLocks noGrp="1"/>
+          </p:cNvSpPr>
+          <p:nvPr>
+            <p:ph type="title"/>
+          </p:nvPr>
+        </p:nvSpPr>
+        <p:spPr>
+          <a:xfrm>
+            <a:off x="581191" y="702156"/>
+            <a:ext cx="11501951" cy="772081"/>
+          </a:xfrm>
+        </p:spPr>
+        <p:txBody>
+          <a:bodyPr>
+            <a:normAutofit/>
+          </a:bodyPr>
+          <a:lstStyle/>
+          <a:p>
+            <a:r>
+              <a:rPr lang="it-IT" sz="2000" b="1" dirty="0">
+                <a:latin typeface="Arial" pitchFamily="34" charset="0"/>
+                <a:cs typeface="Arial" pitchFamily="34" charset="0"/>
+              </a:rPr>
+              <a:t>Acoperire structurală: instrucțiune, decizie, </a:t>
+            </a:r>
+            <a:r>
+              <a:rPr lang="it-IT" sz="2000" b="1" dirty="0" smtClean="0">
+                <a:latin typeface="Arial" pitchFamily="34" charset="0"/>
+                <a:cs typeface="Arial" pitchFamily="34" charset="0"/>
+              </a:rPr>
+              <a:t>condiție</a:t>
+            </a:r>
+            <a:r>
+              <a:rPr lang="ro-RO" sz="2000" b="1" dirty="0" smtClean="0">
+                <a:latin typeface="Arial" pitchFamily="34" charset="0"/>
+                <a:cs typeface="Arial" pitchFamily="34" charset="0"/>
+              </a:rPr>
+              <a:t> – 40 de teste</a:t>
+            </a:r>
+            <a:br>
+              <a:rPr lang="ro-RO" sz="2000" b="1" dirty="0" smtClean="0">
+                <a:latin typeface="Arial" pitchFamily="34" charset="0"/>
+                <a:cs typeface="Arial" pitchFamily="34" charset="0"/>
+              </a:rPr>
+            </a:br>
+            <a:r>
+              <a:rPr lang="en-US" sz="2000" dirty="0">
+                <a:latin typeface="Arial" pitchFamily="34" charset="0"/>
+                <a:cs typeface="Arial" pitchFamily="34" charset="0"/>
+              </a:rPr>
+              <a:t>Statement · Decision · Condition coverage → 43 </a:t>
+            </a:r>
+            <a:r>
+              <a:rPr lang="en-US" sz="2000" dirty="0" err="1">
+                <a:latin typeface="Arial" pitchFamily="34" charset="0"/>
+                <a:cs typeface="Arial" pitchFamily="34" charset="0"/>
+              </a:rPr>
+              <a:t>instrucțiuni</a:t>
+            </a:r>
+            <a:r>
+              <a:rPr lang="en-US" sz="2000" dirty="0">
+                <a:latin typeface="Arial" pitchFamily="34" charset="0"/>
+                <a:cs typeface="Arial" pitchFamily="34" charset="0"/>
+              </a:rPr>
+              <a:t> · 26 </a:t>
+            </a:r>
+            <a:r>
+              <a:rPr lang="en-US" sz="2000" dirty="0" err="1">
+                <a:latin typeface="Arial" pitchFamily="34" charset="0"/>
+                <a:cs typeface="Arial" pitchFamily="34" charset="0"/>
+              </a:rPr>
+              <a:t>ramuri</a:t>
+            </a:r>
+            <a:r>
+              <a:rPr lang="en-US" sz="2000" dirty="0">
+                <a:latin typeface="Arial" pitchFamily="34" charset="0"/>
+                <a:cs typeface="Arial" pitchFamily="34" charset="0"/>
+              </a:rPr>
+              <a:t> · </a:t>
+            </a:r>
+            <a:r>
+              <a:rPr lang="en-US" sz="2000" b="1" dirty="0">
+                <a:latin typeface="Arial" pitchFamily="34" charset="0"/>
+                <a:cs typeface="Arial" pitchFamily="34" charset="0"/>
+              </a:rPr>
+              <a:t>100</a:t>
+            </a:r>
+            <a:r>
+              <a:rPr lang="en-US" sz="2000" b="1" dirty="0" smtClean="0">
+                <a:latin typeface="Arial" pitchFamily="34" charset="0"/>
+                <a:cs typeface="Arial" pitchFamily="34" charset="0"/>
+              </a:rPr>
+              <a:t>%</a:t>
+            </a:r>
+            <a:endParaRPr lang="en-US" sz="2000" dirty="0">
+              <a:latin typeface="Arial" pitchFamily="34" charset="0"/>
+              <a:cs typeface="Arial" pitchFamily="34" charset="0"/>
+            </a:endParaRPr>
+          </a:p>
+        </p:txBody>
+      </p:sp>
+      <p:sp>
+        <p:nvSpPr>
+          <p:cNvPr id="3" name="Content Placeholder 2"/>
+          <p:cNvSpPr>
+            <a:spLocks noGrp="1"/>
+          </p:cNvSpPr>
           <p:nvPr>
             <p:ph idx="1"/>
           </p:nvPr>
-        </p:nvGraphicFramePr>
-        <p:xfrm>
-          <a:off x="581025" y="1468438"/>
-          <a:ext cx="5760719" cy="1645920"/>
-        </p:xfrm>
-        <a:graphic>
-          <a:graphicData uri="http://schemas.openxmlformats.org/drawingml/2006/table">
-            <a:tbl>
-              <a:tblPr firstRow="1" bandRow="1">
-                <a:tableStyleId>{5C22544A-7EE6-4342-B048-85BDC9FD1C3A}</a:tableStyleId>
-              </a:tblPr>
-              <a:tblGrid>
-                <a:gridCol w="2011680">
-                  <a:extLst>
-                    <a:ext uri="{9D8B030D-6E8A-4147-A177-3AD203B41FA5}">
-                      <a16:colId xmlns:a16="http://schemas.microsoft.com/office/drawing/2014/main" val="20000"/>
-                    </a:ext>
-                  </a:extLst>
-                </a:gridCol>
-                <a:gridCol w="3749039">
-                  <a:extLst>
-                    <a:ext uri="{9D8B030D-6E8A-4147-A177-3AD203B41FA5}">
-                      <a16:colId xmlns:a16="http://schemas.microsoft.com/office/drawing/2014/main" val="20001"/>
-                    </a:ext>
-                  </a:extLst>
-                </a:gridCol>
-              </a:tblGrid>
-              <a:tr h="411480">
-                <a:tc>
-                  <a:txBody>
-                    <a:bodyPr/>
-                    <a:lstStyle/>
-                    <a:p>
-                      <a:pPr algn="ctr"/>
-                      <a:r>
-                        <a:rPr sz="1200" b="1" dirty="0" err="1">
-                          <a:solidFill>
-                            <a:srgbClr val="38BDF8"/>
-                          </a:solidFill>
-                          <a:latin typeface="Calibri"/>
-                        </a:rPr>
-                        <a:t>Parametru</a:t>
-                      </a:r>
-                      <a:endParaRPr sz="1200" b="1" dirty="0">
-                        <a:solidFill>
-                          <a:srgbClr val="38BDF8"/>
-                        </a:solidFill>
-                        <a:latin typeface="Calibri"/>
-                      </a:endParaRPr>
-                    </a:p>
-                  </a:txBody>
-                  <a:tcPr>
-                    <a:solidFill>
-                      <a:srgbClr val="0E1F38"/>
-                    </a:solidFill>
-                  </a:tcPr>
-                </a:tc>
-                <a:tc>
-                  <a:txBody>
-                    <a:bodyPr/>
-                    <a:lstStyle/>
-                    <a:p>
-                      <a:pPr algn="ctr"/>
-                      <a:r>
-                        <a:rPr sz="1200" b="1">
-                          <a:solidFill>
-                            <a:srgbClr val="38BDF8"/>
-                          </a:solidFill>
-                          <a:latin typeface="Calibri"/>
-                        </a:rPr>
-                        <a:t>Regulă de validare</a:t>
-                      </a:r>
-                    </a:p>
-                  </a:txBody>
-                  <a:tcPr>
-                    <a:solidFill>
-                      <a:srgbClr val="0E1F38"/>
-                    </a:solidFill>
-                  </a:tcPr>
-                </a:tc>
-                <a:extLst>
-                  <a:ext uri="{0D108BD9-81ED-4DB2-BD59-A6C34878D82A}">
-                    <a16:rowId xmlns:a16="http://schemas.microsoft.com/office/drawing/2014/main" val="10000"/>
-                  </a:ext>
-                </a:extLst>
-              </a:tr>
-              <a:tr h="411480">
-                <a:tc>
-                  <a:txBody>
-                    <a:bodyPr/>
-                    <a:lstStyle/>
-                    <a:p>
-                      <a:pPr algn="l"/>
-                      <a:r>
-                        <a:rPr sz="1100" b="0">
-                          <a:solidFill>
-                            <a:srgbClr val="FFFFFF"/>
-                          </a:solidFill>
-                          <a:latin typeface="Calibri"/>
-                        </a:rPr>
-                        <a:t>class_name</a:t>
-                      </a:r>
-                    </a:p>
-                  </a:txBody>
-                  <a:tcPr>
-                    <a:solidFill>
-                      <a:srgbClr val="1E293B"/>
-                    </a:solidFill>
-                  </a:tcPr>
-                </a:tc>
-                <a:tc>
-                  <a:txBody>
-                    <a:bodyPr/>
-                    <a:lstStyle/>
-                    <a:p>
-                      <a:pPr algn="ctr"/>
-                      <a:r>
-                        <a:rPr sz="1100" b="0">
-                          <a:solidFill>
-                            <a:srgbClr val="FFFFFF"/>
-                          </a:solidFill>
-                          <a:latin typeface="Calibri"/>
-                        </a:rPr>
-                        <a:t>Trebuie să fie în {dance, pilates, yoga, zumba}</a:t>
-                      </a:r>
-                    </a:p>
-                  </a:txBody>
-                  <a:tcPr>
-                    <a:solidFill>
-                      <a:srgbClr val="1E293B"/>
-                    </a:solidFill>
-                  </a:tcPr>
-                </a:tc>
-                <a:extLst>
-                  <a:ext uri="{0D108BD9-81ED-4DB2-BD59-A6C34878D82A}">
-                    <a16:rowId xmlns:a16="http://schemas.microsoft.com/office/drawing/2014/main" val="10001"/>
-                  </a:ext>
-                </a:extLst>
-              </a:tr>
-              <a:tr h="411480">
-                <a:tc>
-                  <a:txBody>
-                    <a:bodyPr/>
-                    <a:lstStyle/>
-                    <a:p>
-                      <a:pPr algn="l"/>
-                      <a:r>
-                        <a:rPr sz="1100" b="0">
-                          <a:solidFill>
-                            <a:srgbClr val="FFFFFF"/>
-                          </a:solidFill>
-                          <a:latin typeface="Calibri"/>
-                        </a:rPr>
-                        <a:t>instructor</a:t>
-                      </a:r>
-                    </a:p>
-                  </a:txBody>
-                  <a:tcPr>
-                    <a:solidFill>
-                      <a:srgbClr val="273549"/>
-                    </a:solidFill>
-                  </a:tcPr>
-                </a:tc>
-                <a:tc>
-                  <a:txBody>
-                    <a:bodyPr/>
-                    <a:lstStyle/>
-                    <a:p>
-                      <a:pPr algn="ctr"/>
-                      <a:r>
-                        <a:rPr sz="1100" b="0">
-                          <a:solidFill>
-                            <a:srgbClr val="FFFFFF"/>
-                          </a:solidFill>
-                          <a:latin typeface="Calibri"/>
-                        </a:rPr>
-                        <a:t>Șir nevid după strip()</a:t>
-                      </a:r>
-                    </a:p>
-                  </a:txBody>
-                  <a:tcPr>
-                    <a:solidFill>
-                      <a:srgbClr val="273549"/>
-                    </a:solidFill>
-                  </a:tcPr>
-                </a:tc>
-                <a:extLst>
-                  <a:ext uri="{0D108BD9-81ED-4DB2-BD59-A6C34878D82A}">
-                    <a16:rowId xmlns:a16="http://schemas.microsoft.com/office/drawing/2014/main" val="10002"/>
-                  </a:ext>
-                </a:extLst>
-              </a:tr>
-              <a:tr h="411480">
-                <a:tc>
-                  <a:txBody>
-                    <a:bodyPr/>
-                    <a:lstStyle/>
-                    <a:p>
-                      <a:pPr algn="l"/>
-                      <a:r>
-                        <a:rPr sz="1100" b="0">
-                          <a:solidFill>
-                            <a:srgbClr val="FFFFFF"/>
-                          </a:solidFill>
-                          <a:latin typeface="Calibri"/>
-                        </a:rPr>
-                        <a:t>price_per_session</a:t>
-                      </a:r>
-                    </a:p>
-                  </a:txBody>
-                  <a:tcPr>
-                    <a:solidFill>
-                      <a:srgbClr val="1E293B"/>
-                    </a:solidFill>
-                  </a:tcPr>
-                </a:tc>
-                <a:tc>
-                  <a:txBody>
-                    <a:bodyPr/>
-                    <a:lstStyle/>
-                    <a:p>
-                      <a:pPr algn="ctr"/>
-                      <a:r>
-                        <a:rPr sz="1100" b="0" dirty="0" err="1">
-                          <a:solidFill>
-                            <a:srgbClr val="FFFFFF"/>
-                          </a:solidFill>
-                          <a:latin typeface="Calibri"/>
-                        </a:rPr>
-                        <a:t>Număr</a:t>
-                      </a:r>
-                      <a:r>
-                        <a:rPr sz="1100" b="0" dirty="0">
-                          <a:solidFill>
-                            <a:srgbClr val="FFFFFF"/>
-                          </a:solidFill>
-                          <a:latin typeface="Calibri"/>
-                        </a:rPr>
-                        <a:t> </a:t>
-                      </a:r>
-                      <a:r>
-                        <a:rPr sz="1100" b="0" dirty="0" err="1">
-                          <a:solidFill>
-                            <a:srgbClr val="FFFFFF"/>
-                          </a:solidFill>
-                          <a:latin typeface="Calibri"/>
-                        </a:rPr>
-                        <a:t>pozitiv</a:t>
-                      </a:r>
-                      <a:r>
-                        <a:rPr sz="1100" b="0" dirty="0">
-                          <a:solidFill>
-                            <a:srgbClr val="FFFFFF"/>
-                          </a:solidFill>
-                          <a:latin typeface="Calibri"/>
-                        </a:rPr>
-                        <a:t>; bool </a:t>
-                      </a:r>
-                      <a:r>
-                        <a:rPr sz="1100" b="0" dirty="0" err="1">
-                          <a:solidFill>
-                            <a:srgbClr val="FFFFFF"/>
-                          </a:solidFill>
-                          <a:latin typeface="Calibri"/>
-                        </a:rPr>
-                        <a:t>respins</a:t>
-                      </a:r>
-                      <a:r>
-                        <a:rPr sz="1100" b="0" dirty="0">
-                          <a:solidFill>
-                            <a:srgbClr val="FFFFFF"/>
-                          </a:solidFill>
-                          <a:latin typeface="Calibri"/>
-                        </a:rPr>
-                        <a:t> explicit</a:t>
-                      </a:r>
-                    </a:p>
-                  </a:txBody>
-                  <a:tcPr>
-                    <a:solidFill>
-                      <a:srgbClr val="1E293B"/>
-                    </a:solidFill>
-                  </a:tcPr>
-                </a:tc>
-                <a:extLst>
-                  <a:ext uri="{0D108BD9-81ED-4DB2-BD59-A6C34878D82A}">
-                    <a16:rowId xmlns:a16="http://schemas.microsoft.com/office/drawing/2014/main" val="10003"/>
-                  </a:ext>
-                </a:extLst>
-              </a:tr>
-            </a:tbl>
-          </a:graphicData>
-        </a:graphic>
-      </p:graphicFrame>
-      <p:graphicFrame>
-        <p:nvGraphicFramePr>
-          <p:cNvPr id="7" name="Table 6">
+        </p:nvSpPr>
+        <p:spPr>
+          <a:xfrm>
+            <a:off x="319935" y="1755957"/>
+            <a:ext cx="11029615" cy="3634486"/>
+          </a:xfrm>
+        </p:spPr>
+        <p:txBody>
+          <a:bodyPr>
+            <a:noAutofit/>
+          </a:bodyPr>
+          <a:lstStyle/>
+          <a:p>
+            <a:r>
+              <a:rPr lang="en-US" sz="1600" b="1" dirty="0" err="1">
+                <a:latin typeface="Arial" pitchFamily="34" charset="0"/>
+                <a:cs typeface="Arial" pitchFamily="34" charset="0"/>
+              </a:rPr>
+              <a:t>Acoperire</a:t>
+            </a:r>
+            <a:r>
+              <a:rPr lang="en-US" sz="1600" b="1" dirty="0">
+                <a:latin typeface="Arial" pitchFamily="34" charset="0"/>
+                <a:cs typeface="Arial" pitchFamily="34" charset="0"/>
+              </a:rPr>
+              <a:t> </a:t>
+            </a:r>
+            <a:r>
+              <a:rPr lang="en-US" sz="1600" b="1" dirty="0" err="1" smtClean="0">
+                <a:latin typeface="Arial" pitchFamily="34" charset="0"/>
+                <a:cs typeface="Arial" pitchFamily="34" charset="0"/>
+              </a:rPr>
+              <a:t>instrucțiune</a:t>
+            </a:r>
+            <a:r>
+              <a:rPr lang="ro-RO" sz="1600" b="1" dirty="0" smtClean="0">
+                <a:latin typeface="Arial" pitchFamily="34" charset="0"/>
+                <a:cs typeface="Arial" pitchFamily="34" charset="0"/>
+              </a:rPr>
+              <a:t>: </a:t>
+            </a:r>
+            <a:r>
+              <a:rPr lang="vi-VN" sz="1600" dirty="0">
+                <a:latin typeface="Arial" pitchFamily="34" charset="0"/>
+                <a:cs typeface="Arial" pitchFamily="34" charset="0"/>
+              </a:rPr>
+              <a:t>Fiecare din cele </a:t>
+            </a:r>
+            <a:r>
+              <a:rPr lang="vi-VN" sz="1600" b="1" dirty="0">
+                <a:latin typeface="Arial" pitchFamily="34" charset="0"/>
+                <a:cs typeface="Arial" pitchFamily="34" charset="0"/>
+              </a:rPr>
+              <a:t>43 de instrucțiuni</a:t>
+            </a:r>
+            <a:r>
+              <a:rPr lang="vi-VN" sz="1600" dirty="0">
+                <a:latin typeface="Arial" pitchFamily="34" charset="0"/>
+                <a:cs typeface="Arial" pitchFamily="34" charset="0"/>
+              </a:rPr>
+              <a:t> este executată cel puțin o dată</a:t>
+            </a:r>
+            <a:r>
+              <a:rPr lang="vi-VN" sz="1600" dirty="0" smtClean="0">
+                <a:latin typeface="Arial" pitchFamily="34" charset="0"/>
+                <a:cs typeface="Arial" pitchFamily="34" charset="0"/>
+              </a:rPr>
+              <a:t>.</a:t>
+            </a:r>
+            <a:endParaRPr lang="ro-RO" sz="1600" dirty="0" smtClean="0">
+              <a:latin typeface="Arial" pitchFamily="34" charset="0"/>
+              <a:cs typeface="Arial" pitchFamily="34" charset="0"/>
+            </a:endParaRPr>
+          </a:p>
+          <a:p>
+            <a:endParaRPr lang="ro-RO" sz="1600" dirty="0" smtClean="0">
+              <a:latin typeface="Arial" pitchFamily="34" charset="0"/>
+              <a:cs typeface="Arial" pitchFamily="34" charset="0"/>
+            </a:endParaRPr>
+          </a:p>
+          <a:p>
+            <a:pPr marL="0" indent="0">
+              <a:buNone/>
+            </a:pPr>
+            <a:endParaRPr lang="ro-RO" sz="1600" dirty="0">
+              <a:latin typeface="Arial" pitchFamily="34" charset="0"/>
+              <a:cs typeface="Arial" pitchFamily="34" charset="0"/>
+            </a:endParaRPr>
+          </a:p>
+          <a:p>
+            <a:pPr marL="0" indent="0">
+              <a:buNone/>
+            </a:pPr>
+            <a:endParaRPr lang="ro-RO" sz="1600" dirty="0" smtClean="0">
+              <a:latin typeface="Arial" pitchFamily="34" charset="0"/>
+              <a:cs typeface="Arial" pitchFamily="34" charset="0"/>
+            </a:endParaRPr>
+          </a:p>
+          <a:p>
+            <a:r>
+              <a:rPr lang="en-US" sz="1600" b="1" dirty="0" err="1">
+                <a:latin typeface="Arial" pitchFamily="34" charset="0"/>
+                <a:cs typeface="Arial" pitchFamily="34" charset="0"/>
+              </a:rPr>
+              <a:t>Acoperire</a:t>
+            </a:r>
+            <a:r>
+              <a:rPr lang="en-US" sz="1600" b="1" dirty="0">
+                <a:latin typeface="Arial" pitchFamily="34" charset="0"/>
+                <a:cs typeface="Arial" pitchFamily="34" charset="0"/>
+              </a:rPr>
+              <a:t> </a:t>
+            </a:r>
+            <a:r>
+              <a:rPr lang="en-US" sz="1600" b="1" dirty="0" err="1" smtClean="0">
+                <a:latin typeface="Arial" pitchFamily="34" charset="0"/>
+                <a:cs typeface="Arial" pitchFamily="34" charset="0"/>
+              </a:rPr>
+              <a:t>decizie</a:t>
+            </a:r>
+            <a:r>
+              <a:rPr lang="ro-RO" sz="1600" b="1" dirty="0" smtClean="0">
+                <a:latin typeface="Arial" pitchFamily="34" charset="0"/>
+                <a:cs typeface="Arial" pitchFamily="34" charset="0"/>
+              </a:rPr>
+              <a:t>: </a:t>
+            </a:r>
+            <a:r>
+              <a:rPr lang="en-US" sz="1600" dirty="0" err="1">
+                <a:latin typeface="Arial" pitchFamily="34" charset="0"/>
+                <a:cs typeface="Arial" pitchFamily="34" charset="0"/>
+              </a:rPr>
+              <a:t>Fiecare</a:t>
+            </a:r>
+            <a:r>
+              <a:rPr lang="en-US" sz="1600" dirty="0">
+                <a:latin typeface="Arial" pitchFamily="34" charset="0"/>
+                <a:cs typeface="Arial" pitchFamily="34" charset="0"/>
+              </a:rPr>
+              <a:t> </a:t>
+            </a:r>
+            <a:r>
+              <a:rPr lang="en-US" sz="1600" b="1" dirty="0">
+                <a:latin typeface="Arial" pitchFamily="34" charset="0"/>
+                <a:cs typeface="Arial" pitchFamily="34" charset="0"/>
+              </a:rPr>
+              <a:t>if</a:t>
+            </a:r>
+            <a:r>
+              <a:rPr lang="en-US" sz="1600" dirty="0">
+                <a:latin typeface="Arial" pitchFamily="34" charset="0"/>
+                <a:cs typeface="Arial" pitchFamily="34" charset="0"/>
+              </a:rPr>
+              <a:t> </a:t>
+            </a:r>
+            <a:r>
+              <a:rPr lang="en-US" sz="1600" dirty="0" err="1">
+                <a:latin typeface="Arial" pitchFamily="34" charset="0"/>
+                <a:cs typeface="Arial" pitchFamily="34" charset="0"/>
+              </a:rPr>
+              <a:t>este</a:t>
+            </a:r>
+            <a:r>
+              <a:rPr lang="en-US" sz="1600" dirty="0">
+                <a:latin typeface="Arial" pitchFamily="34" charset="0"/>
+                <a:cs typeface="Arial" pitchFamily="34" charset="0"/>
+              </a:rPr>
+              <a:t> </a:t>
+            </a:r>
+            <a:r>
+              <a:rPr lang="en-US" sz="1600" dirty="0" err="1">
+                <a:latin typeface="Arial" pitchFamily="34" charset="0"/>
+                <a:cs typeface="Arial" pitchFamily="34" charset="0"/>
+              </a:rPr>
+              <a:t>executat</a:t>
+            </a:r>
+            <a:r>
+              <a:rPr lang="en-US" sz="1600" dirty="0">
+                <a:latin typeface="Arial" pitchFamily="34" charset="0"/>
+                <a:cs typeface="Arial" pitchFamily="34" charset="0"/>
+              </a:rPr>
+              <a:t> </a:t>
+            </a:r>
+            <a:endParaRPr lang="ro-RO" sz="1600" dirty="0" smtClean="0">
+              <a:latin typeface="Arial" pitchFamily="34" charset="0"/>
+              <a:cs typeface="Arial" pitchFamily="34" charset="0"/>
+            </a:endParaRPr>
+          </a:p>
+          <a:p>
+            <a:pPr marL="0" indent="0">
+              <a:buNone/>
+            </a:pPr>
+            <a:r>
+              <a:rPr lang="ro-RO" sz="1600" dirty="0" smtClean="0">
+                <a:latin typeface="Arial" pitchFamily="34" charset="0"/>
+                <a:cs typeface="Arial" pitchFamily="34" charset="0"/>
+              </a:rPr>
+              <a:t>      </a:t>
+            </a:r>
+            <a:r>
+              <a:rPr lang="en-US" sz="1600" dirty="0" err="1" smtClean="0">
+                <a:latin typeface="Arial" pitchFamily="34" charset="0"/>
+                <a:cs typeface="Arial" pitchFamily="34" charset="0"/>
+              </a:rPr>
+              <a:t>pe</a:t>
+            </a:r>
+            <a:r>
+              <a:rPr lang="en-US" sz="1600" dirty="0" smtClean="0">
+                <a:latin typeface="Arial" pitchFamily="34" charset="0"/>
+                <a:cs typeface="Arial" pitchFamily="34" charset="0"/>
+              </a:rPr>
+              <a:t> </a:t>
+            </a:r>
+            <a:r>
+              <a:rPr lang="en-US" sz="1600" dirty="0" err="1">
+                <a:latin typeface="Arial" pitchFamily="34" charset="0"/>
+                <a:cs typeface="Arial" pitchFamily="34" charset="0"/>
+              </a:rPr>
+              <a:t>ramura</a:t>
+            </a:r>
+            <a:r>
+              <a:rPr lang="en-US" sz="1600" dirty="0">
+                <a:latin typeface="Arial" pitchFamily="34" charset="0"/>
+                <a:cs typeface="Arial" pitchFamily="34" charset="0"/>
+              </a:rPr>
+              <a:t> </a:t>
+            </a:r>
+            <a:r>
+              <a:rPr lang="en-US" sz="1600" b="1" dirty="0">
+                <a:latin typeface="Arial" pitchFamily="34" charset="0"/>
+                <a:cs typeface="Arial" pitchFamily="34" charset="0"/>
+              </a:rPr>
+              <a:t>True</a:t>
+            </a:r>
+            <a:r>
+              <a:rPr lang="en-US" sz="1600" dirty="0">
+                <a:latin typeface="Arial" pitchFamily="34" charset="0"/>
+                <a:cs typeface="Arial" pitchFamily="34" charset="0"/>
+              </a:rPr>
+              <a:t> </a:t>
+            </a:r>
+            <a:r>
+              <a:rPr lang="en-US" sz="1600" dirty="0" err="1">
+                <a:latin typeface="Arial" pitchFamily="34" charset="0"/>
+                <a:cs typeface="Arial" pitchFamily="34" charset="0"/>
+              </a:rPr>
+              <a:t>și</a:t>
+            </a:r>
+            <a:r>
+              <a:rPr lang="en-US" sz="1600" dirty="0">
+                <a:latin typeface="Arial" pitchFamily="34" charset="0"/>
+                <a:cs typeface="Arial" pitchFamily="34" charset="0"/>
+              </a:rPr>
+              <a:t> </a:t>
+            </a:r>
+            <a:r>
+              <a:rPr lang="en-US" sz="1600" dirty="0" err="1">
+                <a:latin typeface="Arial" pitchFamily="34" charset="0"/>
+                <a:cs typeface="Arial" pitchFamily="34" charset="0"/>
+              </a:rPr>
+              <a:t>pe</a:t>
+            </a:r>
+            <a:r>
+              <a:rPr lang="en-US" sz="1600" dirty="0">
+                <a:latin typeface="Arial" pitchFamily="34" charset="0"/>
+                <a:cs typeface="Arial" pitchFamily="34" charset="0"/>
+              </a:rPr>
+              <a:t> </a:t>
+            </a:r>
+            <a:r>
+              <a:rPr lang="en-US" sz="1600" dirty="0" err="1">
+                <a:latin typeface="Arial" pitchFamily="34" charset="0"/>
+                <a:cs typeface="Arial" pitchFamily="34" charset="0"/>
+              </a:rPr>
+              <a:t>ramura</a:t>
+            </a:r>
+            <a:r>
+              <a:rPr lang="en-US" sz="1600" dirty="0">
+                <a:latin typeface="Arial" pitchFamily="34" charset="0"/>
+                <a:cs typeface="Arial" pitchFamily="34" charset="0"/>
+              </a:rPr>
+              <a:t> </a:t>
+            </a:r>
+            <a:r>
+              <a:rPr lang="en-US" sz="1600" b="1" dirty="0">
+                <a:latin typeface="Arial" pitchFamily="34" charset="0"/>
+                <a:cs typeface="Arial" pitchFamily="34" charset="0"/>
+              </a:rPr>
+              <a:t>False</a:t>
+            </a:r>
+            <a:r>
+              <a:rPr lang="en-US" sz="1600" dirty="0" smtClean="0">
+                <a:latin typeface="Arial" pitchFamily="34" charset="0"/>
+                <a:cs typeface="Arial" pitchFamily="34" charset="0"/>
+              </a:rPr>
+              <a:t>.</a:t>
+            </a:r>
+            <a:endParaRPr lang="ro-RO" sz="1600" dirty="0" smtClean="0">
+              <a:latin typeface="Arial" pitchFamily="34" charset="0"/>
+              <a:cs typeface="Arial" pitchFamily="34" charset="0"/>
+            </a:endParaRPr>
+          </a:p>
+          <a:p>
+            <a:endParaRPr lang="ro-RO" sz="1600" dirty="0">
+              <a:latin typeface="Arial" pitchFamily="34" charset="0"/>
+              <a:cs typeface="Arial" pitchFamily="34" charset="0"/>
+            </a:endParaRPr>
+          </a:p>
+          <a:p>
+            <a:endParaRPr lang="ro-RO" sz="1600" dirty="0" smtClean="0">
+              <a:latin typeface="Arial" pitchFamily="34" charset="0"/>
+              <a:cs typeface="Arial" pitchFamily="34" charset="0"/>
+            </a:endParaRPr>
+          </a:p>
+          <a:p>
+            <a:pPr marL="0" indent="0">
+              <a:buNone/>
+            </a:pPr>
+            <a:endParaRPr lang="ro-RO" sz="1600" dirty="0" smtClean="0">
+              <a:latin typeface="Arial" pitchFamily="34" charset="0"/>
+              <a:cs typeface="Arial" pitchFamily="34" charset="0"/>
+            </a:endParaRPr>
+          </a:p>
+          <a:p>
+            <a:r>
+              <a:rPr lang="en-US" sz="1600" b="1" dirty="0" err="1">
+                <a:latin typeface="Arial" pitchFamily="34" charset="0"/>
+                <a:cs typeface="Arial" pitchFamily="34" charset="0"/>
+              </a:rPr>
+              <a:t>Acoperire</a:t>
+            </a:r>
+            <a:r>
+              <a:rPr lang="en-US" sz="1600" b="1" dirty="0">
+                <a:latin typeface="Arial" pitchFamily="34" charset="0"/>
+                <a:cs typeface="Arial" pitchFamily="34" charset="0"/>
+              </a:rPr>
+              <a:t> </a:t>
+            </a:r>
+            <a:r>
+              <a:rPr lang="en-US" sz="1600" b="1" dirty="0" err="1" smtClean="0">
+                <a:latin typeface="Arial" pitchFamily="34" charset="0"/>
+                <a:cs typeface="Arial" pitchFamily="34" charset="0"/>
+              </a:rPr>
+              <a:t>condiție</a:t>
+            </a:r>
+            <a:r>
+              <a:rPr lang="ro-RO" sz="1600" b="1" dirty="0" smtClean="0">
+                <a:latin typeface="Arial" pitchFamily="34" charset="0"/>
+                <a:cs typeface="Arial" pitchFamily="34" charset="0"/>
+              </a:rPr>
+              <a:t>: </a:t>
+            </a:r>
+            <a:r>
+              <a:rPr lang="vi-VN" sz="1600" dirty="0">
+                <a:latin typeface="Arial" pitchFamily="34" charset="0"/>
+                <a:cs typeface="Arial" pitchFamily="34" charset="0"/>
+              </a:rPr>
+              <a:t>Fiecare condiție atomică dintr-o </a:t>
+            </a:r>
+            <a:endParaRPr lang="ro-RO" sz="1600" dirty="0" smtClean="0">
+              <a:latin typeface="Arial" pitchFamily="34" charset="0"/>
+              <a:cs typeface="Arial" pitchFamily="34" charset="0"/>
+            </a:endParaRPr>
+          </a:p>
+          <a:p>
+            <a:pPr marL="0" indent="0">
+              <a:buNone/>
+            </a:pPr>
+            <a:r>
+              <a:rPr lang="ro-RO" sz="1600" dirty="0" smtClean="0">
+                <a:latin typeface="Arial" pitchFamily="34" charset="0"/>
+                <a:cs typeface="Arial" pitchFamily="34" charset="0"/>
+              </a:rPr>
+              <a:t>      </a:t>
+            </a:r>
+            <a:r>
+              <a:rPr lang="vi-VN" sz="1600" dirty="0" smtClean="0">
+                <a:latin typeface="Arial" pitchFamily="34" charset="0"/>
+                <a:cs typeface="Arial" pitchFamily="34" charset="0"/>
+              </a:rPr>
+              <a:t>expresie </a:t>
+            </a:r>
+            <a:r>
+              <a:rPr lang="vi-VN" sz="1600" dirty="0">
+                <a:latin typeface="Arial" pitchFamily="34" charset="0"/>
+                <a:cs typeface="Arial" pitchFamily="34" charset="0"/>
+              </a:rPr>
+              <a:t>compusă este testată independent</a:t>
+            </a:r>
+            <a:r>
+              <a:rPr lang="vi-VN" sz="1600" dirty="0" smtClean="0">
+                <a:latin typeface="Arial" pitchFamily="34" charset="0"/>
+                <a:cs typeface="Arial" pitchFamily="34" charset="0"/>
+              </a:rPr>
+              <a:t>.</a:t>
+            </a:r>
+            <a:endParaRPr lang="ro-RO" sz="1600" dirty="0" smtClean="0">
+              <a:latin typeface="Arial" pitchFamily="34" charset="0"/>
+              <a:cs typeface="Arial" pitchFamily="34" charset="0"/>
+            </a:endParaRPr>
+          </a:p>
+        </p:txBody>
+      </p:sp>
+      <p:pic>
+        <p:nvPicPr>
+          <p:cNvPr id="7170" name="Picture 2"/>
+          <p:cNvPicPr>
+            <a:picLocks noChangeAspect="1" noChangeArrowheads="1"/>
+          </p:cNvPicPr>
+          <p:nvPr/>
+        </p:nvPicPr>
+        <p:blipFill>
+          <a:blip r:embed="rId2">
             <a:extLst>
-              <a:ext uri="{FF2B5EF4-FFF2-40B4-BE49-F238E27FC236}">
-                <a16:creationId xmlns:a16="http://schemas.microsoft.com/office/drawing/2014/main" id="{104A91B1-A473-C28A-7D9F-A062290E5E07}"/>
+              <a:ext uri="{28A0092B-C50C-407E-A947-70E740481C1C}">
+                <a14:useLocalDpi xmlns:a14="http://schemas.microsoft.com/office/drawing/2010/main" val="0"/>
               </a:ext>
             </a:extLst>
-          </p:cNvPr>
-          <p:cNvGraphicFramePr>
-            <a:graphicFrameLocks noGrp="1"/>
-          </p:cNvGraphicFramePr>
+          </a:blip>
+          <a:srcRect/>
+          <a:stretch>
+            <a:fillRect/>
+          </a:stretch>
+        </p:blipFill>
+        <p:spPr bwMode="auto">
+          <a:xfrm>
+            <a:off x="699796" y="1758905"/>
+            <a:ext cx="8406882" cy="889917"/>
+          </a:xfrm>
+          <a:prstGeom prst="rect">
+            <a:avLst/>
+          </a:prstGeom>
+          <a:noFill/>
+          <a:ln>
+            <a:noFill/>
+          </a:ln>
+          <a:effectLst/>
+          <a:extLst>
+            <a:ext uri="{909E8E84-426E-40DD-AFC4-6F175D3DCCD1}">
+              <a14:hiddenFill xmlns:a14="http://schemas.microsoft.com/office/drawing/2010/main">
+                <a:solidFill>
+                  <a:schemeClr val="accent1"/>
+                </a:solidFill>
+              </a14:hiddenFill>
+            </a:ext>
+            <a:ext uri="{91240B29-F687-4F45-9708-019B960494DF}">
+              <a14:hiddenLine xmlns:a14="http://schemas.microsoft.com/office/drawing/2010/main" w="9525">
+                <a:solidFill>
+                  <a:schemeClr val="tx1"/>
+                </a:solidFill>
+                <a:miter lim="800000"/>
+                <a:headEnd/>
+                <a:tailEnd/>
+              </a14:hiddenLine>
+            </a:ext>
+            <a:ext uri="{AF507438-7753-43E0-B8FC-AC1667EBCBE1}">
+              <a14:hiddenEffects xmlns:a14="http://schemas.microsoft.com/office/drawing/2010/main">
+                <a:effectLst>
+                  <a:outerShdw dist="35921" dir="2700000" algn="ctr" rotWithShape="0">
+                    <a:schemeClr val="bg2"/>
+                  </a:outerShdw>
+                </a:effectLst>
+              </a14:hiddenEffects>
+            </a:ext>
+          </a:extLst>
+        </p:spPr>
+      </p:pic>
+      <p:pic>
+        <p:nvPicPr>
+          <p:cNvPr id="7171" name="Picture 3"/>
+          <p:cNvPicPr>
+            <a:picLocks noChangeAspect="1" noChangeArrowheads="1"/>
+          </p:cNvPicPr>
           <p:nvPr/>
-        </p:nvGraphicFramePr>
-        <p:xfrm>
-          <a:off x="6400800" y="1600200"/>
-          <a:ext cx="5577840" cy="2011680"/>
-        </p:xfrm>
-        <a:graphic>
-          <a:graphicData uri="http://schemas.openxmlformats.org/drawingml/2006/table">
-            <a:tbl>
-              <a:tblPr firstRow="1" bandRow="1">
-                <a:tableStyleId>{5C22544A-7EE6-4342-B048-85BDC9FD1C3A}</a:tableStyleId>
-              </a:tblPr>
-              <a:tblGrid>
-                <a:gridCol w="2103120">
-                  <a:extLst>
-                    <a:ext uri="{9D8B030D-6E8A-4147-A177-3AD203B41FA5}">
-                      <a16:colId xmlns:a16="http://schemas.microsoft.com/office/drawing/2014/main" val="20000"/>
-                    </a:ext>
-                  </a:extLst>
-                </a:gridCol>
-                <a:gridCol w="3474720">
-                  <a:extLst>
-                    <a:ext uri="{9D8B030D-6E8A-4147-A177-3AD203B41FA5}">
-                      <a16:colId xmlns:a16="http://schemas.microsoft.com/office/drawing/2014/main" val="20001"/>
-                    </a:ext>
-                  </a:extLst>
-                </a:gridCol>
-              </a:tblGrid>
-              <a:tr h="335280">
-                <a:tc>
-                  <a:txBody>
-                    <a:bodyPr/>
-                    <a:lstStyle/>
-                    <a:p>
-                      <a:pPr algn="ctr"/>
-                      <a:r>
-                        <a:rPr sz="1200" b="1">
-                          <a:solidFill>
-                            <a:srgbClr val="38BDF8"/>
-                          </a:solidFill>
-                          <a:latin typeface="Calibri"/>
-                        </a:rPr>
-                        <a:t>Parametru</a:t>
-                      </a:r>
-                    </a:p>
-                  </a:txBody>
-                  <a:tcPr>
-                    <a:solidFill>
-                      <a:srgbClr val="0E1F38"/>
-                    </a:solidFill>
-                  </a:tcPr>
-                </a:tc>
-                <a:tc>
-                  <a:txBody>
-                    <a:bodyPr/>
-                    <a:lstStyle/>
-                    <a:p>
-                      <a:pPr algn="ctr"/>
-                      <a:r>
-                        <a:rPr sz="1200" b="1">
-                          <a:solidFill>
-                            <a:srgbClr val="38BDF8"/>
-                          </a:solidFill>
-                          <a:latin typeface="Calibri"/>
-                        </a:rPr>
-                        <a:t>Regulă de validare</a:t>
-                      </a:r>
-                    </a:p>
-                  </a:txBody>
-                  <a:tcPr>
-                    <a:solidFill>
-                      <a:srgbClr val="0E1F38"/>
-                    </a:solidFill>
-                  </a:tcPr>
-                </a:tc>
-                <a:extLst>
-                  <a:ext uri="{0D108BD9-81ED-4DB2-BD59-A6C34878D82A}">
-                    <a16:rowId xmlns:a16="http://schemas.microsoft.com/office/drawing/2014/main" val="10000"/>
-                  </a:ext>
-                </a:extLst>
-              </a:tr>
-              <a:tr h="335280">
-                <a:tc>
-                  <a:txBody>
-                    <a:bodyPr/>
-                    <a:lstStyle/>
-                    <a:p>
-                      <a:pPr algn="l"/>
-                      <a:r>
-                        <a:rPr sz="1100" b="0">
-                          <a:solidFill>
-                            <a:srgbClr val="FFFFFF"/>
-                          </a:solidFill>
-                          <a:latin typeface="Calibri"/>
-                        </a:rPr>
-                        <a:t>session_history</a:t>
-                      </a:r>
-                    </a:p>
-                  </a:txBody>
-                  <a:tcPr>
-                    <a:solidFill>
-                      <a:srgbClr val="1E293B"/>
-                    </a:solidFill>
-                  </a:tcPr>
-                </a:tc>
-                <a:tc>
-                  <a:txBody>
-                    <a:bodyPr/>
-                    <a:lstStyle/>
-                    <a:p>
-                      <a:pPr algn="ctr"/>
-                      <a:r>
-                        <a:rPr sz="1100" b="0">
-                          <a:solidFill>
-                            <a:srgbClr val="FFFFFF"/>
-                          </a:solidFill>
-                          <a:latin typeface="Calibri"/>
-                        </a:rPr>
-                        <a:t>Trebuie să fie de tip list</a:t>
-                      </a:r>
-                    </a:p>
-                  </a:txBody>
-                  <a:tcPr>
-                    <a:solidFill>
-                      <a:srgbClr val="1E293B"/>
-                    </a:solidFill>
-                  </a:tcPr>
-                </a:tc>
-                <a:extLst>
-                  <a:ext uri="{0D108BD9-81ED-4DB2-BD59-A6C34878D82A}">
-                    <a16:rowId xmlns:a16="http://schemas.microsoft.com/office/drawing/2014/main" val="10001"/>
-                  </a:ext>
-                </a:extLst>
-              </a:tr>
-              <a:tr h="335280">
-                <a:tc>
-                  <a:txBody>
-                    <a:bodyPr/>
-                    <a:lstStyle/>
-                    <a:p>
-                      <a:pPr algn="l"/>
-                      <a:r>
-                        <a:rPr sz="1100" b="0">
-                          <a:solidFill>
-                            <a:srgbClr val="FFFFFF"/>
-                          </a:solidFill>
-                          <a:latin typeface="Calibri"/>
-                        </a:rPr>
-                        <a:t>package_sessions</a:t>
-                      </a:r>
-                    </a:p>
-                  </a:txBody>
-                  <a:tcPr>
-                    <a:solidFill>
-                      <a:srgbClr val="273549"/>
-                    </a:solidFill>
-                  </a:tcPr>
-                </a:tc>
-                <a:tc>
-                  <a:txBody>
-                    <a:bodyPr/>
-                    <a:lstStyle/>
-                    <a:p>
-                      <a:pPr algn="ctr"/>
-                      <a:r>
-                        <a:rPr sz="1100" b="0">
-                          <a:solidFill>
-                            <a:srgbClr val="FFFFFF"/>
-                          </a:solidFill>
-                          <a:latin typeface="Calibri"/>
-                        </a:rPr>
-                        <a:t>int în [1, 20]; bool respins explicit</a:t>
-                      </a:r>
-                    </a:p>
-                  </a:txBody>
-                  <a:tcPr>
-                    <a:solidFill>
-                      <a:srgbClr val="273549"/>
-                    </a:solidFill>
-                  </a:tcPr>
-                </a:tc>
-                <a:extLst>
-                  <a:ext uri="{0D108BD9-81ED-4DB2-BD59-A6C34878D82A}">
-                    <a16:rowId xmlns:a16="http://schemas.microsoft.com/office/drawing/2014/main" val="10002"/>
-                  </a:ext>
-                </a:extLst>
-              </a:tr>
-              <a:tr h="335280">
-                <a:tc>
-                  <a:txBody>
-                    <a:bodyPr/>
-                    <a:lstStyle/>
-                    <a:p>
-                      <a:pPr algn="l"/>
-                      <a:r>
-                        <a:rPr sz="1100" b="0">
-                          <a:solidFill>
-                            <a:srgbClr val="FFFFFF"/>
-                          </a:solidFill>
-                          <a:latin typeface="Calibri"/>
-                        </a:rPr>
-                        <a:t>has_membership</a:t>
-                      </a:r>
-                    </a:p>
-                  </a:txBody>
-                  <a:tcPr>
-                    <a:solidFill>
-                      <a:srgbClr val="1E293B"/>
-                    </a:solidFill>
-                  </a:tcPr>
-                </a:tc>
-                <a:tc>
-                  <a:txBody>
-                    <a:bodyPr/>
-                    <a:lstStyle/>
-                    <a:p>
-                      <a:pPr algn="ctr"/>
-                      <a:r>
-                        <a:rPr sz="1100" b="0">
-                          <a:solidFill>
-                            <a:srgbClr val="FFFFFF"/>
-                          </a:solidFill>
-                          <a:latin typeface="Calibri"/>
-                        </a:rPr>
-                        <a:t>Strict bool (nu int)</a:t>
-                      </a:r>
-                    </a:p>
-                  </a:txBody>
-                  <a:tcPr>
-                    <a:solidFill>
-                      <a:srgbClr val="1E293B"/>
-                    </a:solidFill>
-                  </a:tcPr>
-                </a:tc>
-                <a:extLst>
-                  <a:ext uri="{0D108BD9-81ED-4DB2-BD59-A6C34878D82A}">
-                    <a16:rowId xmlns:a16="http://schemas.microsoft.com/office/drawing/2014/main" val="10003"/>
-                  </a:ext>
-                </a:extLst>
-              </a:tr>
-              <a:tr h="335280">
-                <a:tc>
-                  <a:txBody>
-                    <a:bodyPr/>
-                    <a:lstStyle/>
-                    <a:p>
-                      <a:pPr algn="l"/>
-                      <a:r>
-                        <a:rPr sz="1100" b="0">
-                          <a:solidFill>
-                            <a:srgbClr val="FFFFFF"/>
-                          </a:solidFill>
-                          <a:latin typeface="Calibri"/>
-                        </a:rPr>
-                        <a:t>statusuri în istoric</a:t>
-                      </a:r>
-                    </a:p>
-                  </a:txBody>
-                  <a:tcPr>
-                    <a:solidFill>
-                      <a:srgbClr val="273549"/>
-                    </a:solidFill>
-                  </a:tcPr>
-                </a:tc>
-                <a:tc>
-                  <a:txBody>
-                    <a:bodyPr/>
-                    <a:lstStyle/>
-                    <a:p>
-                      <a:pPr algn="ctr"/>
-                      <a:r>
-                        <a:rPr sz="1100" b="0">
-                          <a:solidFill>
-                            <a:srgbClr val="FFFFFF"/>
-                          </a:solidFill>
-                          <a:latin typeface="Calibri"/>
-                        </a:rPr>
-                        <a:t>Doar 'attended', 'no_show', 'cancelled'</a:t>
-                      </a:r>
-                    </a:p>
-                  </a:txBody>
-                  <a:tcPr>
-                    <a:solidFill>
-                      <a:srgbClr val="273549"/>
-                    </a:solidFill>
-                  </a:tcPr>
-                </a:tc>
-                <a:extLst>
-                  <a:ext uri="{0D108BD9-81ED-4DB2-BD59-A6C34878D82A}">
-                    <a16:rowId xmlns:a16="http://schemas.microsoft.com/office/drawing/2014/main" val="10004"/>
-                  </a:ext>
-                </a:extLst>
-              </a:tr>
-              <a:tr h="335280">
-                <a:tc>
-                  <a:txBody>
-                    <a:bodyPr/>
-                    <a:lstStyle/>
-                    <a:p>
-                      <a:pPr algn="l"/>
-                      <a:r>
-                        <a:rPr sz="1100" b="0">
-                          <a:solidFill>
-                            <a:srgbClr val="FFFFFF"/>
-                          </a:solidFill>
-                          <a:latin typeface="Calibri"/>
-                        </a:rPr>
-                        <a:t>consum vs pachet</a:t>
-                      </a:r>
-                    </a:p>
-                  </a:txBody>
-                  <a:tcPr>
-                    <a:solidFill>
-                      <a:srgbClr val="1E293B"/>
-                    </a:solidFill>
-                  </a:tcPr>
-                </a:tc>
-                <a:tc>
-                  <a:txBody>
-                    <a:bodyPr/>
-                    <a:lstStyle/>
-                    <a:p>
-                      <a:pPr algn="ctr"/>
-                      <a:r>
-                        <a:rPr sz="1100" b="0" dirty="0" err="1">
-                          <a:solidFill>
-                            <a:srgbClr val="FFFFFF"/>
-                          </a:solidFill>
-                          <a:latin typeface="Calibri"/>
-                        </a:rPr>
-                        <a:t>used_sessions</a:t>
-                      </a:r>
-                      <a:r>
-                        <a:rPr sz="1100" b="0" dirty="0">
-                          <a:solidFill>
-                            <a:srgbClr val="FFFFFF"/>
-                          </a:solidFill>
-                          <a:latin typeface="Calibri"/>
-                        </a:rPr>
-                        <a:t> ≤ </a:t>
-                      </a:r>
-                      <a:r>
-                        <a:rPr sz="1100" b="0" dirty="0" err="1">
-                          <a:solidFill>
-                            <a:srgbClr val="FFFFFF"/>
-                          </a:solidFill>
-                          <a:latin typeface="Calibri"/>
-                        </a:rPr>
-                        <a:t>package_sessions</a:t>
-                      </a:r>
-                      <a:endParaRPr sz="1100" b="0" dirty="0">
-                        <a:solidFill>
-                          <a:srgbClr val="FFFFFF"/>
-                        </a:solidFill>
-                        <a:latin typeface="Calibri"/>
-                      </a:endParaRPr>
-                    </a:p>
-                  </a:txBody>
-                  <a:tcPr>
-                    <a:solidFill>
-                      <a:srgbClr val="1E293B"/>
-                    </a:solidFill>
-                  </a:tcPr>
-                </a:tc>
-                <a:extLst>
-                  <a:ext uri="{0D108BD9-81ED-4DB2-BD59-A6C34878D82A}">
-                    <a16:rowId xmlns:a16="http://schemas.microsoft.com/office/drawing/2014/main" val="10005"/>
-                  </a:ext>
-                </a:extLst>
-              </a:tr>
-            </a:tbl>
-          </a:graphicData>
-        </a:graphic>
-      </p:graphicFrame>
+        </p:nvPicPr>
+        <p:blipFill>
+          <a:blip r:embed="rId3">
+            <a:extLst>
+              <a:ext uri="{28A0092B-C50C-407E-A947-70E740481C1C}">
+                <a14:useLocalDpi xmlns:a14="http://schemas.microsoft.com/office/drawing/2010/main" val="0"/>
+              </a:ext>
+            </a:extLst>
+          </a:blip>
+          <a:srcRect/>
+          <a:stretch>
+            <a:fillRect/>
+          </a:stretch>
+        </p:blipFill>
+        <p:spPr bwMode="auto">
+          <a:xfrm>
+            <a:off x="4648807" y="2328995"/>
+            <a:ext cx="7539307" cy="2009740"/>
+          </a:xfrm>
+          <a:prstGeom prst="rect">
+            <a:avLst/>
+          </a:prstGeom>
+          <a:noFill/>
+          <a:ln>
+            <a:noFill/>
+          </a:ln>
+          <a:effectLst/>
+          <a:extLst>
+            <a:ext uri="{909E8E84-426E-40DD-AFC4-6F175D3DCCD1}">
+              <a14:hiddenFill xmlns:a14="http://schemas.microsoft.com/office/drawing/2010/main">
+                <a:solidFill>
+                  <a:schemeClr val="accent1"/>
+                </a:solidFill>
+              </a14:hiddenFill>
+            </a:ext>
+            <a:ext uri="{91240B29-F687-4F45-9708-019B960494DF}">
+              <a14:hiddenLine xmlns:a14="http://schemas.microsoft.com/office/drawing/2010/main" w="9525">
+                <a:solidFill>
+                  <a:schemeClr val="tx1"/>
+                </a:solidFill>
+                <a:miter lim="800000"/>
+                <a:headEnd/>
+                <a:tailEnd/>
+              </a14:hiddenLine>
+            </a:ext>
+            <a:ext uri="{AF507438-7753-43E0-B8FC-AC1667EBCBE1}">
+              <a14:hiddenEffects xmlns:a14="http://schemas.microsoft.com/office/drawing/2010/main">
+                <a:effectLst>
+                  <a:outerShdw dist="35921" dir="2700000" algn="ctr" rotWithShape="0">
+                    <a:schemeClr val="bg2"/>
+                  </a:outerShdw>
+                </a:effectLst>
+              </a14:hiddenEffects>
+            </a:ext>
+          </a:extLst>
+        </p:spPr>
+      </p:pic>
+      <p:pic>
+        <p:nvPicPr>
+          <p:cNvPr id="7172" name="Picture 4"/>
+          <p:cNvPicPr>
+            <a:picLocks noChangeAspect="1" noChangeArrowheads="1"/>
+          </p:cNvPicPr>
+          <p:nvPr/>
+        </p:nvPicPr>
+        <p:blipFill>
+          <a:blip r:embed="rId4">
+            <a:extLst>
+              <a:ext uri="{28A0092B-C50C-407E-A947-70E740481C1C}">
+                <a14:useLocalDpi xmlns:a14="http://schemas.microsoft.com/office/drawing/2010/main" val="0"/>
+              </a:ext>
+            </a:extLst>
+          </a:blip>
+          <a:srcRect/>
+          <a:stretch>
+            <a:fillRect/>
+          </a:stretch>
+        </p:blipFill>
+        <p:spPr bwMode="auto">
+          <a:xfrm>
+            <a:off x="5912416" y="4404053"/>
+            <a:ext cx="5218469" cy="2458287"/>
+          </a:xfrm>
+          <a:prstGeom prst="rect">
+            <a:avLst/>
+          </a:prstGeom>
+          <a:noFill/>
+          <a:ln>
+            <a:noFill/>
+          </a:ln>
+          <a:effectLst/>
+          <a:extLst>
+            <a:ext uri="{909E8E84-426E-40DD-AFC4-6F175D3DCCD1}">
+              <a14:hiddenFill xmlns:a14="http://schemas.microsoft.com/office/drawing/2010/main">
+                <a:solidFill>
+                  <a:schemeClr val="accent1"/>
+                </a:solidFill>
+              </a14:hiddenFill>
+            </a:ext>
+            <a:ext uri="{91240B29-F687-4F45-9708-019B960494DF}">
+              <a14:hiddenLine xmlns:a14="http://schemas.microsoft.com/office/drawing/2010/main" w="9525">
+                <a:solidFill>
+                  <a:schemeClr val="tx1"/>
+                </a:solidFill>
+                <a:miter lim="800000"/>
+                <a:headEnd/>
+                <a:tailEnd/>
+              </a14:hiddenLine>
+            </a:ext>
+            <a:ext uri="{AF507438-7753-43E0-B8FC-AC1667EBCBE1}">
+              <a14:hiddenEffects xmlns:a14="http://schemas.microsoft.com/office/drawing/2010/main">
+                <a:effectLst>
+                  <a:outerShdw dist="35921" dir="2700000" algn="ctr" rotWithShape="0">
+                    <a:schemeClr val="bg2"/>
+                  </a:outerShdw>
+                </a:effectLst>
+              </a14:hiddenEffects>
+            </a:ext>
+          </a:extLst>
+        </p:spPr>
+      </p:pic>
     </p:spTree>
     <p:extLst>
       <p:ext uri="{BB962C8B-B14F-4D97-AF65-F5344CB8AC3E}">
-        <p14:creationId xmlns:p14="http://schemas.microsoft.com/office/powerpoint/2010/main" val="1855665131"/>
+        <p14:creationId xmlns:p14="http://schemas.microsoft.com/office/powerpoint/2010/main" val="1856327874"/>
+      </p:ext>
+    </p:extLst>
+  </p:cSld>
+  <p:clrMapOvr>
+    <a:masterClrMapping/>
+  </p:clrMapOvr>
+</p:sld>
+</file>
+
+<file path=ppt/slides/slide8.xml><?xml version="1.0" encoding="utf-8"?>
+<p:sld xmlns:a="http://schemas.openxmlformats.org/drawingml/2006/main" xmlns:r="http://schemas.openxmlformats.org/officeDocument/2006/relationships" xmlns:p="http://schemas.openxmlformats.org/presentationml/2006/main">
+  <p:cSld>
+    <p:spTree>
+      <p:nvGrpSpPr>
+        <p:cNvPr id="1" name=""/>
+        <p:cNvGrpSpPr/>
+        <p:nvPr/>
+      </p:nvGrpSpPr>
+      <p:grpSpPr>
+        <a:xfrm>
+          <a:off x="0" y="0"/>
+          <a:ext cx="0" cy="0"/>
+          <a:chOff x="0" y="0"/>
+          <a:chExt cx="0" cy="0"/>
+        </a:xfrm>
+      </p:grpSpPr>
+      <p:sp>
+        <p:nvSpPr>
+          <p:cNvPr id="2" name="Title 1"/>
+          <p:cNvSpPr>
+            <a:spLocks noGrp="1"/>
+          </p:cNvSpPr>
+          <p:nvPr>
+            <p:ph type="title"/>
+          </p:nvPr>
+        </p:nvSpPr>
+        <p:spPr>
+          <a:xfrm>
+            <a:off x="581192" y="702156"/>
+            <a:ext cx="8973355" cy="557477"/>
+          </a:xfrm>
+        </p:spPr>
+        <p:txBody>
+          <a:bodyPr>
+            <a:normAutofit/>
+          </a:bodyPr>
+          <a:lstStyle/>
+          <a:p>
+            <a:r>
+              <a:rPr lang="en-US" b="1" dirty="0" err="1"/>
+              <a:t>Circuite</a:t>
+            </a:r>
+            <a:r>
+              <a:rPr lang="en-US" b="1" dirty="0"/>
+              <a:t> </a:t>
+            </a:r>
+            <a:r>
+              <a:rPr lang="en-US" b="1" dirty="0" err="1"/>
+              <a:t>independente</a:t>
+            </a:r>
+            <a:r>
+              <a:rPr lang="en-US" b="1" dirty="0"/>
+              <a:t> </a:t>
+            </a:r>
+            <a:r>
+              <a:rPr lang="en-US" b="1" dirty="0" err="1"/>
+              <a:t>și</a:t>
+            </a:r>
+            <a:r>
+              <a:rPr lang="en-US" b="1" dirty="0"/>
+              <a:t> </a:t>
+            </a:r>
+            <a:r>
+              <a:rPr lang="en-US" b="1" dirty="0" err="1" smtClean="0"/>
+              <a:t>diagrame</a:t>
+            </a:r>
+            <a:r>
+              <a:rPr lang="ro-RO" b="1" dirty="0" smtClean="0"/>
+              <a:t> – 10 drumuri</a:t>
+            </a:r>
+            <a:endParaRPr lang="en-US" dirty="0"/>
+          </a:p>
+        </p:txBody>
+      </p:sp>
+      <p:pic>
+        <p:nvPicPr>
+          <p:cNvPr id="8194" name="Picture 2"/>
+          <p:cNvPicPr>
+            <a:picLocks noChangeAspect="1" noChangeArrowheads="1"/>
+          </p:cNvPicPr>
+          <p:nvPr/>
+        </p:nvPicPr>
+        <p:blipFill>
+          <a:blip r:embed="rId2">
+            <a:extLst>
+              <a:ext uri="{28A0092B-C50C-407E-A947-70E740481C1C}">
+                <a14:useLocalDpi xmlns:a14="http://schemas.microsoft.com/office/drawing/2010/main" val="0"/>
+              </a:ext>
+            </a:extLst>
+          </a:blip>
+          <a:srcRect/>
+          <a:stretch>
+            <a:fillRect/>
+          </a:stretch>
+        </p:blipFill>
+        <p:spPr bwMode="auto">
+          <a:xfrm>
+            <a:off x="962025" y="1590098"/>
+            <a:ext cx="2975353" cy="2638616"/>
+          </a:xfrm>
+          <a:prstGeom prst="rect">
+            <a:avLst/>
+          </a:prstGeom>
+          <a:noFill/>
+          <a:ln>
+            <a:noFill/>
+          </a:ln>
+          <a:effectLst/>
+          <a:extLst>
+            <a:ext uri="{909E8E84-426E-40DD-AFC4-6F175D3DCCD1}">
+              <a14:hiddenFill xmlns:a14="http://schemas.microsoft.com/office/drawing/2010/main">
+                <a:solidFill>
+                  <a:schemeClr val="accent1"/>
+                </a:solidFill>
+              </a14:hiddenFill>
+            </a:ext>
+            <a:ext uri="{91240B29-F687-4F45-9708-019B960494DF}">
+              <a14:hiddenLine xmlns:a14="http://schemas.microsoft.com/office/drawing/2010/main" w="9525">
+                <a:solidFill>
+                  <a:schemeClr val="tx1"/>
+                </a:solidFill>
+                <a:miter lim="800000"/>
+                <a:headEnd/>
+                <a:tailEnd/>
+              </a14:hiddenLine>
+            </a:ext>
+            <a:ext uri="{AF507438-7753-43E0-B8FC-AC1667EBCBE1}">
+              <a14:hiddenEffects xmlns:a14="http://schemas.microsoft.com/office/drawing/2010/main">
+                <a:effectLst>
+                  <a:outerShdw dist="35921" dir="2700000" algn="ctr" rotWithShape="0">
+                    <a:schemeClr val="bg2"/>
+                  </a:outerShdw>
+                </a:effectLst>
+              </a14:hiddenEffects>
+            </a:ext>
+          </a:extLst>
+        </p:spPr>
+      </p:pic>
+      <p:sp>
+        <p:nvSpPr>
+          <p:cNvPr id="4" name="Rectangle 3"/>
+          <p:cNvSpPr/>
+          <p:nvPr/>
+        </p:nvSpPr>
+        <p:spPr>
+          <a:xfrm>
+            <a:off x="756769" y="1220766"/>
+            <a:ext cx="3385863" cy="369332"/>
+          </a:xfrm>
+          <a:prstGeom prst="rect">
+            <a:avLst/>
+          </a:prstGeom>
+        </p:spPr>
+        <p:txBody>
+          <a:bodyPr wrap="none">
+            <a:spAutoFit/>
+          </a:bodyPr>
+          <a:lstStyle/>
+          <a:p>
+            <a:r>
+              <a:rPr lang="it-IT" b="1" dirty="0"/>
+              <a:t>Cele 9 decizii principale (D1–D9)</a:t>
+            </a:r>
+          </a:p>
+        </p:txBody>
+      </p:sp>
+      <p:sp>
+        <p:nvSpPr>
+          <p:cNvPr id="5" name="Rectangle 4"/>
+          <p:cNvSpPr/>
+          <p:nvPr/>
+        </p:nvSpPr>
+        <p:spPr>
+          <a:xfrm>
+            <a:off x="8676372" y="1973241"/>
+            <a:ext cx="3099310" cy="369332"/>
+          </a:xfrm>
+          <a:prstGeom prst="rect">
+            <a:avLst/>
+          </a:prstGeom>
+        </p:spPr>
+        <p:txBody>
+          <a:bodyPr wrap="none">
+            <a:spAutoFit/>
+          </a:bodyPr>
+          <a:lstStyle/>
+          <a:p>
+            <a:r>
+              <a:rPr lang="en-US" b="1" dirty="0" err="1"/>
+              <a:t>Cele</a:t>
+            </a:r>
+            <a:r>
+              <a:rPr lang="en-US" b="1" dirty="0"/>
+              <a:t> 10 </a:t>
+            </a:r>
+            <a:r>
+              <a:rPr lang="en-US" b="1" dirty="0" err="1"/>
+              <a:t>circuite</a:t>
+            </a:r>
+            <a:r>
+              <a:rPr lang="en-US" b="1" dirty="0"/>
+              <a:t> </a:t>
+            </a:r>
+            <a:r>
+              <a:rPr lang="en-US" b="1" dirty="0" err="1"/>
+              <a:t>independente</a:t>
+            </a:r>
+            <a:endParaRPr lang="en-US" b="1" dirty="0"/>
+          </a:p>
+        </p:txBody>
+      </p:sp>
+      <p:pic>
+        <p:nvPicPr>
+          <p:cNvPr id="8195" name="Picture 3"/>
+          <p:cNvPicPr>
+            <a:picLocks noChangeAspect="1" noChangeArrowheads="1"/>
+          </p:cNvPicPr>
+          <p:nvPr/>
+        </p:nvPicPr>
+        <p:blipFill>
+          <a:blip r:embed="rId3">
+            <a:extLst>
+              <a:ext uri="{28A0092B-C50C-407E-A947-70E740481C1C}">
+                <a14:useLocalDpi xmlns:a14="http://schemas.microsoft.com/office/drawing/2010/main" val="0"/>
+              </a:ext>
+            </a:extLst>
+          </a:blip>
+          <a:srcRect/>
+          <a:stretch>
+            <a:fillRect/>
+          </a:stretch>
+        </p:blipFill>
+        <p:spPr bwMode="auto">
+          <a:xfrm>
+            <a:off x="8217839" y="2422139"/>
+            <a:ext cx="4016375" cy="2720975"/>
+          </a:xfrm>
+          <a:prstGeom prst="rect">
+            <a:avLst/>
+          </a:prstGeom>
+          <a:noFill/>
+          <a:ln>
+            <a:noFill/>
+          </a:ln>
+          <a:effectLst/>
+          <a:extLst>
+            <a:ext uri="{909E8E84-426E-40DD-AFC4-6F175D3DCCD1}">
+              <a14:hiddenFill xmlns:a14="http://schemas.microsoft.com/office/drawing/2010/main">
+                <a:solidFill>
+                  <a:schemeClr val="accent1"/>
+                </a:solidFill>
+              </a14:hiddenFill>
+            </a:ext>
+            <a:ext uri="{91240B29-F687-4F45-9708-019B960494DF}">
+              <a14:hiddenLine xmlns:a14="http://schemas.microsoft.com/office/drawing/2010/main" w="9525">
+                <a:solidFill>
+                  <a:schemeClr val="tx1"/>
+                </a:solidFill>
+                <a:miter lim="800000"/>
+                <a:headEnd/>
+                <a:tailEnd/>
+              </a14:hiddenLine>
+            </a:ext>
+            <a:ext uri="{AF507438-7753-43E0-B8FC-AC1667EBCBE1}">
+              <a14:hiddenEffects xmlns:a14="http://schemas.microsoft.com/office/drawing/2010/main">
+                <a:effectLst>
+                  <a:outerShdw dist="35921" dir="2700000" algn="ctr" rotWithShape="0">
+                    <a:schemeClr val="bg2"/>
+                  </a:outerShdw>
+                </a:effectLst>
+              </a14:hiddenEffects>
+            </a:ext>
+          </a:extLst>
+        </p:spPr>
+      </p:pic>
+      <p:pic>
+        <p:nvPicPr>
+          <p:cNvPr id="8196" name="Picture 4"/>
+          <p:cNvPicPr>
+            <a:picLocks noChangeAspect="1" noChangeArrowheads="1"/>
+          </p:cNvPicPr>
+          <p:nvPr/>
+        </p:nvPicPr>
+        <p:blipFill>
+          <a:blip r:embed="rId4">
+            <a:extLst>
+              <a:ext uri="{28A0092B-C50C-407E-A947-70E740481C1C}">
+                <a14:useLocalDpi xmlns:a14="http://schemas.microsoft.com/office/drawing/2010/main" val="0"/>
+              </a:ext>
+            </a:extLst>
+          </a:blip>
+          <a:srcRect/>
+          <a:stretch>
+            <a:fillRect/>
+          </a:stretch>
+        </p:blipFill>
+        <p:spPr bwMode="auto">
+          <a:xfrm>
+            <a:off x="4410075" y="1439264"/>
+            <a:ext cx="3623339" cy="5179735"/>
+          </a:xfrm>
+          <a:prstGeom prst="rect">
+            <a:avLst/>
+          </a:prstGeom>
+          <a:noFill/>
+          <a:ln>
+            <a:noFill/>
+          </a:ln>
+          <a:effectLst/>
+          <a:extLst>
+            <a:ext uri="{909E8E84-426E-40DD-AFC4-6F175D3DCCD1}">
+              <a14:hiddenFill xmlns:a14="http://schemas.microsoft.com/office/drawing/2010/main">
+                <a:solidFill>
+                  <a:schemeClr val="accent1"/>
+                </a:solidFill>
+              </a14:hiddenFill>
+            </a:ext>
+            <a:ext uri="{91240B29-F687-4F45-9708-019B960494DF}">
+              <a14:hiddenLine xmlns:a14="http://schemas.microsoft.com/office/drawing/2010/main" w="9525">
+                <a:solidFill>
+                  <a:schemeClr val="tx1"/>
+                </a:solidFill>
+                <a:miter lim="800000"/>
+                <a:headEnd/>
+                <a:tailEnd/>
+              </a14:hiddenLine>
+            </a:ext>
+            <a:ext uri="{AF507438-7753-43E0-B8FC-AC1667EBCBE1}">
+              <a14:hiddenEffects xmlns:a14="http://schemas.microsoft.com/office/drawing/2010/main">
+                <a:effectLst>
+                  <a:outerShdw dist="35921" dir="2700000" algn="ctr" rotWithShape="0">
+                    <a:schemeClr val="bg2"/>
+                  </a:outerShdw>
+                </a:effectLst>
+              </a14:hiddenEffects>
+            </a:ext>
+          </a:extLst>
+        </p:spPr>
+      </p:pic>
+      <p:pic>
+        <p:nvPicPr>
+          <p:cNvPr id="8197" name="Picture 5"/>
+          <p:cNvPicPr>
+            <a:picLocks noChangeAspect="1" noChangeArrowheads="1"/>
+          </p:cNvPicPr>
+          <p:nvPr/>
+        </p:nvPicPr>
+        <p:blipFill>
+          <a:blip r:embed="rId5">
+            <a:extLst>
+              <a:ext uri="{28A0092B-C50C-407E-A947-70E740481C1C}">
+                <a14:useLocalDpi xmlns:a14="http://schemas.microsoft.com/office/drawing/2010/main" val="0"/>
+              </a:ext>
+            </a:extLst>
+          </a:blip>
+          <a:srcRect/>
+          <a:stretch>
+            <a:fillRect/>
+          </a:stretch>
+        </p:blipFill>
+        <p:spPr bwMode="auto">
+          <a:xfrm>
+            <a:off x="266701" y="4250485"/>
+            <a:ext cx="4038600" cy="2607515"/>
+          </a:xfrm>
+          <a:prstGeom prst="rect">
+            <a:avLst/>
+          </a:prstGeom>
+          <a:noFill/>
+          <a:ln>
+            <a:noFill/>
+          </a:ln>
+          <a:effectLst/>
+          <a:extLst>
+            <a:ext uri="{909E8E84-426E-40DD-AFC4-6F175D3DCCD1}">
+              <a14:hiddenFill xmlns:a14="http://schemas.microsoft.com/office/drawing/2010/main">
+                <a:solidFill>
+                  <a:schemeClr val="accent1"/>
+                </a:solidFill>
+              </a14:hiddenFill>
+            </a:ext>
+            <a:ext uri="{91240B29-F687-4F45-9708-019B960494DF}">
+              <a14:hiddenLine xmlns:a14="http://schemas.microsoft.com/office/drawing/2010/main" w="9525">
+                <a:solidFill>
+                  <a:schemeClr val="tx1"/>
+                </a:solidFill>
+                <a:miter lim="800000"/>
+                <a:headEnd/>
+                <a:tailEnd/>
+              </a14:hiddenLine>
+            </a:ext>
+            <a:ext uri="{AF507438-7753-43E0-B8FC-AC1667EBCBE1}">
+              <a14:hiddenEffects xmlns:a14="http://schemas.microsoft.com/office/drawing/2010/main">
+                <a:effectLst>
+                  <a:outerShdw dist="35921" dir="2700000" algn="ctr" rotWithShape="0">
+                    <a:schemeClr val="bg2"/>
+                  </a:outerShdw>
+                </a:effectLst>
+              </a14:hiddenEffects>
+            </a:ext>
+          </a:extLst>
+        </p:spPr>
+      </p:pic>
+      <p:sp>
+        <p:nvSpPr>
+          <p:cNvPr id="10" name="Rectangle 9"/>
+          <p:cNvSpPr/>
+          <p:nvPr/>
+        </p:nvSpPr>
+        <p:spPr>
+          <a:xfrm>
+            <a:off x="8033414" y="6434333"/>
+            <a:ext cx="4385226" cy="369332"/>
+          </a:xfrm>
+          <a:prstGeom prst="rect">
+            <a:avLst/>
+          </a:prstGeom>
+        </p:spPr>
+        <p:txBody>
+          <a:bodyPr wrap="square">
+            <a:spAutoFit/>
+          </a:bodyPr>
+          <a:lstStyle/>
+          <a:p>
+            <a:r>
+              <a:rPr lang="ro-RO" b="1" dirty="0" smtClean="0"/>
+              <a:t>Diagramele pot fi văzute în README.md</a:t>
+            </a:r>
+            <a:endParaRPr lang="en-US" b="1" dirty="0"/>
+          </a:p>
+        </p:txBody>
+      </p:sp>
+    </p:spTree>
+    <p:extLst>
+      <p:ext uri="{BB962C8B-B14F-4D97-AF65-F5344CB8AC3E}">
+        <p14:creationId xmlns:p14="http://schemas.microsoft.com/office/powerpoint/2010/main" val="807809537"/>
+      </p:ext>
+    </p:extLst>
+  </p:cSld>
+  <p:clrMapOvr>
+    <a:masterClrMapping/>
+  </p:clrMapOvr>
+</p:sld>
+</file>
+
+<file path=ppt/slides/slide9.xml><?xml version="1.0" encoding="utf-8"?>
+<p:sld xmlns:a="http://schemas.openxmlformats.org/drawingml/2006/main" xmlns:r="http://schemas.openxmlformats.org/officeDocument/2006/relationships" xmlns:p="http://schemas.openxmlformats.org/presentationml/2006/main">
+  <p:cSld>
+    <p:spTree>
+      <p:nvGrpSpPr>
+        <p:cNvPr id="1" name=""/>
+        <p:cNvGrpSpPr/>
+        <p:nvPr/>
+      </p:nvGrpSpPr>
+      <p:grpSpPr>
+        <a:xfrm>
+          <a:off x="0" y="0"/>
+          <a:ext cx="0" cy="0"/>
+          <a:chOff x="0" y="0"/>
+          <a:chExt cx="0" cy="0"/>
+        </a:xfrm>
+      </p:grpSpPr>
+      <p:sp>
+        <p:nvSpPr>
+          <p:cNvPr id="2" name="Title 1"/>
+          <p:cNvSpPr>
+            <a:spLocks noGrp="1"/>
+          </p:cNvSpPr>
+          <p:nvPr>
+            <p:ph type="title"/>
+          </p:nvPr>
+        </p:nvSpPr>
+        <p:spPr>
+          <a:xfrm>
+            <a:off x="329254" y="494509"/>
+            <a:ext cx="11641921" cy="746443"/>
+          </a:xfrm>
+        </p:spPr>
+        <p:txBody>
+          <a:bodyPr>
+            <a:noAutofit/>
+          </a:bodyPr>
+          <a:lstStyle/>
+          <a:p>
+            <a:r>
+              <a:rPr lang="en-US" sz="2000" b="1" dirty="0"/>
+              <a:t>Mutation Testing: </a:t>
+            </a:r>
+            <a:r>
+              <a:rPr lang="en-US" sz="2000" b="1" dirty="0" err="1" smtClean="0"/>
+              <a:t>mutmut</a:t>
+            </a:r>
+            <a:r>
+              <a:rPr lang="ro-RO" sz="2000" b="1" dirty="0" smtClean="0"/>
+              <a:t/>
+            </a:r>
+            <a:br>
+              <a:rPr lang="ro-RO" sz="2000" b="1" dirty="0" smtClean="0"/>
+            </a:br>
+            <a:r>
+              <a:rPr lang="vi-VN" sz="2000" dirty="0"/>
+              <a:t>Testele sunt suficient de precise pentru a detecta modificări greșite ale codului?</a:t>
+            </a:r>
+            <a:endParaRPr lang="en-US" sz="2000" dirty="0"/>
+          </a:p>
+        </p:txBody>
+      </p:sp>
+      <p:sp>
+        <p:nvSpPr>
+          <p:cNvPr id="3" name="Content Placeholder 2"/>
+          <p:cNvSpPr>
+            <a:spLocks noGrp="1"/>
+          </p:cNvSpPr>
+          <p:nvPr>
+            <p:ph idx="1"/>
+          </p:nvPr>
+        </p:nvSpPr>
+        <p:spPr>
+          <a:xfrm>
+            <a:off x="0" y="1574447"/>
+            <a:ext cx="12027158" cy="3634486"/>
+          </a:xfrm>
+        </p:spPr>
+        <p:txBody>
+          <a:bodyPr>
+            <a:normAutofit/>
+          </a:bodyPr>
+          <a:lstStyle/>
+          <a:p>
+            <a:r>
+              <a:rPr lang="en-US" b="1" i="1" dirty="0" err="1"/>
+              <a:t>Ce</a:t>
+            </a:r>
+            <a:r>
+              <a:rPr lang="en-US" b="1" i="1" dirty="0"/>
+              <a:t> </a:t>
+            </a:r>
+            <a:r>
+              <a:rPr lang="en-US" b="1" i="1" dirty="0" err="1"/>
+              <a:t>este</a:t>
+            </a:r>
+            <a:r>
+              <a:rPr lang="en-US" b="1" i="1" dirty="0"/>
+              <a:t> mutation testing</a:t>
+            </a:r>
+            <a:r>
+              <a:rPr lang="en-US" b="1" i="1" dirty="0" smtClean="0"/>
+              <a:t>?</a:t>
+            </a:r>
+            <a:r>
+              <a:rPr lang="ro-RO" i="1" dirty="0" smtClean="0"/>
+              <a:t> </a:t>
+            </a:r>
+            <a:r>
+              <a:rPr lang="vi-VN" dirty="0"/>
+              <a:t>Se introduc automat modificări mici (mutanți) în codul sursă și se verifică dacă testele le detectează. </a:t>
+            </a:r>
+            <a:r>
+              <a:rPr lang="vi-VN" b="1" dirty="0"/>
+              <a:t>Mutant ucis</a:t>
+            </a:r>
+            <a:r>
+              <a:rPr lang="vi-VN" dirty="0"/>
+              <a:t> = testul a eșuat → testul e precis. </a:t>
+            </a:r>
+            <a:r>
+              <a:rPr lang="vi-VN" b="1" dirty="0"/>
+              <a:t>Mutant supraviețuitor</a:t>
+            </a:r>
+            <a:r>
+              <a:rPr lang="vi-VN" dirty="0"/>
+              <a:t> = niciun test nu a sesizat modificarea</a:t>
+            </a:r>
+            <a:r>
+              <a:rPr lang="vi-VN" dirty="0" smtClean="0"/>
+              <a:t>.</a:t>
+            </a:r>
+            <a:endParaRPr lang="ro-RO" dirty="0" smtClean="0"/>
+          </a:p>
+          <a:p>
+            <a:r>
+              <a:rPr lang="en-US" b="1" dirty="0" err="1"/>
+              <a:t>Rezultate</a:t>
+            </a:r>
+            <a:r>
+              <a:rPr lang="en-US" b="1" dirty="0"/>
+              <a:t> </a:t>
+            </a:r>
+            <a:r>
+              <a:rPr lang="en-US" b="1" dirty="0" err="1"/>
+              <a:t>mutmut</a:t>
+            </a:r>
+            <a:r>
+              <a:rPr lang="en-US" b="1" dirty="0"/>
+              <a:t> 2.5.1</a:t>
+            </a:r>
+          </a:p>
+          <a:p>
+            <a:endParaRPr lang="ro-RO" b="1" dirty="0" smtClean="0"/>
+          </a:p>
+          <a:p>
+            <a:pPr marL="0" indent="0">
+              <a:buNone/>
+            </a:pPr>
+            <a:endParaRPr lang="ro-RO" b="1" dirty="0" smtClean="0"/>
+          </a:p>
+          <a:p>
+            <a:r>
+              <a:rPr lang="vi-VN" b="1" dirty="0"/>
+              <a:t>Suspicious ≠ Survived.</a:t>
+            </a:r>
+            <a:r>
+              <a:rPr lang="vi-VN" dirty="0"/>
+              <a:t> Categoria </a:t>
+            </a:r>
+            <a:r>
+              <a:rPr lang="vi-VN" dirty="0"/>
+              <a:t>Suspicious</a:t>
+            </a:r>
+            <a:r>
+              <a:rPr lang="vi-VN" dirty="0"/>
+              <a:t> înseamnă că rularea unui test a durat mai mult decât baseline-ul, fără timeout fatal. Rezultatul important este </a:t>
+            </a:r>
+            <a:r>
+              <a:rPr lang="vi-VN" b="1" dirty="0"/>
+              <a:t>0 survived</a:t>
+            </a:r>
+            <a:r>
+              <a:rPr lang="vi-VN" dirty="0" smtClean="0"/>
+              <a:t>.</a:t>
+            </a:r>
+            <a:endParaRPr lang="ro-RO" dirty="0" smtClean="0"/>
+          </a:p>
+          <a:p>
+            <a:r>
+              <a:rPr lang="en-US" b="1" dirty="0"/>
+              <a:t>test_mutation.py — 11 </a:t>
+            </a:r>
+            <a:r>
+              <a:rPr lang="en-US" b="1" dirty="0" err="1"/>
+              <a:t>teste</a:t>
+            </a:r>
+            <a:r>
+              <a:rPr lang="en-US" b="1" dirty="0"/>
+              <a:t> dedicate </a:t>
+            </a:r>
+            <a:r>
+              <a:rPr lang="en-US" b="1" dirty="0" err="1"/>
+              <a:t>pentru</a:t>
+            </a:r>
+            <a:r>
+              <a:rPr lang="en-US" b="1" dirty="0"/>
+              <a:t> </a:t>
+            </a:r>
+            <a:r>
+              <a:rPr lang="en-US" b="1" dirty="0" err="1"/>
+              <a:t>mutanți</a:t>
+            </a:r>
+            <a:r>
+              <a:rPr lang="en-US" b="1" dirty="0"/>
+              <a:t> </a:t>
+            </a:r>
+            <a:r>
+              <a:rPr lang="en-US" b="1" dirty="0" err="1"/>
+              <a:t>neechivalenți</a:t>
+            </a:r>
+            <a:endParaRPr lang="en-US" b="1" dirty="0"/>
+          </a:p>
+          <a:p>
+            <a:pPr marL="0" indent="0">
+              <a:buNone/>
+            </a:pPr>
+            <a:endParaRPr lang="ro-RO" b="1" dirty="0"/>
+          </a:p>
+          <a:p>
+            <a:endParaRPr lang="en-US" b="1" dirty="0"/>
+          </a:p>
+        </p:txBody>
+      </p:sp>
+      <p:pic>
+        <p:nvPicPr>
+          <p:cNvPr id="9218" name="Picture 2"/>
+          <p:cNvPicPr>
+            <a:picLocks noChangeAspect="1" noChangeArrowheads="1"/>
+          </p:cNvPicPr>
+          <p:nvPr/>
+        </p:nvPicPr>
+        <p:blipFill>
+          <a:blip r:embed="rId2">
+            <a:extLst>
+              <a:ext uri="{28A0092B-C50C-407E-A947-70E740481C1C}">
+                <a14:useLocalDpi xmlns:a14="http://schemas.microsoft.com/office/drawing/2010/main" val="0"/>
+              </a:ext>
+            </a:extLst>
+          </a:blip>
+          <a:srcRect/>
+          <a:stretch>
+            <a:fillRect/>
+          </a:stretch>
+        </p:blipFill>
+        <p:spPr bwMode="auto">
+          <a:xfrm>
+            <a:off x="2696806" y="2044021"/>
+            <a:ext cx="1501775" cy="1463675"/>
+          </a:xfrm>
+          <a:prstGeom prst="rect">
+            <a:avLst/>
+          </a:prstGeom>
+          <a:noFill/>
+          <a:ln>
+            <a:noFill/>
+          </a:ln>
+          <a:effectLst/>
+          <a:extLst>
+            <a:ext uri="{909E8E84-426E-40DD-AFC4-6F175D3DCCD1}">
+              <a14:hiddenFill xmlns:a14="http://schemas.microsoft.com/office/drawing/2010/main">
+                <a:solidFill>
+                  <a:schemeClr val="accent1"/>
+                </a:solidFill>
+              </a14:hiddenFill>
+            </a:ext>
+            <a:ext uri="{91240B29-F687-4F45-9708-019B960494DF}">
+              <a14:hiddenLine xmlns:a14="http://schemas.microsoft.com/office/drawing/2010/main" w="9525">
+                <a:solidFill>
+                  <a:schemeClr val="tx1"/>
+                </a:solidFill>
+                <a:miter lim="800000"/>
+                <a:headEnd/>
+                <a:tailEnd/>
+              </a14:hiddenLine>
+            </a:ext>
+            <a:ext uri="{AF507438-7753-43E0-B8FC-AC1667EBCBE1}">
+              <a14:hiddenEffects xmlns:a14="http://schemas.microsoft.com/office/drawing/2010/main">
+                <a:effectLst>
+                  <a:outerShdw dist="35921" dir="2700000" algn="ctr" rotWithShape="0">
+                    <a:schemeClr val="bg2"/>
+                  </a:outerShdw>
+                </a:effectLst>
+              </a14:hiddenEffects>
+            </a:ext>
+          </a:extLst>
+        </p:spPr>
+      </p:pic>
+      <p:pic>
+        <p:nvPicPr>
+          <p:cNvPr id="9219" name="Picture 3"/>
+          <p:cNvPicPr>
+            <a:picLocks noChangeAspect="1" noChangeArrowheads="1"/>
+          </p:cNvPicPr>
+          <p:nvPr/>
+        </p:nvPicPr>
+        <p:blipFill>
+          <a:blip r:embed="rId3">
+            <a:extLst>
+              <a:ext uri="{28A0092B-C50C-407E-A947-70E740481C1C}">
+                <a14:useLocalDpi xmlns:a14="http://schemas.microsoft.com/office/drawing/2010/main" val="0"/>
+              </a:ext>
+            </a:extLst>
+          </a:blip>
+          <a:srcRect/>
+          <a:stretch>
+            <a:fillRect/>
+          </a:stretch>
+        </p:blipFill>
+        <p:spPr bwMode="auto">
+          <a:xfrm>
+            <a:off x="819834" y="4704800"/>
+            <a:ext cx="8903571" cy="2153200"/>
+          </a:xfrm>
+          <a:prstGeom prst="rect">
+            <a:avLst/>
+          </a:prstGeom>
+          <a:noFill/>
+          <a:ln>
+            <a:noFill/>
+          </a:ln>
+          <a:effectLst/>
+          <a:extLst>
+            <a:ext uri="{909E8E84-426E-40DD-AFC4-6F175D3DCCD1}">
+              <a14:hiddenFill xmlns:a14="http://schemas.microsoft.com/office/drawing/2010/main">
+                <a:solidFill>
+                  <a:schemeClr val="accent1"/>
+                </a:solidFill>
+              </a14:hiddenFill>
+            </a:ext>
+            <a:ext uri="{91240B29-F687-4F45-9708-019B960494DF}">
+              <a14:hiddenLine xmlns:a14="http://schemas.microsoft.com/office/drawing/2010/main" w="9525">
+                <a:solidFill>
+                  <a:schemeClr val="tx1"/>
+                </a:solidFill>
+                <a:miter lim="800000"/>
+                <a:headEnd/>
+                <a:tailEnd/>
+              </a14:hiddenLine>
+            </a:ext>
+            <a:ext uri="{AF507438-7753-43E0-B8FC-AC1667EBCBE1}">
+              <a14:hiddenEffects xmlns:a14="http://schemas.microsoft.com/office/drawing/2010/main">
+                <a:effectLst>
+                  <a:outerShdw dist="35921" dir="2700000" algn="ctr" rotWithShape="0">
+                    <a:schemeClr val="bg2"/>
+                  </a:outerShdw>
+                </a:effectLst>
+              </a14:hiddenEffects>
+            </a:ext>
+          </a:extLst>
+        </p:spPr>
+      </p:pic>
+    </p:spTree>
+    <p:extLst>
+      <p:ext uri="{BB962C8B-B14F-4D97-AF65-F5344CB8AC3E}">
+        <p14:creationId xmlns:p14="http://schemas.microsoft.com/office/powerpoint/2010/main" val="2215858726"/>
       </p:ext>
     </p:extLst>
   </p:cSld>
@@ -7694,7 +10215,7 @@
     </a:clrScheme>
     <a:fontScheme name="Dividend">
       <a:majorFont>
-        <a:latin typeface="Franklin Gothic Demi" panose="020B0502020104020203"/>
+        <a:latin typeface="Franklin Gothic Demi"/>
         <a:ea typeface=""/>
         <a:cs typeface=""/>
         <a:font script="Grek" typeface="Corbel"/>
@@ -7731,7 +10252,7 @@
         <a:font script="Geor" typeface="Sylfaen"/>
       </a:majorFont>
       <a:minorFont>
-        <a:latin typeface="Franklin Gothic Book" panose="020B0502020104020203"/>
+        <a:latin typeface="Franklin Gothic Book"/>
         <a:ea typeface=""/>
         <a:cs typeface=""/>
         <a:font script="Grek" typeface="Corbel"/>
@@ -7914,31 +10435,13 @@
   <a:extraClrSchemeLst/>
   <a:extLst>
     <a:ext uri="{05A4C25C-085E-4340-85A3-A5531E510DB2}">
-      <thm15:themeFamily xmlns:thm15="http://schemas.microsoft.com/office/thememl/2012/main" name="DividendVTI" id="{97558BDE-0B66-457C-BB6F-7B1B22DAA9B8}" vid="{F53508A3-AC60-448A-AF37-934D5F1A0D5E}"/>
+      <thm15:themeFamily xmlns:thm15="http://schemas.microsoft.com/office/thememl/2012/main" xmlns="" name="DividendVTI" id="{97558BDE-0B66-457C-BB6F-7B1B22DAA9B8}" vid="{F53508A3-AC60-448A-AF37-934D5F1A0D5E}"/>
     </a:ext>
   </a:extLst>
 </a:theme>
 </file>
 
 <file path=customXml/item1.xml><?xml version="1.0" encoding="utf-8"?>
-<?mso-contentType ?>
-<FormTemplates xmlns="http://schemas.microsoft.com/sharepoint/v3/contenttype/forms">
-  <Display>DocumentLibraryForm</Display>
-  <Edit>DocumentLibraryForm</Edit>
-  <New>DocumentLibraryForm</New>
-</FormTemplates>
-</file>
-
-<file path=customXml/item2.xml><?xml version="1.0" encoding="utf-8"?>
-<p:properties xmlns:p="http://schemas.microsoft.com/office/2006/metadata/properties" xmlns:xsi="http://www.w3.org/2001/XMLSchema-instance" xmlns:pc="http://schemas.microsoft.com/office/infopath/2007/PartnerControls">
-  <documentManagement>
-    <Status xmlns="71af3243-3dd4-4a8d-8c0d-dd76da1f02a5">Not started</Status>
-    <MediaServiceKeyPoints xmlns="71af3243-3dd4-4a8d-8c0d-dd76da1f02a5" xsi:nil="true"/>
-  </documentManagement>
-</p:properties>
-</file>
-
-<file path=customXml/item3.xml><?xml version="1.0" encoding="utf-8"?>
 <ct:contentTypeSchema xmlns:ct="http://schemas.microsoft.com/office/2006/metadata/contentType" xmlns:ma="http://schemas.microsoft.com/office/2006/metadata/properties/metaAttributes" ct:_="" ma:_="" ma:contentTypeName="Document" ma:contentTypeID="0x01010079F111ED35F8CC479449609E8A0923A6" ma:contentTypeVersion="12" ma:contentTypeDescription="Create a new document." ma:contentTypeScope="" ma:versionID="a410dd7f93c95333ffa1b60ed6adedd1">
   <xsd:schema xmlns:xsd="http://www.w3.org/2001/XMLSchema" xmlns:xs="http://www.w3.org/2001/XMLSchema" xmlns:p="http://schemas.microsoft.com/office/2006/metadata/properties" xmlns:ns2="71af3243-3dd4-4a8d-8c0d-dd76da1f02a5" xmlns:ns3="16c05727-aa75-4e4a-9b5f-8a80a1165891" targetNamespace="http://schemas.microsoft.com/office/2006/metadata/properties" ma:root="true" ma:fieldsID="a936d9baba76aa3866493feff160faab" ns2:_="" ns3:_="">
     <xsd:import namespace="71af3243-3dd4-4a8d-8c0d-dd76da1f02a5"/>
@@ -8159,25 +10662,25 @@
 </ct:contentTypeSchema>
 </file>
 
-<file path=customXml/itemProps1.xml><?xml version="1.0" encoding="utf-8"?>
-<ds:datastoreItem xmlns:ds="http://schemas.openxmlformats.org/officeDocument/2006/customXml" ds:itemID="{927BD4C1-B6B1-4715-ABF9-E660A51A4EA0}">
-  <ds:schemaRefs>
-    <ds:schemaRef ds:uri="http://schemas.microsoft.com/sharepoint/v3/contenttype/forms"/>
-  </ds:schemaRefs>
-</ds:datastoreItem>
+<file path=customXml/item2.xml><?xml version="1.0" encoding="utf-8"?>
+<p:properties xmlns:p="http://schemas.microsoft.com/office/2006/metadata/properties" xmlns:xsi="http://www.w3.org/2001/XMLSchema-instance" xmlns:pc="http://schemas.microsoft.com/office/infopath/2007/PartnerControls">
+  <documentManagement>
+    <Status xmlns="71af3243-3dd4-4a8d-8c0d-dd76da1f02a5">Not started</Status>
+    <MediaServiceKeyPoints xmlns="71af3243-3dd4-4a8d-8c0d-dd76da1f02a5" xsi:nil="true"/>
+  </documentManagement>
+</p:properties>
 </file>
 
-<file path=customXml/itemProps2.xml><?xml version="1.0" encoding="utf-8"?>
-<ds:datastoreItem xmlns:ds="http://schemas.openxmlformats.org/officeDocument/2006/customXml" ds:itemID="{8D289AE2-D2AE-49D1-AFAC-3A79F6794255}">
-  <ds:schemaRefs>
-    <ds:schemaRef ds:uri="http://schemas.microsoft.com/office/2006/metadata/properties"/>
-    <ds:schemaRef ds:uri="http://schemas.microsoft.com/office/infopath/2007/PartnerControls"/>
-    <ds:schemaRef ds:uri="71af3243-3dd4-4a8d-8c0d-dd76da1f02a5"/>
-  </ds:schemaRefs>
-</ds:datastoreItem>
+<file path=customXml/item3.xml><?xml version="1.0" encoding="utf-8"?>
+<?mso-contentType ?>
+<FormTemplates xmlns="http://schemas.microsoft.com/sharepoint/v3/contenttype/forms">
+  <Display>DocumentLibraryForm</Display>
+  <Edit>DocumentLibraryForm</Edit>
+  <New>DocumentLibraryForm</New>
+</FormTemplates>
 </file>
 
-<file path=customXml/itemProps3.xml><?xml version="1.0" encoding="utf-8"?>
+<file path=customXml/itemProps1.xml><?xml version="1.0" encoding="utf-8"?>
 <ds:datastoreItem xmlns:ds="http://schemas.openxmlformats.org/officeDocument/2006/customXml" ds:itemID="{41E7CA09-9778-4414-AE97-8064B12DA30E}">
   <ds:schemaRefs>
     <ds:schemaRef ds:uri="http://schemas.microsoft.com/office/2006/metadata/contentType"/>
@@ -8194,4 +10697,22 @@
     <ds:schemaRef ds:uri="http://schemas.microsoft.com/internal/obd"/>
   </ds:schemaRefs>
 </ds:datastoreItem>
+</file>
+
+<file path=customXml/itemProps2.xml><?xml version="1.0" encoding="utf-8"?>
+<ds:datastoreItem xmlns:ds="http://schemas.openxmlformats.org/officeDocument/2006/customXml" ds:itemID="{8D289AE2-D2AE-49D1-AFAC-3A79F6794255}">
+  <ds:schemaRefs>
+    <ds:schemaRef ds:uri="http://schemas.microsoft.com/office/2006/metadata/properties"/>
+    <ds:schemaRef ds:uri="http://schemas.microsoft.com/office/infopath/2007/PartnerControls"/>
+    <ds:schemaRef ds:uri="71af3243-3dd4-4a8d-8c0d-dd76da1f02a5"/>
+  </ds:schemaRefs>
+</ds:datastoreItem>
+</file>
+
+<file path=customXml/itemProps3.xml><?xml version="1.0" encoding="utf-8"?>
+<ds:datastoreItem xmlns:ds="http://schemas.openxmlformats.org/officeDocument/2006/customXml" ds:itemID="{927BD4C1-B6B1-4715-ABF9-E660A51A4EA0}">
+  <ds:schemaRefs>
+    <ds:schemaRef ds:uri="http://schemas.microsoft.com/sharepoint/v3/contenttype/forms"/>
+  </ds:schemaRefs>
+</ds:datastoreItem>
 </file>
--- a/Testarea sistemelor software – Testare unitară în Python.pptx
+++ b/Testarea sistemelor software – Testare unitară în Python.pptx
@@ -115,7 +115,18 @@
   </p:defaultTextStyle>
   <p:extLst>
     <p:ext uri="{EFAFB233-063F-42B5-8137-9DF3F51BA10A}">
-      <p15:sldGuideLst xmlns:p15="http://schemas.microsoft.com/office/powerpoint/2012/main" xmlns=""/>
+      <p15:sldGuideLst xmlns:p15="http://schemas.microsoft.com/office/powerpoint/2012/main">
+        <p15:guide id="1" orient="horz" pos="2160">
+          <p15:clr>
+            <a:srgbClr val="A4A3A4"/>
+          </p15:clr>
+        </p15:guide>
+        <p15:guide id="2" pos="3840">
+          <p15:clr>
+            <a:srgbClr val="A4A3A4"/>
+          </p15:clr>
+        </p15:guide>
+      </p15:sldGuideLst>
     </p:ext>
   </p:extLst>
 </p:presentation>
@@ -341,7 +352,7 @@
           <p:cNvPr id="8" name="Date Placeholder 7">
             <a:extLst>
               <a:ext uri="{FF2B5EF4-FFF2-40B4-BE49-F238E27FC236}">
-                <a16:creationId xmlns:a16="http://schemas.microsoft.com/office/drawing/2014/main" xmlns="" id="{7FA0ACE7-29A8-47D3-A7D9-257B711D8023}"/>
+                <a16:creationId xmlns:a16="http://schemas.microsoft.com/office/drawing/2014/main" id="{7FA0ACE7-29A8-47D3-A7D9-257B711D8023}"/>
               </a:ext>
             </a:extLst>
           </p:cNvPr>
@@ -359,7 +370,7 @@
           <a:p>
             <a:fld id="{ED291B17-9318-49DB-B28B-6E5994AE9581}" type="datetime1">
               <a:rPr lang="en-US" smtClean="0"/>
-              <a:t>5/16/2026</a:t>
+              <a:t>5/17/2026</a:t>
             </a:fld>
             <a:endParaRPr lang="en-US" dirty="0"/>
           </a:p>
@@ -370,7 +381,7 @@
           <p:cNvPr id="9" name="Footer Placeholder 8">
             <a:extLst>
               <a:ext uri="{FF2B5EF4-FFF2-40B4-BE49-F238E27FC236}">
-                <a16:creationId xmlns:a16="http://schemas.microsoft.com/office/drawing/2014/main" xmlns="" id="{DEC604B9-52E9-4810-8359-47206518D038}"/>
+                <a16:creationId xmlns:a16="http://schemas.microsoft.com/office/drawing/2014/main" id="{DEC604B9-52E9-4810-8359-47206518D038}"/>
               </a:ext>
             </a:extLst>
           </p:cNvPr>
@@ -395,7 +406,7 @@
           <p:cNvPr id="10" name="Slide Number Placeholder 9">
             <a:extLst>
               <a:ext uri="{FF2B5EF4-FFF2-40B4-BE49-F238E27FC236}">
-                <a16:creationId xmlns:a16="http://schemas.microsoft.com/office/drawing/2014/main" xmlns="" id="{5898A89F-CA25-400F-B05A-AECBF2517E4F}"/>
+                <a16:creationId xmlns:a16="http://schemas.microsoft.com/office/drawing/2014/main" id="{5898A89F-CA25-400F-B05A-AECBF2517E4F}"/>
               </a:ext>
             </a:extLst>
           </p:cNvPr>
@@ -562,7 +573,7 @@
           <a:p>
             <a:fld id="{2CED4963-E985-44C4-B8C4-FDD613B7C2F8}" type="datetime1">
               <a:rPr lang="en-US" smtClean="0"/>
-              <a:t>5/16/2026</a:t>
+              <a:t>5/17/2026</a:t>
             </a:fld>
             <a:endParaRPr lang="en-US" dirty="0"/>
           </a:p>
@@ -777,7 +788,7 @@
           <p:cNvPr id="8" name="Rectangle 7">
             <a:extLst>
               <a:ext uri="{FF2B5EF4-FFF2-40B4-BE49-F238E27FC236}">
-                <a16:creationId xmlns:a16="http://schemas.microsoft.com/office/drawing/2014/main" xmlns="" id="{F6423B97-A5D4-47B9-8861-73B3707A04CF}"/>
+                <a16:creationId xmlns:a16="http://schemas.microsoft.com/office/drawing/2014/main" id="{F6423B97-A5D4-47B9-8861-73B3707A04CF}"/>
               </a:ext>
             </a:extLst>
           </p:cNvPr>
@@ -820,7 +831,7 @@
           <p:cNvPr id="9" name="Rectangle 8">
             <a:extLst>
               <a:ext uri="{FF2B5EF4-FFF2-40B4-BE49-F238E27FC236}">
-                <a16:creationId xmlns:a16="http://schemas.microsoft.com/office/drawing/2014/main" xmlns="" id="{1AEC0421-37B4-4481-A10D-69FDF5EC7909}"/>
+                <a16:creationId xmlns:a16="http://schemas.microsoft.com/office/drawing/2014/main" id="{1AEC0421-37B4-4481-A10D-69FDF5EC7909}"/>
               </a:ext>
             </a:extLst>
           </p:cNvPr>
@@ -863,7 +874,7 @@
           <p:cNvPr id="10" name="Rectangle 9">
             <a:extLst>
               <a:ext uri="{FF2B5EF4-FFF2-40B4-BE49-F238E27FC236}">
-                <a16:creationId xmlns:a16="http://schemas.microsoft.com/office/drawing/2014/main" xmlns="" id="{5F7265B5-9F97-4F1E-99E9-74F7B7E62337}"/>
+                <a16:creationId xmlns:a16="http://schemas.microsoft.com/office/drawing/2014/main" id="{5F7265B5-9F97-4F1E-99E9-74F7B7E62337}"/>
               </a:ext>
             </a:extLst>
           </p:cNvPr>
@@ -906,7 +917,7 @@
           <p:cNvPr id="11" name="Date Placeholder 10">
             <a:extLst>
               <a:ext uri="{FF2B5EF4-FFF2-40B4-BE49-F238E27FC236}">
-                <a16:creationId xmlns:a16="http://schemas.microsoft.com/office/drawing/2014/main" xmlns="" id="{5C74A470-3BD3-4F33-80E5-67E6E87FCBE7}"/>
+                <a16:creationId xmlns:a16="http://schemas.microsoft.com/office/drawing/2014/main" id="{5C74A470-3BD3-4F33-80E5-67E6E87FCBE7}"/>
               </a:ext>
             </a:extLst>
           </p:cNvPr>
@@ -924,7 +935,7 @@
           <a:p>
             <a:fld id="{ED291B17-9318-49DB-B28B-6E5994AE9581}" type="datetime1">
               <a:rPr lang="en-US" smtClean="0"/>
-              <a:t>5/16/2026</a:t>
+              <a:t>5/17/2026</a:t>
             </a:fld>
             <a:endParaRPr lang="en-US" dirty="0"/>
           </a:p>
@@ -935,7 +946,7 @@
           <p:cNvPr id="12" name="Footer Placeholder 11">
             <a:extLst>
               <a:ext uri="{FF2B5EF4-FFF2-40B4-BE49-F238E27FC236}">
-                <a16:creationId xmlns:a16="http://schemas.microsoft.com/office/drawing/2014/main" xmlns="" id="{9A3A30BA-DB50-4D7D-BCDE-17D20FB354DF}"/>
+                <a16:creationId xmlns:a16="http://schemas.microsoft.com/office/drawing/2014/main" id="{9A3A30BA-DB50-4D7D-BCDE-17D20FB354DF}"/>
               </a:ext>
             </a:extLst>
           </p:cNvPr>
@@ -960,7 +971,7 @@
           <p:cNvPr id="13" name="Slide Number Placeholder 12">
             <a:extLst>
               <a:ext uri="{FF2B5EF4-FFF2-40B4-BE49-F238E27FC236}">
-                <a16:creationId xmlns:a16="http://schemas.microsoft.com/office/drawing/2014/main" xmlns="" id="{76FF9E58-C0B2-436B-A21C-DB45A00D6515}"/>
+                <a16:creationId xmlns:a16="http://schemas.microsoft.com/office/drawing/2014/main" id="{76FF9E58-C0B2-436B-A21C-DB45A00D6515}"/>
               </a:ext>
             </a:extLst>
           </p:cNvPr>
@@ -1104,7 +1115,7 @@
           <p:cNvPr id="8" name="Date Placeholder 7">
             <a:extLst>
               <a:ext uri="{FF2B5EF4-FFF2-40B4-BE49-F238E27FC236}">
-                <a16:creationId xmlns:a16="http://schemas.microsoft.com/office/drawing/2014/main" xmlns="" id="{770E6237-3456-439F-802D-3BA93FC7E3E5}"/>
+                <a16:creationId xmlns:a16="http://schemas.microsoft.com/office/drawing/2014/main" id="{770E6237-3456-439F-802D-3BA93FC7E3E5}"/>
               </a:ext>
             </a:extLst>
           </p:cNvPr>
@@ -1122,7 +1133,7 @@
           <a:p>
             <a:fld id="{78DD82B9-B8EE-4375-B6FF-88FA6ABB15D9}" type="datetime1">
               <a:rPr lang="en-US" smtClean="0"/>
-              <a:t>5/16/2026</a:t>
+              <a:t>5/17/2026</a:t>
             </a:fld>
             <a:endParaRPr lang="en-US" dirty="0"/>
           </a:p>
@@ -1133,7 +1144,7 @@
           <p:cNvPr id="9" name="Footer Placeholder 8">
             <a:extLst>
               <a:ext uri="{FF2B5EF4-FFF2-40B4-BE49-F238E27FC236}">
-                <a16:creationId xmlns:a16="http://schemas.microsoft.com/office/drawing/2014/main" xmlns="" id="{1356D3B5-6063-4A89-B88F-9D3043916FF8}"/>
+                <a16:creationId xmlns:a16="http://schemas.microsoft.com/office/drawing/2014/main" id="{1356D3B5-6063-4A89-B88F-9D3043916FF8}"/>
               </a:ext>
             </a:extLst>
           </p:cNvPr>
@@ -1158,7 +1169,7 @@
           <p:cNvPr id="10" name="Slide Number Placeholder 9">
             <a:extLst>
               <a:ext uri="{FF2B5EF4-FFF2-40B4-BE49-F238E27FC236}">
-                <a16:creationId xmlns:a16="http://schemas.microsoft.com/office/drawing/2014/main" xmlns="" id="{02B78BF7-69D3-4CE0-A631-50EFD41EEEB8}"/>
+                <a16:creationId xmlns:a16="http://schemas.microsoft.com/office/drawing/2014/main" id="{02B78BF7-69D3-4CE0-A631-50EFD41EEEB8}"/>
               </a:ext>
             </a:extLst>
           </p:cNvPr>
@@ -1416,7 +1427,7 @@
           <p:cNvPr id="7" name="Date Placeholder 6">
             <a:extLst>
               <a:ext uri="{FF2B5EF4-FFF2-40B4-BE49-F238E27FC236}">
-                <a16:creationId xmlns:a16="http://schemas.microsoft.com/office/drawing/2014/main" xmlns="" id="{61582016-5696-4A93-887F-BBB3B9002FE5}"/>
+                <a16:creationId xmlns:a16="http://schemas.microsoft.com/office/drawing/2014/main" id="{61582016-5696-4A93-887F-BBB3B9002FE5}"/>
               </a:ext>
             </a:extLst>
           </p:cNvPr>
@@ -1434,7 +1445,7 @@
           <a:p>
             <a:fld id="{B2497495-0637-405E-AE64-5CC7506D51F5}" type="datetime1">
               <a:rPr lang="en-US" smtClean="0"/>
-              <a:t>5/16/2026</a:t>
+              <a:t>5/17/2026</a:t>
             </a:fld>
             <a:endParaRPr lang="en-US" dirty="0"/>
           </a:p>
@@ -1445,7 +1456,7 @@
           <p:cNvPr id="9" name="Footer Placeholder 8">
             <a:extLst>
               <a:ext uri="{FF2B5EF4-FFF2-40B4-BE49-F238E27FC236}">
-                <a16:creationId xmlns:a16="http://schemas.microsoft.com/office/drawing/2014/main" xmlns="" id="{857CFCD5-1192-4E18-8A8F-29E153B44DA4}"/>
+                <a16:creationId xmlns:a16="http://schemas.microsoft.com/office/drawing/2014/main" id="{857CFCD5-1192-4E18-8A8F-29E153B44DA4}"/>
               </a:ext>
             </a:extLst>
           </p:cNvPr>
@@ -1470,7 +1481,7 @@
           <p:cNvPr id="10" name="Slide Number Placeholder 9">
             <a:extLst>
               <a:ext uri="{FF2B5EF4-FFF2-40B4-BE49-F238E27FC236}">
-                <a16:creationId xmlns:a16="http://schemas.microsoft.com/office/drawing/2014/main" xmlns="" id="{E39A109E-5018-4794-92B3-FD5E5BCD95E8}"/>
+                <a16:creationId xmlns:a16="http://schemas.microsoft.com/office/drawing/2014/main" id="{E39A109E-5018-4794-92B3-FD5E5BCD95E8}"/>
               </a:ext>
             </a:extLst>
           </p:cNvPr>
@@ -1687,7 +1698,7 @@
           <a:p>
             <a:fld id="{7BFFD690-9426-415D-8B65-26881E07B2D4}" type="datetime1">
               <a:rPr lang="en-US" smtClean="0"/>
-              <a:t>5/16/2026</a:t>
+              <a:t>5/17/2026</a:t>
             </a:fld>
             <a:endParaRPr lang="en-US" dirty="0"/>
           </a:p>
@@ -2109,7 +2120,7 @@
           <a:p>
             <a:fld id="{04C4989A-474C-40DE-95B9-011C28B71673}" type="datetime1">
               <a:rPr lang="en-US" smtClean="0"/>
-              <a:t>5/16/2026</a:t>
+              <a:t>5/17/2026</a:t>
             </a:fld>
             <a:endParaRPr lang="en-US" dirty="0"/>
           </a:p>
@@ -2232,7 +2243,7 @@
           <a:p>
             <a:fld id="{5DB4ED54-5B5E-4A04-93D3-5772E3CE3818}" type="datetime1">
               <a:rPr lang="en-US" smtClean="0"/>
-              <a:t>5/16/2026</a:t>
+              <a:t>5/17/2026</a:t>
             </a:fld>
             <a:endParaRPr lang="en-US" dirty="0"/>
           </a:p>
@@ -2327,7 +2338,7 @@
           <a:p>
             <a:fld id="{4EDE50D6-574B-40AF-946F-D52A04ADE379}" type="datetime1">
               <a:rPr lang="en-US" smtClean="0"/>
-              <a:t>5/16/2026</a:t>
+              <a:t>5/17/2026</a:t>
             </a:fld>
             <a:endParaRPr lang="en-US" dirty="0"/>
           </a:p>
@@ -2681,7 +2692,7 @@
           <p:cNvPr id="8" name="Date Placeholder 7">
             <a:extLst>
               <a:ext uri="{FF2B5EF4-FFF2-40B4-BE49-F238E27FC236}">
-                <a16:creationId xmlns:a16="http://schemas.microsoft.com/office/drawing/2014/main" xmlns="" id="{0B919CC2-2A65-446F-B538-9E6249035445}"/>
+                <a16:creationId xmlns:a16="http://schemas.microsoft.com/office/drawing/2014/main" id="{0B919CC2-2A65-446F-B538-9E6249035445}"/>
               </a:ext>
             </a:extLst>
           </p:cNvPr>
@@ -2704,7 +2715,7 @@
           <a:p>
             <a:fld id="{D82884F1-FFEA-405F-9602-3DCA865EDA4E}" type="datetime1">
               <a:rPr lang="en-US" smtClean="0"/>
-              <a:t>5/16/2026</a:t>
+              <a:t>5/17/2026</a:t>
             </a:fld>
             <a:endParaRPr lang="en-US" dirty="0"/>
           </a:p>
@@ -2715,7 +2726,7 @@
           <p:cNvPr id="10" name="Footer Placeholder 9">
             <a:extLst>
               <a:ext uri="{FF2B5EF4-FFF2-40B4-BE49-F238E27FC236}">
-                <a16:creationId xmlns:a16="http://schemas.microsoft.com/office/drawing/2014/main" xmlns="" id="{B72412AE-119E-4982-8B24-63365EFCA796}"/>
+                <a16:creationId xmlns:a16="http://schemas.microsoft.com/office/drawing/2014/main" id="{B72412AE-119E-4982-8B24-63365EFCA796}"/>
               </a:ext>
             </a:extLst>
           </p:cNvPr>
@@ -2745,7 +2756,7 @@
           <p:cNvPr id="11" name="Slide Number Placeholder 10">
             <a:extLst>
               <a:ext uri="{FF2B5EF4-FFF2-40B4-BE49-F238E27FC236}">
-                <a16:creationId xmlns:a16="http://schemas.microsoft.com/office/drawing/2014/main" xmlns="" id="{7FC4BB19-6AD1-45CF-9F99-00B109890FAB}"/>
+                <a16:creationId xmlns:a16="http://schemas.microsoft.com/office/drawing/2014/main" id="{7FC4BB19-6AD1-45CF-9F99-00B109890FAB}"/>
               </a:ext>
             </a:extLst>
           </p:cNvPr>
@@ -2997,7 +3008,7 @@
           <a:p>
             <a:fld id="{7E18DB4A-8810-4A10-AD5C-D5E2C667F5B3}" type="datetime1">
               <a:rPr lang="en-US" smtClean="0"/>
-              <a:t>5/16/2026</a:t>
+              <a:t>5/17/2026</a:t>
             </a:fld>
             <a:endParaRPr lang="en-US" dirty="0"/>
           </a:p>
@@ -3212,7 +3223,7 @@
           <a:p>
             <a:fld id="{ED291B17-9318-49DB-B28B-6E5994AE9581}" type="datetime1">
               <a:rPr lang="en-US" smtClean="0"/>
-              <a:t>5/16/2026</a:t>
+              <a:t>5/17/2026</a:t>
             </a:fld>
             <a:endParaRPr lang="en-US" dirty="0"/>
           </a:p>
@@ -3857,10 +3868,10 @@
           <p:cNvPr id="18" name="Rectangle 17">
             <a:extLst>
               <a:ext uri="{FF2B5EF4-FFF2-40B4-BE49-F238E27FC236}">
-                <a16:creationId xmlns:a16="http://schemas.microsoft.com/office/drawing/2014/main" xmlns="" id="{D6D7A0BC-0046-4CAA-8E7F-DCAFE511EA0E}"/>
+                <a16:creationId xmlns:a16="http://schemas.microsoft.com/office/drawing/2014/main" id="{D6D7A0BC-0046-4CAA-8E7F-DCAFE511EA0E}"/>
               </a:ext>
               <a:ext uri="{C183D7F6-B498-43B3-948B-1728B52AA6E4}">
-                <adec:decorative xmlns:adec="http://schemas.microsoft.com/office/drawing/2017/decorative" xmlns="" val="1"/>
+                <adec:decorative xmlns:adec="http://schemas.microsoft.com/office/drawing/2017/decorative" val="1"/>
               </a:ext>
             </a:extLst>
           </p:cNvPr>
@@ -3870,7 +3881,7 @@
           <p:nvPr>
             <p:extLst>
               <p:ext uri="{386F3935-93C4-4BCD-93E2-E3B085C9AB24}">
-                <p16:designElem xmlns:p16="http://schemas.microsoft.com/office/powerpoint/2015/main" xmlns="" val="1"/>
+                <p16:designElem xmlns:p16="http://schemas.microsoft.com/office/powerpoint/2015/main" val="1"/>
               </p:ext>
             </p:extLst>
           </p:nvPr>
@@ -3917,7 +3928,7 @@
           <p:cNvPr id="2" name="Title 1">
             <a:extLst>
               <a:ext uri="{FF2B5EF4-FFF2-40B4-BE49-F238E27FC236}">
-                <a16:creationId xmlns:a16="http://schemas.microsoft.com/office/drawing/2014/main" xmlns="" id="{1C21E816-31F5-48BB-BD02-D15F2F18B48A}"/>
+                <a16:creationId xmlns:a16="http://schemas.microsoft.com/office/drawing/2014/main" id="{1C21E816-31F5-48BB-BD02-D15F2F18B48A}"/>
               </a:ext>
             </a:extLst>
           </p:cNvPr>
@@ -3957,15 +3968,15 @@
               <a:t> software – </a:t>
             </a:r>
             <a:r>
-              <a:rPr lang="ro-RO" sz="2800" dirty="0" smtClean="0"/>
+              <a:rPr lang="ro-RO" sz="2800" dirty="0"/>
               <a:t>t1 - </a:t>
             </a:r>
             <a:r>
-              <a:rPr lang="en-US" sz="2800" dirty="0" err="1" smtClean="0"/>
+              <a:rPr lang="en-US" sz="2800" dirty="0" err="1"/>
               <a:t>Testare</a:t>
             </a:r>
             <a:r>
-              <a:rPr lang="en-US" sz="2800" dirty="0" smtClean="0"/>
+              <a:rPr lang="en-US" sz="2800" dirty="0"/>
               <a:t> </a:t>
             </a:r>
             <a:r>
@@ -3992,10 +4003,10 @@
           <p:cNvPr id="20" name="Rectangle 19">
             <a:extLst>
               <a:ext uri="{FF2B5EF4-FFF2-40B4-BE49-F238E27FC236}">
-                <a16:creationId xmlns:a16="http://schemas.microsoft.com/office/drawing/2014/main" xmlns="" id="{E7C6334F-6411-41EC-AD7D-179EDD8B58CB}"/>
+                <a16:creationId xmlns:a16="http://schemas.microsoft.com/office/drawing/2014/main" id="{E7C6334F-6411-41EC-AD7D-179EDD8B58CB}"/>
               </a:ext>
               <a:ext uri="{C183D7F6-B498-43B3-948B-1728B52AA6E4}">
-                <adec:decorative xmlns:adec="http://schemas.microsoft.com/office/drawing/2017/decorative" xmlns="" val="1"/>
+                <adec:decorative xmlns:adec="http://schemas.microsoft.com/office/drawing/2017/decorative" val="1"/>
               </a:ext>
             </a:extLst>
           </p:cNvPr>
@@ -4005,7 +4016,7 @@
           <p:nvPr>
             <p:extLst>
               <p:ext uri="{386F3935-93C4-4BCD-93E2-E3B085C9AB24}">
-                <p16:designElem xmlns:p16="http://schemas.microsoft.com/office/powerpoint/2015/main" xmlns="" val="1"/>
+                <p16:designElem xmlns:p16="http://schemas.microsoft.com/office/powerpoint/2015/main" val="1"/>
               </p:ext>
             </p:extLst>
           </p:nvPr>
@@ -4046,10 +4057,10 @@
           <p:cNvPr id="22" name="Rectangle 21">
             <a:extLst>
               <a:ext uri="{FF2B5EF4-FFF2-40B4-BE49-F238E27FC236}">
-                <a16:creationId xmlns:a16="http://schemas.microsoft.com/office/drawing/2014/main" xmlns="" id="{E6B02CEE-3AF8-4349-9B3E-8970E6DF62B3}"/>
+                <a16:creationId xmlns:a16="http://schemas.microsoft.com/office/drawing/2014/main" id="{E6B02CEE-3AF8-4349-9B3E-8970E6DF62B3}"/>
               </a:ext>
               <a:ext uri="{C183D7F6-B498-43B3-948B-1728B52AA6E4}">
-                <adec:decorative xmlns:adec="http://schemas.microsoft.com/office/drawing/2017/decorative" xmlns="" val="1"/>
+                <adec:decorative xmlns:adec="http://schemas.microsoft.com/office/drawing/2017/decorative" val="1"/>
               </a:ext>
             </a:extLst>
           </p:cNvPr>
@@ -4059,7 +4070,7 @@
           <p:nvPr>
             <p:extLst>
               <p:ext uri="{386F3935-93C4-4BCD-93E2-E3B085C9AB24}">
-                <p16:designElem xmlns:p16="http://schemas.microsoft.com/office/powerpoint/2015/main" xmlns="" val="1"/>
+                <p16:designElem xmlns:p16="http://schemas.microsoft.com/office/powerpoint/2015/main" val="1"/>
               </p:ext>
             </p:extLst>
           </p:nvPr>
@@ -4100,10 +4111,10 @@
           <p:cNvPr id="24" name="Rectangle 23">
             <a:extLst>
               <a:ext uri="{FF2B5EF4-FFF2-40B4-BE49-F238E27FC236}">
-                <a16:creationId xmlns:a16="http://schemas.microsoft.com/office/drawing/2014/main" xmlns="" id="{AAA01CF0-3FB5-44EB-B7DE-F2E86374C2FB}"/>
+                <a16:creationId xmlns:a16="http://schemas.microsoft.com/office/drawing/2014/main" id="{AAA01CF0-3FB5-44EB-B7DE-F2E86374C2FB}"/>
               </a:ext>
               <a:ext uri="{C183D7F6-B498-43B3-948B-1728B52AA6E4}">
-                <adec:decorative xmlns:adec="http://schemas.microsoft.com/office/drawing/2017/decorative" xmlns="" val="1"/>
+                <adec:decorative xmlns:adec="http://schemas.microsoft.com/office/drawing/2017/decorative" val="1"/>
               </a:ext>
             </a:extLst>
           </p:cNvPr>
@@ -4113,7 +4124,7 @@
           <p:nvPr>
             <p:extLst>
               <p:ext uri="{386F3935-93C4-4BCD-93E2-E3B085C9AB24}">
-                <p16:designElem xmlns:p16="http://schemas.microsoft.com/office/powerpoint/2015/main" xmlns="" val="1"/>
+                <p16:designElem xmlns:p16="http://schemas.microsoft.com/office/powerpoint/2015/main" val="1"/>
               </p:ext>
             </p:extLst>
           </p:nvPr>
@@ -4154,7 +4165,7 @@
           <p:cNvPr id="9" name="Subtitle 2">
             <a:extLst>
               <a:ext uri="{FF2B5EF4-FFF2-40B4-BE49-F238E27FC236}">
-                <a16:creationId xmlns:a16="http://schemas.microsoft.com/office/drawing/2014/main" xmlns="" id="{835D6E6B-3353-491C-A3C6-F278D6CED8B3}"/>
+                <a16:creationId xmlns:a16="http://schemas.microsoft.com/office/drawing/2014/main" id="{835D6E6B-3353-491C-A3C6-F278D6CED8B3}"/>
               </a:ext>
             </a:extLst>
           </p:cNvPr>
@@ -4397,7 +4408,7 @@
           </a:lstStyle>
           <a:p>
             <a:r>
-              <a:rPr lang="ro-RO" dirty="0" smtClean="0">
+              <a:rPr lang="ro-RO" dirty="0">
                 <a:latin typeface="Arial" pitchFamily="34" charset="0"/>
                 <a:cs typeface="Arial" pitchFamily="34" charset="0"/>
               </a:rPr>
@@ -4406,14 +4417,14 @@
           </a:p>
           <a:p>
             <a:r>
-              <a:rPr lang="ro-RO" dirty="0" smtClean="0">
+              <a:rPr lang="ro-RO" dirty="0">
                 <a:latin typeface="Arial" pitchFamily="34" charset="0"/>
                 <a:cs typeface="Arial" pitchFamily="34" charset="0"/>
               </a:rPr>
               <a:t>				     Nițe dan-alexandru (344)</a:t>
             </a:r>
             <a:br>
-              <a:rPr lang="ro-RO" dirty="0" smtClean="0">
+              <a:rPr lang="ro-RO" dirty="0">
                 <a:latin typeface="Arial" pitchFamily="34" charset="0"/>
                 <a:cs typeface="Arial" pitchFamily="34" charset="0"/>
               </a:rPr>
@@ -4430,7 +4441,7 @@
           <p:cNvPr id="10" name="Content Placeholder 3">
             <a:extLst>
               <a:ext uri="{FF2B5EF4-FFF2-40B4-BE49-F238E27FC236}">
-                <a16:creationId xmlns:a16="http://schemas.microsoft.com/office/drawing/2014/main" xmlns="" id="{1B021E2C-E4CD-07DF-0E58-8CBDCC812FD4}"/>
+                <a16:creationId xmlns:a16="http://schemas.microsoft.com/office/drawing/2014/main" id="{1B021E2C-E4CD-07DF-0E58-8CBDCC812FD4}"/>
               </a:ext>
             </a:extLst>
           </p:cNvPr>
@@ -4670,28 +4681,28 @@
           </a:lstStyle>
           <a:p>
             <a:r>
-              <a:rPr lang="ro-RO" sz="1600" b="1" dirty="0" smtClean="0">
+              <a:rPr lang="ro-RO" sz="1600" b="1" dirty="0">
                 <a:latin typeface="Arial" pitchFamily="34" charset="0"/>
                 <a:cs typeface="Arial" pitchFamily="34" charset="0"/>
               </a:rPr>
               <a:t>Clasa implementată: </a:t>
             </a:r>
             <a:r>
-              <a:rPr lang="en-US" sz="1600" i="1" dirty="0" err="1" smtClean="0">
+              <a:rPr lang="en-US" sz="1600" i="1" dirty="0" err="1">
                 <a:latin typeface="Arial" pitchFamily="34" charset="0"/>
                 <a:cs typeface="Arial" pitchFamily="34" charset="0"/>
               </a:rPr>
               <a:t>FitnessClassBooking</a:t>
             </a:r>
             <a:r>
-              <a:rPr lang="ro-RO" sz="1600" dirty="0" smtClean="0">
+              <a:rPr lang="ro-RO" sz="1600" dirty="0">
                 <a:latin typeface="Arial" pitchFamily="34" charset="0"/>
                 <a:cs typeface="Arial" pitchFamily="34" charset="0"/>
               </a:rPr>
               <a:t> </a:t>
             </a:r>
             <a:r>
-              <a:rPr lang="ro-RO" sz="1600" dirty="0" smtClean="0">
+              <a:rPr lang="ro-RO" sz="1600" dirty="0">
                 <a:latin typeface="Arial" pitchFamily="34" charset="0"/>
                 <a:cs typeface="Arial" pitchFamily="34" charset="0"/>
                 <a:sym typeface="Wingdings" pitchFamily="2" charset="2"/>
@@ -4699,7 +4710,7 @@
               <a:t></a:t>
             </a:r>
             <a:r>
-              <a:rPr lang="en-US" sz="1600" dirty="0" smtClean="0">
+              <a:rPr lang="en-US" sz="1600" dirty="0">
                 <a:latin typeface="Arial" pitchFamily="34" charset="0"/>
                 <a:cs typeface="Arial" pitchFamily="34" charset="0"/>
                 <a:sym typeface="Wingdings" pitchFamily="2" charset="2"/>
@@ -4714,42 +4725,42 @@
               </a:rPr>
               <a:t>modelează evaluarea unui pachet de ședințe pentru o clasă de fitness.</a:t>
             </a:r>
-            <a:endParaRPr lang="ro-RO" sz="1600" dirty="0" smtClean="0">
+            <a:endParaRPr lang="ro-RO" sz="1600" dirty="0">
               <a:latin typeface="Arial" pitchFamily="34" charset="0"/>
               <a:cs typeface="Arial" pitchFamily="34" charset="0"/>
             </a:endParaRPr>
           </a:p>
           <a:p>
             <a:r>
-              <a:rPr lang="ro-RO" sz="1600" b="1" dirty="0" smtClean="0">
+              <a:rPr lang="ro-RO" sz="1600" b="1" dirty="0">
                 <a:latin typeface="Arial" pitchFamily="34" charset="0"/>
                 <a:cs typeface="Arial" pitchFamily="34" charset="0"/>
               </a:rPr>
               <a:t>Metoda testată: </a:t>
             </a:r>
             <a:r>
-              <a:rPr lang="en-US" sz="1600" i="1" dirty="0" err="1" smtClean="0">
+              <a:rPr lang="en-US" sz="1600" i="1" dirty="0" err="1">
                 <a:latin typeface="Arial" pitchFamily="34" charset="0"/>
                 <a:cs typeface="Arial" pitchFamily="34" charset="0"/>
               </a:rPr>
               <a:t>evaluate_client_package</a:t>
             </a:r>
             <a:r>
-              <a:rPr lang="en-US" sz="1600" dirty="0" smtClean="0">
+              <a:rPr lang="en-US" sz="1600" dirty="0">
                 <a:latin typeface="Arial" pitchFamily="34" charset="0"/>
                 <a:cs typeface="Arial" pitchFamily="34" charset="0"/>
               </a:rPr>
               <a:t>(self,</a:t>
             </a:r>
             <a:r>
-              <a:rPr lang="ro-RO" sz="1600" dirty="0" smtClean="0">
+              <a:rPr lang="ro-RO" sz="1600" dirty="0">
                 <a:latin typeface="Arial" pitchFamily="34" charset="0"/>
                 <a:cs typeface="Arial" pitchFamily="34" charset="0"/>
               </a:rPr>
               <a:t> </a:t>
             </a:r>
             <a:r>
-              <a:rPr lang="en-US" sz="1600" dirty="0" err="1" smtClean="0">
+              <a:rPr lang="en-US" sz="1600" dirty="0" err="1">
                 <a:latin typeface="Arial" pitchFamily="34" charset="0"/>
                 <a:cs typeface="Arial" pitchFamily="34" charset="0"/>
               </a:rPr>
@@ -4770,21 +4781,21 @@
               <a:t>str</a:t>
             </a:r>
             <a:r>
-              <a:rPr lang="en-US" sz="1600" dirty="0" smtClean="0">
+              <a:rPr lang="en-US" sz="1600" dirty="0">
                 <a:latin typeface="Arial" pitchFamily="34" charset="0"/>
                 <a:cs typeface="Arial" pitchFamily="34" charset="0"/>
               </a:rPr>
               <a:t>],</a:t>
             </a:r>
             <a:r>
-              <a:rPr lang="ro-RO" sz="1600" dirty="0" smtClean="0">
+              <a:rPr lang="ro-RO" sz="1600" dirty="0">
                 <a:latin typeface="Arial" pitchFamily="34" charset="0"/>
                 <a:cs typeface="Arial" pitchFamily="34" charset="0"/>
               </a:rPr>
               <a:t> </a:t>
             </a:r>
             <a:r>
-              <a:rPr lang="en-US" sz="1600" dirty="0" err="1" smtClean="0">
+              <a:rPr lang="en-US" sz="1600" dirty="0" err="1">
                 <a:latin typeface="Arial" pitchFamily="34" charset="0"/>
                 <a:cs typeface="Arial" pitchFamily="34" charset="0"/>
               </a:rPr>
@@ -4805,21 +4816,21 @@
               <a:t>int</a:t>
             </a:r>
             <a:r>
-              <a:rPr lang="en-US" sz="1600" dirty="0" smtClean="0">
+              <a:rPr lang="en-US" sz="1600" dirty="0">
                 <a:latin typeface="Arial" pitchFamily="34" charset="0"/>
                 <a:cs typeface="Arial" pitchFamily="34" charset="0"/>
               </a:rPr>
               <a:t>,</a:t>
             </a:r>
             <a:r>
-              <a:rPr lang="ro-RO" sz="1600" dirty="0" smtClean="0">
+              <a:rPr lang="ro-RO" sz="1600" dirty="0">
                 <a:latin typeface="Arial" pitchFamily="34" charset="0"/>
                 <a:cs typeface="Arial" pitchFamily="34" charset="0"/>
               </a:rPr>
               <a:t> </a:t>
             </a:r>
             <a:r>
-              <a:rPr lang="en-US" sz="1600" dirty="0" err="1" smtClean="0">
+              <a:rPr lang="en-US" sz="1600" dirty="0" err="1">
                 <a:latin typeface="Arial" pitchFamily="34" charset="0"/>
                 <a:cs typeface="Arial" pitchFamily="34" charset="0"/>
               </a:rPr>
@@ -4833,20 +4844,20 @@
               <a:t>: </a:t>
             </a:r>
             <a:r>
-              <a:rPr lang="en-US" sz="1600" dirty="0" err="1" smtClean="0">
+              <a:rPr lang="en-US" sz="1600" dirty="0" err="1">
                 <a:latin typeface="Arial" pitchFamily="34" charset="0"/>
                 <a:cs typeface="Arial" pitchFamily="34" charset="0"/>
               </a:rPr>
               <a:t>bool</a:t>
             </a:r>
             <a:r>
-              <a:rPr lang="en-US" sz="1600" dirty="0" smtClean="0">
+              <a:rPr lang="en-US" sz="1600" dirty="0">
                 <a:latin typeface="Arial" pitchFamily="34" charset="0"/>
                 <a:cs typeface="Arial" pitchFamily="34" charset="0"/>
               </a:rPr>
               <a:t>)</a:t>
             </a:r>
-            <a:endParaRPr lang="ro-RO" sz="1600" dirty="0" smtClean="0">
+            <a:endParaRPr lang="ro-RO" sz="1600" dirty="0">
               <a:latin typeface="Arial" pitchFamily="34" charset="0"/>
               <a:cs typeface="Arial" pitchFamily="34" charset="0"/>
             </a:endParaRPr>
@@ -4860,14 +4871,14 @@
               <a:t>Framework </a:t>
             </a:r>
             <a:r>
-              <a:rPr lang="en-US" sz="1600" b="1" dirty="0" err="1" smtClean="0">
+              <a:rPr lang="en-US" sz="1600" b="1" dirty="0" err="1">
                 <a:latin typeface="Arial" pitchFamily="34" charset="0"/>
                 <a:cs typeface="Arial" pitchFamily="34" charset="0"/>
               </a:rPr>
               <a:t>testare</a:t>
             </a:r>
             <a:r>
-              <a:rPr lang="ro-RO" sz="1600" b="1" dirty="0" smtClean="0">
+              <a:rPr lang="ro-RO" sz="1600" b="1" dirty="0">
                 <a:latin typeface="Arial" pitchFamily="34" charset="0"/>
                 <a:cs typeface="Arial" pitchFamily="34" charset="0"/>
               </a:rPr>
@@ -4885,37 +4896,30 @@
                 <a:latin typeface="Arial" pitchFamily="34" charset="0"/>
                 <a:cs typeface="Arial" pitchFamily="34" charset="0"/>
               </a:rPr>
-              <a:t> </a:t>
-            </a:r>
-            <a:r>
-              <a:rPr lang="en-US" sz="1600" dirty="0" smtClean="0">
-                <a:latin typeface="Arial" pitchFamily="34" charset="0"/>
-                <a:cs typeface="Arial" pitchFamily="34" charset="0"/>
-              </a:rPr>
-              <a:t>9.0.3</a:t>
-            </a:r>
-            <a:endParaRPr lang="ro-RO" sz="1600" dirty="0" smtClean="0">
+              <a:t> 9.0.3</a:t>
+            </a:r>
+            <a:endParaRPr lang="ro-RO" sz="1600" dirty="0">
               <a:latin typeface="Arial" pitchFamily="34" charset="0"/>
               <a:cs typeface="Arial" pitchFamily="34" charset="0"/>
             </a:endParaRPr>
           </a:p>
           <a:p>
             <a:r>
-              <a:rPr lang="en-US" sz="1600" b="1" dirty="0" smtClean="0">
+              <a:rPr lang="en-US" sz="1600" b="1" dirty="0">
                 <a:latin typeface="Arial" pitchFamily="34" charset="0"/>
                 <a:cs typeface="Arial" pitchFamily="34" charset="0"/>
               </a:rPr>
               <a:t>Coverage</a:t>
             </a:r>
             <a:r>
-              <a:rPr lang="ro-RO" sz="1600" b="1" dirty="0" smtClean="0">
+              <a:rPr lang="ro-RO" sz="1600" b="1" dirty="0">
                 <a:latin typeface="Arial" pitchFamily="34" charset="0"/>
                 <a:cs typeface="Arial" pitchFamily="34" charset="0"/>
               </a:rPr>
               <a:t>:</a:t>
             </a:r>
             <a:r>
-              <a:rPr lang="ro-RO" sz="1600" dirty="0" smtClean="0">
+              <a:rPr lang="ro-RO" sz="1600" dirty="0">
                 <a:latin typeface="Arial" pitchFamily="34" charset="0"/>
                 <a:cs typeface="Arial" pitchFamily="34" charset="0"/>
               </a:rPr>
@@ -4926,16 +4930,9 @@
                 <a:latin typeface="Arial" pitchFamily="34" charset="0"/>
                 <a:cs typeface="Arial" pitchFamily="34" charset="0"/>
               </a:rPr>
-              <a:t>coverage.py </a:t>
-            </a:r>
-            <a:r>
-              <a:rPr lang="en-US" sz="1600" dirty="0" smtClean="0">
-                <a:latin typeface="Arial" pitchFamily="34" charset="0"/>
-                <a:cs typeface="Arial" pitchFamily="34" charset="0"/>
-              </a:rPr>
-              <a:t>7.13.5</a:t>
-            </a:r>
-            <a:endParaRPr lang="ro-RO" sz="1600" dirty="0" smtClean="0">
+              <a:t>coverage.py 7.13.5</a:t>
+            </a:r>
+            <a:endParaRPr lang="ro-RO" sz="1600" dirty="0">
               <a:latin typeface="Arial" pitchFamily="34" charset="0"/>
               <a:cs typeface="Arial" pitchFamily="34" charset="0"/>
             </a:endParaRPr>
@@ -4946,17 +4943,10 @@
                 <a:latin typeface="Arial" pitchFamily="34" charset="0"/>
                 <a:cs typeface="Arial" pitchFamily="34" charset="0"/>
               </a:rPr>
-              <a:t>Mutation </a:t>
-            </a:r>
-            <a:r>
-              <a:rPr lang="en-US" sz="1600" b="1" dirty="0" smtClean="0">
-                <a:latin typeface="Arial" pitchFamily="34" charset="0"/>
-                <a:cs typeface="Arial" pitchFamily="34" charset="0"/>
-              </a:rPr>
-              <a:t>testing</a:t>
-            </a:r>
-            <a:r>
-              <a:rPr lang="ro-RO" sz="1600" b="1" dirty="0" smtClean="0">
+              <a:t>Mutation testing</a:t>
+            </a:r>
+            <a:r>
+              <a:rPr lang="ro-RO" sz="1600" b="1" dirty="0">
                 <a:latin typeface="Arial" pitchFamily="34" charset="0"/>
                 <a:cs typeface="Arial" pitchFamily="34" charset="0"/>
               </a:rPr>
@@ -4974,58 +4964,44 @@
                 <a:latin typeface="Arial" pitchFamily="34" charset="0"/>
                 <a:cs typeface="Arial" pitchFamily="34" charset="0"/>
               </a:rPr>
+              <a:t> 2.5.1</a:t>
+            </a:r>
+          </a:p>
+          <a:p>
+            <a:r>
+              <a:rPr lang="en-US" sz="1600" b="1" dirty="0" err="1">
+                <a:latin typeface="Arial" pitchFamily="34" charset="0"/>
+                <a:cs typeface="Arial" pitchFamily="34" charset="0"/>
+              </a:rPr>
+              <a:t>Mediu</a:t>
+            </a:r>
+            <a:r>
+              <a:rPr lang="en-US" sz="1600" b="1" dirty="0">
+                <a:latin typeface="Arial" pitchFamily="34" charset="0"/>
+                <a:cs typeface="Arial" pitchFamily="34" charset="0"/>
+              </a:rPr>
               <a:t> </a:t>
             </a:r>
             <a:r>
-              <a:rPr lang="en-US" sz="1600" dirty="0" smtClean="0">
-                <a:latin typeface="Arial" pitchFamily="34" charset="0"/>
-                <a:cs typeface="Arial" pitchFamily="34" charset="0"/>
-              </a:rPr>
-              <a:t>2.5.1</a:t>
-            </a:r>
-          </a:p>
-          <a:p>
-            <a:r>
-              <a:rPr lang="en-US" sz="1600" b="1" dirty="0" err="1" smtClean="0">
-                <a:latin typeface="Arial" pitchFamily="34" charset="0"/>
-                <a:cs typeface="Arial" pitchFamily="34" charset="0"/>
-              </a:rPr>
-              <a:t>Mediu</a:t>
-            </a:r>
-            <a:r>
-              <a:rPr lang="en-US" sz="1600" b="1" dirty="0" smtClean="0">
-                <a:latin typeface="Arial" pitchFamily="34" charset="0"/>
-                <a:cs typeface="Arial" pitchFamily="34" charset="0"/>
-              </a:rPr>
-              <a:t> </a:t>
-            </a:r>
-            <a:r>
-              <a:rPr lang="en-US" sz="1600" b="1" dirty="0" err="1" smtClean="0">
+              <a:rPr lang="en-US" sz="1600" b="1" dirty="0" err="1">
                 <a:latin typeface="Arial" pitchFamily="34" charset="0"/>
                 <a:cs typeface="Arial" pitchFamily="34" charset="0"/>
               </a:rPr>
               <a:t>rulare</a:t>
             </a:r>
             <a:r>
-              <a:rPr lang="ro-RO" sz="1600" b="1" dirty="0" smtClean="0">
+              <a:rPr lang="ro-RO" sz="1600" b="1" dirty="0">
                 <a:latin typeface="Arial" pitchFamily="34" charset="0"/>
                 <a:cs typeface="Arial" pitchFamily="34" charset="0"/>
               </a:rPr>
               <a:t>: </a:t>
             </a:r>
             <a:r>
-              <a:rPr lang="en-US" sz="1600" dirty="0" smtClean="0">
-                <a:latin typeface="Arial" pitchFamily="34" charset="0"/>
-                <a:cs typeface="Arial" pitchFamily="34" charset="0"/>
-              </a:rPr>
-              <a:t>Windows </a:t>
-            </a:r>
-            <a:r>
               <a:rPr lang="en-US" sz="1600" dirty="0">
                 <a:latin typeface="Arial" pitchFamily="34" charset="0"/>
                 <a:cs typeface="Arial" pitchFamily="34" charset="0"/>
               </a:rPr>
-              <a:t>11 Pro · Python 3.13.3 · WSL Ubuntu 24.04.1</a:t>
+              <a:t>Windows 11 Pro · Python 3.13.3 · WSL Ubuntu 24.04.1</a:t>
             </a:r>
           </a:p>
         </p:txBody>
@@ -5148,18 +5124,10 @@
           <a:p>
             <a:r>
               <a:rPr lang="it-IT" sz="2000" b="1" dirty="0"/>
-              <a:t>Utilizarea AI și rezultate </a:t>
-            </a:r>
-            <a:r>
-              <a:rPr lang="it-IT" sz="2000" b="1" dirty="0" smtClean="0"/>
-              <a:t>finale</a:t>
-            </a:r>
-            <a:r>
-              <a:rPr lang="ro-RO" sz="2000" b="1" dirty="0" smtClean="0"/>
-              <a:t/>
+              <a:t>Utilizarea AI și rezultate finale</a:t>
             </a:r>
             <a:br>
-              <a:rPr lang="ro-RO" sz="2000" b="1" dirty="0" smtClean="0"/>
+              <a:rPr lang="ro-RO" sz="2000" b="1" dirty="0"/>
             </a:br>
             <a:r>
               <a:rPr lang="vi-VN" sz="2000" dirty="0"/>
@@ -5556,28 +5524,28 @@
           <a:lstStyle/>
           <a:p>
             <a:r>
-              <a:rPr lang="en-US" sz="2200" b="1" dirty="0" err="1" smtClean="0">
+              <a:rPr lang="en-US" sz="2200" b="1" dirty="0" err="1">
                 <a:latin typeface="Arial" pitchFamily="34" charset="0"/>
                 <a:cs typeface="Arial" pitchFamily="34" charset="0"/>
               </a:rPr>
               <a:t>Metoda</a:t>
             </a:r>
             <a:r>
-              <a:rPr lang="en-US" sz="2200" b="1" dirty="0" smtClean="0">
+              <a:rPr lang="en-US" sz="2200" b="1" dirty="0">
                 <a:latin typeface="Arial" pitchFamily="34" charset="0"/>
                 <a:cs typeface="Arial" pitchFamily="34" charset="0"/>
               </a:rPr>
               <a:t> </a:t>
             </a:r>
             <a:r>
-              <a:rPr lang="vi-VN" sz="2200" b="1" dirty="0" smtClean="0">
+              <a:rPr lang="vi-VN" sz="2200" b="1" dirty="0">
                 <a:latin typeface="Arial" pitchFamily="34" charset="0"/>
                 <a:cs typeface="Arial" pitchFamily="34" charset="0"/>
               </a:rPr>
               <a:t>testată</a:t>
             </a:r>
             <a:r>
-              <a:rPr lang="en-US" sz="2200" b="1" dirty="0" smtClean="0">
+              <a:rPr lang="en-US" sz="2200" b="1" dirty="0">
                 <a:latin typeface="Arial" pitchFamily="34" charset="0"/>
                 <a:cs typeface="Arial" pitchFamily="34" charset="0"/>
               </a:rPr>
@@ -5671,7 +5639,7 @@
               <a:t> </a:t>
             </a:r>
             <a:r>
-              <a:rPr lang="en-US" b="1" dirty="0" err="1" smtClean="0">
+              <a:rPr lang="en-US" b="1" dirty="0" err="1">
                 <a:latin typeface="Tahoma" pitchFamily="34" charset="0"/>
                 <a:ea typeface="Tahoma" pitchFamily="34" charset="0"/>
                 <a:cs typeface="Tahoma" pitchFamily="34" charset="0"/>
@@ -5679,7 +5647,7 @@
               <a:t>metodei</a:t>
             </a:r>
             <a:r>
-              <a:rPr lang="en-US" b="1" dirty="0" smtClean="0">
+              <a:rPr lang="en-US" b="1" dirty="0">
                 <a:latin typeface="Tahoma" pitchFamily="34" charset="0"/>
                 <a:ea typeface="Tahoma" pitchFamily="34" charset="0"/>
                 <a:cs typeface="Tahoma" pitchFamily="34" charset="0"/>
@@ -5689,7 +5657,7 @@
           </a:p>
           <a:p>
             <a:r>
-              <a:rPr lang="vi-VN" b="1" dirty="0" smtClean="0">
+              <a:rPr lang="vi-VN" b="1" dirty="0">
                 <a:latin typeface="Tahoma" pitchFamily="34" charset="0"/>
                 <a:ea typeface="Tahoma" pitchFamily="34" charset="0"/>
                 <a:cs typeface="Tahoma" pitchFamily="34" charset="0"/>
@@ -5793,100 +5761,87 @@
               </a:rPr>
               <a:t>) </a:t>
             </a:r>
-            <a:endParaRPr lang="en-US" dirty="0" smtClean="0">
+          </a:p>
+          <a:p>
+            <a:r>
+              <a:rPr lang="en-US" dirty="0">
+                <a:latin typeface="Tahoma" pitchFamily="34" charset="0"/>
+                <a:ea typeface="Tahoma" pitchFamily="34" charset="0"/>
+                <a:cs typeface="Tahoma" pitchFamily="34" charset="0"/>
+              </a:rPr>
+              <a:t>result = </a:t>
+            </a:r>
+            <a:r>
+              <a:rPr lang="en-US" dirty="0" err="1">
+                <a:latin typeface="Tahoma" pitchFamily="34" charset="0"/>
+                <a:ea typeface="Tahoma" pitchFamily="34" charset="0"/>
+                <a:cs typeface="Tahoma" pitchFamily="34" charset="0"/>
+              </a:rPr>
+              <a:t>booking.evaluate_client_package</a:t>
+            </a:r>
+            <a:r>
+              <a:rPr lang="en-US" dirty="0">
+                <a:latin typeface="Tahoma" pitchFamily="34" charset="0"/>
+                <a:ea typeface="Tahoma" pitchFamily="34" charset="0"/>
+                <a:cs typeface="Tahoma" pitchFamily="34" charset="0"/>
+              </a:rPr>
+              <a:t>(</a:t>
+            </a:r>
+            <a:r>
+              <a:rPr lang="en-US" dirty="0" err="1">
+                <a:latin typeface="Tahoma" pitchFamily="34" charset="0"/>
+                <a:ea typeface="Tahoma" pitchFamily="34" charset="0"/>
+                <a:cs typeface="Tahoma" pitchFamily="34" charset="0"/>
+              </a:rPr>
+              <a:t>session_history</a:t>
+            </a:r>
+            <a:r>
+              <a:rPr lang="en-US" dirty="0">
+                <a:latin typeface="Tahoma" pitchFamily="34" charset="0"/>
+                <a:ea typeface="Tahoma" pitchFamily="34" charset="0"/>
+                <a:cs typeface="Tahoma" pitchFamily="34" charset="0"/>
+              </a:rPr>
+              <a:t>, </a:t>
+            </a:r>
+            <a:r>
+              <a:rPr lang="en-US" dirty="0" err="1">
+                <a:latin typeface="Tahoma" pitchFamily="34" charset="0"/>
+                <a:ea typeface="Tahoma" pitchFamily="34" charset="0"/>
+                <a:cs typeface="Tahoma" pitchFamily="34" charset="0"/>
+              </a:rPr>
+              <a:t>package_sessions</a:t>
+            </a:r>
+            <a:r>
+              <a:rPr lang="en-US" dirty="0">
+                <a:latin typeface="Tahoma" pitchFamily="34" charset="0"/>
+                <a:ea typeface="Tahoma" pitchFamily="34" charset="0"/>
+                <a:cs typeface="Tahoma" pitchFamily="34" charset="0"/>
+              </a:rPr>
+              <a:t>, </a:t>
+            </a:r>
+            <a:r>
+              <a:rPr lang="en-US" dirty="0" err="1">
+                <a:latin typeface="Tahoma" pitchFamily="34" charset="0"/>
+                <a:ea typeface="Tahoma" pitchFamily="34" charset="0"/>
+                <a:cs typeface="Tahoma" pitchFamily="34" charset="0"/>
+              </a:rPr>
+              <a:t>has_membership</a:t>
+            </a:r>
+            <a:r>
+              <a:rPr lang="en-US" dirty="0">
+                <a:latin typeface="Tahoma" pitchFamily="34" charset="0"/>
+                <a:ea typeface="Tahoma" pitchFamily="34" charset="0"/>
+                <a:cs typeface="Tahoma" pitchFamily="34" charset="0"/>
+              </a:rPr>
+              <a:t>)</a:t>
+            </a:r>
+            <a:endParaRPr lang="en-US" b="1" dirty="0">
               <a:latin typeface="Tahoma" pitchFamily="34" charset="0"/>
               <a:ea typeface="Tahoma" pitchFamily="34" charset="0"/>
               <a:cs typeface="Tahoma" pitchFamily="34" charset="0"/>
             </a:endParaRPr>
           </a:p>
           <a:p>
-            <a:r>
-              <a:rPr lang="en-US" dirty="0" smtClean="0">
-                <a:latin typeface="Tahoma" pitchFamily="34" charset="0"/>
-                <a:ea typeface="Tahoma" pitchFamily="34" charset="0"/>
-                <a:cs typeface="Tahoma" pitchFamily="34" charset="0"/>
-              </a:rPr>
-              <a:t>result </a:t>
-            </a:r>
-            <a:r>
-              <a:rPr lang="en-US" dirty="0">
-                <a:latin typeface="Tahoma" pitchFamily="34" charset="0"/>
-                <a:ea typeface="Tahoma" pitchFamily="34" charset="0"/>
-                <a:cs typeface="Tahoma" pitchFamily="34" charset="0"/>
-              </a:rPr>
-              <a:t>= </a:t>
-            </a:r>
-            <a:r>
-              <a:rPr lang="en-US" dirty="0" err="1">
-                <a:latin typeface="Tahoma" pitchFamily="34" charset="0"/>
-                <a:ea typeface="Tahoma" pitchFamily="34" charset="0"/>
-                <a:cs typeface="Tahoma" pitchFamily="34" charset="0"/>
-              </a:rPr>
-              <a:t>booking.evaluate_client_package</a:t>
-            </a:r>
-            <a:r>
-              <a:rPr lang="en-US" dirty="0">
-                <a:latin typeface="Tahoma" pitchFamily="34" charset="0"/>
-                <a:ea typeface="Tahoma" pitchFamily="34" charset="0"/>
-                <a:cs typeface="Tahoma" pitchFamily="34" charset="0"/>
-              </a:rPr>
-              <a:t>(</a:t>
-            </a:r>
-            <a:r>
-              <a:rPr lang="en-US" dirty="0" err="1">
-                <a:latin typeface="Tahoma" pitchFamily="34" charset="0"/>
-                <a:ea typeface="Tahoma" pitchFamily="34" charset="0"/>
-                <a:cs typeface="Tahoma" pitchFamily="34" charset="0"/>
-              </a:rPr>
-              <a:t>session_history</a:t>
-            </a:r>
-            <a:r>
-              <a:rPr lang="en-US" dirty="0">
-                <a:latin typeface="Tahoma" pitchFamily="34" charset="0"/>
-                <a:ea typeface="Tahoma" pitchFamily="34" charset="0"/>
-                <a:cs typeface="Tahoma" pitchFamily="34" charset="0"/>
-              </a:rPr>
-              <a:t>, </a:t>
-            </a:r>
-            <a:r>
-              <a:rPr lang="en-US" dirty="0" err="1">
-                <a:latin typeface="Tahoma" pitchFamily="34" charset="0"/>
-                <a:ea typeface="Tahoma" pitchFamily="34" charset="0"/>
-                <a:cs typeface="Tahoma" pitchFamily="34" charset="0"/>
-              </a:rPr>
-              <a:t>package_sessions</a:t>
-            </a:r>
-            <a:r>
-              <a:rPr lang="en-US" dirty="0">
-                <a:latin typeface="Tahoma" pitchFamily="34" charset="0"/>
-                <a:ea typeface="Tahoma" pitchFamily="34" charset="0"/>
-                <a:cs typeface="Tahoma" pitchFamily="34" charset="0"/>
-              </a:rPr>
-              <a:t>, </a:t>
-            </a:r>
-            <a:r>
-              <a:rPr lang="en-US" dirty="0" err="1">
-                <a:latin typeface="Tahoma" pitchFamily="34" charset="0"/>
-                <a:ea typeface="Tahoma" pitchFamily="34" charset="0"/>
-                <a:cs typeface="Tahoma" pitchFamily="34" charset="0"/>
-              </a:rPr>
-              <a:t>has_membership</a:t>
-            </a:r>
-            <a:r>
-              <a:rPr lang="en-US" dirty="0" smtClean="0">
-                <a:latin typeface="Tahoma" pitchFamily="34" charset="0"/>
-                <a:ea typeface="Tahoma" pitchFamily="34" charset="0"/>
-                <a:cs typeface="Tahoma" pitchFamily="34" charset="0"/>
-              </a:rPr>
-              <a:t>)</a:t>
-            </a:r>
-            <a:endParaRPr lang="en-US" b="1" dirty="0" smtClean="0">
-              <a:latin typeface="Tahoma" pitchFamily="34" charset="0"/>
-              <a:ea typeface="Tahoma" pitchFamily="34" charset="0"/>
-              <a:cs typeface="Tahoma" pitchFamily="34" charset="0"/>
-            </a:endParaRPr>
-          </a:p>
-          <a:p>
             <a:pPr marL="0" indent="0">
               <a:buNone/>
             </a:pPr>
@@ -5907,7 +5862,7 @@
               <a:t> din </a:t>
             </a:r>
             <a:r>
-              <a:rPr lang="en-US" b="1" dirty="0" err="1" smtClean="0">
+              <a:rPr lang="en-US" b="1" dirty="0" err="1">
                 <a:latin typeface="Tahoma" pitchFamily="34" charset="0"/>
                 <a:ea typeface="Tahoma" pitchFamily="34" charset="0"/>
                 <a:cs typeface="Tahoma" pitchFamily="34" charset="0"/>
@@ -5915,7 +5870,7 @@
               <a:t>session_history</a:t>
             </a:r>
             <a:r>
-              <a:rPr lang="en-US" b="1" dirty="0" smtClean="0">
+              <a:rPr lang="en-US" b="1" dirty="0">
                 <a:latin typeface="Tahoma" pitchFamily="34" charset="0"/>
                 <a:ea typeface="Tahoma" pitchFamily="34" charset="0"/>
                 <a:cs typeface="Tahoma" pitchFamily="34" charset="0"/>
@@ -6336,7 +6291,7 @@
               <a:buNone/>
             </a:pPr>
             <a:r>
-              <a:rPr lang="en-US" sz="1400" b="1" dirty="0" err="1" smtClean="0">
+              <a:rPr lang="en-US" sz="1400" b="1" dirty="0" err="1">
                 <a:latin typeface="Tahoma" pitchFamily="34" charset="0"/>
                 <a:ea typeface="Tahoma" pitchFamily="34" charset="0"/>
                 <a:cs typeface="Tahoma" pitchFamily="34" charset="0"/>
@@ -6344,7 +6299,7 @@
               <a:t>Exemplu</a:t>
             </a:r>
             <a:r>
-              <a:rPr lang="en-US" sz="1400" b="1" dirty="0" smtClean="0">
+              <a:rPr lang="en-US" sz="1400" b="1" dirty="0">
                 <a:latin typeface="Tahoma" pitchFamily="34" charset="0"/>
                 <a:ea typeface="Tahoma" pitchFamily="34" charset="0"/>
                 <a:cs typeface="Tahoma" pitchFamily="34" charset="0"/>
@@ -6357,7 +6312,7 @@
               <a:buNone/>
             </a:pPr>
             <a:r>
-              <a:rPr lang="en-US" sz="1400" b="1" dirty="0" smtClean="0">
+              <a:rPr lang="en-US" sz="1400" b="1" dirty="0">
                 <a:latin typeface="Tahoma" pitchFamily="34" charset="0"/>
                 <a:ea typeface="Tahoma" pitchFamily="34" charset="0"/>
                 <a:cs typeface="Tahoma" pitchFamily="34" charset="0"/>
@@ -6365,14 +6320,14 @@
               <a:t> </a:t>
             </a:r>
             <a:br>
-              <a:rPr lang="en-US" sz="1400" b="1" dirty="0" smtClean="0">
+              <a:rPr lang="en-US" sz="1400" b="1" dirty="0">
                 <a:latin typeface="Tahoma" pitchFamily="34" charset="0"/>
                 <a:ea typeface="Tahoma" pitchFamily="34" charset="0"/>
                 <a:cs typeface="Tahoma" pitchFamily="34" charset="0"/>
               </a:rPr>
             </a:br>
             <a:r>
-              <a:rPr lang="en-US" sz="1400" b="1" dirty="0" smtClean="0">
+              <a:rPr lang="en-US" sz="1400" b="1" dirty="0">
                 <a:latin typeface="Tahoma" pitchFamily="34" charset="0"/>
                 <a:ea typeface="Tahoma" pitchFamily="34" charset="0"/>
                 <a:cs typeface="Tahoma" pitchFamily="34" charset="0"/>
@@ -6659,7 +6614,7 @@
               <a:buNone/>
             </a:pPr>
             <a:r>
-              <a:rPr lang="en-US" sz="1400" b="1" dirty="0" smtClean="0">
+              <a:rPr lang="en-US" sz="1400" b="1" dirty="0">
                 <a:latin typeface="Tahoma" pitchFamily="34" charset="0"/>
                 <a:ea typeface="Tahoma" pitchFamily="34" charset="0"/>
                 <a:cs typeface="Tahoma" pitchFamily="34" charset="0"/>
@@ -6668,11 +6623,7 @@
             </a:r>
             <a:r>
               <a:rPr lang="en-US" sz="1400" dirty="0"/>
-              <a:t>attended=2 </a:t>
-            </a:r>
-            <a:r>
-              <a:rPr lang="en-US" sz="1400" dirty="0" smtClean="0"/>
-              <a:t>; </a:t>
+              <a:t>attended=2 ; </a:t>
             </a:r>
             <a:r>
               <a:rPr lang="en-US" sz="1400" dirty="0" err="1"/>
@@ -6680,26 +6631,14 @@
             </a:r>
             <a:r>
               <a:rPr lang="en-US" sz="1400" dirty="0"/>
-              <a:t>=1 </a:t>
-            </a:r>
-            <a:r>
-              <a:rPr lang="en-US" sz="1400" dirty="0" smtClean="0"/>
-              <a:t>; </a:t>
+              <a:t>=1 ; cancelled=1 ; </a:t>
+            </a:r>
+            <a:r>
+              <a:rPr lang="en-US" sz="1400" dirty="0" err="1"/>
+              <a:t>used_sessions</a:t>
             </a:r>
             <a:r>
               <a:rPr lang="en-US" sz="1400" dirty="0"/>
-              <a:t>cancelled=1 </a:t>
-            </a:r>
-            <a:r>
-              <a:rPr lang="en-US" sz="1400" dirty="0" smtClean="0"/>
-              <a:t>; </a:t>
-            </a:r>
-            <a:r>
-              <a:rPr lang="en-US" sz="1400" dirty="0" err="1" smtClean="0"/>
-              <a:t>used_sessions</a:t>
-            </a:r>
-            <a:r>
-              <a:rPr lang="en-US" sz="1400" dirty="0" smtClean="0"/>
               <a:t>=3 ; remaining=2 ; </a:t>
             </a:r>
             <a:r>
@@ -6708,15 +6647,7 @@
             </a:r>
             <a:r>
               <a:rPr lang="en-US" sz="1400" dirty="0"/>
-              <a:t> = 5 × 50 × 0.80 = 200.0 </a:t>
-            </a:r>
-            <a:r>
-              <a:rPr lang="en-US" sz="1400" dirty="0" smtClean="0"/>
-              <a:t>; status </a:t>
-            </a:r>
-            <a:r>
-              <a:rPr lang="en-US" sz="1400" dirty="0"/>
-              <a:t>= "active"</a:t>
+              <a:t> = 5 × 50 × 0.80 = 200.0 ; status = "active"</a:t>
             </a:r>
             <a:endParaRPr lang="en-US" sz="1400" b="1" dirty="0">
               <a:latin typeface="Tahoma" pitchFamily="34" charset="0"/>
@@ -6777,22 +6708,21 @@
           <a:lstStyle/>
           <a:p>
             <a:r>
-              <a:rPr lang="en-US" dirty="0" err="1" smtClean="0"/>
+              <a:rPr lang="en-US" dirty="0" err="1"/>
               <a:t>Strategiile</a:t>
             </a:r>
             <a:r>
-              <a:rPr lang="en-US" dirty="0" smtClean="0"/>
+              <a:rPr lang="en-US" dirty="0"/>
               <a:t> de </a:t>
             </a:r>
             <a:r>
-              <a:rPr lang="en-US" dirty="0" err="1" smtClean="0"/>
+              <a:rPr lang="en-US" dirty="0" err="1"/>
               <a:t>testare</a:t>
             </a:r>
             <a:r>
-              <a:rPr lang="en-US" dirty="0" smtClean="0"/>
+              <a:rPr lang="en-US" dirty="0"/>
               <a:t> </a:t>
             </a:r>
-            <a:endParaRPr lang="en-US" dirty="0"/>
           </a:p>
         </p:txBody>
       </p:sp>
@@ -6963,11 +6893,11 @@
           </a:lstStyle>
           <a:p>
             <a:r>
-              <a:rPr lang="en-US" dirty="0" err="1" smtClean="0"/>
+              <a:rPr lang="en-US" dirty="0" err="1"/>
               <a:t>Distribu</a:t>
             </a:r>
             <a:r>
-              <a:rPr lang="ro-RO" dirty="0" smtClean="0"/>
+              <a:rPr lang="ro-RO" dirty="0"/>
               <a:t>tia celor 100 de teste</a:t>
             </a:r>
             <a:endParaRPr lang="en-US" dirty="0"/>
@@ -7139,7 +7069,7 @@
           </a:lstStyle>
           <a:p>
             <a:r>
-              <a:rPr lang="ro-RO" sz="2000" dirty="0" smtClean="0"/>
+              <a:rPr lang="ro-RO" sz="2000" dirty="0"/>
               <a:t>Obiectul verificat de teste – outputul metodei</a:t>
             </a:r>
             <a:endParaRPr lang="en-US" sz="2000" dirty="0"/>
@@ -7233,39 +7163,23 @@
           <a:p>
             <a:r>
               <a:rPr lang="vi-VN" dirty="0"/>
-              <a:t>Testele verifică fiecare câmp din acest </a:t>
-            </a:r>
-            <a:r>
-              <a:rPr lang="vi-VN" dirty="0" smtClean="0"/>
-              <a:t>dicționar</a:t>
-            </a:r>
-            <a:r>
-              <a:rPr lang="ro-RO" dirty="0" smtClean="0"/>
+              <a:t>Testele verifică fiecare câmp din acest dicționar</a:t>
+            </a:r>
+            <a:r>
+              <a:rPr lang="ro-RO" dirty="0"/>
               <a:t> (</a:t>
             </a:r>
             <a:r>
-              <a:rPr lang="vi-VN" dirty="0" smtClean="0"/>
-              <a:t>atât </a:t>
-            </a:r>
-            <a:r>
               <a:rPr lang="vi-VN" dirty="0"/>
-              <a:t>individual, cât și </a:t>
-            </a:r>
-            <a:r>
-              <a:rPr lang="vi-VN" dirty="0" smtClean="0"/>
-              <a:t>combinat</a:t>
-            </a:r>
-            <a:r>
-              <a:rPr lang="ro-RO" dirty="0" smtClean="0"/>
+              <a:t>atât individual, cât și combinat</a:t>
+            </a:r>
+            <a:r>
+              <a:rPr lang="ro-RO" dirty="0"/>
               <a:t>)</a:t>
             </a:r>
             <a:r>
-              <a:rPr lang="vi-VN" dirty="0" smtClean="0"/>
-              <a:t> </a:t>
-            </a:r>
-            <a:r>
               <a:rPr lang="vi-VN" dirty="0"/>
-              <a:t>pentru a confirma că logica metodei este corectă.</a:t>
+              <a:t> pentru a confirma că logica metodei este corectă.</a:t>
             </a:r>
             <a:endParaRPr lang="en-US" dirty="0"/>
           </a:p>
@@ -7323,11 +7237,7 @@
           <a:p>
             <a:r>
               <a:rPr lang="nb-NO" b="1" dirty="0"/>
-              <a:t>Validări și reguli de </a:t>
-            </a:r>
-            <a:r>
-              <a:rPr lang="nb-NO" b="1" dirty="0" smtClean="0"/>
-              <a:t>business</a:t>
+              <a:t>Validări și reguli de business</a:t>
             </a:r>
             <a:endParaRPr lang="en-US" dirty="0"/>
           </a:p>
@@ -7355,11 +7265,7 @@
           <a:p>
             <a:r>
               <a:rPr lang="vi-VN" b="1" dirty="0"/>
-              <a:t>Validări constructor __init</a:t>
-            </a:r>
-            <a:r>
-              <a:rPr lang="vi-VN" b="1" dirty="0" smtClean="0"/>
-              <a:t>__</a:t>
+              <a:t>Validări constructor __init__</a:t>
             </a:r>
             <a:endParaRPr lang="ro-RO" b="1" dirty="0"/>
           </a:p>
@@ -7367,7 +7273,7 @@
             <a:pPr marL="0" indent="0">
               <a:buNone/>
             </a:pPr>
-            <a:endParaRPr lang="ro-RO" b="1" dirty="0" smtClean="0"/>
+            <a:endParaRPr lang="ro-RO" b="1" dirty="0"/>
           </a:p>
           <a:p>
             <a:pPr marL="0" indent="0">
@@ -7378,36 +7284,28 @@
           <a:p>
             <a:r>
               <a:rPr lang="vi-VN" b="1" dirty="0"/>
-              <a:t>Validări metodă </a:t>
-            </a:r>
-            <a:r>
-              <a:rPr lang="vi-VN" b="1" dirty="0" smtClean="0"/>
-              <a:t>evaluate_client_package</a:t>
-            </a:r>
-            <a:endParaRPr lang="ro-RO" b="1" dirty="0" smtClean="0"/>
-          </a:p>
-          <a:p>
+              <a:t>Validări metodă evaluate_client_package</a:t>
+            </a:r>
             <a:endParaRPr lang="ro-RO" b="1" dirty="0"/>
           </a:p>
           <a:p>
-            <a:endParaRPr lang="ro-RO" b="1" dirty="0" smtClean="0"/>
+            <a:endParaRPr lang="ro-RO" b="1" dirty="0"/>
+          </a:p>
+          <a:p>
+            <a:endParaRPr lang="ro-RO" b="1" dirty="0"/>
           </a:p>
           <a:p>
             <a:pPr marL="0" indent="0">
               <a:buNone/>
             </a:pPr>
-            <a:endParaRPr lang="ro-RO" dirty="0" smtClean="0"/>
+            <a:endParaRPr lang="ro-RO" dirty="0"/>
           </a:p>
           <a:p>
             <a:r>
               <a:rPr lang="vi-VN" b="1" dirty="0"/>
-              <a:t>Cazul special bool / </a:t>
-            </a:r>
-            <a:r>
-              <a:rPr lang="vi-VN" b="1" dirty="0" smtClean="0"/>
-              <a:t>int</a:t>
-            </a:r>
-            <a:endParaRPr lang="ro-RO" b="1" dirty="0" smtClean="0"/>
+              <a:t>Cazul special bool / int</a:t>
+            </a:r>
+            <a:endParaRPr lang="ro-RO" b="1" dirty="0"/>
           </a:p>
           <a:p>
             <a:endParaRPr lang="ro-RO" b="1" dirty="0"/>
@@ -7416,14 +7314,13 @@
             <a:pPr marL="0" indent="0">
               <a:buNone/>
             </a:pPr>
-            <a:endParaRPr lang="ro-RO" b="1" dirty="0" smtClean="0"/>
+            <a:endParaRPr lang="ro-RO" b="1" dirty="0"/>
           </a:p>
           <a:p>
             <a:r>
               <a:rPr lang="vi-VN" b="1" dirty="0"/>
               <a:t>Formula costului</a:t>
             </a:r>
-            <a:endParaRPr lang="vi-VN" b="1" dirty="0"/>
           </a:p>
         </p:txBody>
       </p:sp>
@@ -7764,7 +7661,7 @@
               <a:t> clase de </a:t>
             </a:r>
             <a:r>
-              <a:rPr lang="es-ES" sz="2000" b="1" dirty="0" err="1" smtClean="0">
+              <a:rPr lang="es-ES" sz="2000" b="1" dirty="0" err="1">
                 <a:latin typeface="Arial" pitchFamily="34" charset="0"/>
                 <a:cs typeface="Arial" pitchFamily="34" charset="0"/>
               </a:rPr>
@@ -7775,17 +7672,10 @@
                 <a:latin typeface="Arial" pitchFamily="34" charset="0"/>
                 <a:cs typeface="Arial" pitchFamily="34" charset="0"/>
               </a:rPr>
-              <a:t> </a:t>
-            </a:r>
-            <a:r>
-              <a:rPr lang="ro-RO" sz="2000" b="1" dirty="0" smtClean="0">
-                <a:latin typeface="Arial" pitchFamily="34" charset="0"/>
-                <a:cs typeface="Arial" pitchFamily="34" charset="0"/>
-              </a:rPr>
-              <a:t>– 23 de teste</a:t>
+              <a:t> – 23 de teste</a:t>
             </a:r>
             <a:br>
-              <a:rPr lang="ro-RO" sz="2000" b="1" dirty="0" smtClean="0">
+              <a:rPr lang="ro-RO" sz="2000" b="1" dirty="0">
                 <a:latin typeface="Arial" pitchFamily="34" charset="0"/>
                 <a:cs typeface="Arial" pitchFamily="34" charset="0"/>
               </a:rPr>
@@ -7876,22 +7766,18 @@
             </a:r>
             <a:r>
               <a:rPr lang="en-US" dirty="0"/>
-              <a:t> </a:t>
-            </a:r>
-            <a:r>
-              <a:rPr lang="en-US" dirty="0" smtClean="0"/>
-              <a:t>(</a:t>
-            </a:r>
-            <a:r>
-              <a:rPr lang="ro-RO" dirty="0" smtClean="0"/>
+              <a:t> (</a:t>
+            </a:r>
+            <a:r>
+              <a:rPr lang="ro-RO" dirty="0"/>
               <a:t>=</a:t>
             </a:r>
             <a:r>
-              <a:rPr lang="en-US" dirty="0" smtClean="0"/>
+              <a:rPr lang="en-US" dirty="0"/>
               <a:t>&gt; </a:t>
             </a:r>
             <a:r>
-              <a:rPr lang="en-US" dirty="0" err="1" smtClean="0"/>
+              <a:rPr lang="en-US" dirty="0" err="1"/>
               <a:t>ValueError</a:t>
             </a:r>
             <a:r>
@@ -8122,14 +8008,10 @@
           <a:p>
             <a:r>
               <a:rPr lang="vi-VN" b="1" dirty="0"/>
-              <a:t>Analiza valorilor de </a:t>
-            </a:r>
-            <a:r>
-              <a:rPr lang="vi-VN" b="1" dirty="0" smtClean="0"/>
-              <a:t>frontieră</a:t>
-            </a:r>
-            <a:r>
-              <a:rPr lang="ro-RO" b="1" dirty="0" smtClean="0"/>
+              <a:t>Analiza valorilor de frontieră</a:t>
+            </a:r>
+            <a:r>
+              <a:rPr lang="ro-RO" b="1" dirty="0"/>
               <a:t> – 16 teste</a:t>
             </a:r>
             <a:endParaRPr lang="en-US" dirty="0"/>
@@ -8174,11 +8056,11 @@
               <a:t> </a:t>
             </a:r>
             <a:r>
-              <a:rPr lang="ro-RO" dirty="0" smtClean="0"/>
+              <a:rPr lang="ro-RO" dirty="0"/>
               <a:t>--</a:t>
             </a:r>
             <a:r>
-              <a:rPr lang="fr-FR" dirty="0" smtClean="0"/>
+              <a:rPr lang="fr-FR" dirty="0"/>
               <a:t> </a:t>
             </a:r>
             <a:r>
@@ -8295,11 +8177,11 @@
               <a:t> </a:t>
             </a:r>
             <a:r>
-              <a:rPr lang="ro-RO" dirty="0" smtClean="0"/>
+              <a:rPr lang="ro-RO" dirty="0"/>
               <a:t>--</a:t>
             </a:r>
             <a:r>
-              <a:rPr lang="en-US" dirty="0" smtClean="0"/>
+              <a:rPr lang="en-US" dirty="0"/>
               <a:t> </a:t>
             </a:r>
             <a:r>
@@ -8467,20 +8349,16 @@
               <a:t>Frontierele </a:t>
             </a:r>
             <a:r>
-              <a:rPr lang="vi-VN" b="1" dirty="0" smtClean="0"/>
+              <a:rPr lang="vi-VN" b="1" dirty="0"/>
               <a:t>instructor</a:t>
             </a:r>
             <a:r>
-              <a:rPr lang="ro-RO" dirty="0" smtClean="0"/>
+              <a:rPr lang="ro-RO" dirty="0"/>
               <a:t> --</a:t>
             </a:r>
             <a:r>
-              <a:rPr lang="vi-VN" dirty="0" smtClean="0"/>
-              <a:t> </a:t>
-            </a:r>
-            <a:r>
               <a:rPr lang="vi-VN" dirty="0"/>
-              <a:t>lungime după strip()</a:t>
+              <a:t> lungime după strip()</a:t>
             </a:r>
             <a:endParaRPr lang="en-US" dirty="0"/>
           </a:p>
@@ -8520,16 +8398,12 @@
               <a:t> </a:t>
             </a:r>
             <a:r>
-              <a:rPr lang="ro-RO" dirty="0" smtClean="0"/>
+              <a:rPr lang="ro-RO" dirty="0"/>
               <a:t>--</a:t>
             </a:r>
             <a:r>
-              <a:rPr lang="vi-VN" dirty="0" smtClean="0"/>
-              <a:t> </a:t>
-            </a:r>
-            <a:r>
               <a:rPr lang="vi-VN" dirty="0"/>
-              <a:t>momentul completării pachetului</a:t>
+              <a:t> momentul completării pachetului</a:t>
             </a:r>
             <a:endParaRPr lang="en-US" dirty="0"/>
           </a:p>
@@ -8656,24 +8530,17 @@
                 <a:latin typeface="Arial" pitchFamily="34" charset="0"/>
                 <a:cs typeface="Arial" pitchFamily="34" charset="0"/>
               </a:rPr>
-              <a:t>Acoperire structurală: instrucțiune, decizie, </a:t>
-            </a:r>
-            <a:r>
-              <a:rPr lang="it-IT" sz="2000" b="1" dirty="0" smtClean="0">
-                <a:latin typeface="Arial" pitchFamily="34" charset="0"/>
-                <a:cs typeface="Arial" pitchFamily="34" charset="0"/>
-              </a:rPr>
-              <a:t>condiție</a:t>
-            </a:r>
-            <a:r>
-              <a:rPr lang="ro-RO" sz="2000" b="1" dirty="0" smtClean="0">
+              <a:t>Acoperire structurală: instrucțiune, decizie, condiție</a:t>
+            </a:r>
+            <a:r>
+              <a:rPr lang="ro-RO" sz="2000" b="1" dirty="0">
                 <a:latin typeface="Arial" pitchFamily="34" charset="0"/>
                 <a:cs typeface="Arial" pitchFamily="34" charset="0"/>
               </a:rPr>
               <a:t> – 40 de teste</a:t>
             </a:r>
             <a:br>
-              <a:rPr lang="ro-RO" sz="2000" b="1" dirty="0" smtClean="0">
+              <a:rPr lang="ro-RO" sz="2000" b="1" dirty="0">
                 <a:latin typeface="Arial" pitchFamily="34" charset="0"/>
                 <a:cs typeface="Arial" pitchFamily="34" charset="0"/>
               </a:rPr>
@@ -8718,14 +8585,7 @@
                 <a:latin typeface="Arial" pitchFamily="34" charset="0"/>
                 <a:cs typeface="Arial" pitchFamily="34" charset="0"/>
               </a:rPr>
-              <a:t>100</a:t>
-            </a:r>
-            <a:r>
-              <a:rPr lang="en-US" sz="2000" b="1" dirty="0" smtClean="0">
-                <a:latin typeface="Arial" pitchFamily="34" charset="0"/>
-                <a:cs typeface="Arial" pitchFamily="34" charset="0"/>
-              </a:rPr>
-              <a:t>%</a:t>
+              <a:t>100%</a:t>
             </a:r>
             <a:endParaRPr lang="en-US" sz="2000" dirty="0">
               <a:latin typeface="Arial" pitchFamily="34" charset="0"/>
@@ -8771,14 +8631,14 @@
               <a:t> </a:t>
             </a:r>
             <a:r>
-              <a:rPr lang="en-US" sz="1600" b="1" dirty="0" err="1" smtClean="0">
+              <a:rPr lang="en-US" sz="1600" b="1" dirty="0" err="1">
                 <a:latin typeface="Arial" pitchFamily="34" charset="0"/>
                 <a:cs typeface="Arial" pitchFamily="34" charset="0"/>
               </a:rPr>
               <a:t>instrucțiune</a:t>
             </a:r>
             <a:r>
-              <a:rPr lang="ro-RO" sz="1600" b="1" dirty="0" smtClean="0">
+              <a:rPr lang="ro-RO" sz="1600" b="1" dirty="0">
                 <a:latin typeface="Arial" pitchFamily="34" charset="0"/>
                 <a:cs typeface="Arial" pitchFamily="34" charset="0"/>
               </a:rPr>
@@ -8803,22 +8663,15 @@
                 <a:latin typeface="Arial" pitchFamily="34" charset="0"/>
                 <a:cs typeface="Arial" pitchFamily="34" charset="0"/>
               </a:rPr>
-              <a:t> este executată cel puțin o dată</a:t>
-            </a:r>
-            <a:r>
-              <a:rPr lang="vi-VN" sz="1600" dirty="0" smtClean="0">
-                <a:latin typeface="Arial" pitchFamily="34" charset="0"/>
-                <a:cs typeface="Arial" pitchFamily="34" charset="0"/>
-              </a:rPr>
-              <a:t>.</a:t>
-            </a:r>
-            <a:endParaRPr lang="ro-RO" sz="1600" dirty="0" smtClean="0">
+              <a:t> este executată cel puțin o dată.</a:t>
+            </a:r>
+            <a:endParaRPr lang="ro-RO" sz="1600" dirty="0">
               <a:latin typeface="Arial" pitchFamily="34" charset="0"/>
               <a:cs typeface="Arial" pitchFamily="34" charset="0"/>
             </a:endParaRPr>
           </a:p>
           <a:p>
-            <a:endParaRPr lang="ro-RO" sz="1600" dirty="0" smtClean="0">
+            <a:endParaRPr lang="ro-RO" sz="1600" dirty="0">
               <a:latin typeface="Arial" pitchFamily="34" charset="0"/>
               <a:cs typeface="Arial" pitchFamily="34" charset="0"/>
             </a:endParaRPr>
@@ -8836,223 +8689,97 @@
             <a:pPr marL="0" indent="0">
               <a:buNone/>
             </a:pPr>
-            <a:endParaRPr lang="ro-RO" sz="1600" dirty="0" smtClean="0">
-              <a:latin typeface="Arial" pitchFamily="34" charset="0"/>
-              <a:cs typeface="Arial" pitchFamily="34" charset="0"/>
-            </a:endParaRPr>
-          </a:p>
-          <a:p>
-            <a:r>
-              <a:rPr lang="en-US" sz="1600" b="1" dirty="0" err="1">
-                <a:latin typeface="Arial" pitchFamily="34" charset="0"/>
-                <a:cs typeface="Arial" pitchFamily="34" charset="0"/>
-              </a:rPr>
-              <a:t>Acoperire</a:t>
-            </a:r>
-            <a:r>
-              <a:rPr lang="en-US" sz="1600" b="1" dirty="0">
-                <a:latin typeface="Arial" pitchFamily="34" charset="0"/>
-                <a:cs typeface="Arial" pitchFamily="34" charset="0"/>
-              </a:rPr>
-              <a:t> </a:t>
-            </a:r>
-            <a:r>
-              <a:rPr lang="en-US" sz="1600" b="1" dirty="0" err="1" smtClean="0">
-                <a:latin typeface="Arial" pitchFamily="34" charset="0"/>
-                <a:cs typeface="Arial" pitchFamily="34" charset="0"/>
-              </a:rPr>
-              <a:t>decizie</a:t>
-            </a:r>
-            <a:r>
-              <a:rPr lang="ro-RO" sz="1600" b="1" dirty="0" smtClean="0">
-                <a:latin typeface="Arial" pitchFamily="34" charset="0"/>
-                <a:cs typeface="Arial" pitchFamily="34" charset="0"/>
-              </a:rPr>
-              <a:t>: </a:t>
-            </a:r>
-            <a:r>
-              <a:rPr lang="en-US" sz="1600" dirty="0" err="1">
-                <a:latin typeface="Arial" pitchFamily="34" charset="0"/>
-                <a:cs typeface="Arial" pitchFamily="34" charset="0"/>
-              </a:rPr>
-              <a:t>Fiecare</a:t>
-            </a:r>
-            <a:r>
-              <a:rPr lang="en-US" sz="1600" dirty="0">
-                <a:latin typeface="Arial" pitchFamily="34" charset="0"/>
-                <a:cs typeface="Arial" pitchFamily="34" charset="0"/>
-              </a:rPr>
-              <a:t> </a:t>
-            </a:r>
-            <a:r>
-              <a:rPr lang="en-US" sz="1600" b="1" dirty="0">
-                <a:latin typeface="Arial" pitchFamily="34" charset="0"/>
-                <a:cs typeface="Arial" pitchFamily="34" charset="0"/>
-              </a:rPr>
-              <a:t>if</a:t>
-            </a:r>
-            <a:r>
-              <a:rPr lang="en-US" sz="1600" dirty="0">
-                <a:latin typeface="Arial" pitchFamily="34" charset="0"/>
-                <a:cs typeface="Arial" pitchFamily="34" charset="0"/>
-              </a:rPr>
-              <a:t> </a:t>
-            </a:r>
-            <a:r>
-              <a:rPr lang="en-US" sz="1600" dirty="0" err="1">
-                <a:latin typeface="Arial" pitchFamily="34" charset="0"/>
-                <a:cs typeface="Arial" pitchFamily="34" charset="0"/>
-              </a:rPr>
-              <a:t>este</a:t>
-            </a:r>
-            <a:r>
-              <a:rPr lang="en-US" sz="1600" dirty="0">
-                <a:latin typeface="Arial" pitchFamily="34" charset="0"/>
-                <a:cs typeface="Arial" pitchFamily="34" charset="0"/>
-              </a:rPr>
-              <a:t> </a:t>
-            </a:r>
-            <a:r>
-              <a:rPr lang="en-US" sz="1600" dirty="0" err="1">
-                <a:latin typeface="Arial" pitchFamily="34" charset="0"/>
-                <a:cs typeface="Arial" pitchFamily="34" charset="0"/>
-              </a:rPr>
-              <a:t>executat</a:t>
-            </a:r>
-            <a:r>
-              <a:rPr lang="en-US" sz="1600" dirty="0">
-                <a:latin typeface="Arial" pitchFamily="34" charset="0"/>
-                <a:cs typeface="Arial" pitchFamily="34" charset="0"/>
-              </a:rPr>
-              <a:t> </a:t>
-            </a:r>
-            <a:endParaRPr lang="ro-RO" sz="1600" dirty="0" smtClean="0">
-              <a:latin typeface="Arial" pitchFamily="34" charset="0"/>
-              <a:cs typeface="Arial" pitchFamily="34" charset="0"/>
-            </a:endParaRPr>
-          </a:p>
-          <a:p>
-            <a:pPr marL="0" indent="0">
-              <a:buNone/>
-            </a:pPr>
-            <a:r>
-              <a:rPr lang="ro-RO" sz="1600" dirty="0" smtClean="0">
-                <a:latin typeface="Arial" pitchFamily="34" charset="0"/>
-                <a:cs typeface="Arial" pitchFamily="34" charset="0"/>
-              </a:rPr>
-              <a:t>      </a:t>
-            </a:r>
-            <a:r>
-              <a:rPr lang="en-US" sz="1600" dirty="0" err="1" smtClean="0">
-                <a:latin typeface="Arial" pitchFamily="34" charset="0"/>
-                <a:cs typeface="Arial" pitchFamily="34" charset="0"/>
-              </a:rPr>
-              <a:t>pe</a:t>
-            </a:r>
-            <a:r>
-              <a:rPr lang="en-US" sz="1600" dirty="0" smtClean="0">
-                <a:latin typeface="Arial" pitchFamily="34" charset="0"/>
-                <a:cs typeface="Arial" pitchFamily="34" charset="0"/>
-              </a:rPr>
-              <a:t> </a:t>
-            </a:r>
-            <a:r>
-              <a:rPr lang="en-US" sz="1600" dirty="0" err="1">
-                <a:latin typeface="Arial" pitchFamily="34" charset="0"/>
-                <a:cs typeface="Arial" pitchFamily="34" charset="0"/>
-              </a:rPr>
-              <a:t>ramura</a:t>
-            </a:r>
-            <a:r>
-              <a:rPr lang="en-US" sz="1600" dirty="0">
-                <a:latin typeface="Arial" pitchFamily="34" charset="0"/>
-                <a:cs typeface="Arial" pitchFamily="34" charset="0"/>
-              </a:rPr>
-              <a:t> </a:t>
-            </a:r>
-            <a:r>
-              <a:rPr lang="en-US" sz="1600" b="1" dirty="0">
-                <a:latin typeface="Arial" pitchFamily="34" charset="0"/>
-                <a:cs typeface="Arial" pitchFamily="34" charset="0"/>
-              </a:rPr>
-              <a:t>True</a:t>
-            </a:r>
-            <a:r>
-              <a:rPr lang="en-US" sz="1600" dirty="0">
-                <a:latin typeface="Arial" pitchFamily="34" charset="0"/>
-                <a:cs typeface="Arial" pitchFamily="34" charset="0"/>
-              </a:rPr>
-              <a:t> </a:t>
-            </a:r>
-            <a:r>
-              <a:rPr lang="en-US" sz="1600" dirty="0" err="1">
-                <a:latin typeface="Arial" pitchFamily="34" charset="0"/>
-                <a:cs typeface="Arial" pitchFamily="34" charset="0"/>
-              </a:rPr>
-              <a:t>și</a:t>
-            </a:r>
-            <a:r>
-              <a:rPr lang="en-US" sz="1600" dirty="0">
-                <a:latin typeface="Arial" pitchFamily="34" charset="0"/>
-                <a:cs typeface="Arial" pitchFamily="34" charset="0"/>
-              </a:rPr>
-              <a:t> </a:t>
-            </a:r>
-            <a:r>
-              <a:rPr lang="en-US" sz="1600" dirty="0" err="1">
-                <a:latin typeface="Arial" pitchFamily="34" charset="0"/>
-                <a:cs typeface="Arial" pitchFamily="34" charset="0"/>
-              </a:rPr>
-              <a:t>pe</a:t>
-            </a:r>
-            <a:r>
-              <a:rPr lang="en-US" sz="1600" dirty="0">
-                <a:latin typeface="Arial" pitchFamily="34" charset="0"/>
-                <a:cs typeface="Arial" pitchFamily="34" charset="0"/>
-              </a:rPr>
-              <a:t> </a:t>
-            </a:r>
-            <a:r>
-              <a:rPr lang="en-US" sz="1600" dirty="0" err="1">
-                <a:latin typeface="Arial" pitchFamily="34" charset="0"/>
-                <a:cs typeface="Arial" pitchFamily="34" charset="0"/>
-              </a:rPr>
-              <a:t>ramura</a:t>
-            </a:r>
-            <a:r>
-              <a:rPr lang="en-US" sz="1600" dirty="0">
-                <a:latin typeface="Arial" pitchFamily="34" charset="0"/>
-                <a:cs typeface="Arial" pitchFamily="34" charset="0"/>
-              </a:rPr>
-              <a:t> </a:t>
-            </a:r>
-            <a:r>
-              <a:rPr lang="en-US" sz="1600" b="1" dirty="0">
-                <a:latin typeface="Arial" pitchFamily="34" charset="0"/>
-                <a:cs typeface="Arial" pitchFamily="34" charset="0"/>
-              </a:rPr>
-              <a:t>False</a:t>
-            </a:r>
-            <a:r>
-              <a:rPr lang="en-US" sz="1600" dirty="0" smtClean="0">
-                <a:latin typeface="Arial" pitchFamily="34" charset="0"/>
-                <a:cs typeface="Arial" pitchFamily="34" charset="0"/>
-              </a:rPr>
-              <a:t>.</a:t>
-            </a:r>
-            <a:endParaRPr lang="ro-RO" sz="1600" dirty="0" smtClean="0">
-              <a:latin typeface="Arial" pitchFamily="34" charset="0"/>
-              <a:cs typeface="Arial" pitchFamily="34" charset="0"/>
-            </a:endParaRPr>
-          </a:p>
-          <a:p>
             <a:endParaRPr lang="ro-RO" sz="1600" dirty="0">
               <a:latin typeface="Arial" pitchFamily="34" charset="0"/>
               <a:cs typeface="Arial" pitchFamily="34" charset="0"/>
             </a:endParaRPr>
           </a:p>
           <a:p>
-            <a:endParaRPr lang="ro-RO" sz="1600" dirty="0" smtClean="0">
+            <a:r>
+              <a:rPr lang="en-US" sz="1600" b="1" dirty="0" err="1">
+                <a:latin typeface="Arial" pitchFamily="34" charset="0"/>
+                <a:cs typeface="Arial" pitchFamily="34" charset="0"/>
+              </a:rPr>
+              <a:t>Acoperire</a:t>
+            </a:r>
+            <a:r>
+              <a:rPr lang="en-US" sz="1600" b="1" dirty="0">
+                <a:latin typeface="Arial" pitchFamily="34" charset="0"/>
+                <a:cs typeface="Arial" pitchFamily="34" charset="0"/>
+              </a:rPr>
+              <a:t> </a:t>
+            </a:r>
+            <a:r>
+              <a:rPr lang="en-US" sz="1600" b="1" dirty="0" err="1">
+                <a:latin typeface="Arial" pitchFamily="34" charset="0"/>
+                <a:cs typeface="Arial" pitchFamily="34" charset="0"/>
+              </a:rPr>
+              <a:t>decizie</a:t>
+            </a:r>
+            <a:r>
+              <a:rPr lang="ro-RO" sz="1600" b="1" dirty="0">
+                <a:latin typeface="Arial" pitchFamily="34" charset="0"/>
+                <a:cs typeface="Arial" pitchFamily="34" charset="0"/>
+              </a:rPr>
+              <a:t>: </a:t>
+            </a:r>
+            <a:r>
+              <a:rPr lang="en-US" sz="1600" dirty="0" err="1">
+                <a:latin typeface="Arial" pitchFamily="34" charset="0"/>
+                <a:cs typeface="Arial" pitchFamily="34" charset="0"/>
+              </a:rPr>
+              <a:t>Fiecare</a:t>
+            </a:r>
+            <a:r>
+              <a:rPr lang="en-US" sz="1600" dirty="0">
+                <a:latin typeface="Arial" pitchFamily="34" charset="0"/>
+                <a:cs typeface="Arial" pitchFamily="34" charset="0"/>
+              </a:rPr>
+              <a:t> </a:t>
+            </a:r>
+            <a:r>
+              <a:rPr lang="en-US" sz="1600" b="1" dirty="0">
+                <a:latin typeface="Arial" pitchFamily="34" charset="0"/>
+                <a:cs typeface="Arial" pitchFamily="34" charset="0"/>
+              </a:rPr>
+              <a:t>if</a:t>
+            </a:r>
+            <a:r>
+              <a:rPr lang="en-US" sz="1600" dirty="0">
+                <a:latin typeface="Arial" pitchFamily="34" charset="0"/>
+                <a:cs typeface="Arial" pitchFamily="34" charset="0"/>
+              </a:rPr>
+              <a:t> </a:t>
+            </a:r>
+            <a:r>
+              <a:rPr lang="en-US" sz="1600" dirty="0" err="1">
+                <a:latin typeface="Arial" pitchFamily="34" charset="0"/>
+                <a:cs typeface="Arial" pitchFamily="34" charset="0"/>
+              </a:rPr>
+              <a:t>este</a:t>
+            </a:r>
+            <a:r>
+              <a:rPr lang="en-US" sz="1600" dirty="0">
+                <a:latin typeface="Arial" pitchFamily="34" charset="0"/>
+                <a:cs typeface="Arial" pitchFamily="34" charset="0"/>
+              </a:rPr>
+              <a:t> </a:t>
+            </a:r>
+            <a:r>
+              <a:rPr lang="en-US" sz="1600" dirty="0" err="1">
+                <a:latin typeface="Arial" pitchFamily="34" charset="0"/>
+                <a:cs typeface="Arial" pitchFamily="34" charset="0"/>
+              </a:rPr>
+              <a:t>executat</a:t>
+            </a:r>
+            <a:r>
+              <a:rPr lang="en-US" sz="1600" dirty="0">
+                <a:latin typeface="Arial" pitchFamily="34" charset="0"/>
+                <a:cs typeface="Arial" pitchFamily="34" charset="0"/>
+              </a:rPr>
+              <a:t> </a:t>
+            </a:r>
+            <a:endParaRPr lang="ro-RO" sz="1600" dirty="0">
               <a:latin typeface="Arial" pitchFamily="34" charset="0"/>
               <a:cs typeface="Arial" pitchFamily="34" charset="0"/>
             </a:endParaRPr>
@@ -9061,85 +8788,197 @@
             <a:pPr marL="0" indent="0">
               <a:buNone/>
             </a:pPr>
-            <a:endParaRPr lang="ro-RO" sz="1600" dirty="0" smtClean="0">
+            <a:r>
+              <a:rPr lang="ro-RO" sz="1600" dirty="0">
+                <a:latin typeface="Arial" pitchFamily="34" charset="0"/>
+                <a:cs typeface="Arial" pitchFamily="34" charset="0"/>
+              </a:rPr>
+              <a:t>      </a:t>
+            </a:r>
+            <a:r>
+              <a:rPr lang="en-US" sz="1600" dirty="0" err="1">
+                <a:latin typeface="Arial" pitchFamily="34" charset="0"/>
+                <a:cs typeface="Arial" pitchFamily="34" charset="0"/>
+              </a:rPr>
+              <a:t>pe</a:t>
+            </a:r>
+            <a:r>
+              <a:rPr lang="en-US" sz="1600" dirty="0">
+                <a:latin typeface="Arial" pitchFamily="34" charset="0"/>
+                <a:cs typeface="Arial" pitchFamily="34" charset="0"/>
+              </a:rPr>
+              <a:t> </a:t>
+            </a:r>
+            <a:r>
+              <a:rPr lang="en-US" sz="1600" dirty="0" err="1">
+                <a:latin typeface="Arial" pitchFamily="34" charset="0"/>
+                <a:cs typeface="Arial" pitchFamily="34" charset="0"/>
+              </a:rPr>
+              <a:t>ramura</a:t>
+            </a:r>
+            <a:r>
+              <a:rPr lang="en-US" sz="1600" dirty="0">
+                <a:latin typeface="Arial" pitchFamily="34" charset="0"/>
+                <a:cs typeface="Arial" pitchFamily="34" charset="0"/>
+              </a:rPr>
+              <a:t> </a:t>
+            </a:r>
+            <a:r>
+              <a:rPr lang="en-US" sz="1600" b="1" dirty="0">
+                <a:latin typeface="Arial" pitchFamily="34" charset="0"/>
+                <a:cs typeface="Arial" pitchFamily="34" charset="0"/>
+              </a:rPr>
+              <a:t>True</a:t>
+            </a:r>
+            <a:r>
+              <a:rPr lang="en-US" sz="1600" dirty="0">
+                <a:latin typeface="Arial" pitchFamily="34" charset="0"/>
+                <a:cs typeface="Arial" pitchFamily="34" charset="0"/>
+              </a:rPr>
+              <a:t> </a:t>
+            </a:r>
+            <a:r>
+              <a:rPr lang="en-US" sz="1600" dirty="0" err="1">
+                <a:latin typeface="Arial" pitchFamily="34" charset="0"/>
+                <a:cs typeface="Arial" pitchFamily="34" charset="0"/>
+              </a:rPr>
+              <a:t>și</a:t>
+            </a:r>
+            <a:r>
+              <a:rPr lang="en-US" sz="1600" dirty="0">
+                <a:latin typeface="Arial" pitchFamily="34" charset="0"/>
+                <a:cs typeface="Arial" pitchFamily="34" charset="0"/>
+              </a:rPr>
+              <a:t> </a:t>
+            </a:r>
+            <a:r>
+              <a:rPr lang="en-US" sz="1600" dirty="0" err="1">
+                <a:latin typeface="Arial" pitchFamily="34" charset="0"/>
+                <a:cs typeface="Arial" pitchFamily="34" charset="0"/>
+              </a:rPr>
+              <a:t>pe</a:t>
+            </a:r>
+            <a:r>
+              <a:rPr lang="en-US" sz="1600" dirty="0">
+                <a:latin typeface="Arial" pitchFamily="34" charset="0"/>
+                <a:cs typeface="Arial" pitchFamily="34" charset="0"/>
+              </a:rPr>
+              <a:t> </a:t>
+            </a:r>
+            <a:r>
+              <a:rPr lang="en-US" sz="1600" dirty="0" err="1">
+                <a:latin typeface="Arial" pitchFamily="34" charset="0"/>
+                <a:cs typeface="Arial" pitchFamily="34" charset="0"/>
+              </a:rPr>
+              <a:t>ramura</a:t>
+            </a:r>
+            <a:r>
+              <a:rPr lang="en-US" sz="1600" dirty="0">
+                <a:latin typeface="Arial" pitchFamily="34" charset="0"/>
+                <a:cs typeface="Arial" pitchFamily="34" charset="0"/>
+              </a:rPr>
+              <a:t> </a:t>
+            </a:r>
+            <a:r>
+              <a:rPr lang="en-US" sz="1600" b="1" dirty="0">
+                <a:latin typeface="Arial" pitchFamily="34" charset="0"/>
+                <a:cs typeface="Arial" pitchFamily="34" charset="0"/>
+              </a:rPr>
+              <a:t>False</a:t>
+            </a:r>
+            <a:r>
+              <a:rPr lang="en-US" sz="1600" dirty="0">
+                <a:latin typeface="Arial" pitchFamily="34" charset="0"/>
+                <a:cs typeface="Arial" pitchFamily="34" charset="0"/>
+              </a:rPr>
+              <a:t>.</a:t>
+            </a:r>
+            <a:endParaRPr lang="ro-RO" sz="1600" dirty="0">
               <a:latin typeface="Arial" pitchFamily="34" charset="0"/>
               <a:cs typeface="Arial" pitchFamily="34" charset="0"/>
             </a:endParaRPr>
           </a:p>
           <a:p>
-            <a:r>
-              <a:rPr lang="en-US" sz="1600" b="1" dirty="0" err="1">
-                <a:latin typeface="Arial" pitchFamily="34" charset="0"/>
-                <a:cs typeface="Arial" pitchFamily="34" charset="0"/>
-              </a:rPr>
-              <a:t>Acoperire</a:t>
-            </a:r>
-            <a:r>
-              <a:rPr lang="en-US" sz="1600" b="1" dirty="0">
-                <a:latin typeface="Arial" pitchFamily="34" charset="0"/>
-                <a:cs typeface="Arial" pitchFamily="34" charset="0"/>
-              </a:rPr>
-              <a:t> </a:t>
-            </a:r>
-            <a:r>
-              <a:rPr lang="en-US" sz="1600" b="1" dirty="0" err="1" smtClean="0">
-                <a:latin typeface="Arial" pitchFamily="34" charset="0"/>
-                <a:cs typeface="Arial" pitchFamily="34" charset="0"/>
-              </a:rPr>
-              <a:t>condiție</a:t>
-            </a:r>
-            <a:r>
-              <a:rPr lang="ro-RO" sz="1600" b="1" dirty="0" smtClean="0">
-                <a:latin typeface="Arial" pitchFamily="34" charset="0"/>
-                <a:cs typeface="Arial" pitchFamily="34" charset="0"/>
-              </a:rPr>
-              <a:t>: </a:t>
-            </a:r>
-            <a:r>
-              <a:rPr lang="vi-VN" sz="1600" dirty="0">
-                <a:latin typeface="Arial" pitchFamily="34" charset="0"/>
-                <a:cs typeface="Arial" pitchFamily="34" charset="0"/>
-              </a:rPr>
-              <a:t>Fiecare condiție atomică dintr-o </a:t>
-            </a:r>
-            <a:endParaRPr lang="ro-RO" sz="1600" dirty="0" smtClean="0">
+            <a:endParaRPr lang="ro-RO" sz="1600" dirty="0">
               <a:latin typeface="Arial" pitchFamily="34" charset="0"/>
               <a:cs typeface="Arial" pitchFamily="34" charset="0"/>
             </a:endParaRPr>
           </a:p>
           <a:p>
+            <a:endParaRPr lang="ro-RO" sz="1600" dirty="0">
+              <a:latin typeface="Arial" pitchFamily="34" charset="0"/>
+              <a:cs typeface="Arial" pitchFamily="34" charset="0"/>
+            </a:endParaRPr>
+          </a:p>
+          <a:p>
             <a:pPr marL="0" indent="0">
               <a:buNone/>
             </a:pPr>
-            <a:r>
-              <a:rPr lang="ro-RO" sz="1600" dirty="0" smtClean="0">
+            <a:endParaRPr lang="ro-RO" sz="1600" dirty="0">
+              <a:latin typeface="Arial" pitchFamily="34" charset="0"/>
+              <a:cs typeface="Arial" pitchFamily="34" charset="0"/>
+            </a:endParaRPr>
+          </a:p>
+          <a:p>
+            <a:r>
+              <a:rPr lang="en-US" sz="1600" b="1" dirty="0" err="1">
+                <a:latin typeface="Arial" pitchFamily="34" charset="0"/>
+                <a:cs typeface="Arial" pitchFamily="34" charset="0"/>
+              </a:rPr>
+              <a:t>Acoperire</a:t>
+            </a:r>
+            <a:r>
+              <a:rPr lang="en-US" sz="1600" b="1" dirty="0">
+                <a:latin typeface="Arial" pitchFamily="34" charset="0"/>
+                <a:cs typeface="Arial" pitchFamily="34" charset="0"/>
+              </a:rPr>
+              <a:t> </a:t>
+            </a:r>
+            <a:r>
+              <a:rPr lang="en-US" sz="1600" b="1" dirty="0" err="1">
+                <a:latin typeface="Arial" pitchFamily="34" charset="0"/>
+                <a:cs typeface="Arial" pitchFamily="34" charset="0"/>
+              </a:rPr>
+              <a:t>condiție</a:t>
+            </a:r>
+            <a:r>
+              <a:rPr lang="ro-RO" sz="1600" b="1" dirty="0">
+                <a:latin typeface="Arial" pitchFamily="34" charset="0"/>
+                <a:cs typeface="Arial" pitchFamily="34" charset="0"/>
+              </a:rPr>
+              <a:t>: </a:t>
+            </a:r>
+            <a:r>
+              <a:rPr lang="vi-VN" sz="1600" dirty="0">
+                <a:latin typeface="Arial" pitchFamily="34" charset="0"/>
+                <a:cs typeface="Arial" pitchFamily="34" charset="0"/>
+              </a:rPr>
+              <a:t>Fiecare condiție atomică dintr-o </a:t>
+            </a:r>
+            <a:endParaRPr lang="ro-RO" sz="1600" dirty="0">
+              <a:latin typeface="Arial" pitchFamily="34" charset="0"/>
+              <a:cs typeface="Arial" pitchFamily="34" charset="0"/>
+            </a:endParaRPr>
+          </a:p>
+          <a:p>
+            <a:pPr marL="0" indent="0">
+              <a:buNone/>
+            </a:pPr>
+            <a:r>
+              <a:rPr lang="ro-RO" sz="1600" dirty="0">
                 <a:latin typeface="Arial" pitchFamily="34" charset="0"/>
                 <a:cs typeface="Arial" pitchFamily="34" charset="0"/>
               </a:rPr>
               <a:t>      </a:t>
             </a:r>
             <a:r>
-              <a:rPr lang="vi-VN" sz="1600" dirty="0" smtClean="0">
-                <a:latin typeface="Arial" pitchFamily="34" charset="0"/>
-                <a:cs typeface="Arial" pitchFamily="34" charset="0"/>
-              </a:rPr>
-              <a:t>expresie </a:t>
-            </a:r>
-            <a:r>
               <a:rPr lang="vi-VN" sz="1600" dirty="0">
                 <a:latin typeface="Arial" pitchFamily="34" charset="0"/>
                 <a:cs typeface="Arial" pitchFamily="34" charset="0"/>
               </a:rPr>
-              <a:t>compusă este testată independent</a:t>
-            </a:r>
-            <a:r>
-              <a:rPr lang="vi-VN" sz="1600" dirty="0" smtClean="0">
-                <a:latin typeface="Arial" pitchFamily="34" charset="0"/>
-                <a:cs typeface="Arial" pitchFamily="34" charset="0"/>
-              </a:rPr>
-              <a:t>.</a:t>
-            </a:r>
-            <a:endParaRPr lang="ro-RO" sz="1600" dirty="0" smtClean="0">
+              <a:t>expresie compusă este testată independent.</a:t>
+            </a:r>
+            <a:endParaRPr lang="ro-RO" sz="1600" dirty="0">
               <a:latin typeface="Arial" pitchFamily="34" charset="0"/>
               <a:cs typeface="Arial" pitchFamily="34" charset="0"/>
             </a:endParaRPr>
@@ -9415,11 +9254,11 @@
               <a:t> </a:t>
             </a:r>
             <a:r>
-              <a:rPr lang="en-US" b="1" dirty="0" err="1" smtClean="0"/>
+              <a:rPr lang="en-US" b="1" dirty="0" err="1"/>
               <a:t>diagrame</a:t>
             </a:r>
             <a:r>
-              <a:rPr lang="ro-RO" b="1" dirty="0" smtClean="0"/>
+              <a:rPr lang="ro-RO" b="1" dirty="0"/>
               <a:t> – 10 drumuri</a:t>
             </a:r>
             <a:endParaRPr lang="en-US" dirty="0"/>
@@ -9691,70 +9530,6 @@
           </a:extLst>
         </p:spPr>
       </p:pic>
-      <p:pic>
-        <p:nvPicPr>
-          <p:cNvPr id="8197" name="Picture 5"/>
-          <p:cNvPicPr>
-            <a:picLocks noChangeAspect="1" noChangeArrowheads="1"/>
-          </p:cNvPicPr>
-          <p:nvPr/>
-        </p:nvPicPr>
-        <p:blipFill>
-          <a:blip r:embed="rId5">
-            <a:extLst>
-              <a:ext uri="{28A0092B-C50C-407E-A947-70E740481C1C}">
-                <a14:useLocalDpi xmlns:a14="http://schemas.microsoft.com/office/drawing/2010/main" val="0"/>
-              </a:ext>
-            </a:extLst>
-          </a:blip>
-          <a:srcRect/>
-          <a:stretch>
-            <a:fillRect/>
-          </a:stretch>
-        </p:blipFill>
-        <p:spPr bwMode="auto">
-          <a:xfrm>
-            <a:off x="266701" y="4250485"/>
-            <a:ext cx="4038600" cy="2607515"/>
-          </a:xfrm>
-          <a:prstGeom prst="rect">
-            <a:avLst/>
-          </a:prstGeom>
-          <a:noFill/>
-          <a:ln>
-            <a:noFill/>
-          </a:ln>
-          <a:effectLst/>
-          <a:extLst>
-            <a:ext uri="{909E8E84-426E-40DD-AFC4-6F175D3DCCD1}">
-              <a14:hiddenFill xmlns:a14="http://schemas.microsoft.com/office/drawing/2010/main">
-                <a:solidFill>
-                  <a:schemeClr val="accent1"/>
-                </a:solidFill>
-              </a14:hiddenFill>
-            </a:ext>
-            <a:ext uri="{91240B29-F687-4F45-9708-019B960494DF}">
-              <a14:hiddenLine xmlns:a14="http://schemas.microsoft.com/office/drawing/2010/main" w="9525">
-                <a:solidFill>
-                  <a:schemeClr val="tx1"/>
-                </a:solidFill>
-                <a:miter lim="800000"/>
-                <a:headEnd/>
-                <a:tailEnd/>
-              </a14:hiddenLine>
-            </a:ext>
-            <a:ext uri="{AF507438-7753-43E0-B8FC-AC1667EBCBE1}">
-              <a14:hiddenEffects xmlns:a14="http://schemas.microsoft.com/office/drawing/2010/main">
-                <a:effectLst>
-                  <a:outerShdw dist="35921" dir="2700000" algn="ctr" rotWithShape="0">
-                    <a:schemeClr val="bg2"/>
-                  </a:outerShdw>
-                </a:effectLst>
-              </a14:hiddenEffects>
-            </a:ext>
-          </a:extLst>
-        </p:spPr>
-      </p:pic>
       <p:sp>
         <p:nvSpPr>
           <p:cNvPr id="10" name="Rectangle 9"/>
@@ -9777,13 +9552,43 @@
           <a:lstStyle/>
           <a:p>
             <a:r>
-              <a:rPr lang="ro-RO" b="1" dirty="0" smtClean="0"/>
+              <a:rPr lang="ro-RO" b="1" dirty="0"/>
               <a:t>Diagramele pot fi văzute în README.md</a:t>
             </a:r>
             <a:endParaRPr lang="en-US" b="1" dirty="0"/>
           </a:p>
         </p:txBody>
       </p:sp>
+      <p:pic>
+        <p:nvPicPr>
+          <p:cNvPr id="6" name="Picture 5">
+            <a:extLst>
+              <a:ext uri="{FF2B5EF4-FFF2-40B4-BE49-F238E27FC236}">
+                <a16:creationId xmlns:a16="http://schemas.microsoft.com/office/drawing/2014/main" id="{58406CC1-0139-9AAF-059A-FE9A0A4C6F93}"/>
+              </a:ext>
+            </a:extLst>
+          </p:cNvPr>
+          <p:cNvPicPr>
+            <a:picLocks noChangeAspect="1"/>
+          </p:cNvPicPr>
+          <p:nvPr/>
+        </p:nvPicPr>
+        <p:blipFill>
+          <a:blip r:embed="rId5"/>
+          <a:stretch>
+            <a:fillRect/>
+          </a:stretch>
+        </p:blipFill>
+        <p:spPr>
+          <a:xfrm>
+            <a:off x="361741" y="4188558"/>
+            <a:ext cx="4175918" cy="2669442"/>
+          </a:xfrm>
+          <a:prstGeom prst="rect">
+            <a:avLst/>
+          </a:prstGeom>
+        </p:spPr>
+      </p:pic>
     </p:spTree>
     <p:extLst>
       <p:ext uri="{BB962C8B-B14F-4D97-AF65-F5344CB8AC3E}">
@@ -9841,15 +9646,11 @@
               <a:t>Mutation Testing: </a:t>
             </a:r>
             <a:r>
-              <a:rPr lang="en-US" sz="2000" b="1" dirty="0" err="1" smtClean="0"/>
+              <a:rPr lang="en-US" sz="2000" b="1" dirty="0" err="1"/>
               <a:t>mutmut</a:t>
             </a:r>
-            <a:r>
-              <a:rPr lang="ro-RO" sz="2000" b="1" dirty="0" smtClean="0"/>
-              <a:t/>
-            </a:r>
             <a:br>
-              <a:rPr lang="ro-RO" sz="2000" b="1" dirty="0" smtClean="0"/>
+              <a:rPr lang="ro-RO" sz="2000" b="1" dirty="0"/>
             </a:br>
             <a:r>
               <a:rPr lang="vi-VN" sz="2000" dirty="0"/>
@@ -9895,14 +9696,10 @@
             </a:r>
             <a:r>
               <a:rPr lang="en-US" b="1" i="1" dirty="0"/>
-              <a:t> mutation testing</a:t>
-            </a:r>
-            <a:r>
-              <a:rPr lang="en-US" b="1" i="1" dirty="0" smtClean="0"/>
-              <a:t>?</a:t>
-            </a:r>
-            <a:r>
-              <a:rPr lang="ro-RO" i="1" dirty="0" smtClean="0"/>
+              <a:t> mutation testing?</a:t>
+            </a:r>
+            <a:r>
+              <a:rPr lang="ro-RO" i="1" dirty="0"/>
               <a:t> </a:t>
             </a:r>
             <a:r>
@@ -9923,13 +9720,9 @@
             </a:r>
             <a:r>
               <a:rPr lang="vi-VN" dirty="0"/>
-              <a:t> = niciun test nu a sesizat modificarea</a:t>
-            </a:r>
-            <a:r>
-              <a:rPr lang="vi-VN" dirty="0" smtClean="0"/>
-              <a:t>.</a:t>
-            </a:r>
-            <a:endParaRPr lang="ro-RO" dirty="0" smtClean="0"/>
+              <a:t> = niciun test nu a sesizat modificarea.</a:t>
+            </a:r>
+            <a:endParaRPr lang="ro-RO" dirty="0"/>
           </a:p>
           <a:p>
             <a:r>
@@ -9950,13 +9743,13 @@
             </a:r>
           </a:p>
           <a:p>
-            <a:endParaRPr lang="ro-RO" b="1" dirty="0" smtClean="0"/>
+            <a:endParaRPr lang="ro-RO" b="1" dirty="0"/>
           </a:p>
           <a:p>
             <a:pPr marL="0" indent="0">
               <a:buNone/>
             </a:pPr>
-            <a:endParaRPr lang="ro-RO" b="1" dirty="0" smtClean="0"/>
+            <a:endParaRPr lang="ro-RO" b="1" dirty="0"/>
           </a:p>
           <a:p>
             <a:r>
@@ -9965,25 +9758,17 @@
             </a:r>
             <a:r>
               <a:rPr lang="vi-VN" dirty="0"/>
-              <a:t> Categoria </a:t>
-            </a:r>
-            <a:r>
-              <a:rPr lang="vi-VN" dirty="0"/>
-              <a:t>Suspicious</a:t>
-            </a:r>
-            <a:r>
-              <a:rPr lang="vi-VN" dirty="0"/>
-              <a:t> înseamnă că rularea unui test a durat mai mult decât baseline-ul, fără timeout fatal. Rezultatul important este </a:t>
+              <a:t> Categoria Suspicious înseamnă că rularea unui test a durat mai mult decât baseline-ul, fără timeout fatal. Rezultatul important este </a:t>
             </a:r>
             <a:r>
               <a:rPr lang="vi-VN" b="1" dirty="0"/>
               <a:t>0 survived</a:t>
             </a:r>
             <a:r>
-              <a:rPr lang="vi-VN" dirty="0" smtClean="0"/>
+              <a:rPr lang="vi-VN" dirty="0"/>
               <a:t>.</a:t>
             </a:r>
-            <a:endParaRPr lang="ro-RO" dirty="0" smtClean="0"/>
+            <a:endParaRPr lang="ro-RO" dirty="0"/>
           </a:p>
           <a:p>
             <a:r>
@@ -10435,7 +10220,7 @@
   <a:extraClrSchemeLst/>
   <a:extLst>
     <a:ext uri="{05A4C25C-085E-4340-85A3-A5531E510DB2}">
-      <thm15:themeFamily xmlns:thm15="http://schemas.microsoft.com/office/thememl/2012/main" xmlns="" name="DividendVTI" id="{97558BDE-0B66-457C-BB6F-7B1B22DAA9B8}" vid="{F53508A3-AC60-448A-AF37-934D5F1A0D5E}"/>
+      <thm15:themeFamily xmlns:thm15="http://schemas.microsoft.com/office/thememl/2012/main" name="DividendVTI" id="{97558BDE-0B66-457C-BB6F-7B1B22DAA9B8}" vid="{F53508A3-AC60-448A-AF37-934D5F1A0D5E}"/>
     </a:ext>
   </a:extLst>
 </a:theme>
